--- a/WQFS.pptx
+++ b/WQFS.pptx
@@ -4015,7 +4015,7 @@
         </p:blipFill>
         <p:spPr>
           <a:xfrm>
-            <a:off x="-463827" y="0"/>
+            <a:off x="-463826" y="0"/>
             <a:ext cx="13119652" cy="6858000"/>
           </a:xfrm>
           <a:prstGeom prst="rect">
@@ -4621,14 +4621,14 @@
           </a:p>
           <a:p>
             <a:r>
-              <a:rPr lang="en-US" altLang="ko-KR" sz="2200" dirty="0">
+              <a:rPr lang="en-US" altLang="ko-KR" sz="2200">
                 <a:latin typeface="HY견고딕" panose="02030600000101010101" pitchFamily="18" charset="-127"/>
                 <a:ea typeface="HY견고딕" panose="02030600000101010101" pitchFamily="18" charset="-127"/>
               </a:rPr>
-              <a:t>(8</a:t>
-            </a:r>
-            <a:r>
-              <a:rPr lang="ko-KR" altLang="en-US" sz="2200" dirty="0">
+              <a:t>(9</a:t>
+            </a:r>
+            <a:r>
+              <a:rPr lang="ko-KR" altLang="en-US" sz="2200">
                 <a:latin typeface="HY견고딕" panose="02030600000101010101" pitchFamily="18" charset="-127"/>
                 <a:ea typeface="HY견고딕" panose="02030600000101010101" pitchFamily="18" charset="-127"/>
               </a:rPr>
@@ -5425,7 +5425,7 @@
                 <a:latin typeface="HY견고딕" panose="02030600000101010101" pitchFamily="18" charset="-127"/>
                 <a:ea typeface="HY견고딕" panose="02030600000101010101" pitchFamily="18" charset="-127"/>
               </a:rPr>
-              <a:t>78%</a:t>
+              <a:t>85%</a:t>
             </a:r>
             <a:endParaRPr lang="ko-KR" altLang="en-US" sz="1000" dirty="0">
               <a:latin typeface="HY견고딕" panose="02030600000101010101" pitchFamily="18" charset="-127"/>
@@ -5485,6 +5485,78 @@
           </a:p>
         </p:txBody>
       </p:sp>
+      <p:pic>
+        <p:nvPicPr>
+          <p:cNvPr id="5" name="그림 4" descr="텍스트, 스크린샷, 소프트웨어, 디스플레이이(가) 표시된 사진&#10;&#10;AI 생성 콘텐츠는 정확하지 않을 수 있습니다.">
+            <a:extLst>
+              <a:ext uri="{FF2B5EF4-FFF2-40B4-BE49-F238E27FC236}">
+                <a16:creationId xmlns:a16="http://schemas.microsoft.com/office/drawing/2014/main" id="{07A6CBA3-54F0-BF75-B122-0F3BE6505564}"/>
+              </a:ext>
+            </a:extLst>
+          </p:cNvPr>
+          <p:cNvPicPr>
+            <a:picLocks noChangeAspect="1"/>
+          </p:cNvPicPr>
+          <p:nvPr/>
+        </p:nvPicPr>
+        <p:blipFill>
+          <a:blip r:embed="rId2">
+            <a:extLst>
+              <a:ext uri="{28A0092B-C50C-407E-A947-70E740481C1C}">
+                <a14:useLocalDpi xmlns:a14="http://schemas.microsoft.com/office/drawing/2010/main" val="0"/>
+              </a:ext>
+            </a:extLst>
+          </a:blip>
+          <a:stretch>
+            <a:fillRect/>
+          </a:stretch>
+        </p:blipFill>
+        <p:spPr>
+          <a:xfrm>
+            <a:off x="166824" y="1946400"/>
+            <a:ext cx="6313671" cy="3630815"/>
+          </a:xfrm>
+          <a:prstGeom prst="rect">
+            <a:avLst/>
+          </a:prstGeom>
+        </p:spPr>
+      </p:pic>
+      <p:pic>
+        <p:nvPicPr>
+          <p:cNvPr id="9" name="그림 8" descr="텍스트, 스크린샷, 폰트, 그래픽이(가) 표시된 사진&#10;&#10;AI 생성 콘텐츠는 정확하지 않을 수 있습니다.">
+            <a:extLst>
+              <a:ext uri="{FF2B5EF4-FFF2-40B4-BE49-F238E27FC236}">
+                <a16:creationId xmlns:a16="http://schemas.microsoft.com/office/drawing/2014/main" id="{6C2AAA67-3D81-042C-AC41-35399DA23C22}"/>
+              </a:ext>
+            </a:extLst>
+          </p:cNvPr>
+          <p:cNvPicPr>
+            <a:picLocks noChangeAspect="1"/>
+          </p:cNvPicPr>
+          <p:nvPr/>
+        </p:nvPicPr>
+        <p:blipFill>
+          <a:blip r:embed="rId3">
+            <a:extLst>
+              <a:ext uri="{28A0092B-C50C-407E-A947-70E740481C1C}">
+                <a14:useLocalDpi xmlns:a14="http://schemas.microsoft.com/office/drawing/2010/main" val="0"/>
+              </a:ext>
+            </a:extLst>
+          </a:blip>
+          <a:stretch>
+            <a:fillRect/>
+          </a:stretch>
+        </p:blipFill>
+        <p:spPr>
+          <a:xfrm>
+            <a:off x="6824443" y="3589776"/>
+            <a:ext cx="5141434" cy="751571"/>
+          </a:xfrm>
+          <a:prstGeom prst="rect">
+            <a:avLst/>
+          </a:prstGeom>
+        </p:spPr>
+      </p:pic>
     </p:spTree>
     <p:extLst>
       <p:ext uri="{BB962C8B-B14F-4D97-AF65-F5344CB8AC3E}">
@@ -5796,8 +5868,8 @@
         </p:nvSpPr>
         <p:spPr>
           <a:xfrm>
-            <a:off x="5861800" y="5815121"/>
-            <a:ext cx="468398" cy="246221"/>
+            <a:off x="5861801" y="5815121"/>
+            <a:ext cx="468397" cy="246221"/>
           </a:xfrm>
           <a:prstGeom prst="rect">
             <a:avLst/>
@@ -5816,7 +5888,7 @@
                 <a:latin typeface="HY견고딕" panose="02030600000101010101" pitchFamily="18" charset="-127"/>
                 <a:ea typeface="HY견고딕" panose="02030600000101010101" pitchFamily="18" charset="-127"/>
               </a:rPr>
-              <a:t>78%</a:t>
+              <a:t>85%</a:t>
             </a:r>
             <a:endParaRPr lang="ko-KR" altLang="en-US" sz="1000" dirty="0">
               <a:latin typeface="HY견고딕" panose="02030600000101010101" pitchFamily="18" charset="-127"/>
@@ -6223,8 +6295,8 @@
         </p:nvSpPr>
         <p:spPr>
           <a:xfrm>
-            <a:off x="5861800" y="5815121"/>
-            <a:ext cx="468398" cy="246221"/>
+            <a:off x="5861801" y="5815121"/>
+            <a:ext cx="468397" cy="246221"/>
           </a:xfrm>
           <a:prstGeom prst="rect">
             <a:avLst/>
@@ -6243,7 +6315,7 @@
                 <a:latin typeface="HY견고딕" panose="02030600000101010101" pitchFamily="18" charset="-127"/>
                 <a:ea typeface="HY견고딕" panose="02030600000101010101" pitchFamily="18" charset="-127"/>
               </a:rPr>
-              <a:t>78%</a:t>
+              <a:t>85%</a:t>
             </a:r>
             <a:endParaRPr lang="ko-KR" altLang="en-US" sz="1000" dirty="0">
               <a:latin typeface="HY견고딕" panose="02030600000101010101" pitchFamily="18" charset="-127"/>
@@ -6299,6 +6371,79 @@
           </a:p>
         </p:txBody>
       </p:sp>
+      <p:pic>
+        <p:nvPicPr>
+          <p:cNvPr id="5" name="그림 4" descr="텍스트, 스크린샷, 소프트웨어이(가) 표시된 사진&#10;&#10;AI 생성 콘텐츠는 정확하지 않을 수 있습니다.">
+            <a:extLst>
+              <a:ext uri="{FF2B5EF4-FFF2-40B4-BE49-F238E27FC236}">
+                <a16:creationId xmlns:a16="http://schemas.microsoft.com/office/drawing/2014/main" id="{8A910930-E5C4-FBF0-DC02-65AD51463FE5}"/>
+              </a:ext>
+            </a:extLst>
+          </p:cNvPr>
+          <p:cNvPicPr>
+            <a:picLocks noChangeAspect="1"/>
+          </p:cNvPicPr>
+          <p:nvPr/>
+        </p:nvPicPr>
+        <p:blipFill>
+          <a:blip r:embed="rId2">
+            <a:extLst>
+              <a:ext uri="{28A0092B-C50C-407E-A947-70E740481C1C}">
+                <a14:useLocalDpi xmlns:a14="http://schemas.microsoft.com/office/drawing/2010/main" val="0"/>
+              </a:ext>
+            </a:extLst>
+          </a:blip>
+          <a:stretch>
+            <a:fillRect/>
+          </a:stretch>
+        </p:blipFill>
+        <p:spPr>
+          <a:xfrm>
+            <a:off x="234892" y="1753299"/>
+            <a:ext cx="6172652" cy="3888462"/>
+          </a:xfrm>
+          <a:prstGeom prst="rect">
+            <a:avLst/>
+          </a:prstGeom>
+        </p:spPr>
+      </p:pic>
+      <p:pic>
+        <p:nvPicPr>
+          <p:cNvPr id="9" name="그림 8" descr="텍스트, 스크린샷, 그래픽 디자인, 그래픽이(가) 표시된 사진&#10;&#10;AI 생성 콘텐츠는 정확하지 않을 수 있습니다.">
+            <a:extLst>
+              <a:ext uri="{FF2B5EF4-FFF2-40B4-BE49-F238E27FC236}">
+                <a16:creationId xmlns:a16="http://schemas.microsoft.com/office/drawing/2014/main" id="{87C1D79D-8039-314B-8EAF-1861CB1A8FBF}"/>
+              </a:ext>
+            </a:extLst>
+          </p:cNvPr>
+          <p:cNvPicPr>
+            <a:picLocks noChangeAspect="1"/>
+          </p:cNvPicPr>
+          <p:nvPr/>
+        </p:nvPicPr>
+        <p:blipFill>
+          <a:blip r:embed="rId3">
+            <a:extLst>
+              <a:ext uri="{28A0092B-C50C-407E-A947-70E740481C1C}">
+                <a14:useLocalDpi xmlns:a14="http://schemas.microsoft.com/office/drawing/2010/main" val="0"/>
+              </a:ext>
+            </a:extLst>
+          </a:blip>
+          <a:srcRect l="22698" r="20882"/>
+          <a:stretch>
+            <a:fillRect/>
+          </a:stretch>
+        </p:blipFill>
+        <p:spPr>
+          <a:xfrm>
+            <a:off x="7675927" y="1747102"/>
+            <a:ext cx="3906473" cy="3894659"/>
+          </a:xfrm>
+          <a:prstGeom prst="rect">
+            <a:avLst/>
+          </a:prstGeom>
+        </p:spPr>
+      </p:pic>
     </p:spTree>
     <p:extLst>
       <p:ext uri="{BB962C8B-B14F-4D97-AF65-F5344CB8AC3E}">
@@ -6610,8 +6755,8 @@
         </p:nvSpPr>
         <p:spPr>
           <a:xfrm>
-            <a:off x="5861800" y="5815121"/>
-            <a:ext cx="468398" cy="246221"/>
+            <a:off x="5861801" y="5815121"/>
+            <a:ext cx="468397" cy="246221"/>
           </a:xfrm>
           <a:prstGeom prst="rect">
             <a:avLst/>
@@ -6630,7 +6775,7 @@
                 <a:latin typeface="HY견고딕" panose="02030600000101010101" pitchFamily="18" charset="-127"/>
                 <a:ea typeface="HY견고딕" panose="02030600000101010101" pitchFamily="18" charset="-127"/>
               </a:rPr>
-              <a:t>78%</a:t>
+              <a:t>85%</a:t>
             </a:r>
             <a:endParaRPr lang="ko-KR" altLang="en-US" sz="1000" dirty="0">
               <a:latin typeface="HY견고딕" panose="02030600000101010101" pitchFamily="18" charset="-127"/>
@@ -6687,6 +6832,79 @@
           </a:p>
         </p:txBody>
       </p:sp>
+      <p:pic>
+        <p:nvPicPr>
+          <p:cNvPr id="5" name="그림 4" descr="텍스트, 스크린샷이(가) 표시된 사진&#10;&#10;AI 생성 콘텐츠는 정확하지 않을 수 있습니다.">
+            <a:extLst>
+              <a:ext uri="{FF2B5EF4-FFF2-40B4-BE49-F238E27FC236}">
+                <a16:creationId xmlns:a16="http://schemas.microsoft.com/office/drawing/2014/main" id="{88AB3067-C965-7186-D069-8FB637F2DA3F}"/>
+              </a:ext>
+            </a:extLst>
+          </p:cNvPr>
+          <p:cNvPicPr>
+            <a:picLocks noChangeAspect="1"/>
+          </p:cNvPicPr>
+          <p:nvPr/>
+        </p:nvPicPr>
+        <p:blipFill>
+          <a:blip r:embed="rId2">
+            <a:extLst>
+              <a:ext uri="{28A0092B-C50C-407E-A947-70E740481C1C}">
+                <a14:useLocalDpi xmlns:a14="http://schemas.microsoft.com/office/drawing/2010/main" val="0"/>
+              </a:ext>
+            </a:extLst>
+          </a:blip>
+          <a:stretch>
+            <a:fillRect/>
+          </a:stretch>
+        </p:blipFill>
+        <p:spPr>
+          <a:xfrm>
+            <a:off x="122870" y="1954490"/>
+            <a:ext cx="7457813" cy="2155867"/>
+          </a:xfrm>
+          <a:prstGeom prst="rect">
+            <a:avLst/>
+          </a:prstGeom>
+        </p:spPr>
+      </p:pic>
+      <p:pic>
+        <p:nvPicPr>
+          <p:cNvPr id="10" name="그림 9" descr="스크린샷, 텍스트, 직사각형, 문구용품이(가) 표시된 사진&#10;&#10;AI 생성 콘텐츠는 정확하지 않을 수 있습니다.">
+            <a:extLst>
+              <a:ext uri="{FF2B5EF4-FFF2-40B4-BE49-F238E27FC236}">
+                <a16:creationId xmlns:a16="http://schemas.microsoft.com/office/drawing/2014/main" id="{581EDB53-C25A-7871-5A54-F0C9CE5BB8C8}"/>
+              </a:ext>
+            </a:extLst>
+          </p:cNvPr>
+          <p:cNvPicPr>
+            <a:picLocks noChangeAspect="1"/>
+          </p:cNvPicPr>
+          <p:nvPr/>
+        </p:nvPicPr>
+        <p:blipFill>
+          <a:blip r:embed="rId3">
+            <a:extLst>
+              <a:ext uri="{28A0092B-C50C-407E-A947-70E740481C1C}">
+                <a14:useLocalDpi xmlns:a14="http://schemas.microsoft.com/office/drawing/2010/main" val="0"/>
+              </a:ext>
+            </a:extLst>
+          </a:blip>
+          <a:srcRect l="22954" r="21128"/>
+          <a:stretch>
+            <a:fillRect/>
+          </a:stretch>
+        </p:blipFill>
+        <p:spPr>
+          <a:xfrm>
+            <a:off x="8024071" y="1957153"/>
+            <a:ext cx="3631786" cy="3653388"/>
+          </a:xfrm>
+          <a:prstGeom prst="rect">
+            <a:avLst/>
+          </a:prstGeom>
+        </p:spPr>
+      </p:pic>
     </p:spTree>
     <p:extLst>
       <p:ext uri="{BB962C8B-B14F-4D97-AF65-F5344CB8AC3E}">

--- a/WQFS.pptx
+++ b/WQFS.pptx
@@ -5,7 +5,7 @@
     <p:sldMasterId id="2147483648" r:id="rId1"/>
   </p:sldMasterIdLst>
   <p:notesMasterIdLst>
-    <p:notesMasterId r:id="rId8"/>
+    <p:notesMasterId r:id="rId10"/>
   </p:notesMasterIdLst>
   <p:sldIdLst>
     <p:sldId id="256" r:id="rId2"/>
@@ -13,7 +13,9 @@
     <p:sldId id="265" r:id="rId4"/>
     <p:sldId id="270" r:id="rId5"/>
     <p:sldId id="267" r:id="rId6"/>
-    <p:sldId id="263" r:id="rId7"/>
+    <p:sldId id="271" r:id="rId7"/>
+    <p:sldId id="272" r:id="rId8"/>
+    <p:sldId id="263" r:id="rId9"/>
   </p:sldIdLst>
   <p:sldSz cx="12192000" cy="6858000"/>
   <p:notesSz cx="7105650" cy="10236200"/>
@@ -213,7 +215,7 @@
           <a:p>
             <a:fld id="{56AE193D-720A-4563-AA71-141E9FDCE958}" type="datetimeFigureOut">
               <a:rPr lang="ko-KR" altLang="en-US" smtClean="0"/>
-              <a:t>2025-11-18</a:t>
+              <a:t>2025-11-25</a:t>
             </a:fld>
             <a:endParaRPr lang="ko-KR" altLang="en-US"/>
           </a:p>
@@ -711,7 +713,7 @@
           <a:p>
             <a:fld id="{6C44D894-CCE4-4219-86B7-733D27BABF13}" type="datetimeFigureOut">
               <a:rPr lang="ko-KR" altLang="en-US" smtClean="0"/>
-              <a:t>2025-11-18</a:t>
+              <a:t>2025-11-25</a:t>
             </a:fld>
             <a:endParaRPr lang="ko-KR" altLang="en-US"/>
           </a:p>
@@ -909,7 +911,7 @@
           <a:p>
             <a:fld id="{6C44D894-CCE4-4219-86B7-733D27BABF13}" type="datetimeFigureOut">
               <a:rPr lang="ko-KR" altLang="en-US" smtClean="0"/>
-              <a:t>2025-11-18</a:t>
+              <a:t>2025-11-25</a:t>
             </a:fld>
             <a:endParaRPr lang="ko-KR" altLang="en-US"/>
           </a:p>
@@ -1117,7 +1119,7 @@
           <a:p>
             <a:fld id="{6C44D894-CCE4-4219-86B7-733D27BABF13}" type="datetimeFigureOut">
               <a:rPr lang="ko-KR" altLang="en-US" smtClean="0"/>
-              <a:t>2025-11-18</a:t>
+              <a:t>2025-11-25</a:t>
             </a:fld>
             <a:endParaRPr lang="ko-KR" altLang="en-US"/>
           </a:p>
@@ -1799,7 +1801,7 @@
           <a:p>
             <a:fld id="{6C44D894-CCE4-4219-86B7-733D27BABF13}" type="datetimeFigureOut">
               <a:rPr lang="ko-KR" altLang="en-US" smtClean="0"/>
-              <a:t>2025-11-18</a:t>
+              <a:t>2025-11-25</a:t>
             </a:fld>
             <a:endParaRPr lang="ko-KR" altLang="en-US"/>
           </a:p>
@@ -2064,7 +2066,7 @@
           <a:p>
             <a:fld id="{6C44D894-CCE4-4219-86B7-733D27BABF13}" type="datetimeFigureOut">
               <a:rPr lang="ko-KR" altLang="en-US" smtClean="0"/>
-              <a:t>2025-11-18</a:t>
+              <a:t>2025-11-25</a:t>
             </a:fld>
             <a:endParaRPr lang="ko-KR" altLang="en-US"/>
           </a:p>
@@ -2476,7 +2478,7 @@
           <a:p>
             <a:fld id="{6C44D894-CCE4-4219-86B7-733D27BABF13}" type="datetimeFigureOut">
               <a:rPr lang="ko-KR" altLang="en-US" smtClean="0"/>
-              <a:t>2025-11-18</a:t>
+              <a:t>2025-11-25</a:t>
             </a:fld>
             <a:endParaRPr lang="ko-KR" altLang="en-US"/>
           </a:p>
@@ -2617,7 +2619,7 @@
           <a:p>
             <a:fld id="{6C44D894-CCE4-4219-86B7-733D27BABF13}" type="datetimeFigureOut">
               <a:rPr lang="ko-KR" altLang="en-US" smtClean="0"/>
-              <a:t>2025-11-18</a:t>
+              <a:t>2025-11-25</a:t>
             </a:fld>
             <a:endParaRPr lang="ko-KR" altLang="en-US"/>
           </a:p>
@@ -2730,7 +2732,7 @@
           <a:p>
             <a:fld id="{6C44D894-CCE4-4219-86B7-733D27BABF13}" type="datetimeFigureOut">
               <a:rPr lang="ko-KR" altLang="en-US" smtClean="0"/>
-              <a:t>2025-11-18</a:t>
+              <a:t>2025-11-25</a:t>
             </a:fld>
             <a:endParaRPr lang="ko-KR" altLang="en-US"/>
           </a:p>
@@ -3041,7 +3043,7 @@
           <a:p>
             <a:fld id="{6C44D894-CCE4-4219-86B7-733D27BABF13}" type="datetimeFigureOut">
               <a:rPr lang="ko-KR" altLang="en-US" smtClean="0"/>
-              <a:t>2025-11-18</a:t>
+              <a:t>2025-11-25</a:t>
             </a:fld>
             <a:endParaRPr lang="ko-KR" altLang="en-US"/>
           </a:p>
@@ -3329,7 +3331,7 @@
           <a:p>
             <a:fld id="{6C44D894-CCE4-4219-86B7-733D27BABF13}" type="datetimeFigureOut">
               <a:rPr lang="ko-KR" altLang="en-US" smtClean="0"/>
-              <a:t>2025-11-18</a:t>
+              <a:t>2025-11-25</a:t>
             </a:fld>
             <a:endParaRPr lang="ko-KR" altLang="en-US"/>
           </a:p>
@@ -3570,7 +3572,7 @@
           <a:p>
             <a:fld id="{6C44D894-CCE4-4219-86B7-733D27BABF13}" type="datetimeFigureOut">
               <a:rPr lang="ko-KR" altLang="en-US" smtClean="0"/>
-              <a:t>2025-11-18</a:t>
+              <a:t>2025-11-25</a:t>
             </a:fld>
             <a:endParaRPr lang="ko-KR" altLang="en-US"/>
           </a:p>
@@ -5245,7 +5247,7 @@
             </a:fld>
             <a:r>
               <a:rPr lang="en-US" altLang="ko-KR" dirty="0"/>
-              <a:t>/7</a:t>
+              <a:t>/8</a:t>
             </a:r>
             <a:endParaRPr lang="ko-KR" altLang="en-US" dirty="0"/>
           </a:p>
@@ -5425,7 +5427,7 @@
                 <a:latin typeface="HY견고딕" panose="02030600000101010101" pitchFamily="18" charset="-127"/>
                 <a:ea typeface="HY견고딕" panose="02030600000101010101" pitchFamily="18" charset="-127"/>
               </a:rPr>
-              <a:t>85%</a:t>
+              <a:t>90%</a:t>
             </a:r>
             <a:endParaRPr lang="ko-KR" altLang="en-US" sz="1000" dirty="0">
               <a:latin typeface="HY견고딕" panose="02030600000101010101" pitchFamily="18" charset="-127"/>
@@ -5487,10 +5489,10 @@
       </p:sp>
       <p:pic>
         <p:nvPicPr>
-          <p:cNvPr id="5" name="그림 4" descr="텍스트, 스크린샷, 소프트웨어, 디스플레이이(가) 표시된 사진&#10;&#10;AI 생성 콘텐츠는 정확하지 않을 수 있습니다.">
-            <a:extLst>
-              <a:ext uri="{FF2B5EF4-FFF2-40B4-BE49-F238E27FC236}">
-                <a16:creationId xmlns:a16="http://schemas.microsoft.com/office/drawing/2014/main" id="{07A6CBA3-54F0-BF75-B122-0F3BE6505564}"/>
+          <p:cNvPr id="10" name="그림 9">
+            <a:extLst>
+              <a:ext uri="{FF2B5EF4-FFF2-40B4-BE49-F238E27FC236}">
+                <a16:creationId xmlns:a16="http://schemas.microsoft.com/office/drawing/2014/main" id="{862BADBE-63FB-F143-82E7-D941AE6AAF9E}"/>
               </a:ext>
             </a:extLst>
           </p:cNvPr>
@@ -5513,8 +5515,8 @@
         </p:blipFill>
         <p:spPr>
           <a:xfrm>
-            <a:off x="166824" y="1946400"/>
-            <a:ext cx="6313671" cy="3630815"/>
+            <a:off x="6486632" y="2566180"/>
+            <a:ext cx="5210755" cy="1725640"/>
           </a:xfrm>
           <a:prstGeom prst="rect">
             <a:avLst/>
@@ -5523,10 +5525,10 @@
       </p:pic>
       <p:pic>
         <p:nvPicPr>
-          <p:cNvPr id="9" name="그림 8" descr="텍스트, 스크린샷, 폰트, 그래픽이(가) 표시된 사진&#10;&#10;AI 생성 콘텐츠는 정확하지 않을 수 있습니다.">
-            <a:extLst>
-              <a:ext uri="{FF2B5EF4-FFF2-40B4-BE49-F238E27FC236}">
-                <a16:creationId xmlns:a16="http://schemas.microsoft.com/office/drawing/2014/main" id="{6C2AAA67-3D81-042C-AC41-35399DA23C22}"/>
+          <p:cNvPr id="14" name="그림 13" descr="텍스트, 스크린샷, 소프트웨어, 디스플레이이(가) 표시된 사진&#10;&#10;AI 생성 콘텐츠는 정확하지 않을 수 있습니다.">
+            <a:extLst>
+              <a:ext uri="{FF2B5EF4-FFF2-40B4-BE49-F238E27FC236}">
+                <a16:creationId xmlns:a16="http://schemas.microsoft.com/office/drawing/2014/main" id="{3FB149E9-FC7D-BB59-136D-988894CEBEC0}"/>
               </a:ext>
             </a:extLst>
           </p:cNvPr>
@@ -5549,8 +5551,8 @@
         </p:blipFill>
         <p:spPr>
           <a:xfrm>
-            <a:off x="6824443" y="3589776"/>
-            <a:ext cx="5141434" cy="751571"/>
+            <a:off x="838199" y="1858566"/>
+            <a:ext cx="5045473" cy="3927760"/>
           </a:xfrm>
           <a:prstGeom prst="rect">
             <a:avLst/>
@@ -5708,7 +5710,7 @@
             </a:fld>
             <a:r>
               <a:rPr lang="en-US" altLang="ko-KR" dirty="0"/>
-              <a:t>/7</a:t>
+              <a:t>/8</a:t>
             </a:r>
             <a:endParaRPr lang="ko-KR" altLang="en-US" dirty="0"/>
           </a:p>
@@ -5868,8 +5870,8 @@
         </p:nvSpPr>
         <p:spPr>
           <a:xfrm>
-            <a:off x="5861801" y="5815121"/>
-            <a:ext cx="468397" cy="246221"/>
+            <a:off x="5861800" y="5815121"/>
+            <a:ext cx="468398" cy="246221"/>
           </a:xfrm>
           <a:prstGeom prst="rect">
             <a:avLst/>
@@ -5888,7 +5890,7 @@
                 <a:latin typeface="HY견고딕" panose="02030600000101010101" pitchFamily="18" charset="-127"/>
                 <a:ea typeface="HY견고딕" panose="02030600000101010101" pitchFamily="18" charset="-127"/>
               </a:rPr>
-              <a:t>85%</a:t>
+              <a:t>90%</a:t>
             </a:r>
             <a:endParaRPr lang="ko-KR" altLang="en-US" sz="1000" dirty="0">
               <a:latin typeface="HY견고딕" panose="02030600000101010101" pitchFamily="18" charset="-127"/>
@@ -6135,7 +6137,7 @@
             </a:fld>
             <a:r>
               <a:rPr lang="en-US" altLang="ko-KR" dirty="0"/>
-              <a:t>/7</a:t>
+              <a:t>/8</a:t>
             </a:r>
             <a:endParaRPr lang="ko-KR" altLang="en-US" dirty="0"/>
           </a:p>
@@ -6295,8 +6297,8 @@
         </p:nvSpPr>
         <p:spPr>
           <a:xfrm>
-            <a:off x="5861801" y="5815121"/>
-            <a:ext cx="468397" cy="246221"/>
+            <a:off x="5861800" y="5815121"/>
+            <a:ext cx="468398" cy="246221"/>
           </a:xfrm>
           <a:prstGeom prst="rect">
             <a:avLst/>
@@ -6315,7 +6317,7 @@
                 <a:latin typeface="HY견고딕" panose="02030600000101010101" pitchFamily="18" charset="-127"/>
                 <a:ea typeface="HY견고딕" panose="02030600000101010101" pitchFamily="18" charset="-127"/>
               </a:rPr>
-              <a:t>85%</a:t>
+              <a:t>90%</a:t>
             </a:r>
             <a:endParaRPr lang="ko-KR" altLang="en-US" sz="1000" dirty="0">
               <a:latin typeface="HY견고딕" panose="02030600000101010101" pitchFamily="18" charset="-127"/>
@@ -6401,43 +6403,6 @@
           <a:xfrm>
             <a:off x="234892" y="1753299"/>
             <a:ext cx="6172652" cy="3888462"/>
-          </a:xfrm>
-          <a:prstGeom prst="rect">
-            <a:avLst/>
-          </a:prstGeom>
-        </p:spPr>
-      </p:pic>
-      <p:pic>
-        <p:nvPicPr>
-          <p:cNvPr id="9" name="그림 8" descr="텍스트, 스크린샷, 그래픽 디자인, 그래픽이(가) 표시된 사진&#10;&#10;AI 생성 콘텐츠는 정확하지 않을 수 있습니다.">
-            <a:extLst>
-              <a:ext uri="{FF2B5EF4-FFF2-40B4-BE49-F238E27FC236}">
-                <a16:creationId xmlns:a16="http://schemas.microsoft.com/office/drawing/2014/main" id="{87C1D79D-8039-314B-8EAF-1861CB1A8FBF}"/>
-              </a:ext>
-            </a:extLst>
-          </p:cNvPr>
-          <p:cNvPicPr>
-            <a:picLocks noChangeAspect="1"/>
-          </p:cNvPicPr>
-          <p:nvPr/>
-        </p:nvPicPr>
-        <p:blipFill>
-          <a:blip r:embed="rId3">
-            <a:extLst>
-              <a:ext uri="{28A0092B-C50C-407E-A947-70E740481C1C}">
-                <a14:useLocalDpi xmlns:a14="http://schemas.microsoft.com/office/drawing/2010/main" val="0"/>
-              </a:ext>
-            </a:extLst>
-          </a:blip>
-          <a:srcRect l="22698" r="20882"/>
-          <a:stretch>
-            <a:fillRect/>
-          </a:stretch>
-        </p:blipFill>
-        <p:spPr>
-          <a:xfrm>
-            <a:off x="7675927" y="1747102"/>
-            <a:ext cx="3906473" cy="3894659"/>
           </a:xfrm>
           <a:prstGeom prst="rect">
             <a:avLst/>
@@ -6595,7 +6560,7 @@
             </a:fld>
             <a:r>
               <a:rPr lang="en-US" altLang="ko-KR" dirty="0"/>
-              <a:t>/7</a:t>
+              <a:t>/8</a:t>
             </a:r>
             <a:endParaRPr lang="ko-KR" altLang="en-US" dirty="0"/>
           </a:p>
@@ -6755,8 +6720,8 @@
         </p:nvSpPr>
         <p:spPr>
           <a:xfrm>
-            <a:off x="5861801" y="5815121"/>
-            <a:ext cx="468397" cy="246221"/>
+            <a:off x="5861800" y="5815121"/>
+            <a:ext cx="468398" cy="246221"/>
           </a:xfrm>
           <a:prstGeom prst="rect">
             <a:avLst/>
@@ -6775,7 +6740,7 @@
                 <a:latin typeface="HY견고딕" panose="02030600000101010101" pitchFamily="18" charset="-127"/>
                 <a:ea typeface="HY견고딕" panose="02030600000101010101" pitchFamily="18" charset="-127"/>
               </a:rPr>
-              <a:t>85%</a:t>
+              <a:t>90%</a:t>
             </a:r>
             <a:endParaRPr lang="ko-KR" altLang="en-US" sz="1000" dirty="0">
               <a:latin typeface="HY견고딕" panose="02030600000101010101" pitchFamily="18" charset="-127"/>
@@ -6860,45 +6825,8 @@
         </p:blipFill>
         <p:spPr>
           <a:xfrm>
-            <a:off x="122870" y="1954490"/>
+            <a:off x="242613" y="2308276"/>
             <a:ext cx="7457813" cy="2155867"/>
-          </a:xfrm>
-          <a:prstGeom prst="rect">
-            <a:avLst/>
-          </a:prstGeom>
-        </p:spPr>
-      </p:pic>
-      <p:pic>
-        <p:nvPicPr>
-          <p:cNvPr id="10" name="그림 9" descr="스크린샷, 텍스트, 직사각형, 문구용품이(가) 표시된 사진&#10;&#10;AI 생성 콘텐츠는 정확하지 않을 수 있습니다.">
-            <a:extLst>
-              <a:ext uri="{FF2B5EF4-FFF2-40B4-BE49-F238E27FC236}">
-                <a16:creationId xmlns:a16="http://schemas.microsoft.com/office/drawing/2014/main" id="{581EDB53-C25A-7871-5A54-F0C9CE5BB8C8}"/>
-              </a:ext>
-            </a:extLst>
-          </p:cNvPr>
-          <p:cNvPicPr>
-            <a:picLocks noChangeAspect="1"/>
-          </p:cNvPicPr>
-          <p:nvPr/>
-        </p:nvPicPr>
-        <p:blipFill>
-          <a:blip r:embed="rId3">
-            <a:extLst>
-              <a:ext uri="{28A0092B-C50C-407E-A947-70E740481C1C}">
-                <a14:useLocalDpi xmlns:a14="http://schemas.microsoft.com/office/drawing/2010/main" val="0"/>
-              </a:ext>
-            </a:extLst>
-          </a:blip>
-          <a:srcRect l="22954" r="21128"/>
-          <a:stretch>
-            <a:fillRect/>
-          </a:stretch>
-        </p:blipFill>
-        <p:spPr>
-          <a:xfrm>
-            <a:off x="8024071" y="1957153"/>
-            <a:ext cx="3631786" cy="3653388"/>
           </a:xfrm>
           <a:prstGeom prst="rect">
             <a:avLst/>
@@ -6923,6 +6851,1709 @@
   <p:cSld>
     <p:spTree>
       <p:nvGrpSpPr>
+        <p:cNvPr id="1" name="">
+          <a:extLst>
+            <a:ext uri="{FF2B5EF4-FFF2-40B4-BE49-F238E27FC236}">
+              <a16:creationId xmlns:a16="http://schemas.microsoft.com/office/drawing/2014/main" id="{601510B1-70C3-62F3-A51D-85C38751A000}"/>
+            </a:ext>
+          </a:extLst>
+        </p:cNvPr>
+        <p:cNvGrpSpPr/>
+        <p:nvPr/>
+      </p:nvGrpSpPr>
+      <p:grpSpPr>
+        <a:xfrm>
+          <a:off x="0" y="0"/>
+          <a:ext cx="0" cy="0"/>
+          <a:chOff x="0" y="0"/>
+          <a:chExt cx="0" cy="0"/>
+        </a:xfrm>
+      </p:grpSpPr>
+      <p:sp>
+        <p:nvSpPr>
+          <p:cNvPr id="12" name="사각형: 둥근 모서리 11">
+            <a:extLst>
+              <a:ext uri="{FF2B5EF4-FFF2-40B4-BE49-F238E27FC236}">
+                <a16:creationId xmlns:a16="http://schemas.microsoft.com/office/drawing/2014/main" id="{951D0ED2-5940-77D0-3C16-A7F3572ABA69}"/>
+              </a:ext>
+            </a:extLst>
+          </p:cNvPr>
+          <p:cNvSpPr/>
+          <p:nvPr/>
+        </p:nvSpPr>
+        <p:spPr>
+          <a:xfrm>
+            <a:off x="609599" y="5840557"/>
+            <a:ext cx="8098972" cy="192595"/>
+          </a:xfrm>
+          <a:prstGeom prst="roundRect">
+            <a:avLst>
+              <a:gd name="adj" fmla="val 50000"/>
+            </a:avLst>
+          </a:prstGeom>
+          <a:solidFill>
+            <a:schemeClr val="accent6">
+              <a:lumMod val="60000"/>
+              <a:lumOff val="40000"/>
+            </a:schemeClr>
+          </a:solidFill>
+          <a:ln w="28575">
+            <a:noFill/>
+          </a:ln>
+        </p:spPr>
+        <p:style>
+          <a:lnRef idx="2">
+            <a:schemeClr val="accent1">
+              <a:shade val="15000"/>
+            </a:schemeClr>
+          </a:lnRef>
+          <a:fillRef idx="1">
+            <a:schemeClr val="accent1"/>
+          </a:fillRef>
+          <a:effectRef idx="0">
+            <a:schemeClr val="accent1"/>
+          </a:effectRef>
+          <a:fontRef idx="minor">
+            <a:schemeClr val="lt1"/>
+          </a:fontRef>
+        </p:style>
+        <p:txBody>
+          <a:bodyPr rtlCol="0" anchor="ctr"/>
+          <a:lstStyle/>
+          <a:p>
+            <a:pPr algn="ctr"/>
+            <a:endParaRPr lang="ko-KR" altLang="en-US"/>
+          </a:p>
+        </p:txBody>
+      </p:sp>
+      <p:sp>
+        <p:nvSpPr>
+          <p:cNvPr id="2" name="제목 1">
+            <a:extLst>
+              <a:ext uri="{FF2B5EF4-FFF2-40B4-BE49-F238E27FC236}">
+                <a16:creationId xmlns:a16="http://schemas.microsoft.com/office/drawing/2014/main" id="{D444C8DF-526C-9548-3754-66C8D62F26E4}"/>
+              </a:ext>
+            </a:extLst>
+          </p:cNvPr>
+          <p:cNvSpPr>
+            <a:spLocks noGrp="1"/>
+          </p:cNvSpPr>
+          <p:nvPr>
+            <p:ph type="title"/>
+          </p:nvPr>
+        </p:nvSpPr>
+        <p:spPr/>
+        <p:txBody>
+          <a:bodyPr>
+            <a:normAutofit/>
+          </a:bodyPr>
+          <a:lstStyle/>
+          <a:p>
+            <a:r>
+              <a:rPr lang="ko-KR" altLang="en-US" dirty="0"/>
+              <a:t>진행 상황</a:t>
+            </a:r>
+          </a:p>
+        </p:txBody>
+      </p:sp>
+      <p:sp>
+        <p:nvSpPr>
+          <p:cNvPr id="4" name="슬라이드 번호 개체 틀 3">
+            <a:extLst>
+              <a:ext uri="{FF2B5EF4-FFF2-40B4-BE49-F238E27FC236}">
+                <a16:creationId xmlns:a16="http://schemas.microsoft.com/office/drawing/2014/main" id="{83D8A3AA-A20E-1975-D487-4B76697E0B29}"/>
+              </a:ext>
+            </a:extLst>
+          </p:cNvPr>
+          <p:cNvSpPr>
+            <a:spLocks noGrp="1"/>
+          </p:cNvSpPr>
+          <p:nvPr>
+            <p:ph type="sldNum" sz="quarter" idx="12"/>
+          </p:nvPr>
+        </p:nvSpPr>
+        <p:spPr/>
+        <p:txBody>
+          <a:bodyPr/>
+          <a:lstStyle/>
+          <a:p>
+            <a:fld id="{E694CC86-33DA-4CBD-A678-F7DD024C14A4}" type="slidenum">
+              <a:rPr lang="ko-KR" altLang="en-US" smtClean="0"/>
+              <a:pPr/>
+              <a:t>6</a:t>
+            </a:fld>
+            <a:r>
+              <a:rPr lang="en-US" altLang="ko-KR" dirty="0"/>
+              <a:t>/8</a:t>
+            </a:r>
+            <a:endParaRPr lang="ko-KR" altLang="en-US" dirty="0"/>
+          </a:p>
+        </p:txBody>
+      </p:sp>
+      <p:sp>
+        <p:nvSpPr>
+          <p:cNvPr id="6" name="사각형: 둥근 모서리 5">
+            <a:extLst>
+              <a:ext uri="{FF2B5EF4-FFF2-40B4-BE49-F238E27FC236}">
+                <a16:creationId xmlns:a16="http://schemas.microsoft.com/office/drawing/2014/main" id="{97A95E06-804A-3F48-822D-085A24AAF87A}"/>
+              </a:ext>
+            </a:extLst>
+          </p:cNvPr>
+          <p:cNvSpPr/>
+          <p:nvPr/>
+        </p:nvSpPr>
+        <p:spPr>
+          <a:xfrm>
+            <a:off x="609600" y="5840557"/>
+            <a:ext cx="10972800" cy="192595"/>
+          </a:xfrm>
+          <a:prstGeom prst="roundRect">
+            <a:avLst>
+              <a:gd name="adj" fmla="val 50000"/>
+            </a:avLst>
+          </a:prstGeom>
+          <a:noFill/>
+          <a:ln w="28575">
+            <a:solidFill>
+              <a:schemeClr val="tx1"/>
+            </a:solidFill>
+          </a:ln>
+        </p:spPr>
+        <p:style>
+          <a:lnRef idx="2">
+            <a:schemeClr val="accent1">
+              <a:shade val="15000"/>
+            </a:schemeClr>
+          </a:lnRef>
+          <a:fillRef idx="1">
+            <a:schemeClr val="accent1"/>
+          </a:fillRef>
+          <a:effectRef idx="0">
+            <a:schemeClr val="accent1"/>
+          </a:effectRef>
+          <a:fontRef idx="minor">
+            <a:schemeClr val="lt1"/>
+          </a:fontRef>
+        </p:style>
+        <p:txBody>
+          <a:bodyPr rtlCol="0" anchor="ctr"/>
+          <a:lstStyle/>
+          <a:p>
+            <a:pPr algn="ctr"/>
+            <a:endParaRPr lang="ko-KR" altLang="en-US"/>
+          </a:p>
+        </p:txBody>
+      </p:sp>
+      <p:sp>
+        <p:nvSpPr>
+          <p:cNvPr id="7" name="TextBox 6">
+            <a:extLst>
+              <a:ext uri="{FF2B5EF4-FFF2-40B4-BE49-F238E27FC236}">
+                <a16:creationId xmlns:a16="http://schemas.microsoft.com/office/drawing/2014/main" id="{DA19A8A9-C658-6655-AE20-A74A70313701}"/>
+              </a:ext>
+            </a:extLst>
+          </p:cNvPr>
+          <p:cNvSpPr txBox="1"/>
+          <p:nvPr/>
+        </p:nvSpPr>
+        <p:spPr>
+          <a:xfrm>
+            <a:off x="122870" y="5782967"/>
+            <a:ext cx="468398" cy="307777"/>
+          </a:xfrm>
+          <a:prstGeom prst="rect">
+            <a:avLst/>
+          </a:prstGeom>
+          <a:noFill/>
+        </p:spPr>
+        <p:txBody>
+          <a:bodyPr wrap="none" rtlCol="0">
+            <a:spAutoFit/>
+          </a:bodyPr>
+          <a:lstStyle/>
+          <a:p>
+            <a:pPr algn="ctr"/>
+            <a:r>
+              <a:rPr lang="en-US" altLang="ko-KR" sz="1400" dirty="0">
+                <a:latin typeface="HY견고딕" panose="02030600000101010101" pitchFamily="18" charset="-127"/>
+                <a:ea typeface="HY견고딕" panose="02030600000101010101" pitchFamily="18" charset="-127"/>
+              </a:rPr>
+              <a:t>0%</a:t>
+            </a:r>
+            <a:endParaRPr lang="ko-KR" altLang="en-US" sz="1400" dirty="0">
+              <a:latin typeface="HY견고딕" panose="02030600000101010101" pitchFamily="18" charset="-127"/>
+              <a:ea typeface="HY견고딕" panose="02030600000101010101" pitchFamily="18" charset="-127"/>
+            </a:endParaRPr>
+          </a:p>
+        </p:txBody>
+      </p:sp>
+      <p:sp>
+        <p:nvSpPr>
+          <p:cNvPr id="8" name="TextBox 7">
+            <a:extLst>
+              <a:ext uri="{FF2B5EF4-FFF2-40B4-BE49-F238E27FC236}">
+                <a16:creationId xmlns:a16="http://schemas.microsoft.com/office/drawing/2014/main" id="{15CF15F2-9F37-3D33-CAA7-F642B39E447F}"/>
+              </a:ext>
+            </a:extLst>
+          </p:cNvPr>
+          <p:cNvSpPr txBox="1"/>
+          <p:nvPr/>
+        </p:nvSpPr>
+        <p:spPr>
+          <a:xfrm>
+            <a:off x="11548533" y="5782967"/>
+            <a:ext cx="692818" cy="307777"/>
+          </a:xfrm>
+          <a:prstGeom prst="rect">
+            <a:avLst/>
+          </a:prstGeom>
+          <a:noFill/>
+        </p:spPr>
+        <p:txBody>
+          <a:bodyPr wrap="none" rtlCol="0">
+            <a:spAutoFit/>
+          </a:bodyPr>
+          <a:lstStyle/>
+          <a:p>
+            <a:pPr algn="ctr"/>
+            <a:r>
+              <a:rPr lang="en-US" altLang="ko-KR" sz="1400" dirty="0">
+                <a:latin typeface="HY견고딕" panose="02030600000101010101" pitchFamily="18" charset="-127"/>
+                <a:ea typeface="HY견고딕" panose="02030600000101010101" pitchFamily="18" charset="-127"/>
+              </a:rPr>
+              <a:t>100%</a:t>
+            </a:r>
+            <a:endParaRPr lang="ko-KR" altLang="en-US" sz="1400" dirty="0">
+              <a:latin typeface="HY견고딕" panose="02030600000101010101" pitchFamily="18" charset="-127"/>
+              <a:ea typeface="HY견고딕" panose="02030600000101010101" pitchFamily="18" charset="-127"/>
+            </a:endParaRPr>
+          </a:p>
+        </p:txBody>
+      </p:sp>
+      <p:sp>
+        <p:nvSpPr>
+          <p:cNvPr id="17" name="TextBox 16">
+            <a:extLst>
+              <a:ext uri="{FF2B5EF4-FFF2-40B4-BE49-F238E27FC236}">
+                <a16:creationId xmlns:a16="http://schemas.microsoft.com/office/drawing/2014/main" id="{5D5100E6-1ACD-E297-2708-A63FC20F9457}"/>
+              </a:ext>
+            </a:extLst>
+          </p:cNvPr>
+          <p:cNvSpPr txBox="1"/>
+          <p:nvPr/>
+        </p:nvSpPr>
+        <p:spPr>
+          <a:xfrm>
+            <a:off x="5861800" y="5815121"/>
+            <a:ext cx="468398" cy="246221"/>
+          </a:xfrm>
+          <a:prstGeom prst="rect">
+            <a:avLst/>
+          </a:prstGeom>
+          <a:noFill/>
+        </p:spPr>
+        <p:txBody>
+          <a:bodyPr wrap="none" rtlCol="0">
+            <a:spAutoFit/>
+          </a:bodyPr>
+          <a:lstStyle/>
+          <a:p>
+            <a:pPr algn="ctr"/>
+            <a:r>
+              <a:rPr lang="en-US" altLang="ko-KR" sz="1000" dirty="0">
+                <a:latin typeface="HY견고딕" panose="02030600000101010101" pitchFamily="18" charset="-127"/>
+                <a:ea typeface="HY견고딕" panose="02030600000101010101" pitchFamily="18" charset="-127"/>
+              </a:rPr>
+              <a:t>90%</a:t>
+            </a:r>
+            <a:endParaRPr lang="ko-KR" altLang="en-US" sz="1000" dirty="0">
+              <a:latin typeface="HY견고딕" panose="02030600000101010101" pitchFamily="18" charset="-127"/>
+              <a:ea typeface="HY견고딕" panose="02030600000101010101" pitchFamily="18" charset="-127"/>
+            </a:endParaRPr>
+          </a:p>
+        </p:txBody>
+      </p:sp>
+      <p:sp>
+        <p:nvSpPr>
+          <p:cNvPr id="13" name="내용 개체 틀 12">
+            <a:extLst>
+              <a:ext uri="{FF2B5EF4-FFF2-40B4-BE49-F238E27FC236}">
+                <a16:creationId xmlns:a16="http://schemas.microsoft.com/office/drawing/2014/main" id="{99928BF1-CBBE-2C36-C5FA-A5EC02D9A324}"/>
+              </a:ext>
+            </a:extLst>
+          </p:cNvPr>
+          <p:cNvSpPr>
+            <a:spLocks noGrp="1"/>
+          </p:cNvSpPr>
+          <p:nvPr>
+            <p:ph idx="1"/>
+          </p:nvPr>
+        </p:nvSpPr>
+        <p:spPr>
+          <a:xfrm>
+            <a:off x="838199" y="1029196"/>
+            <a:ext cx="7689210" cy="1229590"/>
+          </a:xfrm>
+        </p:spPr>
+        <p:txBody>
+          <a:bodyPr>
+            <a:normAutofit/>
+          </a:bodyPr>
+          <a:lstStyle/>
+          <a:p>
+            <a:r>
+              <a:rPr lang="en-US" altLang="ko-KR" dirty="0"/>
+              <a:t>WQFS </a:t>
+            </a:r>
+            <a:r>
+              <a:rPr lang="ko-KR" altLang="en-US" dirty="0"/>
+              <a:t>이벤트 발생 동적화</a:t>
+            </a:r>
+            <a:endParaRPr lang="en-US" altLang="ko-KR" dirty="0"/>
+          </a:p>
+          <a:p>
+            <a:pPr lvl="1"/>
+            <a:r>
+              <a:rPr lang="ko-KR" altLang="en-US" dirty="0"/>
+              <a:t>고정적으로 발생하는 이벤트 시간을 </a:t>
+            </a:r>
+            <a:r>
+              <a:rPr lang="ko-KR" altLang="en-US" dirty="0" err="1"/>
+              <a:t>동적화하여</a:t>
+            </a:r>
+            <a:r>
+              <a:rPr lang="ko-KR" altLang="en-US" dirty="0"/>
+              <a:t> 예측하기 </a:t>
+            </a:r>
+            <a:br>
+              <a:rPr lang="en-US" altLang="ko-KR" dirty="0"/>
+            </a:br>
+            <a:r>
+              <a:rPr lang="ko-KR" altLang="en-US" dirty="0"/>
+              <a:t>힘들게 함</a:t>
+            </a:r>
+            <a:endParaRPr lang="en-US" altLang="ko-KR" dirty="0"/>
+          </a:p>
+        </p:txBody>
+      </p:sp>
+      <p:pic>
+        <p:nvPicPr>
+          <p:cNvPr id="9" name="그림 8" descr="텍스트, 폰트, 스크린샷이(가) 표시된 사진&#10;&#10;AI 생성 콘텐츠는 정확하지 않을 수 있습니다.">
+            <a:extLst>
+              <a:ext uri="{FF2B5EF4-FFF2-40B4-BE49-F238E27FC236}">
+                <a16:creationId xmlns:a16="http://schemas.microsoft.com/office/drawing/2014/main" id="{19C6A8B9-B519-CC23-2A1A-E61D57F4EF14}"/>
+              </a:ext>
+            </a:extLst>
+          </p:cNvPr>
+          <p:cNvPicPr>
+            <a:picLocks noChangeAspect="1"/>
+          </p:cNvPicPr>
+          <p:nvPr/>
+        </p:nvPicPr>
+        <p:blipFill>
+          <a:blip r:embed="rId2">
+            <a:extLst>
+              <a:ext uri="{28A0092B-C50C-407E-A947-70E740481C1C}">
+                <a14:useLocalDpi xmlns:a14="http://schemas.microsoft.com/office/drawing/2010/main" val="0"/>
+              </a:ext>
+            </a:extLst>
+          </a:blip>
+          <a:stretch>
+            <a:fillRect/>
+          </a:stretch>
+        </p:blipFill>
+        <p:spPr>
+          <a:xfrm>
+            <a:off x="513147" y="2495620"/>
+            <a:ext cx="6698562" cy="1290094"/>
+          </a:xfrm>
+          <a:prstGeom prst="rect">
+            <a:avLst/>
+          </a:prstGeom>
+        </p:spPr>
+      </p:pic>
+      <p:pic>
+        <p:nvPicPr>
+          <p:cNvPr id="14" name="그림 13" descr="텍스트, 스크린샷, 폰트이(가) 표시된 사진&#10;&#10;AI 생성 콘텐츠는 정확하지 않을 수 있습니다.">
+            <a:extLst>
+              <a:ext uri="{FF2B5EF4-FFF2-40B4-BE49-F238E27FC236}">
+                <a16:creationId xmlns:a16="http://schemas.microsoft.com/office/drawing/2014/main" id="{DCCB4BE5-633E-F42E-81A9-25454B6DCDB0}"/>
+              </a:ext>
+            </a:extLst>
+          </p:cNvPr>
+          <p:cNvPicPr>
+            <a:picLocks noChangeAspect="1"/>
+          </p:cNvPicPr>
+          <p:nvPr/>
+        </p:nvPicPr>
+        <p:blipFill>
+          <a:blip r:embed="rId3">
+            <a:extLst>
+              <a:ext uri="{28A0092B-C50C-407E-A947-70E740481C1C}">
+                <a14:useLocalDpi xmlns:a14="http://schemas.microsoft.com/office/drawing/2010/main" val="0"/>
+              </a:ext>
+            </a:extLst>
+          </a:blip>
+          <a:stretch>
+            <a:fillRect/>
+          </a:stretch>
+        </p:blipFill>
+        <p:spPr>
+          <a:xfrm>
+            <a:off x="551247" y="4056744"/>
+            <a:ext cx="6698562" cy="1557958"/>
+          </a:xfrm>
+          <a:prstGeom prst="rect">
+            <a:avLst/>
+          </a:prstGeom>
+        </p:spPr>
+      </p:pic>
+    </p:spTree>
+    <p:extLst>
+      <p:ext uri="{BB962C8B-B14F-4D97-AF65-F5344CB8AC3E}">
+        <p14:creationId xmlns:p14="http://schemas.microsoft.com/office/powerpoint/2010/main" val="2818906215"/>
+      </p:ext>
+    </p:extLst>
+  </p:cSld>
+  <p:clrMapOvr>
+    <a:masterClrMapping/>
+  </p:clrMapOvr>
+</p:sld>
+</file>
+
+<file path=ppt/slides/slide7.xml><?xml version="1.0" encoding="utf-8"?>
+<p:sld xmlns:a="http://schemas.openxmlformats.org/drawingml/2006/main" xmlns:r="http://schemas.openxmlformats.org/officeDocument/2006/relationships" xmlns:p="http://schemas.openxmlformats.org/presentationml/2006/main">
+  <p:cSld>
+    <p:spTree>
+      <p:nvGrpSpPr>
+        <p:cNvPr id="1" name="">
+          <a:extLst>
+            <a:ext uri="{FF2B5EF4-FFF2-40B4-BE49-F238E27FC236}">
+              <a16:creationId xmlns:a16="http://schemas.microsoft.com/office/drawing/2014/main" id="{ED335E72-8051-A7E9-CFAC-081FE478495A}"/>
+            </a:ext>
+          </a:extLst>
+        </p:cNvPr>
+        <p:cNvGrpSpPr/>
+        <p:nvPr/>
+      </p:nvGrpSpPr>
+      <p:grpSpPr>
+        <a:xfrm>
+          <a:off x="0" y="0"/>
+          <a:ext cx="0" cy="0"/>
+          <a:chOff x="0" y="0"/>
+          <a:chExt cx="0" cy="0"/>
+        </a:xfrm>
+      </p:grpSpPr>
+      <p:sp>
+        <p:nvSpPr>
+          <p:cNvPr id="12" name="사각형: 둥근 모서리 11">
+            <a:extLst>
+              <a:ext uri="{FF2B5EF4-FFF2-40B4-BE49-F238E27FC236}">
+                <a16:creationId xmlns:a16="http://schemas.microsoft.com/office/drawing/2014/main" id="{BF8712C1-C73F-973D-1BC5-1DE8BDB953DA}"/>
+              </a:ext>
+            </a:extLst>
+          </p:cNvPr>
+          <p:cNvSpPr/>
+          <p:nvPr/>
+        </p:nvSpPr>
+        <p:spPr>
+          <a:xfrm>
+            <a:off x="609599" y="5840557"/>
+            <a:ext cx="8098972" cy="192595"/>
+          </a:xfrm>
+          <a:prstGeom prst="roundRect">
+            <a:avLst>
+              <a:gd name="adj" fmla="val 50000"/>
+            </a:avLst>
+          </a:prstGeom>
+          <a:solidFill>
+            <a:schemeClr val="accent6">
+              <a:lumMod val="60000"/>
+              <a:lumOff val="40000"/>
+            </a:schemeClr>
+          </a:solidFill>
+          <a:ln w="28575">
+            <a:noFill/>
+          </a:ln>
+        </p:spPr>
+        <p:style>
+          <a:lnRef idx="2">
+            <a:schemeClr val="accent1">
+              <a:shade val="15000"/>
+            </a:schemeClr>
+          </a:lnRef>
+          <a:fillRef idx="1">
+            <a:schemeClr val="accent1"/>
+          </a:fillRef>
+          <a:effectRef idx="0">
+            <a:schemeClr val="accent1"/>
+          </a:effectRef>
+          <a:fontRef idx="minor">
+            <a:schemeClr val="lt1"/>
+          </a:fontRef>
+        </p:style>
+        <p:txBody>
+          <a:bodyPr rtlCol="0" anchor="ctr"/>
+          <a:lstStyle/>
+          <a:p>
+            <a:pPr algn="ctr"/>
+            <a:endParaRPr lang="ko-KR" altLang="en-US"/>
+          </a:p>
+        </p:txBody>
+      </p:sp>
+      <p:sp>
+        <p:nvSpPr>
+          <p:cNvPr id="2" name="제목 1">
+            <a:extLst>
+              <a:ext uri="{FF2B5EF4-FFF2-40B4-BE49-F238E27FC236}">
+                <a16:creationId xmlns:a16="http://schemas.microsoft.com/office/drawing/2014/main" id="{AEA60A11-56AC-A912-8687-E96828AB49E2}"/>
+              </a:ext>
+            </a:extLst>
+          </p:cNvPr>
+          <p:cNvSpPr>
+            <a:spLocks noGrp="1"/>
+          </p:cNvSpPr>
+          <p:nvPr>
+            <p:ph type="title"/>
+          </p:nvPr>
+        </p:nvSpPr>
+        <p:spPr/>
+        <p:txBody>
+          <a:bodyPr>
+            <a:normAutofit/>
+          </a:bodyPr>
+          <a:lstStyle/>
+          <a:p>
+            <a:r>
+              <a:rPr lang="ko-KR" altLang="en-US" dirty="0"/>
+              <a:t>진행 상황</a:t>
+            </a:r>
+          </a:p>
+        </p:txBody>
+      </p:sp>
+      <p:sp>
+        <p:nvSpPr>
+          <p:cNvPr id="4" name="슬라이드 번호 개체 틀 3">
+            <a:extLst>
+              <a:ext uri="{FF2B5EF4-FFF2-40B4-BE49-F238E27FC236}">
+                <a16:creationId xmlns:a16="http://schemas.microsoft.com/office/drawing/2014/main" id="{D5E67F79-FBF8-5F90-4229-38F2DC90589D}"/>
+              </a:ext>
+            </a:extLst>
+          </p:cNvPr>
+          <p:cNvSpPr>
+            <a:spLocks noGrp="1"/>
+          </p:cNvSpPr>
+          <p:nvPr>
+            <p:ph type="sldNum" sz="quarter" idx="12"/>
+          </p:nvPr>
+        </p:nvSpPr>
+        <p:spPr/>
+        <p:txBody>
+          <a:bodyPr/>
+          <a:lstStyle/>
+          <a:p>
+            <a:fld id="{E694CC86-33DA-4CBD-A678-F7DD024C14A4}" type="slidenum">
+              <a:rPr lang="ko-KR" altLang="en-US" smtClean="0"/>
+              <a:pPr/>
+              <a:t>7</a:t>
+            </a:fld>
+            <a:r>
+              <a:rPr lang="en-US" altLang="ko-KR" dirty="0"/>
+              <a:t>/8</a:t>
+            </a:r>
+            <a:endParaRPr lang="ko-KR" altLang="en-US" dirty="0"/>
+          </a:p>
+        </p:txBody>
+      </p:sp>
+      <p:sp>
+        <p:nvSpPr>
+          <p:cNvPr id="6" name="사각형: 둥근 모서리 5">
+            <a:extLst>
+              <a:ext uri="{FF2B5EF4-FFF2-40B4-BE49-F238E27FC236}">
+                <a16:creationId xmlns:a16="http://schemas.microsoft.com/office/drawing/2014/main" id="{662FEB88-578D-304F-FCA5-66C39121643A}"/>
+              </a:ext>
+            </a:extLst>
+          </p:cNvPr>
+          <p:cNvSpPr/>
+          <p:nvPr/>
+        </p:nvSpPr>
+        <p:spPr>
+          <a:xfrm>
+            <a:off x="609600" y="5840557"/>
+            <a:ext cx="10972800" cy="192595"/>
+          </a:xfrm>
+          <a:prstGeom prst="roundRect">
+            <a:avLst>
+              <a:gd name="adj" fmla="val 50000"/>
+            </a:avLst>
+          </a:prstGeom>
+          <a:noFill/>
+          <a:ln w="28575">
+            <a:solidFill>
+              <a:schemeClr val="tx1"/>
+            </a:solidFill>
+          </a:ln>
+        </p:spPr>
+        <p:style>
+          <a:lnRef idx="2">
+            <a:schemeClr val="accent1">
+              <a:shade val="15000"/>
+            </a:schemeClr>
+          </a:lnRef>
+          <a:fillRef idx="1">
+            <a:schemeClr val="accent1"/>
+          </a:fillRef>
+          <a:effectRef idx="0">
+            <a:schemeClr val="accent1"/>
+          </a:effectRef>
+          <a:fontRef idx="minor">
+            <a:schemeClr val="lt1"/>
+          </a:fontRef>
+        </p:style>
+        <p:txBody>
+          <a:bodyPr rtlCol="0" anchor="ctr"/>
+          <a:lstStyle/>
+          <a:p>
+            <a:pPr algn="ctr"/>
+            <a:endParaRPr lang="ko-KR" altLang="en-US"/>
+          </a:p>
+        </p:txBody>
+      </p:sp>
+      <p:sp>
+        <p:nvSpPr>
+          <p:cNvPr id="7" name="TextBox 6">
+            <a:extLst>
+              <a:ext uri="{FF2B5EF4-FFF2-40B4-BE49-F238E27FC236}">
+                <a16:creationId xmlns:a16="http://schemas.microsoft.com/office/drawing/2014/main" id="{E7AA9D58-5839-BFDB-F5D0-ADC7078BBC84}"/>
+              </a:ext>
+            </a:extLst>
+          </p:cNvPr>
+          <p:cNvSpPr txBox="1"/>
+          <p:nvPr/>
+        </p:nvSpPr>
+        <p:spPr>
+          <a:xfrm>
+            <a:off x="122870" y="5782967"/>
+            <a:ext cx="468398" cy="307777"/>
+          </a:xfrm>
+          <a:prstGeom prst="rect">
+            <a:avLst/>
+          </a:prstGeom>
+          <a:noFill/>
+        </p:spPr>
+        <p:txBody>
+          <a:bodyPr wrap="none" rtlCol="0">
+            <a:spAutoFit/>
+          </a:bodyPr>
+          <a:lstStyle/>
+          <a:p>
+            <a:pPr algn="ctr"/>
+            <a:r>
+              <a:rPr lang="en-US" altLang="ko-KR" sz="1400" dirty="0">
+                <a:latin typeface="HY견고딕" panose="02030600000101010101" pitchFamily="18" charset="-127"/>
+                <a:ea typeface="HY견고딕" panose="02030600000101010101" pitchFamily="18" charset="-127"/>
+              </a:rPr>
+              <a:t>0%</a:t>
+            </a:r>
+            <a:endParaRPr lang="ko-KR" altLang="en-US" sz="1400" dirty="0">
+              <a:latin typeface="HY견고딕" panose="02030600000101010101" pitchFamily="18" charset="-127"/>
+              <a:ea typeface="HY견고딕" panose="02030600000101010101" pitchFamily="18" charset="-127"/>
+            </a:endParaRPr>
+          </a:p>
+        </p:txBody>
+      </p:sp>
+      <p:sp>
+        <p:nvSpPr>
+          <p:cNvPr id="8" name="TextBox 7">
+            <a:extLst>
+              <a:ext uri="{FF2B5EF4-FFF2-40B4-BE49-F238E27FC236}">
+                <a16:creationId xmlns:a16="http://schemas.microsoft.com/office/drawing/2014/main" id="{C2FDA33F-39CC-2EC2-43EA-FE60BE3F9638}"/>
+              </a:ext>
+            </a:extLst>
+          </p:cNvPr>
+          <p:cNvSpPr txBox="1"/>
+          <p:nvPr/>
+        </p:nvSpPr>
+        <p:spPr>
+          <a:xfrm>
+            <a:off x="11548533" y="5782967"/>
+            <a:ext cx="692818" cy="307777"/>
+          </a:xfrm>
+          <a:prstGeom prst="rect">
+            <a:avLst/>
+          </a:prstGeom>
+          <a:noFill/>
+        </p:spPr>
+        <p:txBody>
+          <a:bodyPr wrap="none" rtlCol="0">
+            <a:spAutoFit/>
+          </a:bodyPr>
+          <a:lstStyle/>
+          <a:p>
+            <a:pPr algn="ctr"/>
+            <a:r>
+              <a:rPr lang="en-US" altLang="ko-KR" sz="1400" dirty="0">
+                <a:latin typeface="HY견고딕" panose="02030600000101010101" pitchFamily="18" charset="-127"/>
+                <a:ea typeface="HY견고딕" panose="02030600000101010101" pitchFamily="18" charset="-127"/>
+              </a:rPr>
+              <a:t>100%</a:t>
+            </a:r>
+            <a:endParaRPr lang="ko-KR" altLang="en-US" sz="1400" dirty="0">
+              <a:latin typeface="HY견고딕" panose="02030600000101010101" pitchFamily="18" charset="-127"/>
+              <a:ea typeface="HY견고딕" panose="02030600000101010101" pitchFamily="18" charset="-127"/>
+            </a:endParaRPr>
+          </a:p>
+        </p:txBody>
+      </p:sp>
+      <p:sp>
+        <p:nvSpPr>
+          <p:cNvPr id="17" name="TextBox 16">
+            <a:extLst>
+              <a:ext uri="{FF2B5EF4-FFF2-40B4-BE49-F238E27FC236}">
+                <a16:creationId xmlns:a16="http://schemas.microsoft.com/office/drawing/2014/main" id="{A7C55E8B-4935-1F2B-2D22-69087A9C1511}"/>
+              </a:ext>
+            </a:extLst>
+          </p:cNvPr>
+          <p:cNvSpPr txBox="1"/>
+          <p:nvPr/>
+        </p:nvSpPr>
+        <p:spPr>
+          <a:xfrm>
+            <a:off x="5861800" y="5815121"/>
+            <a:ext cx="468398" cy="246221"/>
+          </a:xfrm>
+          <a:prstGeom prst="rect">
+            <a:avLst/>
+          </a:prstGeom>
+          <a:noFill/>
+        </p:spPr>
+        <p:txBody>
+          <a:bodyPr wrap="none" rtlCol="0">
+            <a:spAutoFit/>
+          </a:bodyPr>
+          <a:lstStyle/>
+          <a:p>
+            <a:pPr algn="ctr"/>
+            <a:r>
+              <a:rPr lang="en-US" altLang="ko-KR" sz="1000" dirty="0">
+                <a:latin typeface="HY견고딕" panose="02030600000101010101" pitchFamily="18" charset="-127"/>
+                <a:ea typeface="HY견고딕" panose="02030600000101010101" pitchFamily="18" charset="-127"/>
+              </a:rPr>
+              <a:t>90%</a:t>
+            </a:r>
+            <a:endParaRPr lang="ko-KR" altLang="en-US" sz="1000" dirty="0">
+              <a:latin typeface="HY견고딕" panose="02030600000101010101" pitchFamily="18" charset="-127"/>
+              <a:ea typeface="HY견고딕" panose="02030600000101010101" pitchFamily="18" charset="-127"/>
+            </a:endParaRPr>
+          </a:p>
+        </p:txBody>
+      </p:sp>
+      <p:sp>
+        <p:nvSpPr>
+          <p:cNvPr id="13" name="내용 개체 틀 12">
+            <a:extLst>
+              <a:ext uri="{FF2B5EF4-FFF2-40B4-BE49-F238E27FC236}">
+                <a16:creationId xmlns:a16="http://schemas.microsoft.com/office/drawing/2014/main" id="{8EC9A4AF-A59C-36E7-9BC1-8EB9665C73E4}"/>
+              </a:ext>
+            </a:extLst>
+          </p:cNvPr>
+          <p:cNvSpPr>
+            <a:spLocks noGrp="1"/>
+          </p:cNvSpPr>
+          <p:nvPr>
+            <p:ph idx="1"/>
+          </p:nvPr>
+        </p:nvSpPr>
+        <p:spPr>
+          <a:xfrm>
+            <a:off x="838199" y="1029195"/>
+            <a:ext cx="7689210" cy="1523505"/>
+          </a:xfrm>
+        </p:spPr>
+        <p:txBody>
+          <a:bodyPr>
+            <a:normAutofit/>
+          </a:bodyPr>
+          <a:lstStyle/>
+          <a:p>
+            <a:r>
+              <a:rPr lang="en-US" altLang="ko-KR" dirty="0"/>
+              <a:t>WQFS </a:t>
+            </a:r>
+            <a:r>
+              <a:rPr lang="ko-KR" altLang="en-US" dirty="0"/>
+              <a:t>서브 타입</a:t>
+            </a:r>
+            <a:endParaRPr lang="en-US" altLang="ko-KR" dirty="0"/>
+          </a:p>
+          <a:p>
+            <a:pPr lvl="1"/>
+            <a:r>
+              <a:rPr lang="ko-KR" altLang="en-US" dirty="0"/>
+              <a:t>개발자가 정의 타입</a:t>
+            </a:r>
+            <a:r>
+              <a:rPr lang="en-US" altLang="ko-KR" dirty="0"/>
+              <a:t>, </a:t>
+            </a:r>
+            <a:r>
+              <a:rPr lang="ko-KR" altLang="en-US" dirty="0"/>
+              <a:t>필요 시 개발자가 원하는 형태로 </a:t>
+            </a:r>
+            <a:br>
+              <a:rPr lang="en-US" altLang="ko-KR" dirty="0"/>
+            </a:br>
+            <a:r>
+              <a:rPr lang="ko-KR" altLang="en-US" dirty="0"/>
+              <a:t>사용 가능</a:t>
+            </a:r>
+            <a:endParaRPr lang="en-US" altLang="ko-KR" dirty="0"/>
+          </a:p>
+          <a:p>
+            <a:pPr lvl="1"/>
+            <a:r>
+              <a:rPr lang="ko-KR" altLang="en-US" dirty="0"/>
+              <a:t>예</a:t>
+            </a:r>
+            <a:r>
+              <a:rPr lang="en-US" altLang="ko-KR" dirty="0"/>
+              <a:t>) </a:t>
+            </a:r>
+            <a:r>
+              <a:rPr lang="en-US" altLang="ko-KR" dirty="0" err="1"/>
+              <a:t>LevelGenerator</a:t>
+            </a:r>
+            <a:r>
+              <a:rPr lang="ko-KR" altLang="en-US" dirty="0"/>
+              <a:t>에서 이벤트 위치 동기화</a:t>
+            </a:r>
+            <a:endParaRPr lang="en-US" altLang="ko-KR" dirty="0"/>
+          </a:p>
+        </p:txBody>
+      </p:sp>
+      <p:pic>
+        <p:nvPicPr>
+          <p:cNvPr id="5" name="그림 4" descr="의류, 패브릭, 패턴, 예술이(가) 표시된 사진&#10;&#10;AI 생성 콘텐츠는 정확하지 않을 수 있습니다.">
+            <a:extLst>
+              <a:ext uri="{FF2B5EF4-FFF2-40B4-BE49-F238E27FC236}">
+                <a16:creationId xmlns:a16="http://schemas.microsoft.com/office/drawing/2014/main" id="{2874F83F-E254-0185-F0CC-42DC8CB4C7B1}"/>
+              </a:ext>
+            </a:extLst>
+          </p:cNvPr>
+          <p:cNvPicPr>
+            <a:picLocks noChangeAspect="1"/>
+          </p:cNvPicPr>
+          <p:nvPr/>
+        </p:nvPicPr>
+        <p:blipFill>
+          <a:blip r:embed="rId2">
+            <a:extLst>
+              <a:ext uri="{28A0092B-C50C-407E-A947-70E740481C1C}">
+                <a14:useLocalDpi xmlns:a14="http://schemas.microsoft.com/office/drawing/2010/main" val="0"/>
+              </a:ext>
+            </a:extLst>
+          </a:blip>
+          <a:srcRect l="16300" r="17101" b="7875"/>
+          <a:stretch>
+            <a:fillRect/>
+          </a:stretch>
+        </p:blipFill>
+        <p:spPr>
+          <a:xfrm>
+            <a:off x="7962901" y="2006169"/>
+            <a:ext cx="3563862" cy="3718810"/>
+          </a:xfrm>
+          <a:prstGeom prst="rect">
+            <a:avLst/>
+          </a:prstGeom>
+        </p:spPr>
+      </p:pic>
+      <p:sp>
+        <p:nvSpPr>
+          <p:cNvPr id="10" name="직사각형 9">
+            <a:extLst>
+              <a:ext uri="{FF2B5EF4-FFF2-40B4-BE49-F238E27FC236}">
+                <a16:creationId xmlns:a16="http://schemas.microsoft.com/office/drawing/2014/main" id="{5753063B-7040-45FC-25B6-62E97BE4A854}"/>
+              </a:ext>
+            </a:extLst>
+          </p:cNvPr>
+          <p:cNvSpPr/>
+          <p:nvPr/>
+        </p:nvSpPr>
+        <p:spPr>
+          <a:xfrm>
+            <a:off x="11004242" y="2024122"/>
+            <a:ext cx="210136" cy="293409"/>
+          </a:xfrm>
+          <a:prstGeom prst="rect">
+            <a:avLst/>
+          </a:prstGeom>
+          <a:noFill/>
+          <a:ln w="28575">
+            <a:solidFill>
+              <a:srgbClr val="FF0000"/>
+            </a:solidFill>
+          </a:ln>
+        </p:spPr>
+        <p:style>
+          <a:lnRef idx="2">
+            <a:schemeClr val="accent1">
+              <a:shade val="15000"/>
+            </a:schemeClr>
+          </a:lnRef>
+          <a:fillRef idx="1">
+            <a:schemeClr val="accent1"/>
+          </a:fillRef>
+          <a:effectRef idx="0">
+            <a:schemeClr val="accent1"/>
+          </a:effectRef>
+          <a:fontRef idx="minor">
+            <a:schemeClr val="lt1"/>
+          </a:fontRef>
+        </p:style>
+        <p:txBody>
+          <a:bodyPr rtlCol="0" anchor="ctr"/>
+          <a:lstStyle/>
+          <a:p>
+            <a:pPr algn="ctr"/>
+            <a:endParaRPr lang="ko-KR" altLang="en-US"/>
+          </a:p>
+        </p:txBody>
+      </p:sp>
+      <p:sp>
+        <p:nvSpPr>
+          <p:cNvPr id="11" name="직사각형 10">
+            <a:extLst>
+              <a:ext uri="{FF2B5EF4-FFF2-40B4-BE49-F238E27FC236}">
+                <a16:creationId xmlns:a16="http://schemas.microsoft.com/office/drawing/2014/main" id="{D03851CC-38EF-57A8-F905-6A72442466C6}"/>
+              </a:ext>
+            </a:extLst>
+          </p:cNvPr>
+          <p:cNvSpPr/>
+          <p:nvPr/>
+        </p:nvSpPr>
+        <p:spPr>
+          <a:xfrm>
+            <a:off x="10251313" y="3281114"/>
+            <a:ext cx="210136" cy="293409"/>
+          </a:xfrm>
+          <a:prstGeom prst="rect">
+            <a:avLst/>
+          </a:prstGeom>
+          <a:noFill/>
+          <a:ln w="28575">
+            <a:solidFill>
+              <a:srgbClr val="FF0000"/>
+            </a:solidFill>
+          </a:ln>
+        </p:spPr>
+        <p:style>
+          <a:lnRef idx="2">
+            <a:schemeClr val="accent1">
+              <a:shade val="15000"/>
+            </a:schemeClr>
+          </a:lnRef>
+          <a:fillRef idx="1">
+            <a:schemeClr val="accent1"/>
+          </a:fillRef>
+          <a:effectRef idx="0">
+            <a:schemeClr val="accent1"/>
+          </a:effectRef>
+          <a:fontRef idx="minor">
+            <a:schemeClr val="lt1"/>
+          </a:fontRef>
+        </p:style>
+        <p:txBody>
+          <a:bodyPr rtlCol="0" anchor="ctr"/>
+          <a:lstStyle/>
+          <a:p>
+            <a:pPr algn="ctr"/>
+            <a:endParaRPr lang="ko-KR" altLang="en-US"/>
+          </a:p>
+        </p:txBody>
+      </p:sp>
+      <p:sp>
+        <p:nvSpPr>
+          <p:cNvPr id="15" name="직사각형 14">
+            <a:extLst>
+              <a:ext uri="{FF2B5EF4-FFF2-40B4-BE49-F238E27FC236}">
+                <a16:creationId xmlns:a16="http://schemas.microsoft.com/office/drawing/2014/main" id="{73CBFDD7-B238-0455-CCD9-150BDF45BB1F}"/>
+              </a:ext>
+            </a:extLst>
+          </p:cNvPr>
+          <p:cNvSpPr/>
+          <p:nvPr/>
+        </p:nvSpPr>
+        <p:spPr>
+          <a:xfrm>
+            <a:off x="9499442" y="5118986"/>
+            <a:ext cx="210136" cy="293409"/>
+          </a:xfrm>
+          <a:prstGeom prst="rect">
+            <a:avLst/>
+          </a:prstGeom>
+          <a:noFill/>
+          <a:ln w="28575">
+            <a:solidFill>
+              <a:srgbClr val="FF0000"/>
+            </a:solidFill>
+          </a:ln>
+        </p:spPr>
+        <p:style>
+          <a:lnRef idx="2">
+            <a:schemeClr val="accent1">
+              <a:shade val="15000"/>
+            </a:schemeClr>
+          </a:lnRef>
+          <a:fillRef idx="1">
+            <a:schemeClr val="accent1"/>
+          </a:fillRef>
+          <a:effectRef idx="0">
+            <a:schemeClr val="accent1"/>
+          </a:effectRef>
+          <a:fontRef idx="minor">
+            <a:schemeClr val="lt1"/>
+          </a:fontRef>
+        </p:style>
+        <p:txBody>
+          <a:bodyPr rtlCol="0" anchor="ctr"/>
+          <a:lstStyle/>
+          <a:p>
+            <a:pPr algn="ctr"/>
+            <a:endParaRPr lang="ko-KR" altLang="en-US"/>
+          </a:p>
+        </p:txBody>
+      </p:sp>
+      <p:pic>
+        <p:nvPicPr>
+          <p:cNvPr id="20" name="그림 19" descr="텍스트, 스크린샷이(가) 표시된 사진&#10;&#10;AI 생성 콘텐츠는 정확하지 않을 수 있습니다.">
+            <a:extLst>
+              <a:ext uri="{FF2B5EF4-FFF2-40B4-BE49-F238E27FC236}">
+                <a16:creationId xmlns:a16="http://schemas.microsoft.com/office/drawing/2014/main" id="{A8FDD430-1B69-5A27-20D3-A26B6FC83865}"/>
+              </a:ext>
+            </a:extLst>
+          </p:cNvPr>
+          <p:cNvPicPr>
+            <a:picLocks noChangeAspect="1"/>
+          </p:cNvPicPr>
+          <p:nvPr/>
+        </p:nvPicPr>
+        <p:blipFill>
+          <a:blip r:embed="rId3">
+            <a:extLst>
+              <a:ext uri="{28A0092B-C50C-407E-A947-70E740481C1C}">
+                <a14:useLocalDpi xmlns:a14="http://schemas.microsoft.com/office/drawing/2010/main" val="0"/>
+              </a:ext>
+            </a:extLst>
+          </a:blip>
+          <a:stretch>
+            <a:fillRect/>
+          </a:stretch>
+        </p:blipFill>
+        <p:spPr>
+          <a:xfrm>
+            <a:off x="710156" y="3375561"/>
+            <a:ext cx="5331416" cy="2381968"/>
+          </a:xfrm>
+          <a:prstGeom prst="rect">
+            <a:avLst/>
+          </a:prstGeom>
+        </p:spPr>
+      </p:pic>
+      <p:pic>
+        <p:nvPicPr>
+          <p:cNvPr id="22" name="그림 21" descr="텍스트, 스크린샷, 폰트, 번호이(가) 표시된 사진&#10;&#10;AI 생성 콘텐츠는 정확하지 않을 수 있습니다.">
+            <a:extLst>
+              <a:ext uri="{FF2B5EF4-FFF2-40B4-BE49-F238E27FC236}">
+                <a16:creationId xmlns:a16="http://schemas.microsoft.com/office/drawing/2014/main" id="{F9BFE86B-DABF-6FA3-B3BE-85020356B93B}"/>
+              </a:ext>
+            </a:extLst>
+          </p:cNvPr>
+          <p:cNvPicPr>
+            <a:picLocks noChangeAspect="1"/>
+          </p:cNvPicPr>
+          <p:nvPr/>
+        </p:nvPicPr>
+        <p:blipFill>
+          <a:blip r:embed="rId4">
+            <a:extLst>
+              <a:ext uri="{28A0092B-C50C-407E-A947-70E740481C1C}">
+                <a14:useLocalDpi xmlns:a14="http://schemas.microsoft.com/office/drawing/2010/main" val="0"/>
+              </a:ext>
+            </a:extLst>
+          </a:blip>
+          <a:stretch>
+            <a:fillRect/>
+          </a:stretch>
+        </p:blipFill>
+        <p:spPr>
+          <a:xfrm>
+            <a:off x="710156" y="2438910"/>
+            <a:ext cx="4765415" cy="935675"/>
+          </a:xfrm>
+          <a:prstGeom prst="rect">
+            <a:avLst/>
+          </a:prstGeom>
+        </p:spPr>
+      </p:pic>
+      <p:sp>
+        <p:nvSpPr>
+          <p:cNvPr id="23" name="직사각형 22">
+            <a:extLst>
+              <a:ext uri="{FF2B5EF4-FFF2-40B4-BE49-F238E27FC236}">
+                <a16:creationId xmlns:a16="http://schemas.microsoft.com/office/drawing/2014/main" id="{AC3E693B-9C03-29CD-96FA-8617DA4EAE10}"/>
+              </a:ext>
+            </a:extLst>
+          </p:cNvPr>
+          <p:cNvSpPr/>
+          <p:nvPr/>
+        </p:nvSpPr>
+        <p:spPr>
+          <a:xfrm>
+            <a:off x="4743450" y="2438910"/>
+            <a:ext cx="1118350" cy="196818"/>
+          </a:xfrm>
+          <a:prstGeom prst="rect">
+            <a:avLst/>
+          </a:prstGeom>
+          <a:solidFill>
+            <a:srgbClr val="1E1E1E"/>
+          </a:solidFill>
+          <a:ln>
+            <a:noFill/>
+          </a:ln>
+        </p:spPr>
+        <p:style>
+          <a:lnRef idx="2">
+            <a:schemeClr val="accent1">
+              <a:shade val="15000"/>
+            </a:schemeClr>
+          </a:lnRef>
+          <a:fillRef idx="1">
+            <a:schemeClr val="accent1"/>
+          </a:fillRef>
+          <a:effectRef idx="0">
+            <a:schemeClr val="accent1"/>
+          </a:effectRef>
+          <a:fontRef idx="minor">
+            <a:schemeClr val="lt1"/>
+          </a:fontRef>
+        </p:style>
+        <p:txBody>
+          <a:bodyPr rtlCol="0" anchor="b"/>
+          <a:lstStyle/>
+          <a:p>
+            <a:pPr algn="ctr"/>
+            <a:r>
+              <a:rPr lang="en-US" altLang="ko-KR" dirty="0"/>
+              <a:t>. . .</a:t>
+            </a:r>
+            <a:endParaRPr lang="ko-KR" altLang="en-US" dirty="0"/>
+          </a:p>
+        </p:txBody>
+      </p:sp>
+      <p:sp>
+        <p:nvSpPr>
+          <p:cNvPr id="24" name="직사각형 23">
+            <a:extLst>
+              <a:ext uri="{FF2B5EF4-FFF2-40B4-BE49-F238E27FC236}">
+                <a16:creationId xmlns:a16="http://schemas.microsoft.com/office/drawing/2014/main" id="{8B9EDEB0-AD31-2721-77AA-577BDED438D9}"/>
+              </a:ext>
+            </a:extLst>
+          </p:cNvPr>
+          <p:cNvSpPr/>
+          <p:nvPr/>
+        </p:nvSpPr>
+        <p:spPr>
+          <a:xfrm>
+            <a:off x="5129679" y="2620009"/>
+            <a:ext cx="732121" cy="196818"/>
+          </a:xfrm>
+          <a:prstGeom prst="rect">
+            <a:avLst/>
+          </a:prstGeom>
+          <a:solidFill>
+            <a:srgbClr val="1E1E1E"/>
+          </a:solidFill>
+          <a:ln>
+            <a:noFill/>
+          </a:ln>
+        </p:spPr>
+        <p:style>
+          <a:lnRef idx="2">
+            <a:schemeClr val="accent1">
+              <a:shade val="15000"/>
+            </a:schemeClr>
+          </a:lnRef>
+          <a:fillRef idx="1">
+            <a:schemeClr val="accent1"/>
+          </a:fillRef>
+          <a:effectRef idx="0">
+            <a:schemeClr val="accent1"/>
+          </a:effectRef>
+          <a:fontRef idx="minor">
+            <a:schemeClr val="lt1"/>
+          </a:fontRef>
+        </p:style>
+        <p:txBody>
+          <a:bodyPr rtlCol="0" anchor="b"/>
+          <a:lstStyle/>
+          <a:p>
+            <a:pPr algn="ctr"/>
+            <a:r>
+              <a:rPr lang="en-US" altLang="ko-KR" dirty="0"/>
+              <a:t>. . .</a:t>
+            </a:r>
+            <a:endParaRPr lang="ko-KR" altLang="en-US" dirty="0"/>
+          </a:p>
+        </p:txBody>
+      </p:sp>
+      <p:sp>
+        <p:nvSpPr>
+          <p:cNvPr id="25" name="직사각형 24">
+            <a:extLst>
+              <a:ext uri="{FF2B5EF4-FFF2-40B4-BE49-F238E27FC236}">
+                <a16:creationId xmlns:a16="http://schemas.microsoft.com/office/drawing/2014/main" id="{9C95E6AC-98B2-5997-70B6-A462F764037E}"/>
+              </a:ext>
+            </a:extLst>
+          </p:cNvPr>
+          <p:cNvSpPr/>
+          <p:nvPr/>
+        </p:nvSpPr>
+        <p:spPr>
+          <a:xfrm>
+            <a:off x="5165270" y="3178255"/>
+            <a:ext cx="696529" cy="196818"/>
+          </a:xfrm>
+          <a:prstGeom prst="rect">
+            <a:avLst/>
+          </a:prstGeom>
+          <a:solidFill>
+            <a:srgbClr val="1E1E1E"/>
+          </a:solidFill>
+          <a:ln>
+            <a:noFill/>
+          </a:ln>
+        </p:spPr>
+        <p:style>
+          <a:lnRef idx="2">
+            <a:schemeClr val="accent1">
+              <a:shade val="15000"/>
+            </a:schemeClr>
+          </a:lnRef>
+          <a:fillRef idx="1">
+            <a:schemeClr val="accent1"/>
+          </a:fillRef>
+          <a:effectRef idx="0">
+            <a:schemeClr val="accent1"/>
+          </a:effectRef>
+          <a:fontRef idx="minor">
+            <a:schemeClr val="lt1"/>
+          </a:fontRef>
+        </p:style>
+        <p:txBody>
+          <a:bodyPr rtlCol="0" anchor="b"/>
+          <a:lstStyle/>
+          <a:p>
+            <a:pPr algn="ctr"/>
+            <a:r>
+              <a:rPr lang="en-US" altLang="ko-KR" dirty="0"/>
+              <a:t>. . .</a:t>
+            </a:r>
+            <a:endParaRPr lang="ko-KR" altLang="en-US" dirty="0"/>
+          </a:p>
+        </p:txBody>
+      </p:sp>
+      <p:sp>
+        <p:nvSpPr>
+          <p:cNvPr id="26" name="직사각형 25">
+            <a:extLst>
+              <a:ext uri="{FF2B5EF4-FFF2-40B4-BE49-F238E27FC236}">
+                <a16:creationId xmlns:a16="http://schemas.microsoft.com/office/drawing/2014/main" id="{4F1EFE6F-FDC7-0509-B17C-FC6F970A0051}"/>
+              </a:ext>
+            </a:extLst>
+          </p:cNvPr>
+          <p:cNvSpPr/>
+          <p:nvPr/>
+        </p:nvSpPr>
+        <p:spPr>
+          <a:xfrm>
+            <a:off x="5302626" y="2808338"/>
+            <a:ext cx="559174" cy="196818"/>
+          </a:xfrm>
+          <a:prstGeom prst="rect">
+            <a:avLst/>
+          </a:prstGeom>
+          <a:solidFill>
+            <a:srgbClr val="1E1E1E"/>
+          </a:solidFill>
+          <a:ln>
+            <a:noFill/>
+          </a:ln>
+        </p:spPr>
+        <p:style>
+          <a:lnRef idx="2">
+            <a:schemeClr val="accent1">
+              <a:shade val="15000"/>
+            </a:schemeClr>
+          </a:lnRef>
+          <a:fillRef idx="1">
+            <a:schemeClr val="accent1"/>
+          </a:fillRef>
+          <a:effectRef idx="0">
+            <a:schemeClr val="accent1"/>
+          </a:effectRef>
+          <a:fontRef idx="minor">
+            <a:schemeClr val="lt1"/>
+          </a:fontRef>
+        </p:style>
+        <p:txBody>
+          <a:bodyPr rtlCol="0" anchor="b"/>
+          <a:lstStyle/>
+          <a:p>
+            <a:pPr algn="ctr"/>
+            <a:r>
+              <a:rPr lang="en-US" altLang="ko-KR" dirty="0"/>
+              <a:t>. . .</a:t>
+            </a:r>
+            <a:endParaRPr lang="ko-KR" altLang="en-US" dirty="0"/>
+          </a:p>
+        </p:txBody>
+      </p:sp>
+      <p:sp>
+        <p:nvSpPr>
+          <p:cNvPr id="27" name="직사각형 26">
+            <a:extLst>
+              <a:ext uri="{FF2B5EF4-FFF2-40B4-BE49-F238E27FC236}">
+                <a16:creationId xmlns:a16="http://schemas.microsoft.com/office/drawing/2014/main" id="{DE4D020F-E699-BC39-2E51-E4C13E0B1B63}"/>
+              </a:ext>
+            </a:extLst>
+          </p:cNvPr>
+          <p:cNvSpPr/>
+          <p:nvPr/>
+        </p:nvSpPr>
+        <p:spPr>
+          <a:xfrm>
+            <a:off x="5328556" y="3005156"/>
+            <a:ext cx="533243" cy="196818"/>
+          </a:xfrm>
+          <a:prstGeom prst="rect">
+            <a:avLst/>
+          </a:prstGeom>
+          <a:solidFill>
+            <a:srgbClr val="1E1E1E"/>
+          </a:solidFill>
+          <a:ln>
+            <a:noFill/>
+          </a:ln>
+        </p:spPr>
+        <p:style>
+          <a:lnRef idx="2">
+            <a:schemeClr val="accent1">
+              <a:shade val="15000"/>
+            </a:schemeClr>
+          </a:lnRef>
+          <a:fillRef idx="1">
+            <a:schemeClr val="accent1"/>
+          </a:fillRef>
+          <a:effectRef idx="0">
+            <a:schemeClr val="accent1"/>
+          </a:effectRef>
+          <a:fontRef idx="minor">
+            <a:schemeClr val="lt1"/>
+          </a:fontRef>
+        </p:style>
+        <p:txBody>
+          <a:bodyPr rtlCol="0" anchor="b"/>
+          <a:lstStyle/>
+          <a:p>
+            <a:pPr algn="ctr"/>
+            <a:r>
+              <a:rPr lang="en-US" altLang="ko-KR" dirty="0"/>
+              <a:t>. . .</a:t>
+            </a:r>
+            <a:endParaRPr lang="ko-KR" altLang="en-US" dirty="0"/>
+          </a:p>
+        </p:txBody>
+      </p:sp>
+      <p:sp>
+        <p:nvSpPr>
+          <p:cNvPr id="28" name="직사각형 27">
+            <a:extLst>
+              <a:ext uri="{FF2B5EF4-FFF2-40B4-BE49-F238E27FC236}">
+                <a16:creationId xmlns:a16="http://schemas.microsoft.com/office/drawing/2014/main" id="{4A86DC2B-0F56-9B46-F24D-BA078DA8BD64}"/>
+              </a:ext>
+            </a:extLst>
+          </p:cNvPr>
+          <p:cNvSpPr/>
+          <p:nvPr/>
+        </p:nvSpPr>
+        <p:spPr>
+          <a:xfrm>
+            <a:off x="3621074" y="2441630"/>
+            <a:ext cx="158990" cy="178379"/>
+          </a:xfrm>
+          <a:prstGeom prst="rect">
+            <a:avLst/>
+          </a:prstGeom>
+          <a:noFill/>
+          <a:ln w="28575">
+            <a:solidFill>
+              <a:srgbClr val="FF0000"/>
+            </a:solidFill>
+          </a:ln>
+        </p:spPr>
+        <p:style>
+          <a:lnRef idx="2">
+            <a:schemeClr val="accent1">
+              <a:shade val="15000"/>
+            </a:schemeClr>
+          </a:lnRef>
+          <a:fillRef idx="1">
+            <a:schemeClr val="accent1"/>
+          </a:fillRef>
+          <a:effectRef idx="0">
+            <a:schemeClr val="accent1"/>
+          </a:effectRef>
+          <a:fontRef idx="minor">
+            <a:schemeClr val="lt1"/>
+          </a:fontRef>
+        </p:style>
+        <p:txBody>
+          <a:bodyPr rtlCol="0" anchor="ctr"/>
+          <a:lstStyle/>
+          <a:p>
+            <a:pPr algn="ctr"/>
+            <a:endParaRPr lang="ko-KR" altLang="en-US"/>
+          </a:p>
+        </p:txBody>
+      </p:sp>
+      <p:sp>
+        <p:nvSpPr>
+          <p:cNvPr id="29" name="직사각형 28">
+            <a:extLst>
+              <a:ext uri="{FF2B5EF4-FFF2-40B4-BE49-F238E27FC236}">
+                <a16:creationId xmlns:a16="http://schemas.microsoft.com/office/drawing/2014/main" id="{9A45B5AD-96B9-723A-172F-71FE4D438D95}"/>
+              </a:ext>
+            </a:extLst>
+          </p:cNvPr>
+          <p:cNvSpPr/>
+          <p:nvPr/>
+        </p:nvSpPr>
+        <p:spPr>
+          <a:xfrm>
+            <a:off x="3837711" y="2620009"/>
+            <a:ext cx="158990" cy="178379"/>
+          </a:xfrm>
+          <a:prstGeom prst="rect">
+            <a:avLst/>
+          </a:prstGeom>
+          <a:noFill/>
+          <a:ln w="28575">
+            <a:solidFill>
+              <a:srgbClr val="FF0000"/>
+            </a:solidFill>
+          </a:ln>
+        </p:spPr>
+        <p:style>
+          <a:lnRef idx="2">
+            <a:schemeClr val="accent1">
+              <a:shade val="15000"/>
+            </a:schemeClr>
+          </a:lnRef>
+          <a:fillRef idx="1">
+            <a:schemeClr val="accent1"/>
+          </a:fillRef>
+          <a:effectRef idx="0">
+            <a:schemeClr val="accent1"/>
+          </a:effectRef>
+          <a:fontRef idx="minor">
+            <a:schemeClr val="lt1"/>
+          </a:fontRef>
+        </p:style>
+        <p:txBody>
+          <a:bodyPr rtlCol="0" anchor="ctr"/>
+          <a:lstStyle/>
+          <a:p>
+            <a:pPr algn="ctr"/>
+            <a:endParaRPr lang="ko-KR" altLang="en-US"/>
+          </a:p>
+        </p:txBody>
+      </p:sp>
+      <p:sp>
+        <p:nvSpPr>
+          <p:cNvPr id="30" name="직사각형 29">
+            <a:extLst>
+              <a:ext uri="{FF2B5EF4-FFF2-40B4-BE49-F238E27FC236}">
+                <a16:creationId xmlns:a16="http://schemas.microsoft.com/office/drawing/2014/main" id="{94BC2420-49CF-ADEA-C0C6-EA3AA4135539}"/>
+              </a:ext>
+            </a:extLst>
+          </p:cNvPr>
+          <p:cNvSpPr/>
+          <p:nvPr/>
+        </p:nvSpPr>
+        <p:spPr>
+          <a:xfrm>
+            <a:off x="3996701" y="2798388"/>
+            <a:ext cx="158990" cy="178379"/>
+          </a:xfrm>
+          <a:prstGeom prst="rect">
+            <a:avLst/>
+          </a:prstGeom>
+          <a:noFill/>
+          <a:ln w="28575">
+            <a:solidFill>
+              <a:srgbClr val="FF0000"/>
+            </a:solidFill>
+          </a:ln>
+        </p:spPr>
+        <p:style>
+          <a:lnRef idx="2">
+            <a:schemeClr val="accent1">
+              <a:shade val="15000"/>
+            </a:schemeClr>
+          </a:lnRef>
+          <a:fillRef idx="1">
+            <a:schemeClr val="accent1"/>
+          </a:fillRef>
+          <a:effectRef idx="0">
+            <a:schemeClr val="accent1"/>
+          </a:effectRef>
+          <a:fontRef idx="minor">
+            <a:schemeClr val="lt1"/>
+          </a:fontRef>
+        </p:style>
+        <p:txBody>
+          <a:bodyPr rtlCol="0" anchor="ctr"/>
+          <a:lstStyle/>
+          <a:p>
+            <a:pPr algn="ctr"/>
+            <a:endParaRPr lang="ko-KR" altLang="en-US"/>
+          </a:p>
+        </p:txBody>
+      </p:sp>
+      <p:sp>
+        <p:nvSpPr>
+          <p:cNvPr id="31" name="직사각형 30">
+            <a:extLst>
+              <a:ext uri="{FF2B5EF4-FFF2-40B4-BE49-F238E27FC236}">
+                <a16:creationId xmlns:a16="http://schemas.microsoft.com/office/drawing/2014/main" id="{641E401F-7FAE-E171-59DF-366A55482258}"/>
+              </a:ext>
+            </a:extLst>
+          </p:cNvPr>
+          <p:cNvSpPr/>
+          <p:nvPr/>
+        </p:nvSpPr>
+        <p:spPr>
+          <a:xfrm>
+            <a:off x="4060579" y="2997296"/>
+            <a:ext cx="158990" cy="178379"/>
+          </a:xfrm>
+          <a:prstGeom prst="rect">
+            <a:avLst/>
+          </a:prstGeom>
+          <a:noFill/>
+          <a:ln w="28575">
+            <a:solidFill>
+              <a:srgbClr val="FF0000"/>
+            </a:solidFill>
+          </a:ln>
+        </p:spPr>
+        <p:style>
+          <a:lnRef idx="2">
+            <a:schemeClr val="accent1">
+              <a:shade val="15000"/>
+            </a:schemeClr>
+          </a:lnRef>
+          <a:fillRef idx="1">
+            <a:schemeClr val="accent1"/>
+          </a:fillRef>
+          <a:effectRef idx="0">
+            <a:schemeClr val="accent1"/>
+          </a:effectRef>
+          <a:fontRef idx="minor">
+            <a:schemeClr val="lt1"/>
+          </a:fontRef>
+        </p:style>
+        <p:txBody>
+          <a:bodyPr rtlCol="0" anchor="ctr"/>
+          <a:lstStyle/>
+          <a:p>
+            <a:pPr algn="ctr"/>
+            <a:endParaRPr lang="ko-KR" altLang="en-US"/>
+          </a:p>
+        </p:txBody>
+      </p:sp>
+      <p:sp>
+        <p:nvSpPr>
+          <p:cNvPr id="33" name="직사각형 32">
+            <a:extLst>
+              <a:ext uri="{FF2B5EF4-FFF2-40B4-BE49-F238E27FC236}">
+                <a16:creationId xmlns:a16="http://schemas.microsoft.com/office/drawing/2014/main" id="{2465F2E0-A68B-9C3A-7444-1C891BC087CB}"/>
+              </a:ext>
+            </a:extLst>
+          </p:cNvPr>
+          <p:cNvSpPr/>
+          <p:nvPr/>
+        </p:nvSpPr>
+        <p:spPr>
+          <a:xfrm>
+            <a:off x="3837251" y="3175675"/>
+            <a:ext cx="158990" cy="178379"/>
+          </a:xfrm>
+          <a:prstGeom prst="rect">
+            <a:avLst/>
+          </a:prstGeom>
+          <a:noFill/>
+          <a:ln w="28575">
+            <a:solidFill>
+              <a:srgbClr val="FF0000"/>
+            </a:solidFill>
+          </a:ln>
+        </p:spPr>
+        <p:style>
+          <a:lnRef idx="2">
+            <a:schemeClr val="accent1">
+              <a:shade val="15000"/>
+            </a:schemeClr>
+          </a:lnRef>
+          <a:fillRef idx="1">
+            <a:schemeClr val="accent1"/>
+          </a:fillRef>
+          <a:effectRef idx="0">
+            <a:schemeClr val="accent1"/>
+          </a:effectRef>
+          <a:fontRef idx="minor">
+            <a:schemeClr val="lt1"/>
+          </a:fontRef>
+        </p:style>
+        <p:txBody>
+          <a:bodyPr rtlCol="0" anchor="ctr"/>
+          <a:lstStyle/>
+          <a:p>
+            <a:pPr algn="ctr"/>
+            <a:endParaRPr lang="ko-KR" altLang="en-US"/>
+          </a:p>
+        </p:txBody>
+      </p:sp>
+    </p:spTree>
+    <p:extLst>
+      <p:ext uri="{BB962C8B-B14F-4D97-AF65-F5344CB8AC3E}">
+        <p14:creationId xmlns:p14="http://schemas.microsoft.com/office/powerpoint/2010/main" val="1768823865"/>
+      </p:ext>
+    </p:extLst>
+  </p:cSld>
+  <p:clrMapOvr>
+    <a:masterClrMapping/>
+  </p:clrMapOvr>
+</p:sld>
+</file>
+
+<file path=ppt/slides/slide8.xml><?xml version="1.0" encoding="utf-8"?>
+<p:sld xmlns:a="http://schemas.openxmlformats.org/drawingml/2006/main" xmlns:r="http://schemas.openxmlformats.org/officeDocument/2006/relationships" xmlns:p="http://schemas.openxmlformats.org/presentationml/2006/main">
+  <p:cSld>
+    <p:spTree>
+      <p:nvGrpSpPr>
         <p:cNvPr id="1" name=""/>
         <p:cNvGrpSpPr/>
         <p:nvPr/>
@@ -7027,15 +8658,7 @@
             </a:r>
             <a:r>
               <a:rPr lang="ko-KR" altLang="en-US" dirty="0"/>
-              <a:t>아이템</a:t>
-            </a:r>
-            <a:r>
-              <a:rPr lang="en-US" altLang="ko-KR" dirty="0"/>
-              <a:t>,</a:t>
-            </a:r>
-            <a:r>
-              <a:rPr lang="ko-KR" altLang="en-US" dirty="0"/>
-              <a:t> 기타 </a:t>
+              <a:t>기타 </a:t>
             </a:r>
             <a:r>
               <a:rPr lang="en-US" altLang="ko-KR" dirty="0"/>
@@ -7043,7 +8666,7 @@
             </a:r>
             <a:r>
               <a:rPr lang="ko-KR" altLang="en-US" dirty="0"/>
-              <a:t>요소 등의 </a:t>
+              <a:t>요소나 오브젝트 등의 </a:t>
             </a:r>
             <a:r>
               <a:rPr lang="ko-KR" altLang="en-US" dirty="0" err="1"/>
@@ -7069,40 +8692,6 @@
               <a:t>사운드 이펙트 찾기</a:t>
             </a:r>
             <a:endParaRPr lang="en-US" altLang="ko-KR" dirty="0"/>
-          </a:p>
-          <a:p>
-            <a:r>
-              <a:rPr lang="ko-KR" altLang="en-US" dirty="0"/>
-              <a:t>이벤트 발생 및 지속 시간 동적화 </a:t>
-            </a:r>
-            <a:r>
-              <a:rPr lang="en-US" altLang="ko-KR" dirty="0"/>
-              <a:t>(</a:t>
-            </a:r>
-            <a:r>
-              <a:rPr lang="ko-KR" altLang="en-US" dirty="0"/>
-              <a:t>예</a:t>
-            </a:r>
-            <a:r>
-              <a:rPr lang="en-US" altLang="ko-KR" dirty="0"/>
-              <a:t>: 5</a:t>
-            </a:r>
-            <a:r>
-              <a:rPr lang="ko-KR" altLang="en-US" dirty="0"/>
-              <a:t>초 </a:t>
-            </a:r>
-            <a:r>
-              <a:rPr lang="en-US" altLang="ko-KR" dirty="0"/>
-              <a:t>-&gt; 3~5</a:t>
-            </a:r>
-            <a:r>
-              <a:rPr lang="ko-KR" altLang="en-US" dirty="0"/>
-              <a:t>초</a:t>
-            </a:r>
-            <a:r>
-              <a:rPr lang="en-US" altLang="ko-KR" dirty="0"/>
-              <a:t>)</a:t>
-            </a:r>
           </a:p>
         </p:txBody>
       </p:sp>
@@ -7130,7 +8719,7 @@
             <a:fld id="{E694CC86-33DA-4CBD-A678-F7DD024C14A4}" type="slidenum">
               <a:rPr lang="ko-KR" altLang="en-US" smtClean="0"/>
               <a:pPr/>
-              <a:t>6</a:t>
+              <a:t>8</a:t>
             </a:fld>
             <a:r>
               <a:rPr lang="en-US" altLang="ko-KR" dirty="0"/>

--- a/WQFS.pptx
+++ b/WQFS.pptx
@@ -5345,8 +5345,8 @@
         </p:nvSpPr>
         <p:spPr>
           <a:xfrm>
-            <a:off x="609599" y="5840557"/>
-            <a:ext cx="8098972" cy="192595"/>
+            <a:off x="609598" y="5840557"/>
+            <a:ext cx="10639779" cy="192595"/>
           </a:xfrm>
           <a:prstGeom prst="roundRect">
             <a:avLst>
@@ -5796,10 +5796,10 @@
       </p:grpSpPr>
       <p:sp>
         <p:nvSpPr>
-          <p:cNvPr id="12" name="사각형: 둥근 모서리 11">
-            <a:extLst>
-              <a:ext uri="{FF2B5EF4-FFF2-40B4-BE49-F238E27FC236}">
-                <a16:creationId xmlns:a16="http://schemas.microsoft.com/office/drawing/2014/main" id="{9645A4DD-3C05-732D-DAE9-4C189A20F998}"/>
+          <p:cNvPr id="9" name="사각형: 둥근 모서리 8">
+            <a:extLst>
+              <a:ext uri="{FF2B5EF4-FFF2-40B4-BE49-F238E27FC236}">
+                <a16:creationId xmlns:a16="http://schemas.microsoft.com/office/drawing/2014/main" id="{74FE7B53-3BF7-9CC8-3F40-EBB6EE5D3076}"/>
               </a:ext>
             </a:extLst>
           </p:cNvPr>
@@ -5808,8 +5808,8 @@
         </p:nvSpPr>
         <p:spPr>
           <a:xfrm>
-            <a:off x="609599" y="5840557"/>
-            <a:ext cx="8098972" cy="192595"/>
+            <a:off x="609598" y="5840557"/>
+            <a:ext cx="10639779" cy="192595"/>
           </a:xfrm>
           <a:prstGeom prst="roundRect">
             <a:avLst>
@@ -6223,10 +6223,10 @@
       </p:grpSpPr>
       <p:sp>
         <p:nvSpPr>
-          <p:cNvPr id="12" name="사각형: 둥근 모서리 11">
-            <a:extLst>
-              <a:ext uri="{FF2B5EF4-FFF2-40B4-BE49-F238E27FC236}">
-                <a16:creationId xmlns:a16="http://schemas.microsoft.com/office/drawing/2014/main" id="{094F1060-FAEB-3BE8-4FB4-6C1A4327ECB9}"/>
+          <p:cNvPr id="3" name="사각형: 둥근 모서리 2">
+            <a:extLst>
+              <a:ext uri="{FF2B5EF4-FFF2-40B4-BE49-F238E27FC236}">
+                <a16:creationId xmlns:a16="http://schemas.microsoft.com/office/drawing/2014/main" id="{3630560B-7D41-4AA7-61E2-8DD0E06DDC73}"/>
               </a:ext>
             </a:extLst>
           </p:cNvPr>
@@ -6235,8 +6235,8 @@
         </p:nvSpPr>
         <p:spPr>
           <a:xfrm>
-            <a:off x="609599" y="5840557"/>
-            <a:ext cx="8098972" cy="192595"/>
+            <a:off x="609598" y="5840557"/>
+            <a:ext cx="10639779" cy="192595"/>
           </a:xfrm>
           <a:prstGeom prst="roundRect">
             <a:avLst>
@@ -6683,10 +6683,10 @@
       </p:grpSpPr>
       <p:sp>
         <p:nvSpPr>
-          <p:cNvPr id="12" name="사각형: 둥근 모서리 11">
-            <a:extLst>
-              <a:ext uri="{FF2B5EF4-FFF2-40B4-BE49-F238E27FC236}">
-                <a16:creationId xmlns:a16="http://schemas.microsoft.com/office/drawing/2014/main" id="{71B81CF5-CB22-CE8C-F148-70B4F7E5AA5D}"/>
+          <p:cNvPr id="3" name="사각형: 둥근 모서리 2">
+            <a:extLst>
+              <a:ext uri="{FF2B5EF4-FFF2-40B4-BE49-F238E27FC236}">
+                <a16:creationId xmlns:a16="http://schemas.microsoft.com/office/drawing/2014/main" id="{9CB2E316-8C26-1CDD-7F0A-A52E3B41B82C}"/>
               </a:ext>
             </a:extLst>
           </p:cNvPr>
@@ -6695,8 +6695,8 @@
         </p:nvSpPr>
         <p:spPr>
           <a:xfrm>
-            <a:off x="609599" y="5840557"/>
-            <a:ext cx="8098972" cy="192595"/>
+            <a:off x="609598" y="5840557"/>
+            <a:ext cx="10639779" cy="192595"/>
           </a:xfrm>
           <a:prstGeom prst="roundRect">
             <a:avLst>
@@ -7144,10 +7144,10 @@
       </p:grpSpPr>
       <p:sp>
         <p:nvSpPr>
-          <p:cNvPr id="12" name="사각형: 둥근 모서리 11">
-            <a:extLst>
-              <a:ext uri="{FF2B5EF4-FFF2-40B4-BE49-F238E27FC236}">
-                <a16:creationId xmlns:a16="http://schemas.microsoft.com/office/drawing/2014/main" id="{951D0ED2-5940-77D0-3C16-A7F3572ABA69}"/>
+          <p:cNvPr id="3" name="사각형: 둥근 모서리 2">
+            <a:extLst>
+              <a:ext uri="{FF2B5EF4-FFF2-40B4-BE49-F238E27FC236}">
+                <a16:creationId xmlns:a16="http://schemas.microsoft.com/office/drawing/2014/main" id="{796D7E0D-C9AD-731C-FD07-491FA1C851EC}"/>
               </a:ext>
             </a:extLst>
           </p:cNvPr>
@@ -7156,8 +7156,8 @@
         </p:nvSpPr>
         <p:spPr>
           <a:xfrm>
-            <a:off x="609599" y="5840557"/>
-            <a:ext cx="8098972" cy="192595"/>
+            <a:off x="609598" y="5840557"/>
+            <a:ext cx="10639779" cy="192595"/>
           </a:xfrm>
           <a:prstGeom prst="roundRect">
             <a:avLst>
@@ -7748,10 +7748,10 @@
       </p:grpSpPr>
       <p:sp>
         <p:nvSpPr>
-          <p:cNvPr id="12" name="사각형: 둥근 모서리 11">
-            <a:extLst>
-              <a:ext uri="{FF2B5EF4-FFF2-40B4-BE49-F238E27FC236}">
-                <a16:creationId xmlns:a16="http://schemas.microsoft.com/office/drawing/2014/main" id="{BF8712C1-C73F-973D-1BC5-1DE8BDB953DA}"/>
+          <p:cNvPr id="3" name="사각형: 둥근 모서리 2">
+            <a:extLst>
+              <a:ext uri="{FF2B5EF4-FFF2-40B4-BE49-F238E27FC236}">
+                <a16:creationId xmlns:a16="http://schemas.microsoft.com/office/drawing/2014/main" id="{08BBE52B-21E1-11E8-5C3E-61A7FD5D9D7B}"/>
               </a:ext>
             </a:extLst>
           </p:cNvPr>
@@ -7760,8 +7760,8 @@
         </p:nvSpPr>
         <p:spPr>
           <a:xfrm>
-            <a:off x="609599" y="5840557"/>
-            <a:ext cx="8098972" cy="192595"/>
+            <a:off x="609598" y="5840557"/>
+            <a:ext cx="10639779" cy="192595"/>
           </a:xfrm>
           <a:prstGeom prst="roundRect">
             <a:avLst>
@@ -9066,6 +9066,246 @@
           </a:prstGeom>
         </p:spPr>
       </p:pic>
+      <p:sp>
+        <p:nvSpPr>
+          <p:cNvPr id="3" name="사각형: 둥근 모서리 2">
+            <a:extLst>
+              <a:ext uri="{FF2B5EF4-FFF2-40B4-BE49-F238E27FC236}">
+                <a16:creationId xmlns:a16="http://schemas.microsoft.com/office/drawing/2014/main" id="{BCB1B92F-F4F2-36FA-252B-833C6DEA449A}"/>
+              </a:ext>
+            </a:extLst>
+          </p:cNvPr>
+          <p:cNvSpPr/>
+          <p:nvPr/>
+        </p:nvSpPr>
+        <p:spPr>
+          <a:xfrm>
+            <a:off x="609598" y="5840557"/>
+            <a:ext cx="10639779" cy="192595"/>
+          </a:xfrm>
+          <a:prstGeom prst="roundRect">
+            <a:avLst>
+              <a:gd name="adj" fmla="val 50000"/>
+            </a:avLst>
+          </a:prstGeom>
+          <a:solidFill>
+            <a:schemeClr val="accent6">
+              <a:lumMod val="60000"/>
+              <a:lumOff val="40000"/>
+            </a:schemeClr>
+          </a:solidFill>
+          <a:ln w="28575">
+            <a:noFill/>
+          </a:ln>
+        </p:spPr>
+        <p:style>
+          <a:lnRef idx="2">
+            <a:schemeClr val="accent1">
+              <a:shade val="15000"/>
+            </a:schemeClr>
+          </a:lnRef>
+          <a:fillRef idx="1">
+            <a:schemeClr val="accent1"/>
+          </a:fillRef>
+          <a:effectRef idx="0">
+            <a:schemeClr val="accent1"/>
+          </a:effectRef>
+          <a:fontRef idx="minor">
+            <a:schemeClr val="lt1"/>
+          </a:fontRef>
+        </p:style>
+        <p:txBody>
+          <a:bodyPr rtlCol="0" anchor="ctr"/>
+          <a:lstStyle/>
+          <a:p>
+            <a:pPr algn="ctr"/>
+            <a:endParaRPr lang="ko-KR" altLang="en-US"/>
+          </a:p>
+        </p:txBody>
+      </p:sp>
+      <p:sp>
+        <p:nvSpPr>
+          <p:cNvPr id="5" name="사각형: 둥근 모서리 4">
+            <a:extLst>
+              <a:ext uri="{FF2B5EF4-FFF2-40B4-BE49-F238E27FC236}">
+                <a16:creationId xmlns:a16="http://schemas.microsoft.com/office/drawing/2014/main" id="{F141B880-8917-4066-FC95-588899D1DC48}"/>
+              </a:ext>
+            </a:extLst>
+          </p:cNvPr>
+          <p:cNvSpPr/>
+          <p:nvPr/>
+        </p:nvSpPr>
+        <p:spPr>
+          <a:xfrm>
+            <a:off x="609600" y="5840557"/>
+            <a:ext cx="10972800" cy="192595"/>
+          </a:xfrm>
+          <a:prstGeom prst="roundRect">
+            <a:avLst>
+              <a:gd name="adj" fmla="val 50000"/>
+            </a:avLst>
+          </a:prstGeom>
+          <a:noFill/>
+          <a:ln w="28575">
+            <a:solidFill>
+              <a:schemeClr val="tx1"/>
+            </a:solidFill>
+          </a:ln>
+        </p:spPr>
+        <p:style>
+          <a:lnRef idx="2">
+            <a:schemeClr val="accent1">
+              <a:shade val="15000"/>
+            </a:schemeClr>
+          </a:lnRef>
+          <a:fillRef idx="1">
+            <a:schemeClr val="accent1"/>
+          </a:fillRef>
+          <a:effectRef idx="0">
+            <a:schemeClr val="accent1"/>
+          </a:effectRef>
+          <a:fontRef idx="minor">
+            <a:schemeClr val="lt1"/>
+          </a:fontRef>
+        </p:style>
+        <p:txBody>
+          <a:bodyPr rtlCol="0" anchor="ctr"/>
+          <a:lstStyle/>
+          <a:p>
+            <a:pPr algn="ctr"/>
+            <a:endParaRPr lang="ko-KR" altLang="en-US"/>
+          </a:p>
+        </p:txBody>
+      </p:sp>
+      <p:sp>
+        <p:nvSpPr>
+          <p:cNvPr id="7" name="TextBox 6">
+            <a:extLst>
+              <a:ext uri="{FF2B5EF4-FFF2-40B4-BE49-F238E27FC236}">
+                <a16:creationId xmlns:a16="http://schemas.microsoft.com/office/drawing/2014/main" id="{913F23DD-A840-1F89-D29F-4461ECD651E3}"/>
+              </a:ext>
+            </a:extLst>
+          </p:cNvPr>
+          <p:cNvSpPr txBox="1"/>
+          <p:nvPr/>
+        </p:nvSpPr>
+        <p:spPr>
+          <a:xfrm>
+            <a:off x="122870" y="5782967"/>
+            <a:ext cx="468398" cy="307777"/>
+          </a:xfrm>
+          <a:prstGeom prst="rect">
+            <a:avLst/>
+          </a:prstGeom>
+          <a:noFill/>
+        </p:spPr>
+        <p:txBody>
+          <a:bodyPr wrap="none" rtlCol="0">
+            <a:spAutoFit/>
+          </a:bodyPr>
+          <a:lstStyle/>
+          <a:p>
+            <a:pPr algn="ctr"/>
+            <a:r>
+              <a:rPr lang="en-US" altLang="ko-KR" sz="1400" dirty="0">
+                <a:latin typeface="HY견고딕" panose="02030600000101010101" pitchFamily="18" charset="-127"/>
+                <a:ea typeface="HY견고딕" panose="02030600000101010101" pitchFamily="18" charset="-127"/>
+              </a:rPr>
+              <a:t>0%</a:t>
+            </a:r>
+            <a:endParaRPr lang="ko-KR" altLang="en-US" sz="1400" dirty="0">
+              <a:latin typeface="HY견고딕" panose="02030600000101010101" pitchFamily="18" charset="-127"/>
+              <a:ea typeface="HY견고딕" panose="02030600000101010101" pitchFamily="18" charset="-127"/>
+            </a:endParaRPr>
+          </a:p>
+        </p:txBody>
+      </p:sp>
+      <p:sp>
+        <p:nvSpPr>
+          <p:cNvPr id="8" name="TextBox 7">
+            <a:extLst>
+              <a:ext uri="{FF2B5EF4-FFF2-40B4-BE49-F238E27FC236}">
+                <a16:creationId xmlns:a16="http://schemas.microsoft.com/office/drawing/2014/main" id="{70B250C4-B0BA-7B16-C60E-6FE79E3C451E}"/>
+              </a:ext>
+            </a:extLst>
+          </p:cNvPr>
+          <p:cNvSpPr txBox="1"/>
+          <p:nvPr/>
+        </p:nvSpPr>
+        <p:spPr>
+          <a:xfrm>
+            <a:off x="11548533" y="5782967"/>
+            <a:ext cx="692818" cy="307777"/>
+          </a:xfrm>
+          <a:prstGeom prst="rect">
+            <a:avLst/>
+          </a:prstGeom>
+          <a:noFill/>
+        </p:spPr>
+        <p:txBody>
+          <a:bodyPr wrap="none" rtlCol="0">
+            <a:spAutoFit/>
+          </a:bodyPr>
+          <a:lstStyle/>
+          <a:p>
+            <a:pPr algn="ctr"/>
+            <a:r>
+              <a:rPr lang="en-US" altLang="ko-KR" sz="1400" dirty="0">
+                <a:latin typeface="HY견고딕" panose="02030600000101010101" pitchFamily="18" charset="-127"/>
+                <a:ea typeface="HY견고딕" panose="02030600000101010101" pitchFamily="18" charset="-127"/>
+              </a:rPr>
+              <a:t>100%</a:t>
+            </a:r>
+            <a:endParaRPr lang="ko-KR" altLang="en-US" sz="1400" dirty="0">
+              <a:latin typeface="HY견고딕" panose="02030600000101010101" pitchFamily="18" charset="-127"/>
+              <a:ea typeface="HY견고딕" panose="02030600000101010101" pitchFamily="18" charset="-127"/>
+            </a:endParaRPr>
+          </a:p>
+        </p:txBody>
+      </p:sp>
+      <p:sp>
+        <p:nvSpPr>
+          <p:cNvPr id="9" name="TextBox 8">
+            <a:extLst>
+              <a:ext uri="{FF2B5EF4-FFF2-40B4-BE49-F238E27FC236}">
+                <a16:creationId xmlns:a16="http://schemas.microsoft.com/office/drawing/2014/main" id="{EAB9F574-88ED-1D2D-1D5A-CE8825E22124}"/>
+              </a:ext>
+            </a:extLst>
+          </p:cNvPr>
+          <p:cNvSpPr txBox="1"/>
+          <p:nvPr/>
+        </p:nvSpPr>
+        <p:spPr>
+          <a:xfrm>
+            <a:off x="5861800" y="5815121"/>
+            <a:ext cx="468398" cy="246221"/>
+          </a:xfrm>
+          <a:prstGeom prst="rect">
+            <a:avLst/>
+          </a:prstGeom>
+          <a:noFill/>
+        </p:spPr>
+        <p:txBody>
+          <a:bodyPr wrap="none" rtlCol="0">
+            <a:spAutoFit/>
+          </a:bodyPr>
+          <a:lstStyle/>
+          <a:p>
+            <a:pPr algn="ctr"/>
+            <a:r>
+              <a:rPr lang="en-US" altLang="ko-KR" sz="1000" dirty="0">
+                <a:latin typeface="HY견고딕" panose="02030600000101010101" pitchFamily="18" charset="-127"/>
+                <a:ea typeface="HY견고딕" panose="02030600000101010101" pitchFamily="18" charset="-127"/>
+              </a:rPr>
+              <a:t>90%</a:t>
+            </a:r>
+            <a:endParaRPr lang="ko-KR" altLang="en-US" sz="1000" dirty="0">
+              <a:latin typeface="HY견고딕" panose="02030600000101010101" pitchFamily="18" charset="-127"/>
+              <a:ea typeface="HY견고딕" panose="02030600000101010101" pitchFamily="18" charset="-127"/>
+            </a:endParaRPr>
+          </a:p>
+        </p:txBody>
+      </p:sp>
     </p:spTree>
     <p:extLst>
       <p:ext uri="{BB962C8B-B14F-4D97-AF65-F5344CB8AC3E}">
@@ -9194,6 +9434,246 @@
           </a:prstGeom>
         </p:spPr>
       </p:pic>
+      <p:sp>
+        <p:nvSpPr>
+          <p:cNvPr id="3" name="사각형: 둥근 모서리 2">
+            <a:extLst>
+              <a:ext uri="{FF2B5EF4-FFF2-40B4-BE49-F238E27FC236}">
+                <a16:creationId xmlns:a16="http://schemas.microsoft.com/office/drawing/2014/main" id="{16E047CD-AF6C-9FB1-A9E6-4AAF9E4E5B44}"/>
+              </a:ext>
+            </a:extLst>
+          </p:cNvPr>
+          <p:cNvSpPr/>
+          <p:nvPr/>
+        </p:nvSpPr>
+        <p:spPr>
+          <a:xfrm>
+            <a:off x="609598" y="5840557"/>
+            <a:ext cx="10639779" cy="192595"/>
+          </a:xfrm>
+          <a:prstGeom prst="roundRect">
+            <a:avLst>
+              <a:gd name="adj" fmla="val 50000"/>
+            </a:avLst>
+          </a:prstGeom>
+          <a:solidFill>
+            <a:schemeClr val="accent6">
+              <a:lumMod val="60000"/>
+              <a:lumOff val="40000"/>
+            </a:schemeClr>
+          </a:solidFill>
+          <a:ln w="28575">
+            <a:noFill/>
+          </a:ln>
+        </p:spPr>
+        <p:style>
+          <a:lnRef idx="2">
+            <a:schemeClr val="accent1">
+              <a:shade val="15000"/>
+            </a:schemeClr>
+          </a:lnRef>
+          <a:fillRef idx="1">
+            <a:schemeClr val="accent1"/>
+          </a:fillRef>
+          <a:effectRef idx="0">
+            <a:schemeClr val="accent1"/>
+          </a:effectRef>
+          <a:fontRef idx="minor">
+            <a:schemeClr val="lt1"/>
+          </a:fontRef>
+        </p:style>
+        <p:txBody>
+          <a:bodyPr rtlCol="0" anchor="ctr"/>
+          <a:lstStyle/>
+          <a:p>
+            <a:pPr algn="ctr"/>
+            <a:endParaRPr lang="ko-KR" altLang="en-US"/>
+          </a:p>
+        </p:txBody>
+      </p:sp>
+      <p:sp>
+        <p:nvSpPr>
+          <p:cNvPr id="5" name="사각형: 둥근 모서리 4">
+            <a:extLst>
+              <a:ext uri="{FF2B5EF4-FFF2-40B4-BE49-F238E27FC236}">
+                <a16:creationId xmlns:a16="http://schemas.microsoft.com/office/drawing/2014/main" id="{FF1B997B-6B17-5D3F-A0C7-18F7113B3FA2}"/>
+              </a:ext>
+            </a:extLst>
+          </p:cNvPr>
+          <p:cNvSpPr/>
+          <p:nvPr/>
+        </p:nvSpPr>
+        <p:spPr>
+          <a:xfrm>
+            <a:off x="609600" y="5840557"/>
+            <a:ext cx="10972800" cy="192595"/>
+          </a:xfrm>
+          <a:prstGeom prst="roundRect">
+            <a:avLst>
+              <a:gd name="adj" fmla="val 50000"/>
+            </a:avLst>
+          </a:prstGeom>
+          <a:noFill/>
+          <a:ln w="28575">
+            <a:solidFill>
+              <a:schemeClr val="tx1"/>
+            </a:solidFill>
+          </a:ln>
+        </p:spPr>
+        <p:style>
+          <a:lnRef idx="2">
+            <a:schemeClr val="accent1">
+              <a:shade val="15000"/>
+            </a:schemeClr>
+          </a:lnRef>
+          <a:fillRef idx="1">
+            <a:schemeClr val="accent1"/>
+          </a:fillRef>
+          <a:effectRef idx="0">
+            <a:schemeClr val="accent1"/>
+          </a:effectRef>
+          <a:fontRef idx="minor">
+            <a:schemeClr val="lt1"/>
+          </a:fontRef>
+        </p:style>
+        <p:txBody>
+          <a:bodyPr rtlCol="0" anchor="ctr"/>
+          <a:lstStyle/>
+          <a:p>
+            <a:pPr algn="ctr"/>
+            <a:endParaRPr lang="ko-KR" altLang="en-US"/>
+          </a:p>
+        </p:txBody>
+      </p:sp>
+      <p:sp>
+        <p:nvSpPr>
+          <p:cNvPr id="7" name="TextBox 6">
+            <a:extLst>
+              <a:ext uri="{FF2B5EF4-FFF2-40B4-BE49-F238E27FC236}">
+                <a16:creationId xmlns:a16="http://schemas.microsoft.com/office/drawing/2014/main" id="{4F461D76-1A07-1BA2-10DC-FF6228B50190}"/>
+              </a:ext>
+            </a:extLst>
+          </p:cNvPr>
+          <p:cNvSpPr txBox="1"/>
+          <p:nvPr/>
+        </p:nvSpPr>
+        <p:spPr>
+          <a:xfrm>
+            <a:off x="122870" y="5782967"/>
+            <a:ext cx="468398" cy="307777"/>
+          </a:xfrm>
+          <a:prstGeom prst="rect">
+            <a:avLst/>
+          </a:prstGeom>
+          <a:noFill/>
+        </p:spPr>
+        <p:txBody>
+          <a:bodyPr wrap="none" rtlCol="0">
+            <a:spAutoFit/>
+          </a:bodyPr>
+          <a:lstStyle/>
+          <a:p>
+            <a:pPr algn="ctr"/>
+            <a:r>
+              <a:rPr lang="en-US" altLang="ko-KR" sz="1400" dirty="0">
+                <a:latin typeface="HY견고딕" panose="02030600000101010101" pitchFamily="18" charset="-127"/>
+                <a:ea typeface="HY견고딕" panose="02030600000101010101" pitchFamily="18" charset="-127"/>
+              </a:rPr>
+              <a:t>0%</a:t>
+            </a:r>
+            <a:endParaRPr lang="ko-KR" altLang="en-US" sz="1400" dirty="0">
+              <a:latin typeface="HY견고딕" panose="02030600000101010101" pitchFamily="18" charset="-127"/>
+              <a:ea typeface="HY견고딕" panose="02030600000101010101" pitchFamily="18" charset="-127"/>
+            </a:endParaRPr>
+          </a:p>
+        </p:txBody>
+      </p:sp>
+      <p:sp>
+        <p:nvSpPr>
+          <p:cNvPr id="8" name="TextBox 7">
+            <a:extLst>
+              <a:ext uri="{FF2B5EF4-FFF2-40B4-BE49-F238E27FC236}">
+                <a16:creationId xmlns:a16="http://schemas.microsoft.com/office/drawing/2014/main" id="{DF81C966-7F0C-8A76-BF57-AFAF7197E029}"/>
+              </a:ext>
+            </a:extLst>
+          </p:cNvPr>
+          <p:cNvSpPr txBox="1"/>
+          <p:nvPr/>
+        </p:nvSpPr>
+        <p:spPr>
+          <a:xfrm>
+            <a:off x="11548533" y="5782967"/>
+            <a:ext cx="692818" cy="307777"/>
+          </a:xfrm>
+          <a:prstGeom prst="rect">
+            <a:avLst/>
+          </a:prstGeom>
+          <a:noFill/>
+        </p:spPr>
+        <p:txBody>
+          <a:bodyPr wrap="none" rtlCol="0">
+            <a:spAutoFit/>
+          </a:bodyPr>
+          <a:lstStyle/>
+          <a:p>
+            <a:pPr algn="ctr"/>
+            <a:r>
+              <a:rPr lang="en-US" altLang="ko-KR" sz="1400" dirty="0">
+                <a:latin typeface="HY견고딕" panose="02030600000101010101" pitchFamily="18" charset="-127"/>
+                <a:ea typeface="HY견고딕" panose="02030600000101010101" pitchFamily="18" charset="-127"/>
+              </a:rPr>
+              <a:t>100%</a:t>
+            </a:r>
+            <a:endParaRPr lang="ko-KR" altLang="en-US" sz="1400" dirty="0">
+              <a:latin typeface="HY견고딕" panose="02030600000101010101" pitchFamily="18" charset="-127"/>
+              <a:ea typeface="HY견고딕" panose="02030600000101010101" pitchFamily="18" charset="-127"/>
+            </a:endParaRPr>
+          </a:p>
+        </p:txBody>
+      </p:sp>
+      <p:sp>
+        <p:nvSpPr>
+          <p:cNvPr id="9" name="TextBox 8">
+            <a:extLst>
+              <a:ext uri="{FF2B5EF4-FFF2-40B4-BE49-F238E27FC236}">
+                <a16:creationId xmlns:a16="http://schemas.microsoft.com/office/drawing/2014/main" id="{5813F195-26C8-B9D5-7B2C-CE6D08840086}"/>
+              </a:ext>
+            </a:extLst>
+          </p:cNvPr>
+          <p:cNvSpPr txBox="1"/>
+          <p:nvPr/>
+        </p:nvSpPr>
+        <p:spPr>
+          <a:xfrm>
+            <a:off x="5861800" y="5815121"/>
+            <a:ext cx="468398" cy="246221"/>
+          </a:xfrm>
+          <a:prstGeom prst="rect">
+            <a:avLst/>
+          </a:prstGeom>
+          <a:noFill/>
+        </p:spPr>
+        <p:txBody>
+          <a:bodyPr wrap="none" rtlCol="0">
+            <a:spAutoFit/>
+          </a:bodyPr>
+          <a:lstStyle/>
+          <a:p>
+            <a:pPr algn="ctr"/>
+            <a:r>
+              <a:rPr lang="en-US" altLang="ko-KR" sz="1000" dirty="0">
+                <a:latin typeface="HY견고딕" panose="02030600000101010101" pitchFamily="18" charset="-127"/>
+                <a:ea typeface="HY견고딕" panose="02030600000101010101" pitchFamily="18" charset="-127"/>
+              </a:rPr>
+              <a:t>90%</a:t>
+            </a:r>
+            <a:endParaRPr lang="ko-KR" altLang="en-US" sz="1000" dirty="0">
+              <a:latin typeface="HY견고딕" panose="02030600000101010101" pitchFamily="18" charset="-127"/>
+              <a:ea typeface="HY견고딕" panose="02030600000101010101" pitchFamily="18" charset="-127"/>
+            </a:endParaRPr>
+          </a:p>
+        </p:txBody>
+      </p:sp>
     </p:spTree>
     <p:extLst>
       <p:ext uri="{BB962C8B-B14F-4D97-AF65-F5344CB8AC3E}">

--- a/WQFS.pptx
+++ b/WQFS.pptx
@@ -5,7 +5,7 @@
     <p:sldMasterId id="2147483648" r:id="rId1"/>
   </p:sldMasterIdLst>
   <p:notesMasterIdLst>
-    <p:notesMasterId r:id="rId12"/>
+    <p:notesMasterId r:id="rId14"/>
   </p:notesMasterIdLst>
   <p:sldIdLst>
     <p:sldId id="256" r:id="rId2"/>
@@ -16,8 +16,10 @@
     <p:sldId id="271" r:id="rId7"/>
     <p:sldId id="272" r:id="rId8"/>
     <p:sldId id="273" r:id="rId9"/>
-    <p:sldId id="274" r:id="rId10"/>
-    <p:sldId id="263" r:id="rId11"/>
+    <p:sldId id="276" r:id="rId10"/>
+    <p:sldId id="274" r:id="rId11"/>
+    <p:sldId id="277" r:id="rId12"/>
+    <p:sldId id="263" r:id="rId13"/>
   </p:sldIdLst>
   <p:sldSz cx="12192000" cy="6858000"/>
   <p:notesSz cx="7105650" cy="10236200"/>
@@ -5133,7 +5135,7 @@
           <p:cNvPr id="2" name="제목 1">
             <a:extLst>
               <a:ext uri="{FF2B5EF4-FFF2-40B4-BE49-F238E27FC236}">
-                <a16:creationId xmlns:a16="http://schemas.microsoft.com/office/drawing/2014/main" id="{C983A040-B2A1-E2AF-B681-7701D5AE3104}"/>
+                <a16:creationId xmlns:a16="http://schemas.microsoft.com/office/drawing/2014/main" id="{B0DA1791-94C3-9B2F-3342-B0B3997E6E27}"/>
               </a:ext>
             </a:extLst>
           </p:cNvPr>
@@ -5151,7 +5153,375 @@
           <a:p>
             <a:r>
               <a:rPr lang="ko-KR" altLang="en-US" dirty="0"/>
-              <a:t>추후 일정</a:t>
+              <a:t>진행 상황</a:t>
+            </a:r>
+          </a:p>
+        </p:txBody>
+      </p:sp>
+      <p:sp>
+        <p:nvSpPr>
+          <p:cNvPr id="4" name="슬라이드 번호 개체 틀 3">
+            <a:extLst>
+              <a:ext uri="{FF2B5EF4-FFF2-40B4-BE49-F238E27FC236}">
+                <a16:creationId xmlns:a16="http://schemas.microsoft.com/office/drawing/2014/main" id="{F148DF68-A918-E8E5-60D9-F0081BDE60C5}"/>
+              </a:ext>
+            </a:extLst>
+          </p:cNvPr>
+          <p:cNvSpPr>
+            <a:spLocks noGrp="1"/>
+          </p:cNvSpPr>
+          <p:nvPr>
+            <p:ph type="sldNum" sz="quarter" idx="12"/>
+          </p:nvPr>
+        </p:nvSpPr>
+        <p:spPr/>
+        <p:txBody>
+          <a:bodyPr/>
+          <a:lstStyle/>
+          <a:p>
+            <a:fld id="{E694CC86-33DA-4CBD-A678-F7DD024C14A4}" type="slidenum">
+              <a:rPr lang="ko-KR" altLang="en-US" smtClean="0"/>
+              <a:pPr/>
+              <a:t>10</a:t>
+            </a:fld>
+            <a:r>
+              <a:rPr lang="en-US" altLang="ko-KR" dirty="0"/>
+              <a:t>/10</a:t>
+            </a:r>
+            <a:endParaRPr lang="ko-KR" altLang="en-US" dirty="0"/>
+          </a:p>
+        </p:txBody>
+      </p:sp>
+      <p:pic>
+        <p:nvPicPr>
+          <p:cNvPr id="6" name="그림 5" descr="텍스트, 도표, 스케치, 종이접기이(가) 표시된 사진&#10;&#10;AI 생성 콘텐츠는 정확하지 않을 수 있습니다.">
+            <a:extLst>
+              <a:ext uri="{FF2B5EF4-FFF2-40B4-BE49-F238E27FC236}">
+                <a16:creationId xmlns:a16="http://schemas.microsoft.com/office/drawing/2014/main" id="{5111A753-2D7A-DEB4-A802-9CD39A0F7F23}"/>
+              </a:ext>
+            </a:extLst>
+          </p:cNvPr>
+          <p:cNvPicPr>
+            <a:picLocks noChangeAspect="1"/>
+          </p:cNvPicPr>
+          <p:nvPr/>
+        </p:nvPicPr>
+        <p:blipFill>
+          <a:blip r:embed="rId2">
+            <a:extLst>
+              <a:ext uri="{28A0092B-C50C-407E-A947-70E740481C1C}">
+                <a14:useLocalDpi xmlns:a14="http://schemas.microsoft.com/office/drawing/2010/main" val="0"/>
+              </a:ext>
+            </a:extLst>
+          </a:blip>
+          <a:stretch>
+            <a:fillRect/>
+          </a:stretch>
+        </p:blipFill>
+        <p:spPr>
+          <a:xfrm>
+            <a:off x="0" y="1006300"/>
+            <a:ext cx="12192000" cy="4845400"/>
+          </a:xfrm>
+          <a:prstGeom prst="rect">
+            <a:avLst/>
+          </a:prstGeom>
+        </p:spPr>
+      </p:pic>
+      <p:sp>
+        <p:nvSpPr>
+          <p:cNvPr id="3" name="사각형: 둥근 모서리 2">
+            <a:extLst>
+              <a:ext uri="{FF2B5EF4-FFF2-40B4-BE49-F238E27FC236}">
+                <a16:creationId xmlns:a16="http://schemas.microsoft.com/office/drawing/2014/main" id="{16E047CD-AF6C-9FB1-A9E6-4AAF9E4E5B44}"/>
+              </a:ext>
+            </a:extLst>
+          </p:cNvPr>
+          <p:cNvSpPr/>
+          <p:nvPr/>
+        </p:nvSpPr>
+        <p:spPr>
+          <a:xfrm>
+            <a:off x="609598" y="5840557"/>
+            <a:ext cx="10639779" cy="192595"/>
+          </a:xfrm>
+          <a:prstGeom prst="roundRect">
+            <a:avLst>
+              <a:gd name="adj" fmla="val 50000"/>
+            </a:avLst>
+          </a:prstGeom>
+          <a:solidFill>
+            <a:schemeClr val="accent6">
+              <a:lumMod val="60000"/>
+              <a:lumOff val="40000"/>
+            </a:schemeClr>
+          </a:solidFill>
+          <a:ln w="28575">
+            <a:noFill/>
+          </a:ln>
+        </p:spPr>
+        <p:style>
+          <a:lnRef idx="2">
+            <a:schemeClr val="accent1">
+              <a:shade val="15000"/>
+            </a:schemeClr>
+          </a:lnRef>
+          <a:fillRef idx="1">
+            <a:schemeClr val="accent1"/>
+          </a:fillRef>
+          <a:effectRef idx="0">
+            <a:schemeClr val="accent1"/>
+          </a:effectRef>
+          <a:fontRef idx="minor">
+            <a:schemeClr val="lt1"/>
+          </a:fontRef>
+        </p:style>
+        <p:txBody>
+          <a:bodyPr rtlCol="0" anchor="ctr"/>
+          <a:lstStyle/>
+          <a:p>
+            <a:pPr algn="ctr"/>
+            <a:endParaRPr lang="ko-KR" altLang="en-US"/>
+          </a:p>
+        </p:txBody>
+      </p:sp>
+      <p:sp>
+        <p:nvSpPr>
+          <p:cNvPr id="5" name="사각형: 둥근 모서리 4">
+            <a:extLst>
+              <a:ext uri="{FF2B5EF4-FFF2-40B4-BE49-F238E27FC236}">
+                <a16:creationId xmlns:a16="http://schemas.microsoft.com/office/drawing/2014/main" id="{FF1B997B-6B17-5D3F-A0C7-18F7113B3FA2}"/>
+              </a:ext>
+            </a:extLst>
+          </p:cNvPr>
+          <p:cNvSpPr/>
+          <p:nvPr/>
+        </p:nvSpPr>
+        <p:spPr>
+          <a:xfrm>
+            <a:off x="609600" y="5840557"/>
+            <a:ext cx="10972800" cy="192595"/>
+          </a:xfrm>
+          <a:prstGeom prst="roundRect">
+            <a:avLst>
+              <a:gd name="adj" fmla="val 50000"/>
+            </a:avLst>
+          </a:prstGeom>
+          <a:noFill/>
+          <a:ln w="28575">
+            <a:solidFill>
+              <a:schemeClr val="tx1"/>
+            </a:solidFill>
+          </a:ln>
+        </p:spPr>
+        <p:style>
+          <a:lnRef idx="2">
+            <a:schemeClr val="accent1">
+              <a:shade val="15000"/>
+            </a:schemeClr>
+          </a:lnRef>
+          <a:fillRef idx="1">
+            <a:schemeClr val="accent1"/>
+          </a:fillRef>
+          <a:effectRef idx="0">
+            <a:schemeClr val="accent1"/>
+          </a:effectRef>
+          <a:fontRef idx="minor">
+            <a:schemeClr val="lt1"/>
+          </a:fontRef>
+        </p:style>
+        <p:txBody>
+          <a:bodyPr rtlCol="0" anchor="ctr"/>
+          <a:lstStyle/>
+          <a:p>
+            <a:pPr algn="ctr"/>
+            <a:endParaRPr lang="ko-KR" altLang="en-US"/>
+          </a:p>
+        </p:txBody>
+      </p:sp>
+      <p:sp>
+        <p:nvSpPr>
+          <p:cNvPr id="7" name="TextBox 6">
+            <a:extLst>
+              <a:ext uri="{FF2B5EF4-FFF2-40B4-BE49-F238E27FC236}">
+                <a16:creationId xmlns:a16="http://schemas.microsoft.com/office/drawing/2014/main" id="{4F461D76-1A07-1BA2-10DC-FF6228B50190}"/>
+              </a:ext>
+            </a:extLst>
+          </p:cNvPr>
+          <p:cNvSpPr txBox="1"/>
+          <p:nvPr/>
+        </p:nvSpPr>
+        <p:spPr>
+          <a:xfrm>
+            <a:off x="122870" y="5782967"/>
+            <a:ext cx="468398" cy="307777"/>
+          </a:xfrm>
+          <a:prstGeom prst="rect">
+            <a:avLst/>
+          </a:prstGeom>
+          <a:noFill/>
+        </p:spPr>
+        <p:txBody>
+          <a:bodyPr wrap="none" rtlCol="0">
+            <a:spAutoFit/>
+          </a:bodyPr>
+          <a:lstStyle/>
+          <a:p>
+            <a:pPr algn="ctr"/>
+            <a:r>
+              <a:rPr lang="en-US" altLang="ko-KR" sz="1400" dirty="0">
+                <a:latin typeface="HY견고딕" panose="02030600000101010101" pitchFamily="18" charset="-127"/>
+                <a:ea typeface="HY견고딕" panose="02030600000101010101" pitchFamily="18" charset="-127"/>
+              </a:rPr>
+              <a:t>0%</a:t>
+            </a:r>
+            <a:endParaRPr lang="ko-KR" altLang="en-US" sz="1400" dirty="0">
+              <a:latin typeface="HY견고딕" panose="02030600000101010101" pitchFamily="18" charset="-127"/>
+              <a:ea typeface="HY견고딕" panose="02030600000101010101" pitchFamily="18" charset="-127"/>
+            </a:endParaRPr>
+          </a:p>
+        </p:txBody>
+      </p:sp>
+      <p:sp>
+        <p:nvSpPr>
+          <p:cNvPr id="8" name="TextBox 7">
+            <a:extLst>
+              <a:ext uri="{FF2B5EF4-FFF2-40B4-BE49-F238E27FC236}">
+                <a16:creationId xmlns:a16="http://schemas.microsoft.com/office/drawing/2014/main" id="{DF81C966-7F0C-8A76-BF57-AFAF7197E029}"/>
+              </a:ext>
+            </a:extLst>
+          </p:cNvPr>
+          <p:cNvSpPr txBox="1"/>
+          <p:nvPr/>
+        </p:nvSpPr>
+        <p:spPr>
+          <a:xfrm>
+            <a:off x="11548533" y="5782967"/>
+            <a:ext cx="692818" cy="307777"/>
+          </a:xfrm>
+          <a:prstGeom prst="rect">
+            <a:avLst/>
+          </a:prstGeom>
+          <a:noFill/>
+        </p:spPr>
+        <p:txBody>
+          <a:bodyPr wrap="none" rtlCol="0">
+            <a:spAutoFit/>
+          </a:bodyPr>
+          <a:lstStyle/>
+          <a:p>
+            <a:pPr algn="ctr"/>
+            <a:r>
+              <a:rPr lang="en-US" altLang="ko-KR" sz="1400" dirty="0">
+                <a:latin typeface="HY견고딕" panose="02030600000101010101" pitchFamily="18" charset="-127"/>
+                <a:ea typeface="HY견고딕" panose="02030600000101010101" pitchFamily="18" charset="-127"/>
+              </a:rPr>
+              <a:t>100%</a:t>
+            </a:r>
+            <a:endParaRPr lang="ko-KR" altLang="en-US" sz="1400" dirty="0">
+              <a:latin typeface="HY견고딕" panose="02030600000101010101" pitchFamily="18" charset="-127"/>
+              <a:ea typeface="HY견고딕" panose="02030600000101010101" pitchFamily="18" charset="-127"/>
+            </a:endParaRPr>
+          </a:p>
+        </p:txBody>
+      </p:sp>
+      <p:sp>
+        <p:nvSpPr>
+          <p:cNvPr id="9" name="TextBox 8">
+            <a:extLst>
+              <a:ext uri="{FF2B5EF4-FFF2-40B4-BE49-F238E27FC236}">
+                <a16:creationId xmlns:a16="http://schemas.microsoft.com/office/drawing/2014/main" id="{5813F195-26C8-B9D5-7B2C-CE6D08840086}"/>
+              </a:ext>
+            </a:extLst>
+          </p:cNvPr>
+          <p:cNvSpPr txBox="1"/>
+          <p:nvPr/>
+        </p:nvSpPr>
+        <p:spPr>
+          <a:xfrm>
+            <a:off x="5861800" y="5815121"/>
+            <a:ext cx="468398" cy="246221"/>
+          </a:xfrm>
+          <a:prstGeom prst="rect">
+            <a:avLst/>
+          </a:prstGeom>
+          <a:noFill/>
+        </p:spPr>
+        <p:txBody>
+          <a:bodyPr wrap="none" rtlCol="0">
+            <a:spAutoFit/>
+          </a:bodyPr>
+          <a:lstStyle/>
+          <a:p>
+            <a:pPr algn="ctr"/>
+            <a:r>
+              <a:rPr lang="en-US" altLang="ko-KR" sz="1000" dirty="0">
+                <a:latin typeface="HY견고딕" panose="02030600000101010101" pitchFamily="18" charset="-127"/>
+                <a:ea typeface="HY견고딕" panose="02030600000101010101" pitchFamily="18" charset="-127"/>
+              </a:rPr>
+              <a:t>90%</a:t>
+            </a:r>
+            <a:endParaRPr lang="ko-KR" altLang="en-US" sz="1000" dirty="0">
+              <a:latin typeface="HY견고딕" panose="02030600000101010101" pitchFamily="18" charset="-127"/>
+              <a:ea typeface="HY견고딕" panose="02030600000101010101" pitchFamily="18" charset="-127"/>
+            </a:endParaRPr>
+          </a:p>
+        </p:txBody>
+      </p:sp>
+    </p:spTree>
+    <p:extLst>
+      <p:ext uri="{BB962C8B-B14F-4D97-AF65-F5344CB8AC3E}">
+        <p14:creationId xmlns:p14="http://schemas.microsoft.com/office/powerpoint/2010/main" val="256126388"/>
+      </p:ext>
+    </p:extLst>
+  </p:cSld>
+  <p:clrMapOvr>
+    <a:masterClrMapping/>
+  </p:clrMapOvr>
+</p:sld>
+</file>
+
+<file path=ppt/slides/slide11.xml><?xml version="1.0" encoding="utf-8"?>
+<p:sld xmlns:a="http://schemas.openxmlformats.org/drawingml/2006/main" xmlns:r="http://schemas.openxmlformats.org/officeDocument/2006/relationships" xmlns:p="http://schemas.openxmlformats.org/presentationml/2006/main">
+  <p:cSld>
+    <p:spTree>
+      <p:nvGrpSpPr>
+        <p:cNvPr id="1" name=""/>
+        <p:cNvGrpSpPr/>
+        <p:nvPr/>
+      </p:nvGrpSpPr>
+      <p:grpSpPr>
+        <a:xfrm>
+          <a:off x="0" y="0"/>
+          <a:ext cx="0" cy="0"/>
+          <a:chOff x="0" y="0"/>
+          <a:chExt cx="0" cy="0"/>
+        </a:xfrm>
+      </p:grpSpPr>
+      <p:sp>
+        <p:nvSpPr>
+          <p:cNvPr id="2" name="제목 1">
+            <a:extLst>
+              <a:ext uri="{FF2B5EF4-FFF2-40B4-BE49-F238E27FC236}">
+                <a16:creationId xmlns:a16="http://schemas.microsoft.com/office/drawing/2014/main" id="{DC19FCF3-0462-33B2-3736-AFB54CB0F3B6}"/>
+              </a:ext>
+            </a:extLst>
+          </p:cNvPr>
+          <p:cNvSpPr>
+            <a:spLocks noGrp="1"/>
+          </p:cNvSpPr>
+          <p:nvPr>
+            <p:ph type="title"/>
+          </p:nvPr>
+        </p:nvSpPr>
+        <p:spPr/>
+        <p:txBody>
+          <a:bodyPr/>
+          <a:lstStyle/>
+          <a:p>
+            <a:r>
+              <a:rPr lang="ko-KR" altLang="en-US" dirty="0"/>
+              <a:t>출시</a:t>
             </a:r>
           </a:p>
         </p:txBody>
@@ -5161,7 +5531,7 @@
           <p:cNvPr id="3" name="내용 개체 틀 2">
             <a:extLst>
               <a:ext uri="{FF2B5EF4-FFF2-40B4-BE49-F238E27FC236}">
-                <a16:creationId xmlns:a16="http://schemas.microsoft.com/office/drawing/2014/main" id="{0941A029-9DC5-82C0-FE68-969A994C2FCB}"/>
+                <a16:creationId xmlns:a16="http://schemas.microsoft.com/office/drawing/2014/main" id="{298A7A2D-87A0-C2E7-B1E0-C83CE70A12B0}"/>
               </a:ext>
             </a:extLst>
           </p:cNvPr>
@@ -5172,92 +5542,51 @@
             <p:ph idx="1"/>
           </p:nvPr>
         </p:nvSpPr>
-        <p:spPr>
-          <a:xfrm>
-            <a:off x="838200" y="1029195"/>
-            <a:ext cx="10515600" cy="3991616"/>
-          </a:xfrm>
-        </p:spPr>
-        <p:txBody>
-          <a:bodyPr>
-            <a:normAutofit/>
-          </a:bodyPr>
+        <p:spPr/>
+        <p:txBody>
+          <a:bodyPr/>
           <a:lstStyle/>
           <a:p>
             <a:r>
               <a:rPr lang="ko-KR" altLang="en-US" dirty="0"/>
-              <a:t>현재 구현된 기본 정적</a:t>
+              <a:t>플랫폼</a:t>
+            </a:r>
+            <a:endParaRPr lang="en-US" altLang="ko-KR" dirty="0"/>
+          </a:p>
+          <a:p>
+            <a:pPr lvl="1"/>
+            <a:r>
+              <a:rPr lang="en-US" altLang="ko-KR" dirty="0" err="1"/>
+              <a:t>Github</a:t>
+            </a:r>
+            <a:endParaRPr lang="en-US" altLang="ko-KR" dirty="0"/>
+          </a:p>
+          <a:p>
+            <a:r>
+              <a:rPr lang="ko-KR" altLang="en-US" dirty="0"/>
+              <a:t>가격</a:t>
+            </a:r>
+            <a:endParaRPr lang="en-US" altLang="ko-KR" dirty="0"/>
+          </a:p>
+          <a:p>
+            <a:pPr lvl="1"/>
+            <a:r>
+              <a:rPr lang="ko-KR" altLang="en-US" dirty="0"/>
+              <a:t>오픈소스</a:t>
             </a:r>
             <a:r>
               <a:rPr lang="en-US" altLang="ko-KR" dirty="0"/>
-              <a:t>, </a:t>
+              <a:t>(</a:t>
             </a:r>
             <a:r>
               <a:rPr lang="ko-KR" altLang="en-US" dirty="0"/>
-              <a:t>동적 이벤트를 기반으로 </a:t>
-            </a:r>
-            <a:br>
+              <a:t>무료</a:t>
+            </a:r>
+            <a:r>
               <a:rPr lang="en-US" altLang="ko-KR" dirty="0"/>
-            </a:br>
-            <a:r>
-              <a:rPr lang="ko-KR" altLang="en-US" dirty="0"/>
-              <a:t>태풍</a:t>
-            </a:r>
-            <a:r>
-              <a:rPr lang="en-US" altLang="ko-KR" dirty="0"/>
-              <a:t> </a:t>
-            </a:r>
-            <a:r>
-              <a:rPr lang="ko-KR" altLang="en-US" dirty="0"/>
-              <a:t>등 다양한 이벤트를 구현할 수 있게 기능 추가 및 테스트</a:t>
-            </a:r>
-            <a:endParaRPr lang="en-US" altLang="ko-KR" dirty="0"/>
-          </a:p>
-          <a:p>
-            <a:r>
-              <a:rPr lang="en-US" altLang="ko-KR" dirty="0"/>
-              <a:t>NPC, </a:t>
-            </a:r>
-            <a:r>
-              <a:rPr lang="ko-KR" altLang="en-US" dirty="0"/>
-              <a:t>기타 </a:t>
-            </a:r>
-            <a:r>
-              <a:rPr lang="en-US" altLang="ko-KR" dirty="0"/>
-              <a:t>UI </a:t>
-            </a:r>
-            <a:r>
-              <a:rPr lang="ko-KR" altLang="en-US" dirty="0"/>
-              <a:t>요소나 오브젝트 등의 </a:t>
-            </a:r>
-            <a:r>
-              <a:rPr lang="ko-KR" altLang="en-US" dirty="0" err="1"/>
-              <a:t>스프라이트</a:t>
-            </a:r>
-            <a:r>
-              <a:rPr lang="ko-KR" altLang="en-US" dirty="0"/>
-              <a:t> 제작</a:t>
-            </a:r>
-            <a:endParaRPr lang="en-US" altLang="ko-KR" dirty="0"/>
-          </a:p>
-          <a:p>
-            <a:r>
-              <a:rPr lang="ko-KR" altLang="en-US" dirty="0"/>
-              <a:t>배경음악</a:t>
-            </a:r>
-            <a:r>
-              <a:rPr lang="en-US" altLang="ko-KR" dirty="0"/>
-              <a:t>, </a:t>
-            </a:r>
-            <a:r>
-              <a:rPr lang="ko-KR" altLang="en-US" dirty="0"/>
-              <a:t>사운드 </a:t>
-            </a:r>
-            <a:r>
-              <a:rPr lang="ko-KR" altLang="en-US"/>
-              <a:t>이펙트 적용</a:t>
-            </a:r>
-            <a:endParaRPr lang="en-US" altLang="ko-KR" dirty="0"/>
+              <a:t>)</a:t>
+            </a:r>
+            <a:endParaRPr lang="ko-KR" altLang="en-US" dirty="0"/>
           </a:p>
         </p:txBody>
       </p:sp>
@@ -5266,7 +5595,7 @@
           <p:cNvPr id="4" name="슬라이드 번호 개체 틀 3">
             <a:extLst>
               <a:ext uri="{FF2B5EF4-FFF2-40B4-BE49-F238E27FC236}">
-                <a16:creationId xmlns:a16="http://schemas.microsoft.com/office/drawing/2014/main" id="{3CCF8C7F-202A-46D4-1C03-9A2E6985A158}"/>
+                <a16:creationId xmlns:a16="http://schemas.microsoft.com/office/drawing/2014/main" id="{FF480D5B-A57B-B07D-9DAE-2A98351BCB58}"/>
               </a:ext>
             </a:extLst>
           </p:cNvPr>
@@ -5285,7 +5614,204 @@
             <a:fld id="{E694CC86-33DA-4CBD-A678-F7DD024C14A4}" type="slidenum">
               <a:rPr lang="ko-KR" altLang="en-US" smtClean="0"/>
               <a:pPr/>
-              <a:t>10</a:t>
+              <a:t>11</a:t>
+            </a:fld>
+            <a:r>
+              <a:rPr lang="en-US" altLang="ko-KR"/>
+              <a:t>/##</a:t>
+            </a:r>
+            <a:endParaRPr lang="ko-KR" altLang="en-US" dirty="0"/>
+          </a:p>
+        </p:txBody>
+      </p:sp>
+    </p:spTree>
+    <p:extLst>
+      <p:ext uri="{BB962C8B-B14F-4D97-AF65-F5344CB8AC3E}">
+        <p14:creationId xmlns:p14="http://schemas.microsoft.com/office/powerpoint/2010/main" val="2266979873"/>
+      </p:ext>
+    </p:extLst>
+  </p:cSld>
+  <p:clrMapOvr>
+    <a:masterClrMapping/>
+  </p:clrMapOvr>
+</p:sld>
+</file>
+
+<file path=ppt/slides/slide12.xml><?xml version="1.0" encoding="utf-8"?>
+<p:sld xmlns:a="http://schemas.openxmlformats.org/drawingml/2006/main" xmlns:r="http://schemas.openxmlformats.org/officeDocument/2006/relationships" xmlns:p="http://schemas.openxmlformats.org/presentationml/2006/main">
+  <p:cSld>
+    <p:spTree>
+      <p:nvGrpSpPr>
+        <p:cNvPr id="1" name=""/>
+        <p:cNvGrpSpPr/>
+        <p:nvPr/>
+      </p:nvGrpSpPr>
+      <p:grpSpPr>
+        <a:xfrm>
+          <a:off x="0" y="0"/>
+          <a:ext cx="0" cy="0"/>
+          <a:chOff x="0" y="0"/>
+          <a:chExt cx="0" cy="0"/>
+        </a:xfrm>
+      </p:grpSpPr>
+      <p:sp>
+        <p:nvSpPr>
+          <p:cNvPr id="2" name="제목 1">
+            <a:extLst>
+              <a:ext uri="{FF2B5EF4-FFF2-40B4-BE49-F238E27FC236}">
+                <a16:creationId xmlns:a16="http://schemas.microsoft.com/office/drawing/2014/main" id="{C983A040-B2A1-E2AF-B681-7701D5AE3104}"/>
+              </a:ext>
+            </a:extLst>
+          </p:cNvPr>
+          <p:cNvSpPr>
+            <a:spLocks noGrp="1"/>
+          </p:cNvSpPr>
+          <p:nvPr>
+            <p:ph type="title"/>
+          </p:nvPr>
+        </p:nvSpPr>
+        <p:spPr/>
+        <p:txBody>
+          <a:bodyPr/>
+          <a:lstStyle/>
+          <a:p>
+            <a:r>
+              <a:rPr lang="ko-KR" altLang="en-US" dirty="0"/>
+              <a:t>추후 일정</a:t>
+            </a:r>
+          </a:p>
+        </p:txBody>
+      </p:sp>
+      <p:sp>
+        <p:nvSpPr>
+          <p:cNvPr id="3" name="내용 개체 틀 2">
+            <a:extLst>
+              <a:ext uri="{FF2B5EF4-FFF2-40B4-BE49-F238E27FC236}">
+                <a16:creationId xmlns:a16="http://schemas.microsoft.com/office/drawing/2014/main" id="{0941A029-9DC5-82C0-FE68-969A994C2FCB}"/>
+              </a:ext>
+            </a:extLst>
+          </p:cNvPr>
+          <p:cNvSpPr>
+            <a:spLocks noGrp="1"/>
+          </p:cNvSpPr>
+          <p:nvPr>
+            <p:ph idx="1"/>
+          </p:nvPr>
+        </p:nvSpPr>
+        <p:spPr>
+          <a:xfrm>
+            <a:off x="838200" y="1029195"/>
+            <a:ext cx="10515600" cy="3991616"/>
+          </a:xfrm>
+        </p:spPr>
+        <p:txBody>
+          <a:bodyPr>
+            <a:normAutofit/>
+          </a:bodyPr>
+          <a:lstStyle/>
+          <a:p>
+            <a:r>
+              <a:rPr lang="ko-KR" altLang="en-US" dirty="0"/>
+              <a:t>현재 구현된 기본 정적</a:t>
+            </a:r>
+            <a:r>
+              <a:rPr lang="en-US" altLang="ko-KR" dirty="0"/>
+              <a:t>, </a:t>
+            </a:r>
+            <a:r>
+              <a:rPr lang="ko-KR" altLang="en-US" dirty="0"/>
+              <a:t>동적 이벤트를 기반으로 </a:t>
+            </a:r>
+            <a:br>
+              <a:rPr lang="en-US" altLang="ko-KR" dirty="0"/>
+            </a:br>
+            <a:r>
+              <a:rPr lang="ko-KR" altLang="en-US" dirty="0"/>
+              <a:t>태풍</a:t>
+            </a:r>
+            <a:r>
+              <a:rPr lang="en-US" altLang="ko-KR" dirty="0"/>
+              <a:t> </a:t>
+            </a:r>
+            <a:r>
+              <a:rPr lang="ko-KR" altLang="en-US" dirty="0"/>
+              <a:t>등 다양한 이벤트를 구현할 수 있게 기능 추가 및 테스트</a:t>
+            </a:r>
+            <a:endParaRPr lang="en-US" altLang="ko-KR" dirty="0"/>
+          </a:p>
+          <a:p>
+            <a:r>
+              <a:rPr lang="en-US" altLang="ko-KR" dirty="0"/>
+              <a:t>NPC, </a:t>
+            </a:r>
+            <a:r>
+              <a:rPr lang="ko-KR" altLang="en-US" dirty="0"/>
+              <a:t>기타 </a:t>
+            </a:r>
+            <a:r>
+              <a:rPr lang="en-US" altLang="ko-KR" dirty="0"/>
+              <a:t>UI </a:t>
+            </a:r>
+            <a:r>
+              <a:rPr lang="ko-KR" altLang="en-US" dirty="0"/>
+              <a:t>요소나 오브젝트 등의 </a:t>
+            </a:r>
+            <a:r>
+              <a:rPr lang="ko-KR" altLang="en-US" dirty="0" err="1"/>
+              <a:t>스프라이트</a:t>
+            </a:r>
+            <a:r>
+              <a:rPr lang="ko-KR" altLang="en-US" dirty="0"/>
+              <a:t> 제작</a:t>
+            </a:r>
+            <a:endParaRPr lang="en-US" altLang="ko-KR" dirty="0"/>
+          </a:p>
+          <a:p>
+            <a:r>
+              <a:rPr lang="ko-KR" altLang="en-US" dirty="0"/>
+              <a:t>배경음악</a:t>
+            </a:r>
+            <a:r>
+              <a:rPr lang="en-US" altLang="ko-KR" dirty="0"/>
+              <a:t>, </a:t>
+            </a:r>
+            <a:r>
+              <a:rPr lang="ko-KR" altLang="en-US" dirty="0"/>
+              <a:t>사운드 </a:t>
+            </a:r>
+            <a:r>
+              <a:rPr lang="ko-KR" altLang="en-US"/>
+              <a:t>이펙트 적용</a:t>
+            </a:r>
+            <a:endParaRPr lang="en-US" altLang="ko-KR" dirty="0"/>
+          </a:p>
+        </p:txBody>
+      </p:sp>
+      <p:sp>
+        <p:nvSpPr>
+          <p:cNvPr id="4" name="슬라이드 번호 개체 틀 3">
+            <a:extLst>
+              <a:ext uri="{FF2B5EF4-FFF2-40B4-BE49-F238E27FC236}">
+                <a16:creationId xmlns:a16="http://schemas.microsoft.com/office/drawing/2014/main" id="{3CCF8C7F-202A-46D4-1C03-9A2E6985A158}"/>
+              </a:ext>
+            </a:extLst>
+          </p:cNvPr>
+          <p:cNvSpPr>
+            <a:spLocks noGrp="1"/>
+          </p:cNvSpPr>
+          <p:nvPr>
+            <p:ph type="sldNum" sz="quarter" idx="12"/>
+          </p:nvPr>
+        </p:nvSpPr>
+        <p:spPr/>
+        <p:txBody>
+          <a:bodyPr/>
+          <a:lstStyle/>
+          <a:p>
+            <a:fld id="{E694CC86-33DA-4CBD-A678-F7DD024C14A4}" type="slidenum">
+              <a:rPr lang="ko-KR" altLang="en-US" smtClean="0"/>
+              <a:pPr/>
+              <a:t>12</a:t>
             </a:fld>
             <a:r>
               <a:rPr lang="en-US" altLang="ko-KR" dirty="0"/>
@@ -9324,7 +9850,13 @@
   <p:cSld>
     <p:spTree>
       <p:nvGrpSpPr>
-        <p:cNvPr id="1" name=""/>
+        <p:cNvPr id="1" name="">
+          <a:extLst>
+            <a:ext uri="{FF2B5EF4-FFF2-40B4-BE49-F238E27FC236}">
+              <a16:creationId xmlns:a16="http://schemas.microsoft.com/office/drawing/2014/main" id="{2DBAC7F7-4BC8-6C5A-EE56-64FB4B18CC09}"/>
+            </a:ext>
+          </a:extLst>
+        </p:cNvPr>
         <p:cNvGrpSpPr/>
         <p:nvPr/>
       </p:nvGrpSpPr>
@@ -9341,7 +9873,7 @@
           <p:cNvPr id="2" name="제목 1">
             <a:extLst>
               <a:ext uri="{FF2B5EF4-FFF2-40B4-BE49-F238E27FC236}">
-                <a16:creationId xmlns:a16="http://schemas.microsoft.com/office/drawing/2014/main" id="{B0DA1791-94C3-9B2F-3342-B0B3997E6E27}"/>
+                <a16:creationId xmlns:a16="http://schemas.microsoft.com/office/drawing/2014/main" id="{23902489-43A5-1753-9DC6-7BF71F01774E}"/>
               </a:ext>
             </a:extLst>
           </p:cNvPr>
@@ -9359,7 +9891,7 @@
           <a:p>
             <a:r>
               <a:rPr lang="ko-KR" altLang="en-US" dirty="0"/>
-              <a:t>진행 상황</a:t>
+              <a:t>가치</a:t>
             </a:r>
           </a:p>
         </p:txBody>
@@ -9369,7 +9901,7 @@
           <p:cNvPr id="4" name="슬라이드 번호 개체 틀 3">
             <a:extLst>
               <a:ext uri="{FF2B5EF4-FFF2-40B4-BE49-F238E27FC236}">
-                <a16:creationId xmlns:a16="http://schemas.microsoft.com/office/drawing/2014/main" id="{F148DF68-A918-E8E5-60D9-F0081BDE60C5}"/>
+                <a16:creationId xmlns:a16="http://schemas.microsoft.com/office/drawing/2014/main" id="{5EC5FBB7-3962-E1BC-55B4-A9A2BE7001F7}"/>
               </a:ext>
             </a:extLst>
           </p:cNvPr>
@@ -9400,10 +9932,10 @@
       </p:sp>
       <p:pic>
         <p:nvPicPr>
-          <p:cNvPr id="6" name="그림 5" descr="텍스트, 도표, 스케치, 종이접기이(가) 표시된 사진&#10;&#10;AI 생성 콘텐츠는 정확하지 않을 수 있습니다.">
-            <a:extLst>
-              <a:ext uri="{FF2B5EF4-FFF2-40B4-BE49-F238E27FC236}">
-                <a16:creationId xmlns:a16="http://schemas.microsoft.com/office/drawing/2014/main" id="{5111A753-2D7A-DEB4-A802-9CD39A0F7F23}"/>
+          <p:cNvPr id="6" name="그림 5" descr="텍스트, 스크린샷, 폰트, 디자인이(가) 표시된 사진&#10;&#10;AI 생성 콘텐츠는 정확하지 않을 수 있습니다.">
+            <a:extLst>
+              <a:ext uri="{FF2B5EF4-FFF2-40B4-BE49-F238E27FC236}">
+                <a16:creationId xmlns:a16="http://schemas.microsoft.com/office/drawing/2014/main" id="{F5C69D7B-AC2C-2B25-D8F5-39C96394CECB}"/>
               </a:ext>
             </a:extLst>
           </p:cNvPr>
@@ -9426,8 +9958,8 @@
         </p:blipFill>
         <p:spPr>
           <a:xfrm>
-            <a:off x="0" y="1006300"/>
-            <a:ext cx="12192000" cy="4845400"/>
+            <a:off x="0" y="992770"/>
+            <a:ext cx="12192000" cy="4872459"/>
           </a:xfrm>
           <a:prstGeom prst="rect">
             <a:avLst/>
@@ -9439,7 +9971,7 @@
           <p:cNvPr id="3" name="사각형: 둥근 모서리 2">
             <a:extLst>
               <a:ext uri="{FF2B5EF4-FFF2-40B4-BE49-F238E27FC236}">
-                <a16:creationId xmlns:a16="http://schemas.microsoft.com/office/drawing/2014/main" id="{16E047CD-AF6C-9FB1-A9E6-4AAF9E4E5B44}"/>
+                <a16:creationId xmlns:a16="http://schemas.microsoft.com/office/drawing/2014/main" id="{EBEC17E7-C4E7-6984-D112-1108F7B25970}"/>
               </a:ext>
             </a:extLst>
           </p:cNvPr>
@@ -9496,7 +10028,7 @@
           <p:cNvPr id="5" name="사각형: 둥근 모서리 4">
             <a:extLst>
               <a:ext uri="{FF2B5EF4-FFF2-40B4-BE49-F238E27FC236}">
-                <a16:creationId xmlns:a16="http://schemas.microsoft.com/office/drawing/2014/main" id="{FF1B997B-6B17-5D3F-A0C7-18F7113B3FA2}"/>
+                <a16:creationId xmlns:a16="http://schemas.microsoft.com/office/drawing/2014/main" id="{C8611400-C89D-07CA-A38F-E6A18B193393}"/>
               </a:ext>
             </a:extLst>
           </p:cNvPr>
@@ -9550,7 +10082,7 @@
           <p:cNvPr id="7" name="TextBox 6">
             <a:extLst>
               <a:ext uri="{FF2B5EF4-FFF2-40B4-BE49-F238E27FC236}">
-                <a16:creationId xmlns:a16="http://schemas.microsoft.com/office/drawing/2014/main" id="{4F461D76-1A07-1BA2-10DC-FF6228B50190}"/>
+                <a16:creationId xmlns:a16="http://schemas.microsoft.com/office/drawing/2014/main" id="{76D0D2A6-2011-7F86-5A9D-3F74DF3B3F3E}"/>
               </a:ext>
             </a:extLst>
           </p:cNvPr>
@@ -9593,7 +10125,7 @@
           <p:cNvPr id="8" name="TextBox 7">
             <a:extLst>
               <a:ext uri="{FF2B5EF4-FFF2-40B4-BE49-F238E27FC236}">
-                <a16:creationId xmlns:a16="http://schemas.microsoft.com/office/drawing/2014/main" id="{DF81C966-7F0C-8A76-BF57-AFAF7197E029}"/>
+                <a16:creationId xmlns:a16="http://schemas.microsoft.com/office/drawing/2014/main" id="{242B98FB-FDDE-81D8-7E89-1D22D329FC9A}"/>
               </a:ext>
             </a:extLst>
           </p:cNvPr>
@@ -9636,7 +10168,7 @@
           <p:cNvPr id="9" name="TextBox 8">
             <a:extLst>
               <a:ext uri="{FF2B5EF4-FFF2-40B4-BE49-F238E27FC236}">
-                <a16:creationId xmlns:a16="http://schemas.microsoft.com/office/drawing/2014/main" id="{5813F195-26C8-B9D5-7B2C-CE6D08840086}"/>
+                <a16:creationId xmlns:a16="http://schemas.microsoft.com/office/drawing/2014/main" id="{A4722FCC-B811-94CF-3843-D5628632366E}"/>
               </a:ext>
             </a:extLst>
           </p:cNvPr>
@@ -9677,7 +10209,7 @@
     </p:spTree>
     <p:extLst>
       <p:ext uri="{BB962C8B-B14F-4D97-AF65-F5344CB8AC3E}">
-        <p14:creationId xmlns:p14="http://schemas.microsoft.com/office/powerpoint/2010/main" val="256126388"/>
+        <p14:creationId xmlns:p14="http://schemas.microsoft.com/office/powerpoint/2010/main" val="3766531235"/>
       </p:ext>
     </p:extLst>
   </p:cSld>

--- a/WQFS.pptx
+++ b/WQFS.pptx
@@ -5,21 +5,14 @@
     <p:sldMasterId id="2147483648" r:id="rId1"/>
   </p:sldMasterIdLst>
   <p:notesMasterIdLst>
-    <p:notesMasterId r:id="rId14"/>
+    <p:notesMasterId r:id="rId7"/>
   </p:notesMasterIdLst>
   <p:sldIdLst>
     <p:sldId id="256" r:id="rId2"/>
-    <p:sldId id="269" r:id="rId3"/>
-    <p:sldId id="265" r:id="rId4"/>
-    <p:sldId id="270" r:id="rId5"/>
-    <p:sldId id="267" r:id="rId6"/>
-    <p:sldId id="271" r:id="rId7"/>
-    <p:sldId id="272" r:id="rId8"/>
-    <p:sldId id="273" r:id="rId9"/>
-    <p:sldId id="276" r:id="rId10"/>
-    <p:sldId id="274" r:id="rId11"/>
-    <p:sldId id="277" r:id="rId12"/>
-    <p:sldId id="263" r:id="rId13"/>
+    <p:sldId id="277" r:id="rId3"/>
+    <p:sldId id="278" r:id="rId4"/>
+    <p:sldId id="279" r:id="rId5"/>
+    <p:sldId id="263" r:id="rId6"/>
   </p:sldIdLst>
   <p:sldSz cx="12192000" cy="6858000"/>
   <p:notesSz cx="7105650" cy="10236200"/>
@@ -219,7 +212,7 @@
           <a:p>
             <a:fld id="{56AE193D-720A-4563-AA71-141E9FDCE958}" type="datetimeFigureOut">
               <a:rPr lang="ko-KR" altLang="en-US" smtClean="0"/>
-              <a:t>2025-11-26</a:t>
+              <a:t>2025-12-02</a:t>
             </a:fld>
             <a:endParaRPr lang="ko-KR" altLang="en-US"/>
           </a:p>
@@ -717,7 +710,7 @@
           <a:p>
             <a:fld id="{6C44D894-CCE4-4219-86B7-733D27BABF13}" type="datetimeFigureOut">
               <a:rPr lang="ko-KR" altLang="en-US" smtClean="0"/>
-              <a:t>2025-11-26</a:t>
+              <a:t>2025-12-02</a:t>
             </a:fld>
             <a:endParaRPr lang="ko-KR" altLang="en-US"/>
           </a:p>
@@ -915,7 +908,7 @@
           <a:p>
             <a:fld id="{6C44D894-CCE4-4219-86B7-733D27BABF13}" type="datetimeFigureOut">
               <a:rPr lang="ko-KR" altLang="en-US" smtClean="0"/>
-              <a:t>2025-11-26</a:t>
+              <a:t>2025-12-02</a:t>
             </a:fld>
             <a:endParaRPr lang="ko-KR" altLang="en-US"/>
           </a:p>
@@ -1123,7 +1116,7 @@
           <a:p>
             <a:fld id="{6C44D894-CCE4-4219-86B7-733D27BABF13}" type="datetimeFigureOut">
               <a:rPr lang="ko-KR" altLang="en-US" smtClean="0"/>
-              <a:t>2025-11-26</a:t>
+              <a:t>2025-12-02</a:t>
             </a:fld>
             <a:endParaRPr lang="ko-KR" altLang="en-US"/>
           </a:p>
@@ -1805,7 +1798,7 @@
           <a:p>
             <a:fld id="{6C44D894-CCE4-4219-86B7-733D27BABF13}" type="datetimeFigureOut">
               <a:rPr lang="ko-KR" altLang="en-US" smtClean="0"/>
-              <a:t>2025-11-26</a:t>
+              <a:t>2025-12-02</a:t>
             </a:fld>
             <a:endParaRPr lang="ko-KR" altLang="en-US"/>
           </a:p>
@@ -2070,7 +2063,7 @@
           <a:p>
             <a:fld id="{6C44D894-CCE4-4219-86B7-733D27BABF13}" type="datetimeFigureOut">
               <a:rPr lang="ko-KR" altLang="en-US" smtClean="0"/>
-              <a:t>2025-11-26</a:t>
+              <a:t>2025-12-02</a:t>
             </a:fld>
             <a:endParaRPr lang="ko-KR" altLang="en-US"/>
           </a:p>
@@ -2482,7 +2475,7 @@
           <a:p>
             <a:fld id="{6C44D894-CCE4-4219-86B7-733D27BABF13}" type="datetimeFigureOut">
               <a:rPr lang="ko-KR" altLang="en-US" smtClean="0"/>
-              <a:t>2025-11-26</a:t>
+              <a:t>2025-12-02</a:t>
             </a:fld>
             <a:endParaRPr lang="ko-KR" altLang="en-US"/>
           </a:p>
@@ -2623,7 +2616,7 @@
           <a:p>
             <a:fld id="{6C44D894-CCE4-4219-86B7-733D27BABF13}" type="datetimeFigureOut">
               <a:rPr lang="ko-KR" altLang="en-US" smtClean="0"/>
-              <a:t>2025-11-26</a:t>
+              <a:t>2025-12-02</a:t>
             </a:fld>
             <a:endParaRPr lang="ko-KR" altLang="en-US"/>
           </a:p>
@@ -2736,7 +2729,7 @@
           <a:p>
             <a:fld id="{6C44D894-CCE4-4219-86B7-733D27BABF13}" type="datetimeFigureOut">
               <a:rPr lang="ko-KR" altLang="en-US" smtClean="0"/>
-              <a:t>2025-11-26</a:t>
+              <a:t>2025-12-02</a:t>
             </a:fld>
             <a:endParaRPr lang="ko-KR" altLang="en-US"/>
           </a:p>
@@ -3047,7 +3040,7 @@
           <a:p>
             <a:fld id="{6C44D894-CCE4-4219-86B7-733D27BABF13}" type="datetimeFigureOut">
               <a:rPr lang="ko-KR" altLang="en-US" smtClean="0"/>
-              <a:t>2025-11-26</a:t>
+              <a:t>2025-12-02</a:t>
             </a:fld>
             <a:endParaRPr lang="ko-KR" altLang="en-US"/>
           </a:p>
@@ -3335,7 +3328,7 @@
           <a:p>
             <a:fld id="{6C44D894-CCE4-4219-86B7-733D27BABF13}" type="datetimeFigureOut">
               <a:rPr lang="ko-KR" altLang="en-US" smtClean="0"/>
-              <a:t>2025-11-26</a:t>
+              <a:t>2025-12-02</a:t>
             </a:fld>
             <a:endParaRPr lang="ko-KR" altLang="en-US"/>
           </a:p>
@@ -3576,7 +3569,7 @@
           <a:p>
             <a:fld id="{6C44D894-CCE4-4219-86B7-733D27BABF13}" type="datetimeFigureOut">
               <a:rPr lang="ko-KR" altLang="en-US" smtClean="0"/>
-              <a:t>2025-11-26</a:t>
+              <a:t>2025-12-02</a:t>
             </a:fld>
             <a:endParaRPr lang="ko-KR" altLang="en-US"/>
           </a:p>
@@ -5113,7 +5106,7 @@
 </p:sld>
 </file>
 
-<file path=ppt/slides/slide10.xml><?xml version="1.0" encoding="utf-8"?>
+<file path=ppt/slides/slide2.xml><?xml version="1.0" encoding="utf-8"?>
 <p:sld xmlns:a="http://schemas.openxmlformats.org/drawingml/2006/main" xmlns:r="http://schemas.openxmlformats.org/officeDocument/2006/relationships" xmlns:p="http://schemas.openxmlformats.org/presentationml/2006/main">
   <p:cSld>
     <p:spTree>
@@ -5135,7 +5128,7 @@
           <p:cNvPr id="2" name="제목 1">
             <a:extLst>
               <a:ext uri="{FF2B5EF4-FFF2-40B4-BE49-F238E27FC236}">
-                <a16:creationId xmlns:a16="http://schemas.microsoft.com/office/drawing/2014/main" id="{B0DA1791-94C3-9B2F-3342-B0B3997E6E27}"/>
+                <a16:creationId xmlns:a16="http://schemas.microsoft.com/office/drawing/2014/main" id="{DC19FCF3-0462-33B2-3736-AFB54CB0F3B6}"/>
               </a:ext>
             </a:extLst>
           </p:cNvPr>
@@ -5153,8 +5146,103 @@
           <a:p>
             <a:r>
               <a:rPr lang="ko-KR" altLang="en-US" dirty="0"/>
-              <a:t>진행 상황</a:t>
-            </a:r>
+              <a:t>출시</a:t>
+            </a:r>
+          </a:p>
+        </p:txBody>
+      </p:sp>
+      <p:sp>
+        <p:nvSpPr>
+          <p:cNvPr id="3" name="내용 개체 틀 2">
+            <a:extLst>
+              <a:ext uri="{FF2B5EF4-FFF2-40B4-BE49-F238E27FC236}">
+                <a16:creationId xmlns:a16="http://schemas.microsoft.com/office/drawing/2014/main" id="{298A7A2D-87A0-C2E7-B1E0-C83CE70A12B0}"/>
+              </a:ext>
+            </a:extLst>
+          </p:cNvPr>
+          <p:cNvSpPr>
+            <a:spLocks noGrp="1"/>
+          </p:cNvSpPr>
+          <p:nvPr>
+            <p:ph idx="1"/>
+          </p:nvPr>
+        </p:nvSpPr>
+        <p:spPr>
+          <a:xfrm>
+            <a:off x="838200" y="1029195"/>
+            <a:ext cx="10515600" cy="2247405"/>
+          </a:xfrm>
+        </p:spPr>
+        <p:txBody>
+          <a:bodyPr/>
+          <a:lstStyle/>
+          <a:p>
+            <a:r>
+              <a:rPr lang="ko-KR" altLang="en-US" dirty="0"/>
+              <a:t>플랫폼</a:t>
+            </a:r>
+            <a:endParaRPr lang="en-US" altLang="ko-KR" dirty="0"/>
+          </a:p>
+          <a:p>
+            <a:pPr lvl="1"/>
+            <a:r>
+              <a:rPr lang="en-US" altLang="ko-KR" dirty="0" err="1"/>
+              <a:t>Github</a:t>
+            </a:r>
+            <a:r>
+              <a:rPr lang="en-US" altLang="ko-KR" dirty="0"/>
+              <a:t> (</a:t>
+            </a:r>
+            <a:r>
+              <a:rPr lang="ko-KR" altLang="en-US" dirty="0"/>
+              <a:t>시스템</a:t>
+            </a:r>
+            <a:r>
+              <a:rPr lang="en-US" altLang="ko-KR" dirty="0"/>
+              <a:t>, </a:t>
+            </a:r>
+            <a:r>
+              <a:rPr lang="ko-KR" altLang="en-US" dirty="0" err="1"/>
+              <a:t>테크</a:t>
+            </a:r>
+            <a:r>
+              <a:rPr lang="ko-KR" altLang="en-US" dirty="0"/>
+              <a:t> 데모</a:t>
+            </a:r>
+            <a:r>
+              <a:rPr lang="en-US" altLang="ko-KR" dirty="0"/>
+              <a:t>)</a:t>
+            </a:r>
+          </a:p>
+          <a:p>
+            <a:endParaRPr lang="en-US" altLang="ko-KR" dirty="0"/>
+          </a:p>
+          <a:p>
+            <a:r>
+              <a:rPr lang="ko-KR" altLang="en-US" dirty="0"/>
+              <a:t>가격</a:t>
+            </a:r>
+            <a:endParaRPr lang="en-US" altLang="ko-KR" dirty="0"/>
+          </a:p>
+          <a:p>
+            <a:pPr lvl="1"/>
+            <a:r>
+              <a:rPr lang="ko-KR" altLang="en-US" dirty="0"/>
+              <a:t>오픈소스</a:t>
+            </a:r>
+            <a:r>
+              <a:rPr lang="en-US" altLang="ko-KR" dirty="0"/>
+              <a:t>(</a:t>
+            </a:r>
+            <a:r>
+              <a:rPr lang="ko-KR" altLang="en-US" dirty="0"/>
+              <a:t>무료</a:t>
+            </a:r>
+            <a:r>
+              <a:rPr lang="en-US" altLang="ko-KR" dirty="0"/>
+              <a:t>)</a:t>
+            </a:r>
+            <a:endParaRPr lang="ko-KR" altLang="en-US" dirty="0"/>
           </a:p>
         </p:txBody>
       </p:sp>
@@ -5163,7 +5251,7 @@
           <p:cNvPr id="4" name="슬라이드 번호 개체 틀 3">
             <a:extLst>
               <a:ext uri="{FF2B5EF4-FFF2-40B4-BE49-F238E27FC236}">
-                <a16:creationId xmlns:a16="http://schemas.microsoft.com/office/drawing/2014/main" id="{F148DF68-A918-E8E5-60D9-F0081BDE60C5}"/>
+                <a16:creationId xmlns:a16="http://schemas.microsoft.com/office/drawing/2014/main" id="{FF480D5B-A57B-B07D-9DAE-2A98351BCB58}"/>
               </a:ext>
             </a:extLst>
           </p:cNvPr>
@@ -5182,58 +5270,144 @@
             <a:fld id="{E694CC86-33DA-4CBD-A678-F7DD024C14A4}" type="slidenum">
               <a:rPr lang="ko-KR" altLang="en-US" smtClean="0"/>
               <a:pPr/>
-              <a:t>10</a:t>
+              <a:t>2</a:t>
             </a:fld>
             <a:r>
-              <a:rPr lang="en-US" altLang="ko-KR" dirty="0"/>
-              <a:t>/10</a:t>
+              <a:rPr lang="en-US" altLang="ko-KR"/>
+              <a:t>/##</a:t>
             </a:r>
             <a:endParaRPr lang="ko-KR" altLang="en-US" dirty="0"/>
           </a:p>
         </p:txBody>
       </p:sp>
-      <p:pic>
-        <p:nvPicPr>
-          <p:cNvPr id="6" name="그림 5" descr="텍스트, 도표, 스케치, 종이접기이(가) 표시된 사진&#10;&#10;AI 생성 콘텐츠는 정확하지 않을 수 있습니다.">
-            <a:extLst>
-              <a:ext uri="{FF2B5EF4-FFF2-40B4-BE49-F238E27FC236}">
-                <a16:creationId xmlns:a16="http://schemas.microsoft.com/office/drawing/2014/main" id="{5111A753-2D7A-DEB4-A802-9CD39A0F7F23}"/>
-              </a:ext>
-            </a:extLst>
-          </p:cNvPr>
-          <p:cNvPicPr>
-            <a:picLocks noChangeAspect="1"/>
-          </p:cNvPicPr>
-          <p:nvPr/>
-        </p:nvPicPr>
-        <p:blipFill>
-          <a:blip r:embed="rId2">
-            <a:extLst>
-              <a:ext uri="{28A0092B-C50C-407E-A947-70E740481C1C}">
-                <a14:useLocalDpi xmlns:a14="http://schemas.microsoft.com/office/drawing/2010/main" val="0"/>
-              </a:ext>
-            </a:extLst>
-          </a:blip>
-          <a:stretch>
-            <a:fillRect/>
-          </a:stretch>
-        </p:blipFill>
+    </p:spTree>
+    <p:extLst>
+      <p:ext uri="{BB962C8B-B14F-4D97-AF65-F5344CB8AC3E}">
+        <p14:creationId xmlns:p14="http://schemas.microsoft.com/office/powerpoint/2010/main" val="2266979873"/>
+      </p:ext>
+    </p:extLst>
+  </p:cSld>
+  <p:clrMapOvr>
+    <a:masterClrMapping/>
+  </p:clrMapOvr>
+</p:sld>
+</file>
+
+<file path=ppt/slides/slide3.xml><?xml version="1.0" encoding="utf-8"?>
+<p:sld xmlns:a="http://schemas.openxmlformats.org/drawingml/2006/main" xmlns:r="http://schemas.openxmlformats.org/officeDocument/2006/relationships" xmlns:p="http://schemas.openxmlformats.org/presentationml/2006/main">
+  <p:cSld>
+    <p:spTree>
+      <p:nvGrpSpPr>
+        <p:cNvPr id="1" name=""/>
+        <p:cNvGrpSpPr/>
+        <p:nvPr/>
+      </p:nvGrpSpPr>
+      <p:grpSpPr>
+        <a:xfrm>
+          <a:off x="0" y="0"/>
+          <a:ext cx="0" cy="0"/>
+          <a:chOff x="0" y="0"/>
+          <a:chExt cx="0" cy="0"/>
+        </a:xfrm>
+      </p:grpSpPr>
+      <p:sp>
+        <p:nvSpPr>
+          <p:cNvPr id="2" name="제목 1">
+            <a:extLst>
+              <a:ext uri="{FF2B5EF4-FFF2-40B4-BE49-F238E27FC236}">
+                <a16:creationId xmlns:a16="http://schemas.microsoft.com/office/drawing/2014/main" id="{52CE0D65-A805-B809-B37C-CA9A061B76AC}"/>
+              </a:ext>
+            </a:extLst>
+          </p:cNvPr>
+          <p:cNvSpPr>
+            <a:spLocks noGrp="1"/>
+          </p:cNvSpPr>
+          <p:nvPr>
+            <p:ph type="title"/>
+          </p:nvPr>
+        </p:nvSpPr>
+        <p:spPr/>
+        <p:txBody>
+          <a:bodyPr/>
+          <a:lstStyle/>
+          <a:p>
+            <a:r>
+              <a:rPr lang="ko-KR" altLang="en-US" dirty="0"/>
+              <a:t>진행사항</a:t>
+            </a:r>
+          </a:p>
+        </p:txBody>
+      </p:sp>
+      <p:sp>
+        <p:nvSpPr>
+          <p:cNvPr id="3" name="내용 개체 틀 2">
+            <a:extLst>
+              <a:ext uri="{FF2B5EF4-FFF2-40B4-BE49-F238E27FC236}">
+                <a16:creationId xmlns:a16="http://schemas.microsoft.com/office/drawing/2014/main" id="{2D081351-1B69-744E-8E9A-FE01A994515E}"/>
+              </a:ext>
+            </a:extLst>
+          </p:cNvPr>
+          <p:cNvSpPr>
+            <a:spLocks noGrp="1"/>
+          </p:cNvSpPr>
+          <p:nvPr>
+            <p:ph idx="1"/>
+          </p:nvPr>
+        </p:nvSpPr>
         <p:spPr>
           <a:xfrm>
-            <a:off x="0" y="1006300"/>
-            <a:ext cx="12192000" cy="4845400"/>
+            <a:off x="838200" y="1029195"/>
+            <a:ext cx="10515600" cy="4527962"/>
           </a:xfrm>
-          <a:prstGeom prst="rect">
-            <a:avLst/>
-          </a:prstGeom>
         </p:spPr>
-      </p:pic>
-      <p:sp>
-        <p:nvSpPr>
-          <p:cNvPr id="3" name="사각형: 둥근 모서리 2">
-            <a:extLst>
-              <a:ext uri="{FF2B5EF4-FFF2-40B4-BE49-F238E27FC236}">
-                <a16:creationId xmlns:a16="http://schemas.microsoft.com/office/drawing/2014/main" id="{16E047CD-AF6C-9FB1-A9E6-4AAF9E4E5B44}"/>
+        <p:txBody>
+          <a:bodyPr/>
+          <a:lstStyle/>
+          <a:p>
+            <a:endParaRPr lang="ko-KR" altLang="en-US" dirty="0"/>
+          </a:p>
+        </p:txBody>
+      </p:sp>
+      <p:sp>
+        <p:nvSpPr>
+          <p:cNvPr id="4" name="슬라이드 번호 개체 틀 3">
+            <a:extLst>
+              <a:ext uri="{FF2B5EF4-FFF2-40B4-BE49-F238E27FC236}">
+                <a16:creationId xmlns:a16="http://schemas.microsoft.com/office/drawing/2014/main" id="{46EEB367-FE9C-E483-53FC-81C468585309}"/>
+              </a:ext>
+            </a:extLst>
+          </p:cNvPr>
+          <p:cNvSpPr>
+            <a:spLocks noGrp="1"/>
+          </p:cNvSpPr>
+          <p:nvPr>
+            <p:ph type="sldNum" sz="quarter" idx="12"/>
+          </p:nvPr>
+        </p:nvSpPr>
+        <p:spPr/>
+        <p:txBody>
+          <a:bodyPr/>
+          <a:lstStyle/>
+          <a:p>
+            <a:fld id="{E694CC86-33DA-4CBD-A678-F7DD024C14A4}" type="slidenum">
+              <a:rPr lang="ko-KR" altLang="en-US" smtClean="0"/>
+              <a:pPr/>
+              <a:t>3</a:t>
+            </a:fld>
+            <a:r>
+              <a:rPr lang="en-US" altLang="ko-KR"/>
+              <a:t>/##</a:t>
+            </a:r>
+            <a:endParaRPr lang="ko-KR" altLang="en-US" dirty="0"/>
+          </a:p>
+        </p:txBody>
+      </p:sp>
+      <p:sp>
+        <p:nvSpPr>
+          <p:cNvPr id="5" name="사각형: 둥근 모서리 4">
+            <a:extLst>
+              <a:ext uri="{FF2B5EF4-FFF2-40B4-BE49-F238E27FC236}">
+                <a16:creationId xmlns:a16="http://schemas.microsoft.com/office/drawing/2014/main" id="{E9E913DD-D8EA-CF0C-659A-CF3346C6A22C}"/>
               </a:ext>
             </a:extLst>
           </p:cNvPr>
@@ -5242,8 +5416,8 @@
         </p:nvSpPr>
         <p:spPr>
           <a:xfrm>
-            <a:off x="609598" y="5840557"/>
-            <a:ext cx="10639779" cy="192595"/>
+            <a:off x="609598" y="5828805"/>
+            <a:ext cx="10793188" cy="204347"/>
           </a:xfrm>
           <a:prstGeom prst="roundRect">
             <a:avLst>
@@ -5287,10 +5461,10 @@
       </p:sp>
       <p:sp>
         <p:nvSpPr>
-          <p:cNvPr id="5" name="사각형: 둥근 모서리 4">
-            <a:extLst>
-              <a:ext uri="{FF2B5EF4-FFF2-40B4-BE49-F238E27FC236}">
-                <a16:creationId xmlns:a16="http://schemas.microsoft.com/office/drawing/2014/main" id="{FF1B997B-6B17-5D3F-A0C7-18F7113B3FA2}"/>
+          <p:cNvPr id="6" name="사각형: 둥근 모서리 5">
+            <a:extLst>
+              <a:ext uri="{FF2B5EF4-FFF2-40B4-BE49-F238E27FC236}">
+                <a16:creationId xmlns:a16="http://schemas.microsoft.com/office/drawing/2014/main" id="{B8B6145E-DC87-DA56-EDFC-E9A4A958287D}"/>
               </a:ext>
             </a:extLst>
           </p:cNvPr>
@@ -5344,7 +5518,7 @@
           <p:cNvPr id="7" name="TextBox 6">
             <a:extLst>
               <a:ext uri="{FF2B5EF4-FFF2-40B4-BE49-F238E27FC236}">
-                <a16:creationId xmlns:a16="http://schemas.microsoft.com/office/drawing/2014/main" id="{4F461D76-1A07-1BA2-10DC-FF6228B50190}"/>
+                <a16:creationId xmlns:a16="http://schemas.microsoft.com/office/drawing/2014/main" id="{8CC84349-ABC2-61B3-417D-811D01A87E11}"/>
               </a:ext>
             </a:extLst>
           </p:cNvPr>
@@ -5387,7 +5561,7 @@
           <p:cNvPr id="8" name="TextBox 7">
             <a:extLst>
               <a:ext uri="{FF2B5EF4-FFF2-40B4-BE49-F238E27FC236}">
-                <a16:creationId xmlns:a16="http://schemas.microsoft.com/office/drawing/2014/main" id="{DF81C966-7F0C-8A76-BF57-AFAF7197E029}"/>
+                <a16:creationId xmlns:a16="http://schemas.microsoft.com/office/drawing/2014/main" id="{0CF90D66-C036-816E-6AC0-3EAC14EC39C6}"/>
               </a:ext>
             </a:extLst>
           </p:cNvPr>
@@ -5430,7 +5604,7 @@
           <p:cNvPr id="9" name="TextBox 8">
             <a:extLst>
               <a:ext uri="{FF2B5EF4-FFF2-40B4-BE49-F238E27FC236}">
-                <a16:creationId xmlns:a16="http://schemas.microsoft.com/office/drawing/2014/main" id="{5813F195-26C8-B9D5-7B2C-CE6D08840086}"/>
+                <a16:creationId xmlns:a16="http://schemas.microsoft.com/office/drawing/2014/main" id="{DE0F5614-63AE-08E0-2783-55AEFE232EEA}"/>
               </a:ext>
             </a:extLst>
           </p:cNvPr>
@@ -5459,7 +5633,7 @@
                 <a:latin typeface="HY견고딕" panose="02030600000101010101" pitchFamily="18" charset="-127"/>
                 <a:ea typeface="HY견고딕" panose="02030600000101010101" pitchFamily="18" charset="-127"/>
               </a:rPr>
-              <a:t>90%</a:t>
+              <a:t>95%</a:t>
             </a:r>
             <a:endParaRPr lang="ko-KR" altLang="en-US" sz="1000" dirty="0">
               <a:latin typeface="HY견고딕" panose="02030600000101010101" pitchFamily="18" charset="-127"/>
@@ -5471,7 +5645,7 @@
     </p:spTree>
     <p:extLst>
       <p:ext uri="{BB962C8B-B14F-4D97-AF65-F5344CB8AC3E}">
-        <p14:creationId xmlns:p14="http://schemas.microsoft.com/office/powerpoint/2010/main" val="256126388"/>
+        <p14:creationId xmlns:p14="http://schemas.microsoft.com/office/powerpoint/2010/main" val="1374066864"/>
       </p:ext>
     </p:extLst>
   </p:cSld>
@@ -5481,360 +5655,7 @@
 </p:sld>
 </file>
 
-<file path=ppt/slides/slide11.xml><?xml version="1.0" encoding="utf-8"?>
-<p:sld xmlns:a="http://schemas.openxmlformats.org/drawingml/2006/main" xmlns:r="http://schemas.openxmlformats.org/officeDocument/2006/relationships" xmlns:p="http://schemas.openxmlformats.org/presentationml/2006/main">
-  <p:cSld>
-    <p:spTree>
-      <p:nvGrpSpPr>
-        <p:cNvPr id="1" name=""/>
-        <p:cNvGrpSpPr/>
-        <p:nvPr/>
-      </p:nvGrpSpPr>
-      <p:grpSpPr>
-        <a:xfrm>
-          <a:off x="0" y="0"/>
-          <a:ext cx="0" cy="0"/>
-          <a:chOff x="0" y="0"/>
-          <a:chExt cx="0" cy="0"/>
-        </a:xfrm>
-      </p:grpSpPr>
-      <p:sp>
-        <p:nvSpPr>
-          <p:cNvPr id="2" name="제목 1">
-            <a:extLst>
-              <a:ext uri="{FF2B5EF4-FFF2-40B4-BE49-F238E27FC236}">
-                <a16:creationId xmlns:a16="http://schemas.microsoft.com/office/drawing/2014/main" id="{DC19FCF3-0462-33B2-3736-AFB54CB0F3B6}"/>
-              </a:ext>
-            </a:extLst>
-          </p:cNvPr>
-          <p:cNvSpPr>
-            <a:spLocks noGrp="1"/>
-          </p:cNvSpPr>
-          <p:nvPr>
-            <p:ph type="title"/>
-          </p:nvPr>
-        </p:nvSpPr>
-        <p:spPr/>
-        <p:txBody>
-          <a:bodyPr/>
-          <a:lstStyle/>
-          <a:p>
-            <a:r>
-              <a:rPr lang="ko-KR" altLang="en-US" dirty="0"/>
-              <a:t>출시</a:t>
-            </a:r>
-          </a:p>
-        </p:txBody>
-      </p:sp>
-      <p:sp>
-        <p:nvSpPr>
-          <p:cNvPr id="3" name="내용 개체 틀 2">
-            <a:extLst>
-              <a:ext uri="{FF2B5EF4-FFF2-40B4-BE49-F238E27FC236}">
-                <a16:creationId xmlns:a16="http://schemas.microsoft.com/office/drawing/2014/main" id="{298A7A2D-87A0-C2E7-B1E0-C83CE70A12B0}"/>
-              </a:ext>
-            </a:extLst>
-          </p:cNvPr>
-          <p:cNvSpPr>
-            <a:spLocks noGrp="1"/>
-          </p:cNvSpPr>
-          <p:nvPr>
-            <p:ph idx="1"/>
-          </p:nvPr>
-        </p:nvSpPr>
-        <p:spPr/>
-        <p:txBody>
-          <a:bodyPr/>
-          <a:lstStyle/>
-          <a:p>
-            <a:r>
-              <a:rPr lang="ko-KR" altLang="en-US" dirty="0"/>
-              <a:t>플랫폼</a:t>
-            </a:r>
-            <a:endParaRPr lang="en-US" altLang="ko-KR" dirty="0"/>
-          </a:p>
-          <a:p>
-            <a:pPr lvl="1"/>
-            <a:r>
-              <a:rPr lang="en-US" altLang="ko-KR" dirty="0" err="1"/>
-              <a:t>Github</a:t>
-            </a:r>
-            <a:endParaRPr lang="en-US" altLang="ko-KR" dirty="0"/>
-          </a:p>
-          <a:p>
-            <a:r>
-              <a:rPr lang="ko-KR" altLang="en-US" dirty="0"/>
-              <a:t>가격</a:t>
-            </a:r>
-            <a:endParaRPr lang="en-US" altLang="ko-KR" dirty="0"/>
-          </a:p>
-          <a:p>
-            <a:pPr lvl="1"/>
-            <a:r>
-              <a:rPr lang="ko-KR" altLang="en-US" dirty="0"/>
-              <a:t>오픈소스</a:t>
-            </a:r>
-            <a:r>
-              <a:rPr lang="en-US" altLang="ko-KR" dirty="0"/>
-              <a:t>(</a:t>
-            </a:r>
-            <a:r>
-              <a:rPr lang="ko-KR" altLang="en-US" dirty="0"/>
-              <a:t>무료</a:t>
-            </a:r>
-            <a:r>
-              <a:rPr lang="en-US" altLang="ko-KR" dirty="0"/>
-              <a:t>)</a:t>
-            </a:r>
-            <a:endParaRPr lang="ko-KR" altLang="en-US" dirty="0"/>
-          </a:p>
-        </p:txBody>
-      </p:sp>
-      <p:sp>
-        <p:nvSpPr>
-          <p:cNvPr id="4" name="슬라이드 번호 개체 틀 3">
-            <a:extLst>
-              <a:ext uri="{FF2B5EF4-FFF2-40B4-BE49-F238E27FC236}">
-                <a16:creationId xmlns:a16="http://schemas.microsoft.com/office/drawing/2014/main" id="{FF480D5B-A57B-B07D-9DAE-2A98351BCB58}"/>
-              </a:ext>
-            </a:extLst>
-          </p:cNvPr>
-          <p:cNvSpPr>
-            <a:spLocks noGrp="1"/>
-          </p:cNvSpPr>
-          <p:nvPr>
-            <p:ph type="sldNum" sz="quarter" idx="12"/>
-          </p:nvPr>
-        </p:nvSpPr>
-        <p:spPr/>
-        <p:txBody>
-          <a:bodyPr/>
-          <a:lstStyle/>
-          <a:p>
-            <a:fld id="{E694CC86-33DA-4CBD-A678-F7DD024C14A4}" type="slidenum">
-              <a:rPr lang="ko-KR" altLang="en-US" smtClean="0"/>
-              <a:pPr/>
-              <a:t>11</a:t>
-            </a:fld>
-            <a:r>
-              <a:rPr lang="en-US" altLang="ko-KR"/>
-              <a:t>/##</a:t>
-            </a:r>
-            <a:endParaRPr lang="ko-KR" altLang="en-US" dirty="0"/>
-          </a:p>
-        </p:txBody>
-      </p:sp>
-    </p:spTree>
-    <p:extLst>
-      <p:ext uri="{BB962C8B-B14F-4D97-AF65-F5344CB8AC3E}">
-        <p14:creationId xmlns:p14="http://schemas.microsoft.com/office/powerpoint/2010/main" val="2266979873"/>
-      </p:ext>
-    </p:extLst>
-  </p:cSld>
-  <p:clrMapOvr>
-    <a:masterClrMapping/>
-  </p:clrMapOvr>
-</p:sld>
-</file>
-
-<file path=ppt/slides/slide12.xml><?xml version="1.0" encoding="utf-8"?>
-<p:sld xmlns:a="http://schemas.openxmlformats.org/drawingml/2006/main" xmlns:r="http://schemas.openxmlformats.org/officeDocument/2006/relationships" xmlns:p="http://schemas.openxmlformats.org/presentationml/2006/main">
-  <p:cSld>
-    <p:spTree>
-      <p:nvGrpSpPr>
-        <p:cNvPr id="1" name=""/>
-        <p:cNvGrpSpPr/>
-        <p:nvPr/>
-      </p:nvGrpSpPr>
-      <p:grpSpPr>
-        <a:xfrm>
-          <a:off x="0" y="0"/>
-          <a:ext cx="0" cy="0"/>
-          <a:chOff x="0" y="0"/>
-          <a:chExt cx="0" cy="0"/>
-        </a:xfrm>
-      </p:grpSpPr>
-      <p:sp>
-        <p:nvSpPr>
-          <p:cNvPr id="2" name="제목 1">
-            <a:extLst>
-              <a:ext uri="{FF2B5EF4-FFF2-40B4-BE49-F238E27FC236}">
-                <a16:creationId xmlns:a16="http://schemas.microsoft.com/office/drawing/2014/main" id="{C983A040-B2A1-E2AF-B681-7701D5AE3104}"/>
-              </a:ext>
-            </a:extLst>
-          </p:cNvPr>
-          <p:cNvSpPr>
-            <a:spLocks noGrp="1"/>
-          </p:cNvSpPr>
-          <p:nvPr>
-            <p:ph type="title"/>
-          </p:nvPr>
-        </p:nvSpPr>
-        <p:spPr/>
-        <p:txBody>
-          <a:bodyPr/>
-          <a:lstStyle/>
-          <a:p>
-            <a:r>
-              <a:rPr lang="ko-KR" altLang="en-US" dirty="0"/>
-              <a:t>추후 일정</a:t>
-            </a:r>
-          </a:p>
-        </p:txBody>
-      </p:sp>
-      <p:sp>
-        <p:nvSpPr>
-          <p:cNvPr id="3" name="내용 개체 틀 2">
-            <a:extLst>
-              <a:ext uri="{FF2B5EF4-FFF2-40B4-BE49-F238E27FC236}">
-                <a16:creationId xmlns:a16="http://schemas.microsoft.com/office/drawing/2014/main" id="{0941A029-9DC5-82C0-FE68-969A994C2FCB}"/>
-              </a:ext>
-            </a:extLst>
-          </p:cNvPr>
-          <p:cNvSpPr>
-            <a:spLocks noGrp="1"/>
-          </p:cNvSpPr>
-          <p:nvPr>
-            <p:ph idx="1"/>
-          </p:nvPr>
-        </p:nvSpPr>
-        <p:spPr>
-          <a:xfrm>
-            <a:off x="838200" y="1029195"/>
-            <a:ext cx="10515600" cy="3991616"/>
-          </a:xfrm>
-        </p:spPr>
-        <p:txBody>
-          <a:bodyPr>
-            <a:normAutofit/>
-          </a:bodyPr>
-          <a:lstStyle/>
-          <a:p>
-            <a:r>
-              <a:rPr lang="ko-KR" altLang="en-US" dirty="0"/>
-              <a:t>현재 구현된 기본 정적</a:t>
-            </a:r>
-            <a:r>
-              <a:rPr lang="en-US" altLang="ko-KR" dirty="0"/>
-              <a:t>, </a:t>
-            </a:r>
-            <a:r>
-              <a:rPr lang="ko-KR" altLang="en-US" dirty="0"/>
-              <a:t>동적 이벤트를 기반으로 </a:t>
-            </a:r>
-            <a:br>
-              <a:rPr lang="en-US" altLang="ko-KR" dirty="0"/>
-            </a:br>
-            <a:r>
-              <a:rPr lang="ko-KR" altLang="en-US" dirty="0"/>
-              <a:t>태풍</a:t>
-            </a:r>
-            <a:r>
-              <a:rPr lang="en-US" altLang="ko-KR" dirty="0"/>
-              <a:t> </a:t>
-            </a:r>
-            <a:r>
-              <a:rPr lang="ko-KR" altLang="en-US" dirty="0"/>
-              <a:t>등 다양한 이벤트를 구현할 수 있게 기능 추가 및 테스트</a:t>
-            </a:r>
-            <a:endParaRPr lang="en-US" altLang="ko-KR" dirty="0"/>
-          </a:p>
-          <a:p>
-            <a:r>
-              <a:rPr lang="en-US" altLang="ko-KR" dirty="0"/>
-              <a:t>NPC, </a:t>
-            </a:r>
-            <a:r>
-              <a:rPr lang="ko-KR" altLang="en-US" dirty="0"/>
-              <a:t>기타 </a:t>
-            </a:r>
-            <a:r>
-              <a:rPr lang="en-US" altLang="ko-KR" dirty="0"/>
-              <a:t>UI </a:t>
-            </a:r>
-            <a:r>
-              <a:rPr lang="ko-KR" altLang="en-US" dirty="0"/>
-              <a:t>요소나 오브젝트 등의 </a:t>
-            </a:r>
-            <a:r>
-              <a:rPr lang="ko-KR" altLang="en-US" dirty="0" err="1"/>
-              <a:t>스프라이트</a:t>
-            </a:r>
-            <a:r>
-              <a:rPr lang="ko-KR" altLang="en-US" dirty="0"/>
-              <a:t> 제작</a:t>
-            </a:r>
-            <a:endParaRPr lang="en-US" altLang="ko-KR" dirty="0"/>
-          </a:p>
-          <a:p>
-            <a:r>
-              <a:rPr lang="ko-KR" altLang="en-US" dirty="0"/>
-              <a:t>배경음악</a:t>
-            </a:r>
-            <a:r>
-              <a:rPr lang="en-US" altLang="ko-KR" dirty="0"/>
-              <a:t>, </a:t>
-            </a:r>
-            <a:r>
-              <a:rPr lang="ko-KR" altLang="en-US" dirty="0"/>
-              <a:t>사운드 </a:t>
-            </a:r>
-            <a:r>
-              <a:rPr lang="ko-KR" altLang="en-US"/>
-              <a:t>이펙트 적용</a:t>
-            </a:r>
-            <a:endParaRPr lang="en-US" altLang="ko-KR" dirty="0"/>
-          </a:p>
-        </p:txBody>
-      </p:sp>
-      <p:sp>
-        <p:nvSpPr>
-          <p:cNvPr id="4" name="슬라이드 번호 개체 틀 3">
-            <a:extLst>
-              <a:ext uri="{FF2B5EF4-FFF2-40B4-BE49-F238E27FC236}">
-                <a16:creationId xmlns:a16="http://schemas.microsoft.com/office/drawing/2014/main" id="{3CCF8C7F-202A-46D4-1C03-9A2E6985A158}"/>
-              </a:ext>
-            </a:extLst>
-          </p:cNvPr>
-          <p:cNvSpPr>
-            <a:spLocks noGrp="1"/>
-          </p:cNvSpPr>
-          <p:nvPr>
-            <p:ph type="sldNum" sz="quarter" idx="12"/>
-          </p:nvPr>
-        </p:nvSpPr>
-        <p:spPr/>
-        <p:txBody>
-          <a:bodyPr/>
-          <a:lstStyle/>
-          <a:p>
-            <a:fld id="{E694CC86-33DA-4CBD-A678-F7DD024C14A4}" type="slidenum">
-              <a:rPr lang="ko-KR" altLang="en-US" smtClean="0"/>
-              <a:pPr/>
-              <a:t>12</a:t>
-            </a:fld>
-            <a:r>
-              <a:rPr lang="en-US" altLang="ko-KR" dirty="0"/>
-              <a:t>/10</a:t>
-            </a:r>
-            <a:endParaRPr lang="ko-KR" altLang="en-US" dirty="0"/>
-          </a:p>
-        </p:txBody>
-      </p:sp>
-    </p:spTree>
-    <p:extLst>
-      <p:ext uri="{BB962C8B-B14F-4D97-AF65-F5344CB8AC3E}">
-        <p14:creationId xmlns:p14="http://schemas.microsoft.com/office/powerpoint/2010/main" val="286812283"/>
-      </p:ext>
-    </p:extLst>
-  </p:cSld>
-  <p:clrMapOvr>
-    <a:masterClrMapping/>
-  </p:clrMapOvr>
-</p:sld>
-</file>
-
-<file path=ppt/slides/slide2.xml><?xml version="1.0" encoding="utf-8"?>
+<file path=ppt/slides/slide4.xml><?xml version="1.0" encoding="utf-8"?>
 <p:sld xmlns:a="http://schemas.openxmlformats.org/drawingml/2006/main" xmlns:r="http://schemas.openxmlformats.org/officeDocument/2006/relationships" xmlns:p="http://schemas.openxmlformats.org/presentationml/2006/main">
   <p:cSld>
     <p:spTree>
@@ -5842,7 +5663,7 @@
         <p:cNvPr id="1" name="">
           <a:extLst>
             <a:ext uri="{FF2B5EF4-FFF2-40B4-BE49-F238E27FC236}">
-              <a16:creationId xmlns:a16="http://schemas.microsoft.com/office/drawing/2014/main" id="{10914D7E-553C-C0DF-F6A2-E01B4B20E4D4}"/>
+              <a16:creationId xmlns:a16="http://schemas.microsoft.com/office/drawing/2014/main" id="{7FD15CA3-E021-E939-7DE1-FC197172E5CC}"/>
             </a:ext>
           </a:extLst>
         </p:cNvPr>
@@ -5859,10 +5680,109 @@
       </p:grpSpPr>
       <p:sp>
         <p:nvSpPr>
-          <p:cNvPr id="12" name="사각형: 둥근 모서리 11">
-            <a:extLst>
-              <a:ext uri="{FF2B5EF4-FFF2-40B4-BE49-F238E27FC236}">
-                <a16:creationId xmlns:a16="http://schemas.microsoft.com/office/drawing/2014/main" id="{5DF499C5-1587-5788-A0DC-3371E7CAAAAD}"/>
+          <p:cNvPr id="2" name="제목 1">
+            <a:extLst>
+              <a:ext uri="{FF2B5EF4-FFF2-40B4-BE49-F238E27FC236}">
+                <a16:creationId xmlns:a16="http://schemas.microsoft.com/office/drawing/2014/main" id="{9537272B-FDC6-D1B8-34BD-38EFBAF0AE00}"/>
+              </a:ext>
+            </a:extLst>
+          </p:cNvPr>
+          <p:cNvSpPr>
+            <a:spLocks noGrp="1"/>
+          </p:cNvSpPr>
+          <p:nvPr>
+            <p:ph type="title"/>
+          </p:nvPr>
+        </p:nvSpPr>
+        <p:spPr/>
+        <p:txBody>
+          <a:bodyPr/>
+          <a:lstStyle/>
+          <a:p>
+            <a:r>
+              <a:rPr lang="ko-KR" altLang="en-US" dirty="0"/>
+              <a:t>진행사항</a:t>
+            </a:r>
+          </a:p>
+        </p:txBody>
+      </p:sp>
+      <p:sp>
+        <p:nvSpPr>
+          <p:cNvPr id="3" name="내용 개체 틀 2">
+            <a:extLst>
+              <a:ext uri="{FF2B5EF4-FFF2-40B4-BE49-F238E27FC236}">
+                <a16:creationId xmlns:a16="http://schemas.microsoft.com/office/drawing/2014/main" id="{21C99886-2F79-3F7A-7DD6-6C4B1C429E8F}"/>
+              </a:ext>
+            </a:extLst>
+          </p:cNvPr>
+          <p:cNvSpPr>
+            <a:spLocks noGrp="1"/>
+          </p:cNvSpPr>
+          <p:nvPr>
+            <p:ph idx="1"/>
+          </p:nvPr>
+        </p:nvSpPr>
+        <p:spPr>
+          <a:xfrm>
+            <a:off x="838200" y="1029195"/>
+            <a:ext cx="10515600" cy="565562"/>
+          </a:xfrm>
+        </p:spPr>
+        <p:txBody>
+          <a:bodyPr/>
+          <a:lstStyle/>
+          <a:p>
+            <a:r>
+              <a:rPr lang="ko-KR" altLang="en-US" dirty="0" err="1"/>
+              <a:t>스프라이트</a:t>
+            </a:r>
+            <a:r>
+              <a:rPr lang="ko-KR" altLang="en-US" dirty="0"/>
+              <a:t> 제작 현황</a:t>
+            </a:r>
+          </a:p>
+        </p:txBody>
+      </p:sp>
+      <p:sp>
+        <p:nvSpPr>
+          <p:cNvPr id="4" name="슬라이드 번호 개체 틀 3">
+            <a:extLst>
+              <a:ext uri="{FF2B5EF4-FFF2-40B4-BE49-F238E27FC236}">
+                <a16:creationId xmlns:a16="http://schemas.microsoft.com/office/drawing/2014/main" id="{3141ABCE-9B5D-9AFE-717E-FCB99D277E15}"/>
+              </a:ext>
+            </a:extLst>
+          </p:cNvPr>
+          <p:cNvSpPr>
+            <a:spLocks noGrp="1"/>
+          </p:cNvSpPr>
+          <p:nvPr>
+            <p:ph type="sldNum" sz="quarter" idx="12"/>
+          </p:nvPr>
+        </p:nvSpPr>
+        <p:spPr/>
+        <p:txBody>
+          <a:bodyPr/>
+          <a:lstStyle/>
+          <a:p>
+            <a:fld id="{E694CC86-33DA-4CBD-A678-F7DD024C14A4}" type="slidenum">
+              <a:rPr lang="ko-KR" altLang="en-US" smtClean="0"/>
+              <a:pPr/>
+              <a:t>4</a:t>
+            </a:fld>
+            <a:r>
+              <a:rPr lang="en-US" altLang="ko-KR"/>
+              <a:t>/##</a:t>
+            </a:r>
+            <a:endParaRPr lang="ko-KR" altLang="en-US" dirty="0"/>
+          </a:p>
+        </p:txBody>
+      </p:sp>
+      <p:sp>
+        <p:nvSpPr>
+          <p:cNvPr id="5" name="사각형: 둥근 모서리 4">
+            <a:extLst>
+              <a:ext uri="{FF2B5EF4-FFF2-40B4-BE49-F238E27FC236}">
+                <a16:creationId xmlns:a16="http://schemas.microsoft.com/office/drawing/2014/main" id="{F7656F95-A447-6B30-015C-2A60EB3FAC37}"/>
               </a:ext>
             </a:extLst>
           </p:cNvPr>
@@ -5871,8 +5791,8 @@
         </p:nvSpPr>
         <p:spPr>
           <a:xfrm>
-            <a:off x="609598" y="5840557"/>
-            <a:ext cx="10639779" cy="192595"/>
+            <a:off x="609598" y="5828805"/>
+            <a:ext cx="10793188" cy="204347"/>
           </a:xfrm>
           <a:prstGeom prst="roundRect">
             <a:avLst>
@@ -5916,74 +5836,10 @@
       </p:sp>
       <p:sp>
         <p:nvSpPr>
-          <p:cNvPr id="2" name="제목 1">
-            <a:extLst>
-              <a:ext uri="{FF2B5EF4-FFF2-40B4-BE49-F238E27FC236}">
-                <a16:creationId xmlns:a16="http://schemas.microsoft.com/office/drawing/2014/main" id="{208A58DB-F0DE-C5B1-CB0C-31D9A99D285D}"/>
-              </a:ext>
-            </a:extLst>
-          </p:cNvPr>
-          <p:cNvSpPr>
-            <a:spLocks noGrp="1"/>
-          </p:cNvSpPr>
-          <p:nvPr>
-            <p:ph type="title"/>
-          </p:nvPr>
-        </p:nvSpPr>
-        <p:spPr/>
-        <p:txBody>
-          <a:bodyPr>
-            <a:normAutofit/>
-          </a:bodyPr>
-          <a:lstStyle/>
-          <a:p>
-            <a:r>
-              <a:rPr lang="ko-KR" altLang="en-US" dirty="0"/>
-              <a:t>지난 주 진행 상황</a:t>
-            </a:r>
-          </a:p>
-        </p:txBody>
-      </p:sp>
-      <p:sp>
-        <p:nvSpPr>
-          <p:cNvPr id="4" name="슬라이드 번호 개체 틀 3">
-            <a:extLst>
-              <a:ext uri="{FF2B5EF4-FFF2-40B4-BE49-F238E27FC236}">
-                <a16:creationId xmlns:a16="http://schemas.microsoft.com/office/drawing/2014/main" id="{4C20CB1A-B85F-7ED5-8585-C0D92149032C}"/>
-              </a:ext>
-            </a:extLst>
-          </p:cNvPr>
-          <p:cNvSpPr>
-            <a:spLocks noGrp="1"/>
-          </p:cNvSpPr>
-          <p:nvPr>
-            <p:ph type="sldNum" sz="quarter" idx="12"/>
-          </p:nvPr>
-        </p:nvSpPr>
-        <p:spPr/>
-        <p:txBody>
-          <a:bodyPr/>
-          <a:lstStyle/>
-          <a:p>
-            <a:fld id="{E694CC86-33DA-4CBD-A678-F7DD024C14A4}" type="slidenum">
-              <a:rPr lang="ko-KR" altLang="en-US" smtClean="0"/>
-              <a:pPr/>
-              <a:t>2</a:t>
-            </a:fld>
-            <a:r>
-              <a:rPr lang="en-US" altLang="ko-KR" dirty="0"/>
-              <a:t>/10</a:t>
-            </a:r>
-            <a:endParaRPr lang="ko-KR" altLang="en-US" dirty="0"/>
-          </a:p>
-        </p:txBody>
-      </p:sp>
-      <p:sp>
-        <p:nvSpPr>
           <p:cNvPr id="6" name="사각형: 둥근 모서리 5">
             <a:extLst>
               <a:ext uri="{FF2B5EF4-FFF2-40B4-BE49-F238E27FC236}">
-                <a16:creationId xmlns:a16="http://schemas.microsoft.com/office/drawing/2014/main" id="{5D4EDA68-3964-D89E-8528-4F1A9F9D377D}"/>
+                <a16:creationId xmlns:a16="http://schemas.microsoft.com/office/drawing/2014/main" id="{37A7AF17-DD7D-7ACA-1AA1-ED4F84D38C0B}"/>
               </a:ext>
             </a:extLst>
           </p:cNvPr>
@@ -6037,7 +5893,7 @@
           <p:cNvPr id="7" name="TextBox 6">
             <a:extLst>
               <a:ext uri="{FF2B5EF4-FFF2-40B4-BE49-F238E27FC236}">
-                <a16:creationId xmlns:a16="http://schemas.microsoft.com/office/drawing/2014/main" id="{46394544-8D6B-E8B0-57AB-03D864D53601}"/>
+                <a16:creationId xmlns:a16="http://schemas.microsoft.com/office/drawing/2014/main" id="{BC417559-42B4-68DB-1103-BA9BA2312F46}"/>
               </a:ext>
             </a:extLst>
           </p:cNvPr>
@@ -6080,7 +5936,7 @@
           <p:cNvPr id="8" name="TextBox 7">
             <a:extLst>
               <a:ext uri="{FF2B5EF4-FFF2-40B4-BE49-F238E27FC236}">
-                <a16:creationId xmlns:a16="http://schemas.microsoft.com/office/drawing/2014/main" id="{3E0DAEA3-5323-6605-E212-0E6E55D9C63A}"/>
+                <a16:creationId xmlns:a16="http://schemas.microsoft.com/office/drawing/2014/main" id="{7F5890C3-2538-BFED-D34C-2ABA0919D8AF}"/>
               </a:ext>
             </a:extLst>
           </p:cNvPr>
@@ -6120,10 +5976,10 @@
       </p:sp>
       <p:sp>
         <p:nvSpPr>
-          <p:cNvPr id="17" name="TextBox 16">
-            <a:extLst>
-              <a:ext uri="{FF2B5EF4-FFF2-40B4-BE49-F238E27FC236}">
-                <a16:creationId xmlns:a16="http://schemas.microsoft.com/office/drawing/2014/main" id="{4217279C-B351-5FB2-A632-4266812EE967}"/>
+          <p:cNvPr id="9" name="TextBox 8">
+            <a:extLst>
+              <a:ext uri="{FF2B5EF4-FFF2-40B4-BE49-F238E27FC236}">
+                <a16:creationId xmlns:a16="http://schemas.microsoft.com/office/drawing/2014/main" id="{E3F1FAD6-7DB7-C694-46BC-48E2723FFDF0}"/>
               </a:ext>
             </a:extLst>
           </p:cNvPr>
@@ -6152,7 +6008,7 @@
                 <a:latin typeface="HY견고딕" panose="02030600000101010101" pitchFamily="18" charset="-127"/>
                 <a:ea typeface="HY견고딕" panose="02030600000101010101" pitchFamily="18" charset="-127"/>
               </a:rPr>
-              <a:t>90%</a:t>
+              <a:t>95%</a:t>
             </a:r>
             <a:endParaRPr lang="ko-KR" altLang="en-US" sz="1000" dirty="0">
               <a:latin typeface="HY견고딕" panose="02030600000101010101" pitchFamily="18" charset="-127"/>
@@ -6163,354 +6019,20 @@
       </p:sp>
       <p:sp>
         <p:nvSpPr>
-          <p:cNvPr id="13" name="내용 개체 틀 12">
-            <a:extLst>
-              <a:ext uri="{FF2B5EF4-FFF2-40B4-BE49-F238E27FC236}">
-                <a16:creationId xmlns:a16="http://schemas.microsoft.com/office/drawing/2014/main" id="{05D53968-ED29-002D-5645-B1969B15F40D}"/>
-              </a:ext>
-            </a:extLst>
-          </p:cNvPr>
-          <p:cNvSpPr>
-            <a:spLocks noGrp="1"/>
-          </p:cNvSpPr>
-          <p:nvPr>
-            <p:ph idx="1"/>
-          </p:nvPr>
+          <p:cNvPr id="10" name="TextBox 9">
+            <a:extLst>
+              <a:ext uri="{FF2B5EF4-FFF2-40B4-BE49-F238E27FC236}">
+                <a16:creationId xmlns:a16="http://schemas.microsoft.com/office/drawing/2014/main" id="{C5CC0E7A-4916-6CA7-6905-0BA2BF3FFC58}"/>
+              </a:ext>
+            </a:extLst>
+          </p:cNvPr>
+          <p:cNvSpPr txBox="1"/>
+          <p:nvPr/>
         </p:nvSpPr>
         <p:spPr>
           <a:xfrm>
-            <a:off x="838199" y="1029196"/>
-            <a:ext cx="9203871" cy="1428778"/>
-          </a:xfrm>
-        </p:spPr>
-        <p:txBody>
-          <a:bodyPr>
-            <a:normAutofit/>
-          </a:bodyPr>
-          <a:lstStyle/>
-          <a:p>
-            <a:r>
-              <a:rPr lang="en-US" altLang="ko-KR" dirty="0"/>
-              <a:t>WQFS </a:t>
-            </a:r>
-            <a:r>
-              <a:rPr lang="ko-KR" altLang="en-US" dirty="0"/>
-              <a:t>퀘스트 목록</a:t>
-            </a:r>
-            <a:endParaRPr lang="en-US" altLang="ko-KR" dirty="0"/>
-          </a:p>
-          <a:p>
-            <a:pPr lvl="1"/>
-            <a:r>
-              <a:rPr lang="en-US" altLang="ko-KR" dirty="0"/>
-              <a:t>UI</a:t>
-            </a:r>
-            <a:r>
-              <a:rPr lang="ko-KR" altLang="en-US" dirty="0"/>
-              <a:t>로 퀘스트를 표시할 수 있게 퀘스트 리스트를 문자열 형태로 반환</a:t>
-            </a:r>
-          </a:p>
-        </p:txBody>
-      </p:sp>
-      <p:pic>
-        <p:nvPicPr>
-          <p:cNvPr id="10" name="그림 9">
-            <a:extLst>
-              <a:ext uri="{FF2B5EF4-FFF2-40B4-BE49-F238E27FC236}">
-                <a16:creationId xmlns:a16="http://schemas.microsoft.com/office/drawing/2014/main" id="{862BADBE-63FB-F143-82E7-D941AE6AAF9E}"/>
-              </a:ext>
-            </a:extLst>
-          </p:cNvPr>
-          <p:cNvPicPr>
-            <a:picLocks noChangeAspect="1"/>
-          </p:cNvPicPr>
-          <p:nvPr/>
-        </p:nvPicPr>
-        <p:blipFill>
-          <a:blip r:embed="rId2">
-            <a:extLst>
-              <a:ext uri="{28A0092B-C50C-407E-A947-70E740481C1C}">
-                <a14:useLocalDpi xmlns:a14="http://schemas.microsoft.com/office/drawing/2010/main" val="0"/>
-              </a:ext>
-            </a:extLst>
-          </a:blip>
-          <a:stretch>
-            <a:fillRect/>
-          </a:stretch>
-        </p:blipFill>
-        <p:spPr>
-          <a:xfrm>
-            <a:off x="6486632" y="2566180"/>
-            <a:ext cx="5210755" cy="1725640"/>
-          </a:xfrm>
-          <a:prstGeom prst="rect">
-            <a:avLst/>
-          </a:prstGeom>
-        </p:spPr>
-      </p:pic>
-      <p:pic>
-        <p:nvPicPr>
-          <p:cNvPr id="14" name="그림 13" descr="텍스트, 스크린샷, 소프트웨어, 디스플레이이(가) 표시된 사진&#10;&#10;AI 생성 콘텐츠는 정확하지 않을 수 있습니다.">
-            <a:extLst>
-              <a:ext uri="{FF2B5EF4-FFF2-40B4-BE49-F238E27FC236}">
-                <a16:creationId xmlns:a16="http://schemas.microsoft.com/office/drawing/2014/main" id="{3FB149E9-FC7D-BB59-136D-988894CEBEC0}"/>
-              </a:ext>
-            </a:extLst>
-          </p:cNvPr>
-          <p:cNvPicPr>
-            <a:picLocks noChangeAspect="1"/>
-          </p:cNvPicPr>
-          <p:nvPr/>
-        </p:nvPicPr>
-        <p:blipFill>
-          <a:blip r:embed="rId3">
-            <a:extLst>
-              <a:ext uri="{28A0092B-C50C-407E-A947-70E740481C1C}">
-                <a14:useLocalDpi xmlns:a14="http://schemas.microsoft.com/office/drawing/2010/main" val="0"/>
-              </a:ext>
-            </a:extLst>
-          </a:blip>
-          <a:stretch>
-            <a:fillRect/>
-          </a:stretch>
-        </p:blipFill>
-        <p:spPr>
-          <a:xfrm>
-            <a:off x="838199" y="1858566"/>
-            <a:ext cx="5045473" cy="3927760"/>
-          </a:xfrm>
-          <a:prstGeom prst="rect">
-            <a:avLst/>
-          </a:prstGeom>
-        </p:spPr>
-      </p:pic>
-    </p:spTree>
-    <p:extLst>
-      <p:ext uri="{BB962C8B-B14F-4D97-AF65-F5344CB8AC3E}">
-        <p14:creationId xmlns:p14="http://schemas.microsoft.com/office/powerpoint/2010/main" val="1881528289"/>
-      </p:ext>
-    </p:extLst>
-  </p:cSld>
-  <p:clrMapOvr>
-    <a:masterClrMapping/>
-  </p:clrMapOvr>
-</p:sld>
-</file>
-
-<file path=ppt/slides/slide3.xml><?xml version="1.0" encoding="utf-8"?>
-<p:sld xmlns:a="http://schemas.openxmlformats.org/drawingml/2006/main" xmlns:r="http://schemas.openxmlformats.org/officeDocument/2006/relationships" xmlns:p="http://schemas.openxmlformats.org/presentationml/2006/main">
-  <p:cSld>
-    <p:spTree>
-      <p:nvGrpSpPr>
-        <p:cNvPr id="1" name="">
-          <a:extLst>
-            <a:ext uri="{FF2B5EF4-FFF2-40B4-BE49-F238E27FC236}">
-              <a16:creationId xmlns:a16="http://schemas.microsoft.com/office/drawing/2014/main" id="{1BAA932C-7AC0-A026-41E2-A7E50647A485}"/>
-            </a:ext>
-          </a:extLst>
-        </p:cNvPr>
-        <p:cNvGrpSpPr/>
-        <p:nvPr/>
-      </p:nvGrpSpPr>
-      <p:grpSpPr>
-        <a:xfrm>
-          <a:off x="0" y="0"/>
-          <a:ext cx="0" cy="0"/>
-          <a:chOff x="0" y="0"/>
-          <a:chExt cx="0" cy="0"/>
-        </a:xfrm>
-      </p:grpSpPr>
-      <p:sp>
-        <p:nvSpPr>
-          <p:cNvPr id="9" name="사각형: 둥근 모서리 8">
-            <a:extLst>
-              <a:ext uri="{FF2B5EF4-FFF2-40B4-BE49-F238E27FC236}">
-                <a16:creationId xmlns:a16="http://schemas.microsoft.com/office/drawing/2014/main" id="{74FE7B53-3BF7-9CC8-3F40-EBB6EE5D3076}"/>
-              </a:ext>
-            </a:extLst>
-          </p:cNvPr>
-          <p:cNvSpPr/>
-          <p:nvPr/>
-        </p:nvSpPr>
-        <p:spPr>
-          <a:xfrm>
-            <a:off x="609598" y="5840557"/>
-            <a:ext cx="10639779" cy="192595"/>
-          </a:xfrm>
-          <a:prstGeom prst="roundRect">
-            <a:avLst>
-              <a:gd name="adj" fmla="val 50000"/>
-            </a:avLst>
-          </a:prstGeom>
-          <a:solidFill>
-            <a:schemeClr val="accent6">
-              <a:lumMod val="60000"/>
-              <a:lumOff val="40000"/>
-            </a:schemeClr>
-          </a:solidFill>
-          <a:ln w="28575">
-            <a:noFill/>
-          </a:ln>
-        </p:spPr>
-        <p:style>
-          <a:lnRef idx="2">
-            <a:schemeClr val="accent1">
-              <a:shade val="15000"/>
-            </a:schemeClr>
-          </a:lnRef>
-          <a:fillRef idx="1">
-            <a:schemeClr val="accent1"/>
-          </a:fillRef>
-          <a:effectRef idx="0">
-            <a:schemeClr val="accent1"/>
-          </a:effectRef>
-          <a:fontRef idx="minor">
-            <a:schemeClr val="lt1"/>
-          </a:fontRef>
-        </p:style>
-        <p:txBody>
-          <a:bodyPr rtlCol="0" anchor="ctr"/>
-          <a:lstStyle/>
-          <a:p>
-            <a:pPr algn="ctr"/>
-            <a:endParaRPr lang="ko-KR" altLang="en-US"/>
-          </a:p>
-        </p:txBody>
-      </p:sp>
-      <p:sp>
-        <p:nvSpPr>
-          <p:cNvPr id="2" name="제목 1">
-            <a:extLst>
-              <a:ext uri="{FF2B5EF4-FFF2-40B4-BE49-F238E27FC236}">
-                <a16:creationId xmlns:a16="http://schemas.microsoft.com/office/drawing/2014/main" id="{932DF39E-5FDE-E5CA-D1A1-CA514350AD83}"/>
-              </a:ext>
-            </a:extLst>
-          </p:cNvPr>
-          <p:cNvSpPr>
-            <a:spLocks noGrp="1"/>
-          </p:cNvSpPr>
-          <p:nvPr>
-            <p:ph type="title"/>
-          </p:nvPr>
-        </p:nvSpPr>
-        <p:spPr/>
-        <p:txBody>
-          <a:bodyPr>
-            <a:normAutofit/>
-          </a:bodyPr>
-          <a:lstStyle/>
-          <a:p>
-            <a:r>
-              <a:rPr lang="ko-KR" altLang="en-US" dirty="0"/>
-              <a:t>지난 주 진행 상황</a:t>
-            </a:r>
-          </a:p>
-        </p:txBody>
-      </p:sp>
-      <p:sp>
-        <p:nvSpPr>
-          <p:cNvPr id="4" name="슬라이드 번호 개체 틀 3">
-            <a:extLst>
-              <a:ext uri="{FF2B5EF4-FFF2-40B4-BE49-F238E27FC236}">
-                <a16:creationId xmlns:a16="http://schemas.microsoft.com/office/drawing/2014/main" id="{A6D81ED3-057E-790E-9D48-05F34AA23E82}"/>
-              </a:ext>
-            </a:extLst>
-          </p:cNvPr>
-          <p:cNvSpPr>
-            <a:spLocks noGrp="1"/>
-          </p:cNvSpPr>
-          <p:nvPr>
-            <p:ph type="sldNum" sz="quarter" idx="12"/>
-          </p:nvPr>
-        </p:nvSpPr>
-        <p:spPr/>
-        <p:txBody>
-          <a:bodyPr/>
-          <a:lstStyle/>
-          <a:p>
-            <a:fld id="{E694CC86-33DA-4CBD-A678-F7DD024C14A4}" type="slidenum">
-              <a:rPr lang="ko-KR" altLang="en-US" smtClean="0"/>
-              <a:pPr/>
-              <a:t>3</a:t>
-            </a:fld>
-            <a:r>
-              <a:rPr lang="en-US" altLang="ko-KR" dirty="0"/>
-              <a:t>/10</a:t>
-            </a:r>
-            <a:endParaRPr lang="ko-KR" altLang="en-US" dirty="0"/>
-          </a:p>
-        </p:txBody>
-      </p:sp>
-      <p:sp>
-        <p:nvSpPr>
-          <p:cNvPr id="6" name="사각형: 둥근 모서리 5">
-            <a:extLst>
-              <a:ext uri="{FF2B5EF4-FFF2-40B4-BE49-F238E27FC236}">
-                <a16:creationId xmlns:a16="http://schemas.microsoft.com/office/drawing/2014/main" id="{61C772F6-1917-AE1F-3930-78EE6138062C}"/>
-              </a:ext>
-            </a:extLst>
-          </p:cNvPr>
-          <p:cNvSpPr/>
-          <p:nvPr/>
-        </p:nvSpPr>
-        <p:spPr>
-          <a:xfrm>
-            <a:off x="609600" y="5840557"/>
-            <a:ext cx="10972800" cy="192595"/>
-          </a:xfrm>
-          <a:prstGeom prst="roundRect">
-            <a:avLst>
-              <a:gd name="adj" fmla="val 50000"/>
-            </a:avLst>
-          </a:prstGeom>
-          <a:noFill/>
-          <a:ln w="28575">
-            <a:solidFill>
-              <a:schemeClr val="tx1"/>
-            </a:solidFill>
-          </a:ln>
-        </p:spPr>
-        <p:style>
-          <a:lnRef idx="2">
-            <a:schemeClr val="accent1">
-              <a:shade val="15000"/>
-            </a:schemeClr>
-          </a:lnRef>
-          <a:fillRef idx="1">
-            <a:schemeClr val="accent1"/>
-          </a:fillRef>
-          <a:effectRef idx="0">
-            <a:schemeClr val="accent1"/>
-          </a:effectRef>
-          <a:fontRef idx="minor">
-            <a:schemeClr val="lt1"/>
-          </a:fontRef>
-        </p:style>
-        <p:txBody>
-          <a:bodyPr rtlCol="0" anchor="ctr"/>
-          <a:lstStyle/>
-          <a:p>
-            <a:pPr algn="ctr"/>
-            <a:endParaRPr lang="ko-KR" altLang="en-US"/>
-          </a:p>
-        </p:txBody>
-      </p:sp>
-      <p:sp>
-        <p:nvSpPr>
-          <p:cNvPr id="7" name="TextBox 6">
-            <a:extLst>
-              <a:ext uri="{FF2B5EF4-FFF2-40B4-BE49-F238E27FC236}">
-                <a16:creationId xmlns:a16="http://schemas.microsoft.com/office/drawing/2014/main" id="{5D72D3D5-B958-37D8-0CB2-C60915C0BE46}"/>
-              </a:ext>
-            </a:extLst>
-          </p:cNvPr>
-          <p:cNvSpPr txBox="1"/>
-          <p:nvPr/>
-        </p:nvSpPr>
-        <p:spPr>
-          <a:xfrm>
-            <a:off x="122870" y="5782967"/>
-            <a:ext cx="468398" cy="307777"/>
+            <a:off x="652321" y="2476500"/>
+            <a:ext cx="902811" cy="307777"/>
           </a:xfrm>
           <a:prstGeom prst="rect">
             <a:avLst/>
@@ -6525,13 +6047,13 @@
           <a:p>
             <a:pPr algn="ctr"/>
             <a:r>
-              <a:rPr lang="en-US" altLang="ko-KR" sz="1400" dirty="0">
+              <a:rPr lang="ko-KR" altLang="en-US" sz="1400">
                 <a:latin typeface="HY견고딕" panose="02030600000101010101" pitchFamily="18" charset="-127"/>
                 <a:ea typeface="HY견고딕" panose="02030600000101010101" pitchFamily="18" charset="-127"/>
               </a:rPr>
-              <a:t>0%</a:t>
-            </a:r>
-            <a:endParaRPr lang="ko-KR" altLang="en-US" sz="1400" dirty="0">
+              <a:t>플레이어</a:t>
+            </a:r>
+            <a:endParaRPr lang="en-US" altLang="ko-KR" sz="1400" dirty="0">
               <a:latin typeface="HY견고딕" panose="02030600000101010101" pitchFamily="18" charset="-127"/>
               <a:ea typeface="HY견고딕" panose="02030600000101010101" pitchFamily="18" charset="-127"/>
             </a:endParaRPr>
@@ -6540,10 +6062,10 @@
       </p:sp>
       <p:sp>
         <p:nvSpPr>
-          <p:cNvPr id="8" name="TextBox 7">
-            <a:extLst>
-              <a:ext uri="{FF2B5EF4-FFF2-40B4-BE49-F238E27FC236}">
-                <a16:creationId xmlns:a16="http://schemas.microsoft.com/office/drawing/2014/main" id="{03C6D761-CA20-C2D6-4261-46C3D732707A}"/>
+          <p:cNvPr id="11" name="TextBox 10">
+            <a:extLst>
+              <a:ext uri="{FF2B5EF4-FFF2-40B4-BE49-F238E27FC236}">
+                <a16:creationId xmlns:a16="http://schemas.microsoft.com/office/drawing/2014/main" id="{41CE8512-3EE4-D09A-48BB-8E321F562B3B}"/>
               </a:ext>
             </a:extLst>
           </p:cNvPr>
@@ -6552,8 +6074,8 @@
         </p:nvSpPr>
         <p:spPr>
           <a:xfrm>
-            <a:off x="11548533" y="5782967"/>
-            <a:ext cx="692818" cy="307777"/>
+            <a:off x="2042262" y="2463956"/>
+            <a:ext cx="768160" cy="307777"/>
           </a:xfrm>
           <a:prstGeom prst="rect">
             <a:avLst/>
@@ -6572,21 +6094,17 @@
                 <a:latin typeface="HY견고딕" panose="02030600000101010101" pitchFamily="18" charset="-127"/>
                 <a:ea typeface="HY견고딕" panose="02030600000101010101" pitchFamily="18" charset="-127"/>
               </a:rPr>
-              <a:t>100%</a:t>
-            </a:r>
-            <a:endParaRPr lang="ko-KR" altLang="en-US" sz="1400" dirty="0">
-              <a:latin typeface="HY견고딕" panose="02030600000101010101" pitchFamily="18" charset="-127"/>
-              <a:ea typeface="HY견고딕" panose="02030600000101010101" pitchFamily="18" charset="-127"/>
-            </a:endParaRPr>
-          </a:p>
-        </p:txBody>
-      </p:sp>
-      <p:sp>
-        <p:nvSpPr>
-          <p:cNvPr id="17" name="TextBox 16">
-            <a:extLst>
-              <a:ext uri="{FF2B5EF4-FFF2-40B4-BE49-F238E27FC236}">
-                <a16:creationId xmlns:a16="http://schemas.microsoft.com/office/drawing/2014/main" id="{4E841C1D-C20B-CA09-E339-9711F6EBF256}"/>
+              <a:t>NPC 1</a:t>
+            </a:r>
+          </a:p>
+        </p:txBody>
+      </p:sp>
+      <p:sp>
+        <p:nvSpPr>
+          <p:cNvPr id="12" name="TextBox 11">
+            <a:extLst>
+              <a:ext uri="{FF2B5EF4-FFF2-40B4-BE49-F238E27FC236}">
+                <a16:creationId xmlns:a16="http://schemas.microsoft.com/office/drawing/2014/main" id="{03B5DA30-7E71-53F2-8E0D-F10E9D6C61B0}"/>
               </a:ext>
             </a:extLst>
           </p:cNvPr>
@@ -6595,8 +6113,8 @@
         </p:nvSpPr>
         <p:spPr>
           <a:xfrm>
-            <a:off x="5861800" y="5815121"/>
-            <a:ext cx="468398" cy="246221"/>
+            <a:off x="3038305" y="2460001"/>
+            <a:ext cx="768160" cy="307777"/>
           </a:xfrm>
           <a:prstGeom prst="rect">
             <a:avLst/>
@@ -6611,333 +6129,31 @@
           <a:p>
             <a:pPr algn="ctr"/>
             <a:r>
-              <a:rPr lang="en-US" altLang="ko-KR" sz="1000" dirty="0">
+              <a:rPr lang="en-US" altLang="ko-KR" sz="1400" dirty="0">
                 <a:latin typeface="HY견고딕" panose="02030600000101010101" pitchFamily="18" charset="-127"/>
                 <a:ea typeface="HY견고딕" panose="02030600000101010101" pitchFamily="18" charset="-127"/>
               </a:rPr>
-              <a:t>90%</a:t>
-            </a:r>
-            <a:endParaRPr lang="ko-KR" altLang="en-US" sz="1000" dirty="0">
-              <a:latin typeface="HY견고딕" panose="02030600000101010101" pitchFamily="18" charset="-127"/>
-              <a:ea typeface="HY견고딕" panose="02030600000101010101" pitchFamily="18" charset="-127"/>
-            </a:endParaRPr>
-          </a:p>
-        </p:txBody>
-      </p:sp>
-      <p:sp>
-        <p:nvSpPr>
-          <p:cNvPr id="13" name="내용 개체 틀 12">
-            <a:extLst>
-              <a:ext uri="{FF2B5EF4-FFF2-40B4-BE49-F238E27FC236}">
-                <a16:creationId xmlns:a16="http://schemas.microsoft.com/office/drawing/2014/main" id="{F61080BD-16A5-80AB-1A4F-501CB498AF7B}"/>
-              </a:ext>
-            </a:extLst>
-          </p:cNvPr>
-          <p:cNvSpPr>
-            <a:spLocks noGrp="1"/>
-          </p:cNvSpPr>
-          <p:nvPr>
-            <p:ph idx="1"/>
-          </p:nvPr>
+              <a:t>NPC 2</a:t>
+            </a:r>
+          </a:p>
+        </p:txBody>
+      </p:sp>
+      <p:sp>
+        <p:nvSpPr>
+          <p:cNvPr id="13" name="TextBox 12">
+            <a:extLst>
+              <a:ext uri="{FF2B5EF4-FFF2-40B4-BE49-F238E27FC236}">
+                <a16:creationId xmlns:a16="http://schemas.microsoft.com/office/drawing/2014/main" id="{9BCAD28E-F98D-8EFF-1A1B-C1FE60D278DC}"/>
+              </a:ext>
+            </a:extLst>
+          </p:cNvPr>
+          <p:cNvSpPr txBox="1"/>
+          <p:nvPr/>
         </p:nvSpPr>
         <p:spPr>
           <a:xfrm>
-            <a:off x="838199" y="1029195"/>
-            <a:ext cx="7870371" cy="923783"/>
-          </a:xfrm>
-        </p:spPr>
-        <p:txBody>
-          <a:bodyPr>
-            <a:normAutofit/>
-          </a:bodyPr>
-          <a:lstStyle/>
-          <a:p>
-            <a:r>
-              <a:rPr lang="en-US" altLang="ko-KR" dirty="0"/>
-              <a:t>WQFS </a:t>
-            </a:r>
-            <a:r>
-              <a:rPr lang="ko-KR" altLang="en-US" dirty="0"/>
-              <a:t>퀘스트 타입 </a:t>
-            </a:r>
-            <a:r>
-              <a:rPr lang="en-US" altLang="ko-KR" dirty="0"/>
-              <a:t>1</a:t>
-            </a:r>
-          </a:p>
-          <a:p>
-            <a:pPr lvl="1"/>
-            <a:r>
-              <a:rPr lang="ko-KR" altLang="en-US" dirty="0"/>
-              <a:t>퀘스트 타입에 따라 발생시키는 이벤트와  완료 조건이 다름</a:t>
-            </a:r>
-            <a:endParaRPr lang="en-US" altLang="ko-KR" dirty="0"/>
-          </a:p>
-        </p:txBody>
-      </p:sp>
-      <p:pic>
-        <p:nvPicPr>
-          <p:cNvPr id="5" name="그림 4" descr="텍스트, 스크린샷, 폰트, 라인이(가) 표시된 사진&#10;&#10;AI 생성 콘텐츠는 정확하지 않을 수 있습니다.">
-            <a:extLst>
-              <a:ext uri="{FF2B5EF4-FFF2-40B4-BE49-F238E27FC236}">
-                <a16:creationId xmlns:a16="http://schemas.microsoft.com/office/drawing/2014/main" id="{09695884-D038-6CF3-44E1-2AA91B49A797}"/>
-              </a:ext>
-            </a:extLst>
-          </p:cNvPr>
-          <p:cNvPicPr>
-            <a:picLocks noChangeAspect="1"/>
-          </p:cNvPicPr>
-          <p:nvPr/>
-        </p:nvPicPr>
-        <p:blipFill>
-          <a:blip r:embed="rId2">
-            <a:extLst>
-              <a:ext uri="{28A0092B-C50C-407E-A947-70E740481C1C}">
-                <a14:useLocalDpi xmlns:a14="http://schemas.microsoft.com/office/drawing/2010/main" val="0"/>
-              </a:ext>
-            </a:extLst>
-          </a:blip>
-          <a:stretch>
-            <a:fillRect/>
-          </a:stretch>
-        </p:blipFill>
-        <p:spPr>
-          <a:xfrm>
-            <a:off x="-1" y="2669296"/>
-            <a:ext cx="12192000" cy="2611693"/>
-          </a:xfrm>
-          <a:prstGeom prst="rect">
-            <a:avLst/>
-          </a:prstGeom>
-        </p:spPr>
-      </p:pic>
-    </p:spTree>
-    <p:extLst>
-      <p:ext uri="{BB962C8B-B14F-4D97-AF65-F5344CB8AC3E}">
-        <p14:creationId xmlns:p14="http://schemas.microsoft.com/office/powerpoint/2010/main" val="1295884404"/>
-      </p:ext>
-    </p:extLst>
-  </p:cSld>
-  <p:clrMapOvr>
-    <a:masterClrMapping/>
-  </p:clrMapOvr>
-</p:sld>
-</file>
-
-<file path=ppt/slides/slide4.xml><?xml version="1.0" encoding="utf-8"?>
-<p:sld xmlns:a="http://schemas.openxmlformats.org/drawingml/2006/main" xmlns:r="http://schemas.openxmlformats.org/officeDocument/2006/relationships" xmlns:p="http://schemas.openxmlformats.org/presentationml/2006/main">
-  <p:cSld>
-    <p:spTree>
-      <p:nvGrpSpPr>
-        <p:cNvPr id="1" name="">
-          <a:extLst>
-            <a:ext uri="{FF2B5EF4-FFF2-40B4-BE49-F238E27FC236}">
-              <a16:creationId xmlns:a16="http://schemas.microsoft.com/office/drawing/2014/main" id="{91F85B0D-B02E-2F68-7A5F-B2BBCC6228A3}"/>
-            </a:ext>
-          </a:extLst>
-        </p:cNvPr>
-        <p:cNvGrpSpPr/>
-        <p:nvPr/>
-      </p:nvGrpSpPr>
-      <p:grpSpPr>
-        <a:xfrm>
-          <a:off x="0" y="0"/>
-          <a:ext cx="0" cy="0"/>
-          <a:chOff x="0" y="0"/>
-          <a:chExt cx="0" cy="0"/>
-        </a:xfrm>
-      </p:grpSpPr>
-      <p:sp>
-        <p:nvSpPr>
-          <p:cNvPr id="3" name="사각형: 둥근 모서리 2">
-            <a:extLst>
-              <a:ext uri="{FF2B5EF4-FFF2-40B4-BE49-F238E27FC236}">
-                <a16:creationId xmlns:a16="http://schemas.microsoft.com/office/drawing/2014/main" id="{3630560B-7D41-4AA7-61E2-8DD0E06DDC73}"/>
-              </a:ext>
-            </a:extLst>
-          </p:cNvPr>
-          <p:cNvSpPr/>
-          <p:nvPr/>
-        </p:nvSpPr>
-        <p:spPr>
-          <a:xfrm>
-            <a:off x="609598" y="5840557"/>
-            <a:ext cx="10639779" cy="192595"/>
-          </a:xfrm>
-          <a:prstGeom prst="roundRect">
-            <a:avLst>
-              <a:gd name="adj" fmla="val 50000"/>
-            </a:avLst>
-          </a:prstGeom>
-          <a:solidFill>
-            <a:schemeClr val="accent6">
-              <a:lumMod val="60000"/>
-              <a:lumOff val="40000"/>
-            </a:schemeClr>
-          </a:solidFill>
-          <a:ln w="28575">
-            <a:noFill/>
-          </a:ln>
-        </p:spPr>
-        <p:style>
-          <a:lnRef idx="2">
-            <a:schemeClr val="accent1">
-              <a:shade val="15000"/>
-            </a:schemeClr>
-          </a:lnRef>
-          <a:fillRef idx="1">
-            <a:schemeClr val="accent1"/>
-          </a:fillRef>
-          <a:effectRef idx="0">
-            <a:schemeClr val="accent1"/>
-          </a:effectRef>
-          <a:fontRef idx="minor">
-            <a:schemeClr val="lt1"/>
-          </a:fontRef>
-        </p:style>
-        <p:txBody>
-          <a:bodyPr rtlCol="0" anchor="ctr"/>
-          <a:lstStyle/>
-          <a:p>
-            <a:pPr algn="ctr"/>
-            <a:endParaRPr lang="ko-KR" altLang="en-US"/>
-          </a:p>
-        </p:txBody>
-      </p:sp>
-      <p:sp>
-        <p:nvSpPr>
-          <p:cNvPr id="2" name="제목 1">
-            <a:extLst>
-              <a:ext uri="{FF2B5EF4-FFF2-40B4-BE49-F238E27FC236}">
-                <a16:creationId xmlns:a16="http://schemas.microsoft.com/office/drawing/2014/main" id="{6D732EDA-0CEC-21B5-BDB2-10B4B7476DAA}"/>
-              </a:ext>
-            </a:extLst>
-          </p:cNvPr>
-          <p:cNvSpPr>
-            <a:spLocks noGrp="1"/>
-          </p:cNvSpPr>
-          <p:nvPr>
-            <p:ph type="title"/>
-          </p:nvPr>
-        </p:nvSpPr>
-        <p:spPr/>
-        <p:txBody>
-          <a:bodyPr>
-            <a:normAutofit/>
-          </a:bodyPr>
-          <a:lstStyle/>
-          <a:p>
-            <a:r>
-              <a:rPr lang="ko-KR" altLang="en-US" dirty="0"/>
-              <a:t>지난 주 진행 상황</a:t>
-            </a:r>
-          </a:p>
-        </p:txBody>
-      </p:sp>
-      <p:sp>
-        <p:nvSpPr>
-          <p:cNvPr id="4" name="슬라이드 번호 개체 틀 3">
-            <a:extLst>
-              <a:ext uri="{FF2B5EF4-FFF2-40B4-BE49-F238E27FC236}">
-                <a16:creationId xmlns:a16="http://schemas.microsoft.com/office/drawing/2014/main" id="{F581FFCC-8507-F817-F8F1-D1061E5F1884}"/>
-              </a:ext>
-            </a:extLst>
-          </p:cNvPr>
-          <p:cNvSpPr>
-            <a:spLocks noGrp="1"/>
-          </p:cNvSpPr>
-          <p:nvPr>
-            <p:ph type="sldNum" sz="quarter" idx="12"/>
-          </p:nvPr>
-        </p:nvSpPr>
-        <p:spPr/>
-        <p:txBody>
-          <a:bodyPr/>
-          <a:lstStyle/>
-          <a:p>
-            <a:fld id="{E694CC86-33DA-4CBD-A678-F7DD024C14A4}" type="slidenum">
-              <a:rPr lang="ko-KR" altLang="en-US" smtClean="0"/>
-              <a:pPr/>
-              <a:t>4</a:t>
-            </a:fld>
-            <a:r>
-              <a:rPr lang="en-US" altLang="ko-KR" dirty="0"/>
-              <a:t>/10</a:t>
-            </a:r>
-            <a:endParaRPr lang="ko-KR" altLang="en-US" dirty="0"/>
-          </a:p>
-        </p:txBody>
-      </p:sp>
-      <p:sp>
-        <p:nvSpPr>
-          <p:cNvPr id="6" name="사각형: 둥근 모서리 5">
-            <a:extLst>
-              <a:ext uri="{FF2B5EF4-FFF2-40B4-BE49-F238E27FC236}">
-                <a16:creationId xmlns:a16="http://schemas.microsoft.com/office/drawing/2014/main" id="{FF24206B-3EC6-59C4-040B-BC4202C7A49B}"/>
-              </a:ext>
-            </a:extLst>
-          </p:cNvPr>
-          <p:cNvSpPr/>
-          <p:nvPr/>
-        </p:nvSpPr>
-        <p:spPr>
-          <a:xfrm>
-            <a:off x="609600" y="5840557"/>
-            <a:ext cx="10972800" cy="192595"/>
-          </a:xfrm>
-          <a:prstGeom prst="roundRect">
-            <a:avLst>
-              <a:gd name="adj" fmla="val 50000"/>
-            </a:avLst>
-          </a:prstGeom>
-          <a:noFill/>
-          <a:ln w="28575">
-            <a:solidFill>
-              <a:schemeClr val="tx1"/>
-            </a:solidFill>
-          </a:ln>
-        </p:spPr>
-        <p:style>
-          <a:lnRef idx="2">
-            <a:schemeClr val="accent1">
-              <a:shade val="15000"/>
-            </a:schemeClr>
-          </a:lnRef>
-          <a:fillRef idx="1">
-            <a:schemeClr val="accent1"/>
-          </a:fillRef>
-          <a:effectRef idx="0">
-            <a:schemeClr val="accent1"/>
-          </a:effectRef>
-          <a:fontRef idx="minor">
-            <a:schemeClr val="lt1"/>
-          </a:fontRef>
-        </p:style>
-        <p:txBody>
-          <a:bodyPr rtlCol="0" anchor="ctr"/>
-          <a:lstStyle/>
-          <a:p>
-            <a:pPr algn="ctr"/>
-            <a:endParaRPr lang="ko-KR" altLang="en-US"/>
-          </a:p>
-        </p:txBody>
-      </p:sp>
-      <p:sp>
-        <p:nvSpPr>
-          <p:cNvPr id="7" name="TextBox 6">
-            <a:extLst>
-              <a:ext uri="{FF2B5EF4-FFF2-40B4-BE49-F238E27FC236}">
-                <a16:creationId xmlns:a16="http://schemas.microsoft.com/office/drawing/2014/main" id="{B47BD445-0B63-174C-56B0-23F4C1E53EBA}"/>
-              </a:ext>
-            </a:extLst>
-          </p:cNvPr>
-          <p:cNvSpPr txBox="1"/>
-          <p:nvPr/>
-        </p:nvSpPr>
-        <p:spPr>
-          <a:xfrm>
-            <a:off x="122870" y="5782967"/>
-            <a:ext cx="468398" cy="307777"/>
+            <a:off x="4034348" y="2468821"/>
+            <a:ext cx="768160" cy="307777"/>
           </a:xfrm>
           <a:prstGeom prst="rect">
             <a:avLst/>
@@ -6956,21 +6172,17 @@
                 <a:latin typeface="HY견고딕" panose="02030600000101010101" pitchFamily="18" charset="-127"/>
                 <a:ea typeface="HY견고딕" panose="02030600000101010101" pitchFamily="18" charset="-127"/>
               </a:rPr>
-              <a:t>0%</a:t>
-            </a:r>
-            <a:endParaRPr lang="ko-KR" altLang="en-US" sz="1400" dirty="0">
-              <a:latin typeface="HY견고딕" panose="02030600000101010101" pitchFamily="18" charset="-127"/>
-              <a:ea typeface="HY견고딕" panose="02030600000101010101" pitchFamily="18" charset="-127"/>
-            </a:endParaRPr>
-          </a:p>
-        </p:txBody>
-      </p:sp>
-      <p:sp>
-        <p:nvSpPr>
-          <p:cNvPr id="8" name="TextBox 7">
-            <a:extLst>
-              <a:ext uri="{FF2B5EF4-FFF2-40B4-BE49-F238E27FC236}">
-                <a16:creationId xmlns:a16="http://schemas.microsoft.com/office/drawing/2014/main" id="{676581E4-5979-55A8-E911-47C1D3D82BB1}"/>
+              <a:t>NPC 3</a:t>
+            </a:r>
+          </a:p>
+        </p:txBody>
+      </p:sp>
+      <p:sp>
+        <p:nvSpPr>
+          <p:cNvPr id="14" name="TextBox 13">
+            <a:extLst>
+              <a:ext uri="{FF2B5EF4-FFF2-40B4-BE49-F238E27FC236}">
+                <a16:creationId xmlns:a16="http://schemas.microsoft.com/office/drawing/2014/main" id="{44640FCB-8964-AC4D-10C0-854043962822}"/>
               </a:ext>
             </a:extLst>
           </p:cNvPr>
@@ -6979,8 +6191,8 @@
         </p:nvSpPr>
         <p:spPr>
           <a:xfrm>
-            <a:off x="11548533" y="5782967"/>
-            <a:ext cx="692818" cy="307777"/>
+            <a:off x="5030391" y="2464866"/>
+            <a:ext cx="768160" cy="307777"/>
           </a:xfrm>
           <a:prstGeom prst="rect">
             <a:avLst/>
@@ -6999,21 +6211,17 @@
                 <a:latin typeface="HY견고딕" panose="02030600000101010101" pitchFamily="18" charset="-127"/>
                 <a:ea typeface="HY견고딕" panose="02030600000101010101" pitchFamily="18" charset="-127"/>
               </a:rPr>
-              <a:t>100%</a:t>
-            </a:r>
-            <a:endParaRPr lang="ko-KR" altLang="en-US" sz="1400" dirty="0">
-              <a:latin typeface="HY견고딕" panose="02030600000101010101" pitchFamily="18" charset="-127"/>
-              <a:ea typeface="HY견고딕" panose="02030600000101010101" pitchFamily="18" charset="-127"/>
-            </a:endParaRPr>
-          </a:p>
-        </p:txBody>
-      </p:sp>
-      <p:sp>
-        <p:nvSpPr>
-          <p:cNvPr id="17" name="TextBox 16">
-            <a:extLst>
-              <a:ext uri="{FF2B5EF4-FFF2-40B4-BE49-F238E27FC236}">
-                <a16:creationId xmlns:a16="http://schemas.microsoft.com/office/drawing/2014/main" id="{7EF5FE63-1FA9-AD5A-FFE5-3FDC5470E810}"/>
+              <a:t>NPC 4</a:t>
+            </a:r>
+          </a:p>
+        </p:txBody>
+      </p:sp>
+      <p:sp>
+        <p:nvSpPr>
+          <p:cNvPr id="15" name="TextBox 14">
+            <a:extLst>
+              <a:ext uri="{FF2B5EF4-FFF2-40B4-BE49-F238E27FC236}">
+                <a16:creationId xmlns:a16="http://schemas.microsoft.com/office/drawing/2014/main" id="{21D59DF1-B246-D609-A29B-8AEC751D3866}"/>
               </a:ext>
             </a:extLst>
           </p:cNvPr>
@@ -7022,8 +6230,8 @@
         </p:nvSpPr>
         <p:spPr>
           <a:xfrm>
-            <a:off x="5861800" y="5815121"/>
-            <a:ext cx="468398" cy="246221"/>
+            <a:off x="6118443" y="2476500"/>
+            <a:ext cx="723275" cy="307777"/>
           </a:xfrm>
           <a:prstGeom prst="rect">
             <a:avLst/>
@@ -7038,13 +6246,13 @@
           <a:p>
             <a:pPr algn="ctr"/>
             <a:r>
-              <a:rPr lang="en-US" altLang="ko-KR" sz="1000" dirty="0">
+              <a:rPr lang="ko-KR" altLang="en-US" sz="1400" dirty="0">
                 <a:latin typeface="HY견고딕" panose="02030600000101010101" pitchFamily="18" charset="-127"/>
                 <a:ea typeface="HY견고딕" panose="02030600000101010101" pitchFamily="18" charset="-127"/>
               </a:rPr>
-              <a:t>90%</a:t>
-            </a:r>
-            <a:endParaRPr lang="ko-KR" altLang="en-US" sz="1000" dirty="0">
+              <a:t>몬스터</a:t>
+            </a:r>
+            <a:endParaRPr lang="en-US" altLang="ko-KR" sz="1400" dirty="0">
               <a:latin typeface="HY견고딕" panose="02030600000101010101" pitchFamily="18" charset="-127"/>
               <a:ea typeface="HY견고딕" panose="02030600000101010101" pitchFamily="18" charset="-127"/>
             </a:endParaRPr>
@@ -7053,128 +6261,137 @@
       </p:sp>
       <p:sp>
         <p:nvSpPr>
-          <p:cNvPr id="13" name="내용 개체 틀 12">
-            <a:extLst>
-              <a:ext uri="{FF2B5EF4-FFF2-40B4-BE49-F238E27FC236}">
-                <a16:creationId xmlns:a16="http://schemas.microsoft.com/office/drawing/2014/main" id="{1C6B8773-F14C-FF35-13D3-082504E65D37}"/>
-              </a:ext>
-            </a:extLst>
-          </p:cNvPr>
-          <p:cNvSpPr>
-            <a:spLocks noGrp="1"/>
-          </p:cNvSpPr>
-          <p:nvPr>
-            <p:ph idx="1"/>
-          </p:nvPr>
+          <p:cNvPr id="16" name="TextBox 15">
+            <a:extLst>
+              <a:ext uri="{FF2B5EF4-FFF2-40B4-BE49-F238E27FC236}">
+                <a16:creationId xmlns:a16="http://schemas.microsoft.com/office/drawing/2014/main" id="{04299D23-4DEB-A886-5BC3-43FB20F3F314}"/>
+              </a:ext>
+            </a:extLst>
+          </p:cNvPr>
+          <p:cNvSpPr txBox="1"/>
+          <p:nvPr/>
         </p:nvSpPr>
         <p:spPr>
           <a:xfrm>
-            <a:off x="838199" y="1029195"/>
-            <a:ext cx="7870371" cy="923783"/>
-          </a:xfrm>
-        </p:spPr>
-        <p:txBody>
-          <a:bodyPr>
-            <a:normAutofit/>
-          </a:bodyPr>
-          <a:lstStyle/>
-          <a:p>
-            <a:r>
-              <a:rPr lang="en-US" altLang="ko-KR" dirty="0"/>
-              <a:t>WQFS </a:t>
-            </a:r>
-            <a:r>
-              <a:rPr lang="ko-KR" altLang="en-US" dirty="0"/>
-              <a:t>퀘스트 타입 </a:t>
-            </a:r>
-            <a:r>
-              <a:rPr lang="en-US" altLang="ko-KR"/>
-              <a:t>2</a:t>
-            </a:r>
-          </a:p>
-          <a:p>
-            <a:pPr lvl="1"/>
-            <a:endParaRPr lang="en-US" altLang="ko-KR" dirty="0"/>
-          </a:p>
-        </p:txBody>
-      </p:sp>
-      <p:pic>
-        <p:nvPicPr>
-          <p:cNvPr id="5" name="그림 4" descr="텍스트, 스크린샷, 소프트웨어이(가) 표시된 사진&#10;&#10;AI 생성 콘텐츠는 정확하지 않을 수 있습니다.">
-            <a:extLst>
-              <a:ext uri="{FF2B5EF4-FFF2-40B4-BE49-F238E27FC236}">
-                <a16:creationId xmlns:a16="http://schemas.microsoft.com/office/drawing/2014/main" id="{8A910930-E5C4-FBF0-DC02-65AD51463FE5}"/>
-              </a:ext>
-            </a:extLst>
-          </p:cNvPr>
-          <p:cNvPicPr>
-            <a:picLocks noChangeAspect="1"/>
-          </p:cNvPicPr>
-          <p:nvPr/>
-        </p:nvPicPr>
-        <p:blipFill>
-          <a:blip r:embed="rId2">
-            <a:extLst>
-              <a:ext uri="{28A0092B-C50C-407E-A947-70E740481C1C}">
-                <a14:useLocalDpi xmlns:a14="http://schemas.microsoft.com/office/drawing/2010/main" val="0"/>
-              </a:ext>
-            </a:extLst>
-          </a:blip>
-          <a:stretch>
-            <a:fillRect/>
-          </a:stretch>
-        </p:blipFill>
-        <p:spPr>
-          <a:xfrm>
-            <a:off x="234892" y="1753299"/>
-            <a:ext cx="6172652" cy="3888462"/>
+            <a:off x="7640104" y="2528693"/>
+            <a:ext cx="723275" cy="307777"/>
           </a:xfrm>
           <a:prstGeom prst="rect">
             <a:avLst/>
           </a:prstGeom>
+          <a:noFill/>
         </p:spPr>
-      </p:pic>
-      <p:pic>
-        <p:nvPicPr>
-          <p:cNvPr id="9" name="그림 8" descr="텍스트, 스크린샷, 직사각형, 디자인이(가) 표시된 사진&#10;&#10;AI 생성 콘텐츠는 정확하지 않을 수 있습니다.">
-            <a:extLst>
-              <a:ext uri="{FF2B5EF4-FFF2-40B4-BE49-F238E27FC236}">
-                <a16:creationId xmlns:a16="http://schemas.microsoft.com/office/drawing/2014/main" id="{48885939-238A-1F3B-6CFA-68D3C160A829}"/>
-              </a:ext>
-            </a:extLst>
-          </p:cNvPr>
-          <p:cNvPicPr>
-            <a:picLocks noChangeAspect="1"/>
-          </p:cNvPicPr>
+        <p:txBody>
+          <a:bodyPr wrap="none" rtlCol="0">
+            <a:spAutoFit/>
+          </a:bodyPr>
+          <a:lstStyle/>
+          <a:p>
+            <a:pPr algn="ctr"/>
+            <a:r>
+              <a:rPr lang="ko-KR" altLang="en-US" sz="1400" dirty="0">
+                <a:latin typeface="HY견고딕" panose="02030600000101010101" pitchFamily="18" charset="-127"/>
+                <a:ea typeface="HY견고딕" panose="02030600000101010101" pitchFamily="18" charset="-127"/>
+              </a:rPr>
+              <a:t>이벤트</a:t>
+            </a:r>
+            <a:endParaRPr lang="en-US" altLang="ko-KR" sz="1400" dirty="0">
+              <a:latin typeface="HY견고딕" panose="02030600000101010101" pitchFamily="18" charset="-127"/>
+              <a:ea typeface="HY견고딕" panose="02030600000101010101" pitchFamily="18" charset="-127"/>
+            </a:endParaRPr>
+          </a:p>
+        </p:txBody>
+      </p:sp>
+      <p:sp>
+        <p:nvSpPr>
+          <p:cNvPr id="17" name="TextBox 16">
+            <a:extLst>
+              <a:ext uri="{FF2B5EF4-FFF2-40B4-BE49-F238E27FC236}">
+                <a16:creationId xmlns:a16="http://schemas.microsoft.com/office/drawing/2014/main" id="{7519C95B-F630-CCC6-1F00-3B2491ABE919}"/>
+              </a:ext>
+            </a:extLst>
+          </p:cNvPr>
+          <p:cNvSpPr txBox="1"/>
           <p:nvPr/>
-        </p:nvPicPr>
-        <p:blipFill>
-          <a:blip r:embed="rId3">
-            <a:extLst>
-              <a:ext uri="{28A0092B-C50C-407E-A947-70E740481C1C}">
-                <a14:useLocalDpi xmlns:a14="http://schemas.microsoft.com/office/drawing/2010/main" val="0"/>
-              </a:ext>
-            </a:extLst>
-          </a:blip>
-          <a:srcRect l="30785" r="13287"/>
-          <a:stretch>
-            <a:fillRect/>
-          </a:stretch>
-        </p:blipFill>
+        </p:nvSpPr>
         <p:spPr>
           <a:xfrm>
-            <a:off x="7571014" y="1747767"/>
-            <a:ext cx="3871742" cy="3893993"/>
+            <a:off x="5930183" y="4493075"/>
+            <a:ext cx="782587" cy="307777"/>
           </a:xfrm>
           <a:prstGeom prst="rect">
             <a:avLst/>
           </a:prstGeom>
+          <a:noFill/>
         </p:spPr>
-      </p:pic>
+        <p:txBody>
+          <a:bodyPr wrap="none" rtlCol="0">
+            <a:spAutoFit/>
+          </a:bodyPr>
+          <a:lstStyle/>
+          <a:p>
+            <a:pPr algn="ctr"/>
+            <a:r>
+              <a:rPr lang="ko-KR" altLang="en-US" sz="1400" dirty="0">
+                <a:latin typeface="HY견고딕" panose="02030600000101010101" pitchFamily="18" charset="-127"/>
+                <a:ea typeface="HY견고딕" panose="02030600000101010101" pitchFamily="18" charset="-127"/>
+              </a:rPr>
+              <a:t>아이템 </a:t>
+            </a:r>
+            <a:endParaRPr lang="en-US" altLang="ko-KR" sz="1400" dirty="0">
+              <a:latin typeface="HY견고딕" panose="02030600000101010101" pitchFamily="18" charset="-127"/>
+              <a:ea typeface="HY견고딕" panose="02030600000101010101" pitchFamily="18" charset="-127"/>
+            </a:endParaRPr>
+          </a:p>
+        </p:txBody>
+      </p:sp>
+      <p:sp>
+        <p:nvSpPr>
+          <p:cNvPr id="18" name="TextBox 17">
+            <a:extLst>
+              <a:ext uri="{FF2B5EF4-FFF2-40B4-BE49-F238E27FC236}">
+                <a16:creationId xmlns:a16="http://schemas.microsoft.com/office/drawing/2014/main" id="{8F331605-073F-CB90-B223-F3C23CEB8AF3}"/>
+              </a:ext>
+            </a:extLst>
+          </p:cNvPr>
+          <p:cNvSpPr txBox="1"/>
+          <p:nvPr/>
+        </p:nvSpPr>
+        <p:spPr>
+          <a:xfrm>
+            <a:off x="2729566" y="4348007"/>
+            <a:ext cx="603050" cy="307777"/>
+          </a:xfrm>
+          <a:prstGeom prst="rect">
+            <a:avLst/>
+          </a:prstGeom>
+          <a:noFill/>
+        </p:spPr>
+        <p:txBody>
+          <a:bodyPr wrap="none" rtlCol="0">
+            <a:spAutoFit/>
+          </a:bodyPr>
+          <a:lstStyle/>
+          <a:p>
+            <a:pPr algn="ctr"/>
+            <a:r>
+              <a:rPr lang="ko-KR" altLang="en-US" sz="1400">
+                <a:latin typeface="HY견고딕" panose="02030600000101010101" pitchFamily="18" charset="-127"/>
+                <a:ea typeface="HY견고딕" panose="02030600000101010101" pitchFamily="18" charset="-127"/>
+              </a:rPr>
+              <a:t>타일 </a:t>
+            </a:r>
+            <a:endParaRPr lang="en-US" altLang="ko-KR" sz="1400" dirty="0">
+              <a:latin typeface="HY견고딕" panose="02030600000101010101" pitchFamily="18" charset="-127"/>
+              <a:ea typeface="HY견고딕" panose="02030600000101010101" pitchFamily="18" charset="-127"/>
+            </a:endParaRPr>
+          </a:p>
+        </p:txBody>
+      </p:sp>
     </p:spTree>
     <p:extLst>
       <p:ext uri="{BB962C8B-B14F-4D97-AF65-F5344CB8AC3E}">
-        <p14:creationId xmlns:p14="http://schemas.microsoft.com/office/powerpoint/2010/main" val="1771116258"/>
+        <p14:creationId xmlns:p14="http://schemas.microsoft.com/office/powerpoint/2010/main" val="805984882"/>
       </p:ext>
     </p:extLst>
   </p:cSld>
@@ -7185,2299 +6402,6 @@
 </file>
 
 <file path=ppt/slides/slide5.xml><?xml version="1.0" encoding="utf-8"?>
-<p:sld xmlns:a="http://schemas.openxmlformats.org/drawingml/2006/main" xmlns:r="http://schemas.openxmlformats.org/officeDocument/2006/relationships" xmlns:p="http://schemas.openxmlformats.org/presentationml/2006/main">
-  <p:cSld>
-    <p:spTree>
-      <p:nvGrpSpPr>
-        <p:cNvPr id="1" name="">
-          <a:extLst>
-            <a:ext uri="{FF2B5EF4-FFF2-40B4-BE49-F238E27FC236}">
-              <a16:creationId xmlns:a16="http://schemas.microsoft.com/office/drawing/2014/main" id="{1FAB8BCC-04C4-4156-922D-817F4793B11D}"/>
-            </a:ext>
-          </a:extLst>
-        </p:cNvPr>
-        <p:cNvGrpSpPr/>
-        <p:nvPr/>
-      </p:nvGrpSpPr>
-      <p:grpSpPr>
-        <a:xfrm>
-          <a:off x="0" y="0"/>
-          <a:ext cx="0" cy="0"/>
-          <a:chOff x="0" y="0"/>
-          <a:chExt cx="0" cy="0"/>
-        </a:xfrm>
-      </p:grpSpPr>
-      <p:sp>
-        <p:nvSpPr>
-          <p:cNvPr id="3" name="사각형: 둥근 모서리 2">
-            <a:extLst>
-              <a:ext uri="{FF2B5EF4-FFF2-40B4-BE49-F238E27FC236}">
-                <a16:creationId xmlns:a16="http://schemas.microsoft.com/office/drawing/2014/main" id="{9CB2E316-8C26-1CDD-7F0A-A52E3B41B82C}"/>
-              </a:ext>
-            </a:extLst>
-          </p:cNvPr>
-          <p:cNvSpPr/>
-          <p:nvPr/>
-        </p:nvSpPr>
-        <p:spPr>
-          <a:xfrm>
-            <a:off x="609598" y="5840557"/>
-            <a:ext cx="10639779" cy="192595"/>
-          </a:xfrm>
-          <a:prstGeom prst="roundRect">
-            <a:avLst>
-              <a:gd name="adj" fmla="val 50000"/>
-            </a:avLst>
-          </a:prstGeom>
-          <a:solidFill>
-            <a:schemeClr val="accent6">
-              <a:lumMod val="60000"/>
-              <a:lumOff val="40000"/>
-            </a:schemeClr>
-          </a:solidFill>
-          <a:ln w="28575">
-            <a:noFill/>
-          </a:ln>
-        </p:spPr>
-        <p:style>
-          <a:lnRef idx="2">
-            <a:schemeClr val="accent1">
-              <a:shade val="15000"/>
-            </a:schemeClr>
-          </a:lnRef>
-          <a:fillRef idx="1">
-            <a:schemeClr val="accent1"/>
-          </a:fillRef>
-          <a:effectRef idx="0">
-            <a:schemeClr val="accent1"/>
-          </a:effectRef>
-          <a:fontRef idx="minor">
-            <a:schemeClr val="lt1"/>
-          </a:fontRef>
-        </p:style>
-        <p:txBody>
-          <a:bodyPr rtlCol="0" anchor="ctr"/>
-          <a:lstStyle/>
-          <a:p>
-            <a:pPr algn="ctr"/>
-            <a:endParaRPr lang="ko-KR" altLang="en-US"/>
-          </a:p>
-        </p:txBody>
-      </p:sp>
-      <p:sp>
-        <p:nvSpPr>
-          <p:cNvPr id="2" name="제목 1">
-            <a:extLst>
-              <a:ext uri="{FF2B5EF4-FFF2-40B4-BE49-F238E27FC236}">
-                <a16:creationId xmlns:a16="http://schemas.microsoft.com/office/drawing/2014/main" id="{E6F7DB81-B4CD-0020-3B58-5C80A1CDE9A6}"/>
-              </a:ext>
-            </a:extLst>
-          </p:cNvPr>
-          <p:cNvSpPr>
-            <a:spLocks noGrp="1"/>
-          </p:cNvSpPr>
-          <p:nvPr>
-            <p:ph type="title"/>
-          </p:nvPr>
-        </p:nvSpPr>
-        <p:spPr/>
-        <p:txBody>
-          <a:bodyPr>
-            <a:normAutofit/>
-          </a:bodyPr>
-          <a:lstStyle/>
-          <a:p>
-            <a:r>
-              <a:rPr lang="ko-KR" altLang="en-US" dirty="0"/>
-              <a:t>지난 주 진행 상황</a:t>
-            </a:r>
-          </a:p>
-        </p:txBody>
-      </p:sp>
-      <p:sp>
-        <p:nvSpPr>
-          <p:cNvPr id="4" name="슬라이드 번호 개체 틀 3">
-            <a:extLst>
-              <a:ext uri="{FF2B5EF4-FFF2-40B4-BE49-F238E27FC236}">
-                <a16:creationId xmlns:a16="http://schemas.microsoft.com/office/drawing/2014/main" id="{3ECD1BB7-0A27-DD3E-AF28-045A7B8796A5}"/>
-              </a:ext>
-            </a:extLst>
-          </p:cNvPr>
-          <p:cNvSpPr>
-            <a:spLocks noGrp="1"/>
-          </p:cNvSpPr>
-          <p:nvPr>
-            <p:ph type="sldNum" sz="quarter" idx="12"/>
-          </p:nvPr>
-        </p:nvSpPr>
-        <p:spPr/>
-        <p:txBody>
-          <a:bodyPr/>
-          <a:lstStyle/>
-          <a:p>
-            <a:fld id="{E694CC86-33DA-4CBD-A678-F7DD024C14A4}" type="slidenum">
-              <a:rPr lang="ko-KR" altLang="en-US" smtClean="0"/>
-              <a:pPr/>
-              <a:t>5</a:t>
-            </a:fld>
-            <a:r>
-              <a:rPr lang="en-US" altLang="ko-KR" dirty="0"/>
-              <a:t>/10</a:t>
-            </a:r>
-            <a:endParaRPr lang="ko-KR" altLang="en-US" dirty="0"/>
-          </a:p>
-        </p:txBody>
-      </p:sp>
-      <p:sp>
-        <p:nvSpPr>
-          <p:cNvPr id="6" name="사각형: 둥근 모서리 5">
-            <a:extLst>
-              <a:ext uri="{FF2B5EF4-FFF2-40B4-BE49-F238E27FC236}">
-                <a16:creationId xmlns:a16="http://schemas.microsoft.com/office/drawing/2014/main" id="{28315A0A-FD38-71EC-117A-13AE7289C6AB}"/>
-              </a:ext>
-            </a:extLst>
-          </p:cNvPr>
-          <p:cNvSpPr/>
-          <p:nvPr/>
-        </p:nvSpPr>
-        <p:spPr>
-          <a:xfrm>
-            <a:off x="609600" y="5840557"/>
-            <a:ext cx="10972800" cy="192595"/>
-          </a:xfrm>
-          <a:prstGeom prst="roundRect">
-            <a:avLst>
-              <a:gd name="adj" fmla="val 50000"/>
-            </a:avLst>
-          </a:prstGeom>
-          <a:noFill/>
-          <a:ln w="28575">
-            <a:solidFill>
-              <a:schemeClr val="tx1"/>
-            </a:solidFill>
-          </a:ln>
-        </p:spPr>
-        <p:style>
-          <a:lnRef idx="2">
-            <a:schemeClr val="accent1">
-              <a:shade val="15000"/>
-            </a:schemeClr>
-          </a:lnRef>
-          <a:fillRef idx="1">
-            <a:schemeClr val="accent1"/>
-          </a:fillRef>
-          <a:effectRef idx="0">
-            <a:schemeClr val="accent1"/>
-          </a:effectRef>
-          <a:fontRef idx="minor">
-            <a:schemeClr val="lt1"/>
-          </a:fontRef>
-        </p:style>
-        <p:txBody>
-          <a:bodyPr rtlCol="0" anchor="ctr"/>
-          <a:lstStyle/>
-          <a:p>
-            <a:pPr algn="ctr"/>
-            <a:endParaRPr lang="ko-KR" altLang="en-US"/>
-          </a:p>
-        </p:txBody>
-      </p:sp>
-      <p:sp>
-        <p:nvSpPr>
-          <p:cNvPr id="7" name="TextBox 6">
-            <a:extLst>
-              <a:ext uri="{FF2B5EF4-FFF2-40B4-BE49-F238E27FC236}">
-                <a16:creationId xmlns:a16="http://schemas.microsoft.com/office/drawing/2014/main" id="{7F8EAFA3-77E5-4D2D-D2F2-3AD4EA9D7984}"/>
-              </a:ext>
-            </a:extLst>
-          </p:cNvPr>
-          <p:cNvSpPr txBox="1"/>
-          <p:nvPr/>
-        </p:nvSpPr>
-        <p:spPr>
-          <a:xfrm>
-            <a:off x="122870" y="5782967"/>
-            <a:ext cx="468398" cy="307777"/>
-          </a:xfrm>
-          <a:prstGeom prst="rect">
-            <a:avLst/>
-          </a:prstGeom>
-          <a:noFill/>
-        </p:spPr>
-        <p:txBody>
-          <a:bodyPr wrap="none" rtlCol="0">
-            <a:spAutoFit/>
-          </a:bodyPr>
-          <a:lstStyle/>
-          <a:p>
-            <a:pPr algn="ctr"/>
-            <a:r>
-              <a:rPr lang="en-US" altLang="ko-KR" sz="1400" dirty="0">
-                <a:latin typeface="HY견고딕" panose="02030600000101010101" pitchFamily="18" charset="-127"/>
-                <a:ea typeface="HY견고딕" panose="02030600000101010101" pitchFamily="18" charset="-127"/>
-              </a:rPr>
-              <a:t>0%</a:t>
-            </a:r>
-            <a:endParaRPr lang="ko-KR" altLang="en-US" sz="1400" dirty="0">
-              <a:latin typeface="HY견고딕" panose="02030600000101010101" pitchFamily="18" charset="-127"/>
-              <a:ea typeface="HY견고딕" panose="02030600000101010101" pitchFamily="18" charset="-127"/>
-            </a:endParaRPr>
-          </a:p>
-        </p:txBody>
-      </p:sp>
-      <p:sp>
-        <p:nvSpPr>
-          <p:cNvPr id="8" name="TextBox 7">
-            <a:extLst>
-              <a:ext uri="{FF2B5EF4-FFF2-40B4-BE49-F238E27FC236}">
-                <a16:creationId xmlns:a16="http://schemas.microsoft.com/office/drawing/2014/main" id="{604EA42F-D1DB-1FB7-EA7F-34E32F903808}"/>
-              </a:ext>
-            </a:extLst>
-          </p:cNvPr>
-          <p:cNvSpPr txBox="1"/>
-          <p:nvPr/>
-        </p:nvSpPr>
-        <p:spPr>
-          <a:xfrm>
-            <a:off x="11548533" y="5782967"/>
-            <a:ext cx="692818" cy="307777"/>
-          </a:xfrm>
-          <a:prstGeom prst="rect">
-            <a:avLst/>
-          </a:prstGeom>
-          <a:noFill/>
-        </p:spPr>
-        <p:txBody>
-          <a:bodyPr wrap="none" rtlCol="0">
-            <a:spAutoFit/>
-          </a:bodyPr>
-          <a:lstStyle/>
-          <a:p>
-            <a:pPr algn="ctr"/>
-            <a:r>
-              <a:rPr lang="en-US" altLang="ko-KR" sz="1400" dirty="0">
-                <a:latin typeface="HY견고딕" panose="02030600000101010101" pitchFamily="18" charset="-127"/>
-                <a:ea typeface="HY견고딕" panose="02030600000101010101" pitchFamily="18" charset="-127"/>
-              </a:rPr>
-              <a:t>100%</a:t>
-            </a:r>
-            <a:endParaRPr lang="ko-KR" altLang="en-US" sz="1400" dirty="0">
-              <a:latin typeface="HY견고딕" panose="02030600000101010101" pitchFamily="18" charset="-127"/>
-              <a:ea typeface="HY견고딕" panose="02030600000101010101" pitchFamily="18" charset="-127"/>
-            </a:endParaRPr>
-          </a:p>
-        </p:txBody>
-      </p:sp>
-      <p:sp>
-        <p:nvSpPr>
-          <p:cNvPr id="17" name="TextBox 16">
-            <a:extLst>
-              <a:ext uri="{FF2B5EF4-FFF2-40B4-BE49-F238E27FC236}">
-                <a16:creationId xmlns:a16="http://schemas.microsoft.com/office/drawing/2014/main" id="{3CB3741A-581C-05AC-29AB-CA49FB64BAF0}"/>
-              </a:ext>
-            </a:extLst>
-          </p:cNvPr>
-          <p:cNvSpPr txBox="1"/>
-          <p:nvPr/>
-        </p:nvSpPr>
-        <p:spPr>
-          <a:xfrm>
-            <a:off x="5861800" y="5815121"/>
-            <a:ext cx="468398" cy="246221"/>
-          </a:xfrm>
-          <a:prstGeom prst="rect">
-            <a:avLst/>
-          </a:prstGeom>
-          <a:noFill/>
-        </p:spPr>
-        <p:txBody>
-          <a:bodyPr wrap="none" rtlCol="0">
-            <a:spAutoFit/>
-          </a:bodyPr>
-          <a:lstStyle/>
-          <a:p>
-            <a:pPr algn="ctr"/>
-            <a:r>
-              <a:rPr lang="en-US" altLang="ko-KR" sz="1000" dirty="0">
-                <a:latin typeface="HY견고딕" panose="02030600000101010101" pitchFamily="18" charset="-127"/>
-                <a:ea typeface="HY견고딕" panose="02030600000101010101" pitchFamily="18" charset="-127"/>
-              </a:rPr>
-              <a:t>90%</a:t>
-            </a:r>
-            <a:endParaRPr lang="ko-KR" altLang="en-US" sz="1000" dirty="0">
-              <a:latin typeface="HY견고딕" panose="02030600000101010101" pitchFamily="18" charset="-127"/>
-              <a:ea typeface="HY견고딕" panose="02030600000101010101" pitchFamily="18" charset="-127"/>
-            </a:endParaRPr>
-          </a:p>
-        </p:txBody>
-      </p:sp>
-      <p:sp>
-        <p:nvSpPr>
-          <p:cNvPr id="13" name="내용 개체 틀 12">
-            <a:extLst>
-              <a:ext uri="{FF2B5EF4-FFF2-40B4-BE49-F238E27FC236}">
-                <a16:creationId xmlns:a16="http://schemas.microsoft.com/office/drawing/2014/main" id="{5687E576-D451-3A2D-5DCC-0411F073E1E3}"/>
-              </a:ext>
-            </a:extLst>
-          </p:cNvPr>
-          <p:cNvSpPr>
-            <a:spLocks noGrp="1"/>
-          </p:cNvSpPr>
-          <p:nvPr>
-            <p:ph idx="1"/>
-          </p:nvPr>
-        </p:nvSpPr>
-        <p:spPr>
-          <a:xfrm>
-            <a:off x="838199" y="1029196"/>
-            <a:ext cx="7689210" cy="925294"/>
-          </a:xfrm>
-        </p:spPr>
-        <p:txBody>
-          <a:bodyPr>
-            <a:normAutofit/>
-          </a:bodyPr>
-          <a:lstStyle/>
-          <a:p>
-            <a:r>
-              <a:rPr lang="en-US" altLang="ko-KR" dirty="0"/>
-              <a:t>WQFS </a:t>
-            </a:r>
-            <a:r>
-              <a:rPr lang="ko-KR" altLang="en-US" dirty="0"/>
-              <a:t>쓰나미 이벤트</a:t>
-            </a:r>
-            <a:endParaRPr lang="en-US" altLang="ko-KR" dirty="0"/>
-          </a:p>
-          <a:p>
-            <a:pPr lvl="1"/>
-            <a:r>
-              <a:rPr lang="ko-KR" altLang="en-US" dirty="0"/>
-              <a:t>평소에는 정지해 있다가 이벤트 발생시 이동</a:t>
-            </a:r>
-            <a:endParaRPr lang="en-US" altLang="ko-KR" dirty="0"/>
-          </a:p>
-        </p:txBody>
-      </p:sp>
-      <p:pic>
-        <p:nvPicPr>
-          <p:cNvPr id="5" name="그림 4" descr="텍스트, 스크린샷이(가) 표시된 사진&#10;&#10;AI 생성 콘텐츠는 정확하지 않을 수 있습니다.">
-            <a:extLst>
-              <a:ext uri="{FF2B5EF4-FFF2-40B4-BE49-F238E27FC236}">
-                <a16:creationId xmlns:a16="http://schemas.microsoft.com/office/drawing/2014/main" id="{88AB3067-C965-7186-D069-8FB637F2DA3F}"/>
-              </a:ext>
-            </a:extLst>
-          </p:cNvPr>
-          <p:cNvPicPr>
-            <a:picLocks noChangeAspect="1"/>
-          </p:cNvPicPr>
-          <p:nvPr/>
-        </p:nvPicPr>
-        <p:blipFill>
-          <a:blip r:embed="rId2">
-            <a:extLst>
-              <a:ext uri="{28A0092B-C50C-407E-A947-70E740481C1C}">
-                <a14:useLocalDpi xmlns:a14="http://schemas.microsoft.com/office/drawing/2010/main" val="0"/>
-              </a:ext>
-            </a:extLst>
-          </a:blip>
-          <a:stretch>
-            <a:fillRect/>
-          </a:stretch>
-        </p:blipFill>
-        <p:spPr>
-          <a:xfrm>
-            <a:off x="242613" y="2308276"/>
-            <a:ext cx="7457813" cy="2155867"/>
-          </a:xfrm>
-          <a:prstGeom prst="rect">
-            <a:avLst/>
-          </a:prstGeom>
-        </p:spPr>
-      </p:pic>
-      <p:pic>
-        <p:nvPicPr>
-          <p:cNvPr id="9" name="그림 8" descr="가전, 가전용품, 스크린샷, 제어이(가) 표시된 사진&#10;&#10;AI 생성 콘텐츠는 정확하지 않을 수 있습니다.">
-            <a:extLst>
-              <a:ext uri="{FF2B5EF4-FFF2-40B4-BE49-F238E27FC236}">
-                <a16:creationId xmlns:a16="http://schemas.microsoft.com/office/drawing/2014/main" id="{FAF9397F-D85B-4A32-DAC0-40FA2E1995A4}"/>
-              </a:ext>
-            </a:extLst>
-          </p:cNvPr>
-          <p:cNvPicPr>
-            <a:picLocks noChangeAspect="1"/>
-          </p:cNvPicPr>
-          <p:nvPr/>
-        </p:nvPicPr>
-        <p:blipFill>
-          <a:blip r:embed="rId3">
-            <a:extLst>
-              <a:ext uri="{28A0092B-C50C-407E-A947-70E740481C1C}">
-                <a14:useLocalDpi xmlns:a14="http://schemas.microsoft.com/office/drawing/2010/main" val="0"/>
-              </a:ext>
-            </a:extLst>
-          </a:blip>
-          <a:srcRect l="31000" r="13214"/>
-          <a:stretch>
-            <a:fillRect/>
-          </a:stretch>
-        </p:blipFill>
-        <p:spPr>
-          <a:xfrm>
-            <a:off x="8082643" y="2009634"/>
-            <a:ext cx="3630385" cy="3660600"/>
-          </a:xfrm>
-          <a:prstGeom prst="rect">
-            <a:avLst/>
-          </a:prstGeom>
-        </p:spPr>
-      </p:pic>
-    </p:spTree>
-    <p:extLst>
-      <p:ext uri="{BB962C8B-B14F-4D97-AF65-F5344CB8AC3E}">
-        <p14:creationId xmlns:p14="http://schemas.microsoft.com/office/powerpoint/2010/main" val="1466951444"/>
-      </p:ext>
-    </p:extLst>
-  </p:cSld>
-  <p:clrMapOvr>
-    <a:masterClrMapping/>
-  </p:clrMapOvr>
-</p:sld>
-</file>
-
-<file path=ppt/slides/slide6.xml><?xml version="1.0" encoding="utf-8"?>
-<p:sld xmlns:a="http://schemas.openxmlformats.org/drawingml/2006/main" xmlns:r="http://schemas.openxmlformats.org/officeDocument/2006/relationships" xmlns:p="http://schemas.openxmlformats.org/presentationml/2006/main">
-  <p:cSld>
-    <p:spTree>
-      <p:nvGrpSpPr>
-        <p:cNvPr id="1" name="">
-          <a:extLst>
-            <a:ext uri="{FF2B5EF4-FFF2-40B4-BE49-F238E27FC236}">
-              <a16:creationId xmlns:a16="http://schemas.microsoft.com/office/drawing/2014/main" id="{601510B1-70C3-62F3-A51D-85C38751A000}"/>
-            </a:ext>
-          </a:extLst>
-        </p:cNvPr>
-        <p:cNvGrpSpPr/>
-        <p:nvPr/>
-      </p:nvGrpSpPr>
-      <p:grpSpPr>
-        <a:xfrm>
-          <a:off x="0" y="0"/>
-          <a:ext cx="0" cy="0"/>
-          <a:chOff x="0" y="0"/>
-          <a:chExt cx="0" cy="0"/>
-        </a:xfrm>
-      </p:grpSpPr>
-      <p:sp>
-        <p:nvSpPr>
-          <p:cNvPr id="3" name="사각형: 둥근 모서리 2">
-            <a:extLst>
-              <a:ext uri="{FF2B5EF4-FFF2-40B4-BE49-F238E27FC236}">
-                <a16:creationId xmlns:a16="http://schemas.microsoft.com/office/drawing/2014/main" id="{796D7E0D-C9AD-731C-FD07-491FA1C851EC}"/>
-              </a:ext>
-            </a:extLst>
-          </p:cNvPr>
-          <p:cNvSpPr/>
-          <p:nvPr/>
-        </p:nvSpPr>
-        <p:spPr>
-          <a:xfrm>
-            <a:off x="609598" y="5840557"/>
-            <a:ext cx="10639779" cy="192595"/>
-          </a:xfrm>
-          <a:prstGeom prst="roundRect">
-            <a:avLst>
-              <a:gd name="adj" fmla="val 50000"/>
-            </a:avLst>
-          </a:prstGeom>
-          <a:solidFill>
-            <a:schemeClr val="accent6">
-              <a:lumMod val="60000"/>
-              <a:lumOff val="40000"/>
-            </a:schemeClr>
-          </a:solidFill>
-          <a:ln w="28575">
-            <a:noFill/>
-          </a:ln>
-        </p:spPr>
-        <p:style>
-          <a:lnRef idx="2">
-            <a:schemeClr val="accent1">
-              <a:shade val="15000"/>
-            </a:schemeClr>
-          </a:lnRef>
-          <a:fillRef idx="1">
-            <a:schemeClr val="accent1"/>
-          </a:fillRef>
-          <a:effectRef idx="0">
-            <a:schemeClr val="accent1"/>
-          </a:effectRef>
-          <a:fontRef idx="minor">
-            <a:schemeClr val="lt1"/>
-          </a:fontRef>
-        </p:style>
-        <p:txBody>
-          <a:bodyPr rtlCol="0" anchor="ctr"/>
-          <a:lstStyle/>
-          <a:p>
-            <a:pPr algn="ctr"/>
-            <a:endParaRPr lang="ko-KR" altLang="en-US"/>
-          </a:p>
-        </p:txBody>
-      </p:sp>
-      <p:sp>
-        <p:nvSpPr>
-          <p:cNvPr id="2" name="제목 1">
-            <a:extLst>
-              <a:ext uri="{FF2B5EF4-FFF2-40B4-BE49-F238E27FC236}">
-                <a16:creationId xmlns:a16="http://schemas.microsoft.com/office/drawing/2014/main" id="{D444C8DF-526C-9548-3754-66C8D62F26E4}"/>
-              </a:ext>
-            </a:extLst>
-          </p:cNvPr>
-          <p:cNvSpPr>
-            <a:spLocks noGrp="1"/>
-          </p:cNvSpPr>
-          <p:nvPr>
-            <p:ph type="title"/>
-          </p:nvPr>
-        </p:nvSpPr>
-        <p:spPr/>
-        <p:txBody>
-          <a:bodyPr>
-            <a:normAutofit/>
-          </a:bodyPr>
-          <a:lstStyle/>
-          <a:p>
-            <a:r>
-              <a:rPr lang="ko-KR" altLang="en-US" dirty="0"/>
-              <a:t>진행 상황</a:t>
-            </a:r>
-          </a:p>
-        </p:txBody>
-      </p:sp>
-      <p:sp>
-        <p:nvSpPr>
-          <p:cNvPr id="4" name="슬라이드 번호 개체 틀 3">
-            <a:extLst>
-              <a:ext uri="{FF2B5EF4-FFF2-40B4-BE49-F238E27FC236}">
-                <a16:creationId xmlns:a16="http://schemas.microsoft.com/office/drawing/2014/main" id="{83D8A3AA-A20E-1975-D487-4B76697E0B29}"/>
-              </a:ext>
-            </a:extLst>
-          </p:cNvPr>
-          <p:cNvSpPr>
-            <a:spLocks noGrp="1"/>
-          </p:cNvSpPr>
-          <p:nvPr>
-            <p:ph type="sldNum" sz="quarter" idx="12"/>
-          </p:nvPr>
-        </p:nvSpPr>
-        <p:spPr/>
-        <p:txBody>
-          <a:bodyPr/>
-          <a:lstStyle/>
-          <a:p>
-            <a:fld id="{E694CC86-33DA-4CBD-A678-F7DD024C14A4}" type="slidenum">
-              <a:rPr lang="ko-KR" altLang="en-US" smtClean="0"/>
-              <a:pPr/>
-              <a:t>6</a:t>
-            </a:fld>
-            <a:r>
-              <a:rPr lang="en-US" altLang="ko-KR" dirty="0"/>
-              <a:t>/10</a:t>
-            </a:r>
-            <a:endParaRPr lang="ko-KR" altLang="en-US" dirty="0"/>
-          </a:p>
-        </p:txBody>
-      </p:sp>
-      <p:sp>
-        <p:nvSpPr>
-          <p:cNvPr id="6" name="사각형: 둥근 모서리 5">
-            <a:extLst>
-              <a:ext uri="{FF2B5EF4-FFF2-40B4-BE49-F238E27FC236}">
-                <a16:creationId xmlns:a16="http://schemas.microsoft.com/office/drawing/2014/main" id="{97A95E06-804A-3F48-822D-085A24AAF87A}"/>
-              </a:ext>
-            </a:extLst>
-          </p:cNvPr>
-          <p:cNvSpPr/>
-          <p:nvPr/>
-        </p:nvSpPr>
-        <p:spPr>
-          <a:xfrm>
-            <a:off x="609600" y="5840557"/>
-            <a:ext cx="10972800" cy="192595"/>
-          </a:xfrm>
-          <a:prstGeom prst="roundRect">
-            <a:avLst>
-              <a:gd name="adj" fmla="val 50000"/>
-            </a:avLst>
-          </a:prstGeom>
-          <a:noFill/>
-          <a:ln w="28575">
-            <a:solidFill>
-              <a:schemeClr val="tx1"/>
-            </a:solidFill>
-          </a:ln>
-        </p:spPr>
-        <p:style>
-          <a:lnRef idx="2">
-            <a:schemeClr val="accent1">
-              <a:shade val="15000"/>
-            </a:schemeClr>
-          </a:lnRef>
-          <a:fillRef idx="1">
-            <a:schemeClr val="accent1"/>
-          </a:fillRef>
-          <a:effectRef idx="0">
-            <a:schemeClr val="accent1"/>
-          </a:effectRef>
-          <a:fontRef idx="minor">
-            <a:schemeClr val="lt1"/>
-          </a:fontRef>
-        </p:style>
-        <p:txBody>
-          <a:bodyPr rtlCol="0" anchor="ctr"/>
-          <a:lstStyle/>
-          <a:p>
-            <a:pPr algn="ctr"/>
-            <a:endParaRPr lang="ko-KR" altLang="en-US"/>
-          </a:p>
-        </p:txBody>
-      </p:sp>
-      <p:sp>
-        <p:nvSpPr>
-          <p:cNvPr id="7" name="TextBox 6">
-            <a:extLst>
-              <a:ext uri="{FF2B5EF4-FFF2-40B4-BE49-F238E27FC236}">
-                <a16:creationId xmlns:a16="http://schemas.microsoft.com/office/drawing/2014/main" id="{DA19A8A9-C658-6655-AE20-A74A70313701}"/>
-              </a:ext>
-            </a:extLst>
-          </p:cNvPr>
-          <p:cNvSpPr txBox="1"/>
-          <p:nvPr/>
-        </p:nvSpPr>
-        <p:spPr>
-          <a:xfrm>
-            <a:off x="122870" y="5782967"/>
-            <a:ext cx="468398" cy="307777"/>
-          </a:xfrm>
-          <a:prstGeom prst="rect">
-            <a:avLst/>
-          </a:prstGeom>
-          <a:noFill/>
-        </p:spPr>
-        <p:txBody>
-          <a:bodyPr wrap="none" rtlCol="0">
-            <a:spAutoFit/>
-          </a:bodyPr>
-          <a:lstStyle/>
-          <a:p>
-            <a:pPr algn="ctr"/>
-            <a:r>
-              <a:rPr lang="en-US" altLang="ko-KR" sz="1400" dirty="0">
-                <a:latin typeface="HY견고딕" panose="02030600000101010101" pitchFamily="18" charset="-127"/>
-                <a:ea typeface="HY견고딕" panose="02030600000101010101" pitchFamily="18" charset="-127"/>
-              </a:rPr>
-              <a:t>0%</a:t>
-            </a:r>
-            <a:endParaRPr lang="ko-KR" altLang="en-US" sz="1400" dirty="0">
-              <a:latin typeface="HY견고딕" panose="02030600000101010101" pitchFamily="18" charset="-127"/>
-              <a:ea typeface="HY견고딕" panose="02030600000101010101" pitchFamily="18" charset="-127"/>
-            </a:endParaRPr>
-          </a:p>
-        </p:txBody>
-      </p:sp>
-      <p:sp>
-        <p:nvSpPr>
-          <p:cNvPr id="8" name="TextBox 7">
-            <a:extLst>
-              <a:ext uri="{FF2B5EF4-FFF2-40B4-BE49-F238E27FC236}">
-                <a16:creationId xmlns:a16="http://schemas.microsoft.com/office/drawing/2014/main" id="{15CF15F2-9F37-3D33-CAA7-F642B39E447F}"/>
-              </a:ext>
-            </a:extLst>
-          </p:cNvPr>
-          <p:cNvSpPr txBox="1"/>
-          <p:nvPr/>
-        </p:nvSpPr>
-        <p:spPr>
-          <a:xfrm>
-            <a:off x="11548533" y="5782967"/>
-            <a:ext cx="692818" cy="307777"/>
-          </a:xfrm>
-          <a:prstGeom prst="rect">
-            <a:avLst/>
-          </a:prstGeom>
-          <a:noFill/>
-        </p:spPr>
-        <p:txBody>
-          <a:bodyPr wrap="none" rtlCol="0">
-            <a:spAutoFit/>
-          </a:bodyPr>
-          <a:lstStyle/>
-          <a:p>
-            <a:pPr algn="ctr"/>
-            <a:r>
-              <a:rPr lang="en-US" altLang="ko-KR" sz="1400" dirty="0">
-                <a:latin typeface="HY견고딕" panose="02030600000101010101" pitchFamily="18" charset="-127"/>
-                <a:ea typeface="HY견고딕" panose="02030600000101010101" pitchFamily="18" charset="-127"/>
-              </a:rPr>
-              <a:t>100%</a:t>
-            </a:r>
-            <a:endParaRPr lang="ko-KR" altLang="en-US" sz="1400" dirty="0">
-              <a:latin typeface="HY견고딕" panose="02030600000101010101" pitchFamily="18" charset="-127"/>
-              <a:ea typeface="HY견고딕" panose="02030600000101010101" pitchFamily="18" charset="-127"/>
-            </a:endParaRPr>
-          </a:p>
-        </p:txBody>
-      </p:sp>
-      <p:sp>
-        <p:nvSpPr>
-          <p:cNvPr id="17" name="TextBox 16">
-            <a:extLst>
-              <a:ext uri="{FF2B5EF4-FFF2-40B4-BE49-F238E27FC236}">
-                <a16:creationId xmlns:a16="http://schemas.microsoft.com/office/drawing/2014/main" id="{5D5100E6-1ACD-E297-2708-A63FC20F9457}"/>
-              </a:ext>
-            </a:extLst>
-          </p:cNvPr>
-          <p:cNvSpPr txBox="1"/>
-          <p:nvPr/>
-        </p:nvSpPr>
-        <p:spPr>
-          <a:xfrm>
-            <a:off x="5861800" y="5815121"/>
-            <a:ext cx="468398" cy="246221"/>
-          </a:xfrm>
-          <a:prstGeom prst="rect">
-            <a:avLst/>
-          </a:prstGeom>
-          <a:noFill/>
-        </p:spPr>
-        <p:txBody>
-          <a:bodyPr wrap="none" rtlCol="0">
-            <a:spAutoFit/>
-          </a:bodyPr>
-          <a:lstStyle/>
-          <a:p>
-            <a:pPr algn="ctr"/>
-            <a:r>
-              <a:rPr lang="en-US" altLang="ko-KR" sz="1000" dirty="0">
-                <a:latin typeface="HY견고딕" panose="02030600000101010101" pitchFamily="18" charset="-127"/>
-                <a:ea typeface="HY견고딕" panose="02030600000101010101" pitchFamily="18" charset="-127"/>
-              </a:rPr>
-              <a:t>90%</a:t>
-            </a:r>
-            <a:endParaRPr lang="ko-KR" altLang="en-US" sz="1000" dirty="0">
-              <a:latin typeface="HY견고딕" panose="02030600000101010101" pitchFamily="18" charset="-127"/>
-              <a:ea typeface="HY견고딕" panose="02030600000101010101" pitchFamily="18" charset="-127"/>
-            </a:endParaRPr>
-          </a:p>
-        </p:txBody>
-      </p:sp>
-      <p:sp>
-        <p:nvSpPr>
-          <p:cNvPr id="13" name="내용 개체 틀 12">
-            <a:extLst>
-              <a:ext uri="{FF2B5EF4-FFF2-40B4-BE49-F238E27FC236}">
-                <a16:creationId xmlns:a16="http://schemas.microsoft.com/office/drawing/2014/main" id="{99928BF1-CBBE-2C36-C5FA-A5EC02D9A324}"/>
-              </a:ext>
-            </a:extLst>
-          </p:cNvPr>
-          <p:cNvSpPr>
-            <a:spLocks noGrp="1"/>
-          </p:cNvSpPr>
-          <p:nvPr>
-            <p:ph idx="1"/>
-          </p:nvPr>
-        </p:nvSpPr>
-        <p:spPr>
-          <a:xfrm>
-            <a:off x="838199" y="1029196"/>
-            <a:ext cx="7689210" cy="1229590"/>
-          </a:xfrm>
-        </p:spPr>
-        <p:txBody>
-          <a:bodyPr>
-            <a:normAutofit/>
-          </a:bodyPr>
-          <a:lstStyle/>
-          <a:p>
-            <a:r>
-              <a:rPr lang="en-US" altLang="ko-KR" dirty="0"/>
-              <a:t>WQFS </a:t>
-            </a:r>
-            <a:r>
-              <a:rPr lang="ko-KR" altLang="en-US" dirty="0"/>
-              <a:t>이벤트 발생 동적화</a:t>
-            </a:r>
-            <a:endParaRPr lang="en-US" altLang="ko-KR" dirty="0"/>
-          </a:p>
-          <a:p>
-            <a:pPr lvl="1"/>
-            <a:r>
-              <a:rPr lang="ko-KR" altLang="en-US" dirty="0"/>
-              <a:t>고정적으로 발생하는 이벤트 시간을 </a:t>
-            </a:r>
-            <a:r>
-              <a:rPr lang="ko-KR" altLang="en-US" dirty="0" err="1"/>
-              <a:t>동적화하여</a:t>
-            </a:r>
-            <a:r>
-              <a:rPr lang="ko-KR" altLang="en-US" dirty="0"/>
-              <a:t> 예측하기 </a:t>
-            </a:r>
-            <a:br>
-              <a:rPr lang="en-US" altLang="ko-KR" dirty="0"/>
-            </a:br>
-            <a:r>
-              <a:rPr lang="ko-KR" altLang="en-US" dirty="0"/>
-              <a:t>힘들게 함</a:t>
-            </a:r>
-            <a:endParaRPr lang="en-US" altLang="ko-KR" dirty="0"/>
-          </a:p>
-        </p:txBody>
-      </p:sp>
-      <p:pic>
-        <p:nvPicPr>
-          <p:cNvPr id="9" name="그림 8" descr="텍스트, 폰트, 스크린샷이(가) 표시된 사진&#10;&#10;AI 생성 콘텐츠는 정확하지 않을 수 있습니다.">
-            <a:extLst>
-              <a:ext uri="{FF2B5EF4-FFF2-40B4-BE49-F238E27FC236}">
-                <a16:creationId xmlns:a16="http://schemas.microsoft.com/office/drawing/2014/main" id="{19C6A8B9-B519-CC23-2A1A-E61D57F4EF14}"/>
-              </a:ext>
-            </a:extLst>
-          </p:cNvPr>
-          <p:cNvPicPr>
-            <a:picLocks noChangeAspect="1"/>
-          </p:cNvPicPr>
-          <p:nvPr/>
-        </p:nvPicPr>
-        <p:blipFill>
-          <a:blip r:embed="rId2">
-            <a:extLst>
-              <a:ext uri="{28A0092B-C50C-407E-A947-70E740481C1C}">
-                <a14:useLocalDpi xmlns:a14="http://schemas.microsoft.com/office/drawing/2010/main" val="0"/>
-              </a:ext>
-            </a:extLst>
-          </a:blip>
-          <a:stretch>
-            <a:fillRect/>
-          </a:stretch>
-        </p:blipFill>
-        <p:spPr>
-          <a:xfrm>
-            <a:off x="513147" y="2495620"/>
-            <a:ext cx="6698562" cy="1290094"/>
-          </a:xfrm>
-          <a:prstGeom prst="rect">
-            <a:avLst/>
-          </a:prstGeom>
-        </p:spPr>
-      </p:pic>
-      <p:pic>
-        <p:nvPicPr>
-          <p:cNvPr id="14" name="그림 13" descr="텍스트, 스크린샷, 폰트이(가) 표시된 사진&#10;&#10;AI 생성 콘텐츠는 정확하지 않을 수 있습니다.">
-            <a:extLst>
-              <a:ext uri="{FF2B5EF4-FFF2-40B4-BE49-F238E27FC236}">
-                <a16:creationId xmlns:a16="http://schemas.microsoft.com/office/drawing/2014/main" id="{DCCB4BE5-633E-F42E-81A9-25454B6DCDB0}"/>
-              </a:ext>
-            </a:extLst>
-          </p:cNvPr>
-          <p:cNvPicPr>
-            <a:picLocks noChangeAspect="1"/>
-          </p:cNvPicPr>
-          <p:nvPr/>
-        </p:nvPicPr>
-        <p:blipFill>
-          <a:blip r:embed="rId3">
-            <a:extLst>
-              <a:ext uri="{28A0092B-C50C-407E-A947-70E740481C1C}">
-                <a14:useLocalDpi xmlns:a14="http://schemas.microsoft.com/office/drawing/2010/main" val="0"/>
-              </a:ext>
-            </a:extLst>
-          </a:blip>
-          <a:stretch>
-            <a:fillRect/>
-          </a:stretch>
-        </p:blipFill>
-        <p:spPr>
-          <a:xfrm>
-            <a:off x="551247" y="4056744"/>
-            <a:ext cx="6698562" cy="1557958"/>
-          </a:xfrm>
-          <a:prstGeom prst="rect">
-            <a:avLst/>
-          </a:prstGeom>
-        </p:spPr>
-      </p:pic>
-      <p:pic>
-        <p:nvPicPr>
-          <p:cNvPr id="5" name="그림 4" descr="스크린샷, 직사각형, 잭, 디자인이(가) 표시된 사진&#10;&#10;AI 생성 콘텐츠는 정확하지 않을 수 있습니다.">
-            <a:extLst>
-              <a:ext uri="{FF2B5EF4-FFF2-40B4-BE49-F238E27FC236}">
-                <a16:creationId xmlns:a16="http://schemas.microsoft.com/office/drawing/2014/main" id="{80FEA332-6FB7-72A7-1668-9F5484B1EAAB}"/>
-              </a:ext>
-            </a:extLst>
-          </p:cNvPr>
-          <p:cNvPicPr>
-            <a:picLocks noChangeAspect="1"/>
-          </p:cNvPicPr>
-          <p:nvPr/>
-        </p:nvPicPr>
-        <p:blipFill>
-          <a:blip r:embed="rId4">
-            <a:extLst>
-              <a:ext uri="{28A0092B-C50C-407E-A947-70E740481C1C}">
-                <a14:useLocalDpi xmlns:a14="http://schemas.microsoft.com/office/drawing/2010/main" val="0"/>
-              </a:ext>
-            </a:extLst>
-          </a:blip>
-          <a:srcRect l="31072" r="13071"/>
-          <a:stretch>
-            <a:fillRect/>
-          </a:stretch>
-        </p:blipFill>
-        <p:spPr>
-          <a:xfrm>
-            <a:off x="8059661" y="2029009"/>
-            <a:ext cx="3488872" cy="3513410"/>
-          </a:xfrm>
-          <a:prstGeom prst="rect">
-            <a:avLst/>
-          </a:prstGeom>
-        </p:spPr>
-      </p:pic>
-      <p:sp>
-        <p:nvSpPr>
-          <p:cNvPr id="10" name="TextBox 9">
-            <a:extLst>
-              <a:ext uri="{FF2B5EF4-FFF2-40B4-BE49-F238E27FC236}">
-                <a16:creationId xmlns:a16="http://schemas.microsoft.com/office/drawing/2014/main" id="{2C7386E5-BB13-4E68-8B5E-C2544B509880}"/>
-              </a:ext>
-            </a:extLst>
-          </p:cNvPr>
-          <p:cNvSpPr txBox="1"/>
-          <p:nvPr/>
-        </p:nvSpPr>
-        <p:spPr>
-          <a:xfrm>
-            <a:off x="9007289" y="4955149"/>
-            <a:ext cx="708848" cy="307777"/>
-          </a:xfrm>
-          <a:prstGeom prst="rect">
-            <a:avLst/>
-          </a:prstGeom>
-          <a:noFill/>
-        </p:spPr>
-        <p:txBody>
-          <a:bodyPr wrap="none" rtlCol="0">
-            <a:spAutoFit/>
-          </a:bodyPr>
-          <a:lstStyle/>
-          <a:p>
-            <a:pPr algn="ctr"/>
-            <a:r>
-              <a:rPr lang="en-US" altLang="ko-KR" sz="1400">
-                <a:latin typeface="HY견고딕" panose="02030600000101010101" pitchFamily="18" charset="-127"/>
-                <a:ea typeface="HY견고딕" panose="02030600000101010101" pitchFamily="18" charset="-127"/>
-              </a:rPr>
-              <a:t>3~7</a:t>
-            </a:r>
-            <a:r>
-              <a:rPr lang="ko-KR" altLang="en-US" sz="1400" dirty="0">
-                <a:latin typeface="HY견고딕" panose="02030600000101010101" pitchFamily="18" charset="-127"/>
-                <a:ea typeface="HY견고딕" panose="02030600000101010101" pitchFamily="18" charset="-127"/>
-              </a:rPr>
-              <a:t>초</a:t>
-            </a:r>
-          </a:p>
-        </p:txBody>
-      </p:sp>
-      <p:sp>
-        <p:nvSpPr>
-          <p:cNvPr id="11" name="TextBox 10">
-            <a:extLst>
-              <a:ext uri="{FF2B5EF4-FFF2-40B4-BE49-F238E27FC236}">
-                <a16:creationId xmlns:a16="http://schemas.microsoft.com/office/drawing/2014/main" id="{0F488095-3BD3-F162-79B9-DA56DEB265A1}"/>
-              </a:ext>
-            </a:extLst>
-          </p:cNvPr>
-          <p:cNvSpPr txBox="1"/>
-          <p:nvPr/>
-        </p:nvSpPr>
-        <p:spPr>
-          <a:xfrm>
-            <a:off x="10587635" y="4955149"/>
-            <a:ext cx="476412" cy="307777"/>
-          </a:xfrm>
-          <a:prstGeom prst="rect">
-            <a:avLst/>
-          </a:prstGeom>
-          <a:noFill/>
-        </p:spPr>
-        <p:txBody>
-          <a:bodyPr wrap="none" rtlCol="0">
-            <a:spAutoFit/>
-          </a:bodyPr>
-          <a:lstStyle/>
-          <a:p>
-            <a:pPr algn="ctr"/>
-            <a:r>
-              <a:rPr lang="en-US" altLang="ko-KR" sz="1400" dirty="0">
-                <a:latin typeface="HY견고딕" panose="02030600000101010101" pitchFamily="18" charset="-127"/>
-                <a:ea typeface="HY견고딕" panose="02030600000101010101" pitchFamily="18" charset="-127"/>
-              </a:rPr>
-              <a:t>5</a:t>
-            </a:r>
-            <a:r>
-              <a:rPr lang="ko-KR" altLang="en-US" sz="1400" dirty="0">
-                <a:latin typeface="HY견고딕" panose="02030600000101010101" pitchFamily="18" charset="-127"/>
-                <a:ea typeface="HY견고딕" panose="02030600000101010101" pitchFamily="18" charset="-127"/>
-              </a:rPr>
-              <a:t>초</a:t>
-            </a:r>
-          </a:p>
-        </p:txBody>
-      </p:sp>
-    </p:spTree>
-    <p:extLst>
-      <p:ext uri="{BB962C8B-B14F-4D97-AF65-F5344CB8AC3E}">
-        <p14:creationId xmlns:p14="http://schemas.microsoft.com/office/powerpoint/2010/main" val="2818906215"/>
-      </p:ext>
-    </p:extLst>
-  </p:cSld>
-  <p:clrMapOvr>
-    <a:masterClrMapping/>
-  </p:clrMapOvr>
-</p:sld>
-</file>
-
-<file path=ppt/slides/slide7.xml><?xml version="1.0" encoding="utf-8"?>
-<p:sld xmlns:a="http://schemas.openxmlformats.org/drawingml/2006/main" xmlns:r="http://schemas.openxmlformats.org/officeDocument/2006/relationships" xmlns:p="http://schemas.openxmlformats.org/presentationml/2006/main">
-  <p:cSld>
-    <p:spTree>
-      <p:nvGrpSpPr>
-        <p:cNvPr id="1" name="">
-          <a:extLst>
-            <a:ext uri="{FF2B5EF4-FFF2-40B4-BE49-F238E27FC236}">
-              <a16:creationId xmlns:a16="http://schemas.microsoft.com/office/drawing/2014/main" id="{ED335E72-8051-A7E9-CFAC-081FE478495A}"/>
-            </a:ext>
-          </a:extLst>
-        </p:cNvPr>
-        <p:cNvGrpSpPr/>
-        <p:nvPr/>
-      </p:nvGrpSpPr>
-      <p:grpSpPr>
-        <a:xfrm>
-          <a:off x="0" y="0"/>
-          <a:ext cx="0" cy="0"/>
-          <a:chOff x="0" y="0"/>
-          <a:chExt cx="0" cy="0"/>
-        </a:xfrm>
-      </p:grpSpPr>
-      <p:sp>
-        <p:nvSpPr>
-          <p:cNvPr id="3" name="사각형: 둥근 모서리 2">
-            <a:extLst>
-              <a:ext uri="{FF2B5EF4-FFF2-40B4-BE49-F238E27FC236}">
-                <a16:creationId xmlns:a16="http://schemas.microsoft.com/office/drawing/2014/main" id="{08BBE52B-21E1-11E8-5C3E-61A7FD5D9D7B}"/>
-              </a:ext>
-            </a:extLst>
-          </p:cNvPr>
-          <p:cNvSpPr/>
-          <p:nvPr/>
-        </p:nvSpPr>
-        <p:spPr>
-          <a:xfrm>
-            <a:off x="609598" y="5840557"/>
-            <a:ext cx="10639779" cy="192595"/>
-          </a:xfrm>
-          <a:prstGeom prst="roundRect">
-            <a:avLst>
-              <a:gd name="adj" fmla="val 50000"/>
-            </a:avLst>
-          </a:prstGeom>
-          <a:solidFill>
-            <a:schemeClr val="accent6">
-              <a:lumMod val="60000"/>
-              <a:lumOff val="40000"/>
-            </a:schemeClr>
-          </a:solidFill>
-          <a:ln w="28575">
-            <a:noFill/>
-          </a:ln>
-        </p:spPr>
-        <p:style>
-          <a:lnRef idx="2">
-            <a:schemeClr val="accent1">
-              <a:shade val="15000"/>
-            </a:schemeClr>
-          </a:lnRef>
-          <a:fillRef idx="1">
-            <a:schemeClr val="accent1"/>
-          </a:fillRef>
-          <a:effectRef idx="0">
-            <a:schemeClr val="accent1"/>
-          </a:effectRef>
-          <a:fontRef idx="minor">
-            <a:schemeClr val="lt1"/>
-          </a:fontRef>
-        </p:style>
-        <p:txBody>
-          <a:bodyPr rtlCol="0" anchor="ctr"/>
-          <a:lstStyle/>
-          <a:p>
-            <a:pPr algn="ctr"/>
-            <a:endParaRPr lang="ko-KR" altLang="en-US"/>
-          </a:p>
-        </p:txBody>
-      </p:sp>
-      <p:sp>
-        <p:nvSpPr>
-          <p:cNvPr id="2" name="제목 1">
-            <a:extLst>
-              <a:ext uri="{FF2B5EF4-FFF2-40B4-BE49-F238E27FC236}">
-                <a16:creationId xmlns:a16="http://schemas.microsoft.com/office/drawing/2014/main" id="{AEA60A11-56AC-A912-8687-E96828AB49E2}"/>
-              </a:ext>
-            </a:extLst>
-          </p:cNvPr>
-          <p:cNvSpPr>
-            <a:spLocks noGrp="1"/>
-          </p:cNvSpPr>
-          <p:nvPr>
-            <p:ph type="title"/>
-          </p:nvPr>
-        </p:nvSpPr>
-        <p:spPr/>
-        <p:txBody>
-          <a:bodyPr>
-            <a:normAutofit/>
-          </a:bodyPr>
-          <a:lstStyle/>
-          <a:p>
-            <a:r>
-              <a:rPr lang="ko-KR" altLang="en-US" dirty="0"/>
-              <a:t>진행 상황</a:t>
-            </a:r>
-          </a:p>
-        </p:txBody>
-      </p:sp>
-      <p:sp>
-        <p:nvSpPr>
-          <p:cNvPr id="4" name="슬라이드 번호 개체 틀 3">
-            <a:extLst>
-              <a:ext uri="{FF2B5EF4-FFF2-40B4-BE49-F238E27FC236}">
-                <a16:creationId xmlns:a16="http://schemas.microsoft.com/office/drawing/2014/main" id="{D5E67F79-FBF8-5F90-4229-38F2DC90589D}"/>
-              </a:ext>
-            </a:extLst>
-          </p:cNvPr>
-          <p:cNvSpPr>
-            <a:spLocks noGrp="1"/>
-          </p:cNvSpPr>
-          <p:nvPr>
-            <p:ph type="sldNum" sz="quarter" idx="12"/>
-          </p:nvPr>
-        </p:nvSpPr>
-        <p:spPr/>
-        <p:txBody>
-          <a:bodyPr/>
-          <a:lstStyle/>
-          <a:p>
-            <a:fld id="{E694CC86-33DA-4CBD-A678-F7DD024C14A4}" type="slidenum">
-              <a:rPr lang="ko-KR" altLang="en-US" smtClean="0"/>
-              <a:pPr/>
-              <a:t>7</a:t>
-            </a:fld>
-            <a:r>
-              <a:rPr lang="en-US" altLang="ko-KR" dirty="0"/>
-              <a:t>/10</a:t>
-            </a:r>
-            <a:endParaRPr lang="ko-KR" altLang="en-US" dirty="0"/>
-          </a:p>
-        </p:txBody>
-      </p:sp>
-      <p:sp>
-        <p:nvSpPr>
-          <p:cNvPr id="6" name="사각형: 둥근 모서리 5">
-            <a:extLst>
-              <a:ext uri="{FF2B5EF4-FFF2-40B4-BE49-F238E27FC236}">
-                <a16:creationId xmlns:a16="http://schemas.microsoft.com/office/drawing/2014/main" id="{662FEB88-578D-304F-FCA5-66C39121643A}"/>
-              </a:ext>
-            </a:extLst>
-          </p:cNvPr>
-          <p:cNvSpPr/>
-          <p:nvPr/>
-        </p:nvSpPr>
-        <p:spPr>
-          <a:xfrm>
-            <a:off x="609600" y="5840557"/>
-            <a:ext cx="10972800" cy="192595"/>
-          </a:xfrm>
-          <a:prstGeom prst="roundRect">
-            <a:avLst>
-              <a:gd name="adj" fmla="val 50000"/>
-            </a:avLst>
-          </a:prstGeom>
-          <a:noFill/>
-          <a:ln w="28575">
-            <a:solidFill>
-              <a:schemeClr val="tx1"/>
-            </a:solidFill>
-          </a:ln>
-        </p:spPr>
-        <p:style>
-          <a:lnRef idx="2">
-            <a:schemeClr val="accent1">
-              <a:shade val="15000"/>
-            </a:schemeClr>
-          </a:lnRef>
-          <a:fillRef idx="1">
-            <a:schemeClr val="accent1"/>
-          </a:fillRef>
-          <a:effectRef idx="0">
-            <a:schemeClr val="accent1"/>
-          </a:effectRef>
-          <a:fontRef idx="minor">
-            <a:schemeClr val="lt1"/>
-          </a:fontRef>
-        </p:style>
-        <p:txBody>
-          <a:bodyPr rtlCol="0" anchor="ctr"/>
-          <a:lstStyle/>
-          <a:p>
-            <a:pPr algn="ctr"/>
-            <a:endParaRPr lang="ko-KR" altLang="en-US"/>
-          </a:p>
-        </p:txBody>
-      </p:sp>
-      <p:sp>
-        <p:nvSpPr>
-          <p:cNvPr id="7" name="TextBox 6">
-            <a:extLst>
-              <a:ext uri="{FF2B5EF4-FFF2-40B4-BE49-F238E27FC236}">
-                <a16:creationId xmlns:a16="http://schemas.microsoft.com/office/drawing/2014/main" id="{E7AA9D58-5839-BFDB-F5D0-ADC7078BBC84}"/>
-              </a:ext>
-            </a:extLst>
-          </p:cNvPr>
-          <p:cNvSpPr txBox="1"/>
-          <p:nvPr/>
-        </p:nvSpPr>
-        <p:spPr>
-          <a:xfrm>
-            <a:off x="122870" y="5782967"/>
-            <a:ext cx="468398" cy="307777"/>
-          </a:xfrm>
-          <a:prstGeom prst="rect">
-            <a:avLst/>
-          </a:prstGeom>
-          <a:noFill/>
-        </p:spPr>
-        <p:txBody>
-          <a:bodyPr wrap="none" rtlCol="0">
-            <a:spAutoFit/>
-          </a:bodyPr>
-          <a:lstStyle/>
-          <a:p>
-            <a:pPr algn="ctr"/>
-            <a:r>
-              <a:rPr lang="en-US" altLang="ko-KR" sz="1400" dirty="0">
-                <a:latin typeface="HY견고딕" panose="02030600000101010101" pitchFamily="18" charset="-127"/>
-                <a:ea typeface="HY견고딕" panose="02030600000101010101" pitchFamily="18" charset="-127"/>
-              </a:rPr>
-              <a:t>0%</a:t>
-            </a:r>
-            <a:endParaRPr lang="ko-KR" altLang="en-US" sz="1400" dirty="0">
-              <a:latin typeface="HY견고딕" panose="02030600000101010101" pitchFamily="18" charset="-127"/>
-              <a:ea typeface="HY견고딕" panose="02030600000101010101" pitchFamily="18" charset="-127"/>
-            </a:endParaRPr>
-          </a:p>
-        </p:txBody>
-      </p:sp>
-      <p:sp>
-        <p:nvSpPr>
-          <p:cNvPr id="8" name="TextBox 7">
-            <a:extLst>
-              <a:ext uri="{FF2B5EF4-FFF2-40B4-BE49-F238E27FC236}">
-                <a16:creationId xmlns:a16="http://schemas.microsoft.com/office/drawing/2014/main" id="{C2FDA33F-39CC-2EC2-43EA-FE60BE3F9638}"/>
-              </a:ext>
-            </a:extLst>
-          </p:cNvPr>
-          <p:cNvSpPr txBox="1"/>
-          <p:nvPr/>
-        </p:nvSpPr>
-        <p:spPr>
-          <a:xfrm>
-            <a:off x="11548533" y="5782967"/>
-            <a:ext cx="692818" cy="307777"/>
-          </a:xfrm>
-          <a:prstGeom prst="rect">
-            <a:avLst/>
-          </a:prstGeom>
-          <a:noFill/>
-        </p:spPr>
-        <p:txBody>
-          <a:bodyPr wrap="none" rtlCol="0">
-            <a:spAutoFit/>
-          </a:bodyPr>
-          <a:lstStyle/>
-          <a:p>
-            <a:pPr algn="ctr"/>
-            <a:r>
-              <a:rPr lang="en-US" altLang="ko-KR" sz="1400" dirty="0">
-                <a:latin typeface="HY견고딕" panose="02030600000101010101" pitchFamily="18" charset="-127"/>
-                <a:ea typeface="HY견고딕" panose="02030600000101010101" pitchFamily="18" charset="-127"/>
-              </a:rPr>
-              <a:t>100%</a:t>
-            </a:r>
-            <a:endParaRPr lang="ko-KR" altLang="en-US" sz="1400" dirty="0">
-              <a:latin typeface="HY견고딕" panose="02030600000101010101" pitchFamily="18" charset="-127"/>
-              <a:ea typeface="HY견고딕" panose="02030600000101010101" pitchFamily="18" charset="-127"/>
-            </a:endParaRPr>
-          </a:p>
-        </p:txBody>
-      </p:sp>
-      <p:sp>
-        <p:nvSpPr>
-          <p:cNvPr id="17" name="TextBox 16">
-            <a:extLst>
-              <a:ext uri="{FF2B5EF4-FFF2-40B4-BE49-F238E27FC236}">
-                <a16:creationId xmlns:a16="http://schemas.microsoft.com/office/drawing/2014/main" id="{A7C55E8B-4935-1F2B-2D22-69087A9C1511}"/>
-              </a:ext>
-            </a:extLst>
-          </p:cNvPr>
-          <p:cNvSpPr txBox="1"/>
-          <p:nvPr/>
-        </p:nvSpPr>
-        <p:spPr>
-          <a:xfrm>
-            <a:off x="5861800" y="5815121"/>
-            <a:ext cx="468398" cy="246221"/>
-          </a:xfrm>
-          <a:prstGeom prst="rect">
-            <a:avLst/>
-          </a:prstGeom>
-          <a:noFill/>
-        </p:spPr>
-        <p:txBody>
-          <a:bodyPr wrap="none" rtlCol="0">
-            <a:spAutoFit/>
-          </a:bodyPr>
-          <a:lstStyle/>
-          <a:p>
-            <a:pPr algn="ctr"/>
-            <a:r>
-              <a:rPr lang="en-US" altLang="ko-KR" sz="1000" dirty="0">
-                <a:latin typeface="HY견고딕" panose="02030600000101010101" pitchFamily="18" charset="-127"/>
-                <a:ea typeface="HY견고딕" panose="02030600000101010101" pitchFamily="18" charset="-127"/>
-              </a:rPr>
-              <a:t>90%</a:t>
-            </a:r>
-            <a:endParaRPr lang="ko-KR" altLang="en-US" sz="1000" dirty="0">
-              <a:latin typeface="HY견고딕" panose="02030600000101010101" pitchFamily="18" charset="-127"/>
-              <a:ea typeface="HY견고딕" panose="02030600000101010101" pitchFamily="18" charset="-127"/>
-            </a:endParaRPr>
-          </a:p>
-        </p:txBody>
-      </p:sp>
-      <p:sp>
-        <p:nvSpPr>
-          <p:cNvPr id="13" name="내용 개체 틀 12">
-            <a:extLst>
-              <a:ext uri="{FF2B5EF4-FFF2-40B4-BE49-F238E27FC236}">
-                <a16:creationId xmlns:a16="http://schemas.microsoft.com/office/drawing/2014/main" id="{8EC9A4AF-A59C-36E7-9BC1-8EB9665C73E4}"/>
-              </a:ext>
-            </a:extLst>
-          </p:cNvPr>
-          <p:cNvSpPr>
-            <a:spLocks noGrp="1"/>
-          </p:cNvSpPr>
-          <p:nvPr>
-            <p:ph idx="1"/>
-          </p:nvPr>
-        </p:nvSpPr>
-        <p:spPr>
-          <a:xfrm>
-            <a:off x="838199" y="1029195"/>
-            <a:ext cx="7689210" cy="1523505"/>
-          </a:xfrm>
-        </p:spPr>
-        <p:txBody>
-          <a:bodyPr>
-            <a:normAutofit/>
-          </a:bodyPr>
-          <a:lstStyle/>
-          <a:p>
-            <a:r>
-              <a:rPr lang="en-US" altLang="ko-KR" dirty="0"/>
-              <a:t>WQFS </a:t>
-            </a:r>
-            <a:r>
-              <a:rPr lang="ko-KR" altLang="en-US" dirty="0"/>
-              <a:t>서브 타입</a:t>
-            </a:r>
-            <a:endParaRPr lang="en-US" altLang="ko-KR" dirty="0"/>
-          </a:p>
-          <a:p>
-            <a:pPr lvl="1"/>
-            <a:r>
-              <a:rPr lang="ko-KR" altLang="en-US" dirty="0"/>
-              <a:t>개발자가 정의 타입</a:t>
-            </a:r>
-            <a:r>
-              <a:rPr lang="en-US" altLang="ko-KR" dirty="0"/>
-              <a:t>, </a:t>
-            </a:r>
-            <a:r>
-              <a:rPr lang="ko-KR" altLang="en-US" dirty="0"/>
-              <a:t>필요 시 개발자가 원하는 형태로 </a:t>
-            </a:r>
-            <a:br>
-              <a:rPr lang="en-US" altLang="ko-KR" dirty="0"/>
-            </a:br>
-            <a:r>
-              <a:rPr lang="ko-KR" altLang="en-US" dirty="0"/>
-              <a:t>사용 가능</a:t>
-            </a:r>
-            <a:endParaRPr lang="en-US" altLang="ko-KR" dirty="0"/>
-          </a:p>
-          <a:p>
-            <a:pPr lvl="1"/>
-            <a:r>
-              <a:rPr lang="ko-KR" altLang="en-US" dirty="0"/>
-              <a:t>예</a:t>
-            </a:r>
-            <a:r>
-              <a:rPr lang="en-US" altLang="ko-KR" dirty="0"/>
-              <a:t>) </a:t>
-            </a:r>
-            <a:r>
-              <a:rPr lang="en-US" altLang="ko-KR" dirty="0" err="1"/>
-              <a:t>LevelGenerator</a:t>
-            </a:r>
-            <a:r>
-              <a:rPr lang="ko-KR" altLang="en-US" dirty="0"/>
-              <a:t>에서 이벤트 위치 동기화</a:t>
-            </a:r>
-            <a:endParaRPr lang="en-US" altLang="ko-KR" dirty="0"/>
-          </a:p>
-        </p:txBody>
-      </p:sp>
-      <p:pic>
-        <p:nvPicPr>
-          <p:cNvPr id="5" name="그림 4" descr="의류, 패브릭, 패턴, 예술이(가) 표시된 사진&#10;&#10;AI 생성 콘텐츠는 정확하지 않을 수 있습니다.">
-            <a:extLst>
-              <a:ext uri="{FF2B5EF4-FFF2-40B4-BE49-F238E27FC236}">
-                <a16:creationId xmlns:a16="http://schemas.microsoft.com/office/drawing/2014/main" id="{2874F83F-E254-0185-F0CC-42DC8CB4C7B1}"/>
-              </a:ext>
-            </a:extLst>
-          </p:cNvPr>
-          <p:cNvPicPr>
-            <a:picLocks noChangeAspect="1"/>
-          </p:cNvPicPr>
-          <p:nvPr/>
-        </p:nvPicPr>
-        <p:blipFill>
-          <a:blip r:embed="rId2">
-            <a:extLst>
-              <a:ext uri="{28A0092B-C50C-407E-A947-70E740481C1C}">
-                <a14:useLocalDpi xmlns:a14="http://schemas.microsoft.com/office/drawing/2010/main" val="0"/>
-              </a:ext>
-            </a:extLst>
-          </a:blip>
-          <a:srcRect l="16300" r="17101" b="7875"/>
-          <a:stretch>
-            <a:fillRect/>
-          </a:stretch>
-        </p:blipFill>
-        <p:spPr>
-          <a:xfrm>
-            <a:off x="7962901" y="2006169"/>
-            <a:ext cx="3563862" cy="3718810"/>
-          </a:xfrm>
-          <a:prstGeom prst="rect">
-            <a:avLst/>
-          </a:prstGeom>
-        </p:spPr>
-      </p:pic>
-      <p:sp>
-        <p:nvSpPr>
-          <p:cNvPr id="10" name="직사각형 9">
-            <a:extLst>
-              <a:ext uri="{FF2B5EF4-FFF2-40B4-BE49-F238E27FC236}">
-                <a16:creationId xmlns:a16="http://schemas.microsoft.com/office/drawing/2014/main" id="{5753063B-7040-45FC-25B6-62E97BE4A854}"/>
-              </a:ext>
-            </a:extLst>
-          </p:cNvPr>
-          <p:cNvSpPr/>
-          <p:nvPr/>
-        </p:nvSpPr>
-        <p:spPr>
-          <a:xfrm>
-            <a:off x="11004242" y="2024122"/>
-            <a:ext cx="210136" cy="293409"/>
-          </a:xfrm>
-          <a:prstGeom prst="rect">
-            <a:avLst/>
-          </a:prstGeom>
-          <a:noFill/>
-          <a:ln w="28575">
-            <a:solidFill>
-              <a:srgbClr val="FF0000"/>
-            </a:solidFill>
-          </a:ln>
-        </p:spPr>
-        <p:style>
-          <a:lnRef idx="2">
-            <a:schemeClr val="accent1">
-              <a:shade val="15000"/>
-            </a:schemeClr>
-          </a:lnRef>
-          <a:fillRef idx="1">
-            <a:schemeClr val="accent1"/>
-          </a:fillRef>
-          <a:effectRef idx="0">
-            <a:schemeClr val="accent1"/>
-          </a:effectRef>
-          <a:fontRef idx="minor">
-            <a:schemeClr val="lt1"/>
-          </a:fontRef>
-        </p:style>
-        <p:txBody>
-          <a:bodyPr rtlCol="0" anchor="ctr"/>
-          <a:lstStyle/>
-          <a:p>
-            <a:pPr algn="ctr"/>
-            <a:endParaRPr lang="ko-KR" altLang="en-US"/>
-          </a:p>
-        </p:txBody>
-      </p:sp>
-      <p:sp>
-        <p:nvSpPr>
-          <p:cNvPr id="11" name="직사각형 10">
-            <a:extLst>
-              <a:ext uri="{FF2B5EF4-FFF2-40B4-BE49-F238E27FC236}">
-                <a16:creationId xmlns:a16="http://schemas.microsoft.com/office/drawing/2014/main" id="{D03851CC-38EF-57A8-F905-6A72442466C6}"/>
-              </a:ext>
-            </a:extLst>
-          </p:cNvPr>
-          <p:cNvSpPr/>
-          <p:nvPr/>
-        </p:nvSpPr>
-        <p:spPr>
-          <a:xfrm>
-            <a:off x="10251313" y="3281114"/>
-            <a:ext cx="210136" cy="293409"/>
-          </a:xfrm>
-          <a:prstGeom prst="rect">
-            <a:avLst/>
-          </a:prstGeom>
-          <a:noFill/>
-          <a:ln w="28575">
-            <a:solidFill>
-              <a:srgbClr val="FF0000"/>
-            </a:solidFill>
-          </a:ln>
-        </p:spPr>
-        <p:style>
-          <a:lnRef idx="2">
-            <a:schemeClr val="accent1">
-              <a:shade val="15000"/>
-            </a:schemeClr>
-          </a:lnRef>
-          <a:fillRef idx="1">
-            <a:schemeClr val="accent1"/>
-          </a:fillRef>
-          <a:effectRef idx="0">
-            <a:schemeClr val="accent1"/>
-          </a:effectRef>
-          <a:fontRef idx="minor">
-            <a:schemeClr val="lt1"/>
-          </a:fontRef>
-        </p:style>
-        <p:txBody>
-          <a:bodyPr rtlCol="0" anchor="ctr"/>
-          <a:lstStyle/>
-          <a:p>
-            <a:pPr algn="ctr"/>
-            <a:endParaRPr lang="ko-KR" altLang="en-US"/>
-          </a:p>
-        </p:txBody>
-      </p:sp>
-      <p:sp>
-        <p:nvSpPr>
-          <p:cNvPr id="15" name="직사각형 14">
-            <a:extLst>
-              <a:ext uri="{FF2B5EF4-FFF2-40B4-BE49-F238E27FC236}">
-                <a16:creationId xmlns:a16="http://schemas.microsoft.com/office/drawing/2014/main" id="{73CBFDD7-B238-0455-CCD9-150BDF45BB1F}"/>
-              </a:ext>
-            </a:extLst>
-          </p:cNvPr>
-          <p:cNvSpPr/>
-          <p:nvPr/>
-        </p:nvSpPr>
-        <p:spPr>
-          <a:xfrm>
-            <a:off x="9499442" y="5118986"/>
-            <a:ext cx="210136" cy="293409"/>
-          </a:xfrm>
-          <a:prstGeom prst="rect">
-            <a:avLst/>
-          </a:prstGeom>
-          <a:noFill/>
-          <a:ln w="28575">
-            <a:solidFill>
-              <a:srgbClr val="FF0000"/>
-            </a:solidFill>
-          </a:ln>
-        </p:spPr>
-        <p:style>
-          <a:lnRef idx="2">
-            <a:schemeClr val="accent1">
-              <a:shade val="15000"/>
-            </a:schemeClr>
-          </a:lnRef>
-          <a:fillRef idx="1">
-            <a:schemeClr val="accent1"/>
-          </a:fillRef>
-          <a:effectRef idx="0">
-            <a:schemeClr val="accent1"/>
-          </a:effectRef>
-          <a:fontRef idx="minor">
-            <a:schemeClr val="lt1"/>
-          </a:fontRef>
-        </p:style>
-        <p:txBody>
-          <a:bodyPr rtlCol="0" anchor="ctr"/>
-          <a:lstStyle/>
-          <a:p>
-            <a:pPr algn="ctr"/>
-            <a:endParaRPr lang="ko-KR" altLang="en-US"/>
-          </a:p>
-        </p:txBody>
-      </p:sp>
-      <p:pic>
-        <p:nvPicPr>
-          <p:cNvPr id="20" name="그림 19" descr="텍스트, 스크린샷이(가) 표시된 사진&#10;&#10;AI 생성 콘텐츠는 정확하지 않을 수 있습니다.">
-            <a:extLst>
-              <a:ext uri="{FF2B5EF4-FFF2-40B4-BE49-F238E27FC236}">
-                <a16:creationId xmlns:a16="http://schemas.microsoft.com/office/drawing/2014/main" id="{A8FDD430-1B69-5A27-20D3-A26B6FC83865}"/>
-              </a:ext>
-            </a:extLst>
-          </p:cNvPr>
-          <p:cNvPicPr>
-            <a:picLocks noChangeAspect="1"/>
-          </p:cNvPicPr>
-          <p:nvPr/>
-        </p:nvPicPr>
-        <p:blipFill>
-          <a:blip r:embed="rId3">
-            <a:extLst>
-              <a:ext uri="{28A0092B-C50C-407E-A947-70E740481C1C}">
-                <a14:useLocalDpi xmlns:a14="http://schemas.microsoft.com/office/drawing/2010/main" val="0"/>
-              </a:ext>
-            </a:extLst>
-          </a:blip>
-          <a:stretch>
-            <a:fillRect/>
-          </a:stretch>
-        </p:blipFill>
-        <p:spPr>
-          <a:xfrm>
-            <a:off x="710156" y="3375561"/>
-            <a:ext cx="5331416" cy="2381968"/>
-          </a:xfrm>
-          <a:prstGeom prst="rect">
-            <a:avLst/>
-          </a:prstGeom>
-        </p:spPr>
-      </p:pic>
-      <p:pic>
-        <p:nvPicPr>
-          <p:cNvPr id="22" name="그림 21" descr="텍스트, 스크린샷, 폰트, 번호이(가) 표시된 사진&#10;&#10;AI 생성 콘텐츠는 정확하지 않을 수 있습니다.">
-            <a:extLst>
-              <a:ext uri="{FF2B5EF4-FFF2-40B4-BE49-F238E27FC236}">
-                <a16:creationId xmlns:a16="http://schemas.microsoft.com/office/drawing/2014/main" id="{F9BFE86B-DABF-6FA3-B3BE-85020356B93B}"/>
-              </a:ext>
-            </a:extLst>
-          </p:cNvPr>
-          <p:cNvPicPr>
-            <a:picLocks noChangeAspect="1"/>
-          </p:cNvPicPr>
-          <p:nvPr/>
-        </p:nvPicPr>
-        <p:blipFill>
-          <a:blip r:embed="rId4">
-            <a:extLst>
-              <a:ext uri="{28A0092B-C50C-407E-A947-70E740481C1C}">
-                <a14:useLocalDpi xmlns:a14="http://schemas.microsoft.com/office/drawing/2010/main" val="0"/>
-              </a:ext>
-            </a:extLst>
-          </a:blip>
-          <a:stretch>
-            <a:fillRect/>
-          </a:stretch>
-        </p:blipFill>
-        <p:spPr>
-          <a:xfrm>
-            <a:off x="710156" y="2438910"/>
-            <a:ext cx="4765415" cy="935675"/>
-          </a:xfrm>
-          <a:prstGeom prst="rect">
-            <a:avLst/>
-          </a:prstGeom>
-        </p:spPr>
-      </p:pic>
-      <p:sp>
-        <p:nvSpPr>
-          <p:cNvPr id="23" name="직사각형 22">
-            <a:extLst>
-              <a:ext uri="{FF2B5EF4-FFF2-40B4-BE49-F238E27FC236}">
-                <a16:creationId xmlns:a16="http://schemas.microsoft.com/office/drawing/2014/main" id="{AC3E693B-9C03-29CD-96FA-8617DA4EAE10}"/>
-              </a:ext>
-            </a:extLst>
-          </p:cNvPr>
-          <p:cNvSpPr/>
-          <p:nvPr/>
-        </p:nvSpPr>
-        <p:spPr>
-          <a:xfrm>
-            <a:off x="4743450" y="2438910"/>
-            <a:ext cx="1118350" cy="196818"/>
-          </a:xfrm>
-          <a:prstGeom prst="rect">
-            <a:avLst/>
-          </a:prstGeom>
-          <a:solidFill>
-            <a:srgbClr val="1E1E1E"/>
-          </a:solidFill>
-          <a:ln>
-            <a:noFill/>
-          </a:ln>
-        </p:spPr>
-        <p:style>
-          <a:lnRef idx="2">
-            <a:schemeClr val="accent1">
-              <a:shade val="15000"/>
-            </a:schemeClr>
-          </a:lnRef>
-          <a:fillRef idx="1">
-            <a:schemeClr val="accent1"/>
-          </a:fillRef>
-          <a:effectRef idx="0">
-            <a:schemeClr val="accent1"/>
-          </a:effectRef>
-          <a:fontRef idx="minor">
-            <a:schemeClr val="lt1"/>
-          </a:fontRef>
-        </p:style>
-        <p:txBody>
-          <a:bodyPr rtlCol="0" anchor="b"/>
-          <a:lstStyle/>
-          <a:p>
-            <a:pPr algn="ctr"/>
-            <a:r>
-              <a:rPr lang="en-US" altLang="ko-KR" dirty="0"/>
-              <a:t>. . .</a:t>
-            </a:r>
-            <a:endParaRPr lang="ko-KR" altLang="en-US" dirty="0"/>
-          </a:p>
-        </p:txBody>
-      </p:sp>
-      <p:sp>
-        <p:nvSpPr>
-          <p:cNvPr id="24" name="직사각형 23">
-            <a:extLst>
-              <a:ext uri="{FF2B5EF4-FFF2-40B4-BE49-F238E27FC236}">
-                <a16:creationId xmlns:a16="http://schemas.microsoft.com/office/drawing/2014/main" id="{8B9EDEB0-AD31-2721-77AA-577BDED438D9}"/>
-              </a:ext>
-            </a:extLst>
-          </p:cNvPr>
-          <p:cNvSpPr/>
-          <p:nvPr/>
-        </p:nvSpPr>
-        <p:spPr>
-          <a:xfrm>
-            <a:off x="5129679" y="2620009"/>
-            <a:ext cx="732121" cy="196818"/>
-          </a:xfrm>
-          <a:prstGeom prst="rect">
-            <a:avLst/>
-          </a:prstGeom>
-          <a:solidFill>
-            <a:srgbClr val="1E1E1E"/>
-          </a:solidFill>
-          <a:ln>
-            <a:noFill/>
-          </a:ln>
-        </p:spPr>
-        <p:style>
-          <a:lnRef idx="2">
-            <a:schemeClr val="accent1">
-              <a:shade val="15000"/>
-            </a:schemeClr>
-          </a:lnRef>
-          <a:fillRef idx="1">
-            <a:schemeClr val="accent1"/>
-          </a:fillRef>
-          <a:effectRef idx="0">
-            <a:schemeClr val="accent1"/>
-          </a:effectRef>
-          <a:fontRef idx="minor">
-            <a:schemeClr val="lt1"/>
-          </a:fontRef>
-        </p:style>
-        <p:txBody>
-          <a:bodyPr rtlCol="0" anchor="b"/>
-          <a:lstStyle/>
-          <a:p>
-            <a:pPr algn="ctr"/>
-            <a:r>
-              <a:rPr lang="en-US" altLang="ko-KR" dirty="0"/>
-              <a:t>. . .</a:t>
-            </a:r>
-            <a:endParaRPr lang="ko-KR" altLang="en-US" dirty="0"/>
-          </a:p>
-        </p:txBody>
-      </p:sp>
-      <p:sp>
-        <p:nvSpPr>
-          <p:cNvPr id="25" name="직사각형 24">
-            <a:extLst>
-              <a:ext uri="{FF2B5EF4-FFF2-40B4-BE49-F238E27FC236}">
-                <a16:creationId xmlns:a16="http://schemas.microsoft.com/office/drawing/2014/main" id="{9C95E6AC-98B2-5997-70B6-A462F764037E}"/>
-              </a:ext>
-            </a:extLst>
-          </p:cNvPr>
-          <p:cNvSpPr/>
-          <p:nvPr/>
-        </p:nvSpPr>
-        <p:spPr>
-          <a:xfrm>
-            <a:off x="5165270" y="3178255"/>
-            <a:ext cx="696529" cy="196818"/>
-          </a:xfrm>
-          <a:prstGeom prst="rect">
-            <a:avLst/>
-          </a:prstGeom>
-          <a:solidFill>
-            <a:srgbClr val="1E1E1E"/>
-          </a:solidFill>
-          <a:ln>
-            <a:noFill/>
-          </a:ln>
-        </p:spPr>
-        <p:style>
-          <a:lnRef idx="2">
-            <a:schemeClr val="accent1">
-              <a:shade val="15000"/>
-            </a:schemeClr>
-          </a:lnRef>
-          <a:fillRef idx="1">
-            <a:schemeClr val="accent1"/>
-          </a:fillRef>
-          <a:effectRef idx="0">
-            <a:schemeClr val="accent1"/>
-          </a:effectRef>
-          <a:fontRef idx="minor">
-            <a:schemeClr val="lt1"/>
-          </a:fontRef>
-        </p:style>
-        <p:txBody>
-          <a:bodyPr rtlCol="0" anchor="b"/>
-          <a:lstStyle/>
-          <a:p>
-            <a:pPr algn="ctr"/>
-            <a:r>
-              <a:rPr lang="en-US" altLang="ko-KR" dirty="0"/>
-              <a:t>. . .</a:t>
-            </a:r>
-            <a:endParaRPr lang="ko-KR" altLang="en-US" dirty="0"/>
-          </a:p>
-        </p:txBody>
-      </p:sp>
-      <p:sp>
-        <p:nvSpPr>
-          <p:cNvPr id="26" name="직사각형 25">
-            <a:extLst>
-              <a:ext uri="{FF2B5EF4-FFF2-40B4-BE49-F238E27FC236}">
-                <a16:creationId xmlns:a16="http://schemas.microsoft.com/office/drawing/2014/main" id="{4F1EFE6F-FDC7-0509-B17C-FC6F970A0051}"/>
-              </a:ext>
-            </a:extLst>
-          </p:cNvPr>
-          <p:cNvSpPr/>
-          <p:nvPr/>
-        </p:nvSpPr>
-        <p:spPr>
-          <a:xfrm>
-            <a:off x="5302626" y="2808338"/>
-            <a:ext cx="559174" cy="196818"/>
-          </a:xfrm>
-          <a:prstGeom prst="rect">
-            <a:avLst/>
-          </a:prstGeom>
-          <a:solidFill>
-            <a:srgbClr val="1E1E1E"/>
-          </a:solidFill>
-          <a:ln>
-            <a:noFill/>
-          </a:ln>
-        </p:spPr>
-        <p:style>
-          <a:lnRef idx="2">
-            <a:schemeClr val="accent1">
-              <a:shade val="15000"/>
-            </a:schemeClr>
-          </a:lnRef>
-          <a:fillRef idx="1">
-            <a:schemeClr val="accent1"/>
-          </a:fillRef>
-          <a:effectRef idx="0">
-            <a:schemeClr val="accent1"/>
-          </a:effectRef>
-          <a:fontRef idx="minor">
-            <a:schemeClr val="lt1"/>
-          </a:fontRef>
-        </p:style>
-        <p:txBody>
-          <a:bodyPr rtlCol="0" anchor="b"/>
-          <a:lstStyle/>
-          <a:p>
-            <a:pPr algn="ctr"/>
-            <a:r>
-              <a:rPr lang="en-US" altLang="ko-KR" dirty="0"/>
-              <a:t>. . .</a:t>
-            </a:r>
-            <a:endParaRPr lang="ko-KR" altLang="en-US" dirty="0"/>
-          </a:p>
-        </p:txBody>
-      </p:sp>
-      <p:sp>
-        <p:nvSpPr>
-          <p:cNvPr id="27" name="직사각형 26">
-            <a:extLst>
-              <a:ext uri="{FF2B5EF4-FFF2-40B4-BE49-F238E27FC236}">
-                <a16:creationId xmlns:a16="http://schemas.microsoft.com/office/drawing/2014/main" id="{DE4D020F-E699-BC39-2E51-E4C13E0B1B63}"/>
-              </a:ext>
-            </a:extLst>
-          </p:cNvPr>
-          <p:cNvSpPr/>
-          <p:nvPr/>
-        </p:nvSpPr>
-        <p:spPr>
-          <a:xfrm>
-            <a:off x="5328556" y="3005156"/>
-            <a:ext cx="533243" cy="196818"/>
-          </a:xfrm>
-          <a:prstGeom prst="rect">
-            <a:avLst/>
-          </a:prstGeom>
-          <a:solidFill>
-            <a:srgbClr val="1E1E1E"/>
-          </a:solidFill>
-          <a:ln>
-            <a:noFill/>
-          </a:ln>
-        </p:spPr>
-        <p:style>
-          <a:lnRef idx="2">
-            <a:schemeClr val="accent1">
-              <a:shade val="15000"/>
-            </a:schemeClr>
-          </a:lnRef>
-          <a:fillRef idx="1">
-            <a:schemeClr val="accent1"/>
-          </a:fillRef>
-          <a:effectRef idx="0">
-            <a:schemeClr val="accent1"/>
-          </a:effectRef>
-          <a:fontRef idx="minor">
-            <a:schemeClr val="lt1"/>
-          </a:fontRef>
-        </p:style>
-        <p:txBody>
-          <a:bodyPr rtlCol="0" anchor="b"/>
-          <a:lstStyle/>
-          <a:p>
-            <a:pPr algn="ctr"/>
-            <a:r>
-              <a:rPr lang="en-US" altLang="ko-KR" dirty="0"/>
-              <a:t>. . .</a:t>
-            </a:r>
-            <a:endParaRPr lang="ko-KR" altLang="en-US" dirty="0"/>
-          </a:p>
-        </p:txBody>
-      </p:sp>
-      <p:sp>
-        <p:nvSpPr>
-          <p:cNvPr id="28" name="직사각형 27">
-            <a:extLst>
-              <a:ext uri="{FF2B5EF4-FFF2-40B4-BE49-F238E27FC236}">
-                <a16:creationId xmlns:a16="http://schemas.microsoft.com/office/drawing/2014/main" id="{4A86DC2B-0F56-9B46-F24D-BA078DA8BD64}"/>
-              </a:ext>
-            </a:extLst>
-          </p:cNvPr>
-          <p:cNvSpPr/>
-          <p:nvPr/>
-        </p:nvSpPr>
-        <p:spPr>
-          <a:xfrm>
-            <a:off x="3621074" y="2441630"/>
-            <a:ext cx="158990" cy="178379"/>
-          </a:xfrm>
-          <a:prstGeom prst="rect">
-            <a:avLst/>
-          </a:prstGeom>
-          <a:noFill/>
-          <a:ln w="28575">
-            <a:solidFill>
-              <a:srgbClr val="FF0000"/>
-            </a:solidFill>
-          </a:ln>
-        </p:spPr>
-        <p:style>
-          <a:lnRef idx="2">
-            <a:schemeClr val="accent1">
-              <a:shade val="15000"/>
-            </a:schemeClr>
-          </a:lnRef>
-          <a:fillRef idx="1">
-            <a:schemeClr val="accent1"/>
-          </a:fillRef>
-          <a:effectRef idx="0">
-            <a:schemeClr val="accent1"/>
-          </a:effectRef>
-          <a:fontRef idx="minor">
-            <a:schemeClr val="lt1"/>
-          </a:fontRef>
-        </p:style>
-        <p:txBody>
-          <a:bodyPr rtlCol="0" anchor="ctr"/>
-          <a:lstStyle/>
-          <a:p>
-            <a:pPr algn="ctr"/>
-            <a:endParaRPr lang="ko-KR" altLang="en-US"/>
-          </a:p>
-        </p:txBody>
-      </p:sp>
-      <p:sp>
-        <p:nvSpPr>
-          <p:cNvPr id="29" name="직사각형 28">
-            <a:extLst>
-              <a:ext uri="{FF2B5EF4-FFF2-40B4-BE49-F238E27FC236}">
-                <a16:creationId xmlns:a16="http://schemas.microsoft.com/office/drawing/2014/main" id="{9A45B5AD-96B9-723A-172F-71FE4D438D95}"/>
-              </a:ext>
-            </a:extLst>
-          </p:cNvPr>
-          <p:cNvSpPr/>
-          <p:nvPr/>
-        </p:nvSpPr>
-        <p:spPr>
-          <a:xfrm>
-            <a:off x="3837711" y="2620009"/>
-            <a:ext cx="158990" cy="178379"/>
-          </a:xfrm>
-          <a:prstGeom prst="rect">
-            <a:avLst/>
-          </a:prstGeom>
-          <a:noFill/>
-          <a:ln w="28575">
-            <a:solidFill>
-              <a:srgbClr val="FF0000"/>
-            </a:solidFill>
-          </a:ln>
-        </p:spPr>
-        <p:style>
-          <a:lnRef idx="2">
-            <a:schemeClr val="accent1">
-              <a:shade val="15000"/>
-            </a:schemeClr>
-          </a:lnRef>
-          <a:fillRef idx="1">
-            <a:schemeClr val="accent1"/>
-          </a:fillRef>
-          <a:effectRef idx="0">
-            <a:schemeClr val="accent1"/>
-          </a:effectRef>
-          <a:fontRef idx="minor">
-            <a:schemeClr val="lt1"/>
-          </a:fontRef>
-        </p:style>
-        <p:txBody>
-          <a:bodyPr rtlCol="0" anchor="ctr"/>
-          <a:lstStyle/>
-          <a:p>
-            <a:pPr algn="ctr"/>
-            <a:endParaRPr lang="ko-KR" altLang="en-US"/>
-          </a:p>
-        </p:txBody>
-      </p:sp>
-      <p:sp>
-        <p:nvSpPr>
-          <p:cNvPr id="30" name="직사각형 29">
-            <a:extLst>
-              <a:ext uri="{FF2B5EF4-FFF2-40B4-BE49-F238E27FC236}">
-                <a16:creationId xmlns:a16="http://schemas.microsoft.com/office/drawing/2014/main" id="{94BC2420-49CF-ADEA-C0C6-EA3AA4135539}"/>
-              </a:ext>
-            </a:extLst>
-          </p:cNvPr>
-          <p:cNvSpPr/>
-          <p:nvPr/>
-        </p:nvSpPr>
-        <p:spPr>
-          <a:xfrm>
-            <a:off x="3996701" y="2798388"/>
-            <a:ext cx="158990" cy="178379"/>
-          </a:xfrm>
-          <a:prstGeom prst="rect">
-            <a:avLst/>
-          </a:prstGeom>
-          <a:noFill/>
-          <a:ln w="28575">
-            <a:solidFill>
-              <a:srgbClr val="FF0000"/>
-            </a:solidFill>
-          </a:ln>
-        </p:spPr>
-        <p:style>
-          <a:lnRef idx="2">
-            <a:schemeClr val="accent1">
-              <a:shade val="15000"/>
-            </a:schemeClr>
-          </a:lnRef>
-          <a:fillRef idx="1">
-            <a:schemeClr val="accent1"/>
-          </a:fillRef>
-          <a:effectRef idx="0">
-            <a:schemeClr val="accent1"/>
-          </a:effectRef>
-          <a:fontRef idx="minor">
-            <a:schemeClr val="lt1"/>
-          </a:fontRef>
-        </p:style>
-        <p:txBody>
-          <a:bodyPr rtlCol="0" anchor="ctr"/>
-          <a:lstStyle/>
-          <a:p>
-            <a:pPr algn="ctr"/>
-            <a:endParaRPr lang="ko-KR" altLang="en-US"/>
-          </a:p>
-        </p:txBody>
-      </p:sp>
-      <p:sp>
-        <p:nvSpPr>
-          <p:cNvPr id="31" name="직사각형 30">
-            <a:extLst>
-              <a:ext uri="{FF2B5EF4-FFF2-40B4-BE49-F238E27FC236}">
-                <a16:creationId xmlns:a16="http://schemas.microsoft.com/office/drawing/2014/main" id="{641E401F-7FAE-E171-59DF-366A55482258}"/>
-              </a:ext>
-            </a:extLst>
-          </p:cNvPr>
-          <p:cNvSpPr/>
-          <p:nvPr/>
-        </p:nvSpPr>
-        <p:spPr>
-          <a:xfrm>
-            <a:off x="4060579" y="2997296"/>
-            <a:ext cx="158990" cy="178379"/>
-          </a:xfrm>
-          <a:prstGeom prst="rect">
-            <a:avLst/>
-          </a:prstGeom>
-          <a:noFill/>
-          <a:ln w="28575">
-            <a:solidFill>
-              <a:srgbClr val="FF0000"/>
-            </a:solidFill>
-          </a:ln>
-        </p:spPr>
-        <p:style>
-          <a:lnRef idx="2">
-            <a:schemeClr val="accent1">
-              <a:shade val="15000"/>
-            </a:schemeClr>
-          </a:lnRef>
-          <a:fillRef idx="1">
-            <a:schemeClr val="accent1"/>
-          </a:fillRef>
-          <a:effectRef idx="0">
-            <a:schemeClr val="accent1"/>
-          </a:effectRef>
-          <a:fontRef idx="minor">
-            <a:schemeClr val="lt1"/>
-          </a:fontRef>
-        </p:style>
-        <p:txBody>
-          <a:bodyPr rtlCol="0" anchor="ctr"/>
-          <a:lstStyle/>
-          <a:p>
-            <a:pPr algn="ctr"/>
-            <a:endParaRPr lang="ko-KR" altLang="en-US"/>
-          </a:p>
-        </p:txBody>
-      </p:sp>
-      <p:sp>
-        <p:nvSpPr>
-          <p:cNvPr id="33" name="직사각형 32">
-            <a:extLst>
-              <a:ext uri="{FF2B5EF4-FFF2-40B4-BE49-F238E27FC236}">
-                <a16:creationId xmlns:a16="http://schemas.microsoft.com/office/drawing/2014/main" id="{2465F2E0-A68B-9C3A-7444-1C891BC087CB}"/>
-              </a:ext>
-            </a:extLst>
-          </p:cNvPr>
-          <p:cNvSpPr/>
-          <p:nvPr/>
-        </p:nvSpPr>
-        <p:spPr>
-          <a:xfrm>
-            <a:off x="3837251" y="3175675"/>
-            <a:ext cx="158990" cy="178379"/>
-          </a:xfrm>
-          <a:prstGeom prst="rect">
-            <a:avLst/>
-          </a:prstGeom>
-          <a:noFill/>
-          <a:ln w="28575">
-            <a:solidFill>
-              <a:srgbClr val="FF0000"/>
-            </a:solidFill>
-          </a:ln>
-        </p:spPr>
-        <p:style>
-          <a:lnRef idx="2">
-            <a:schemeClr val="accent1">
-              <a:shade val="15000"/>
-            </a:schemeClr>
-          </a:lnRef>
-          <a:fillRef idx="1">
-            <a:schemeClr val="accent1"/>
-          </a:fillRef>
-          <a:effectRef idx="0">
-            <a:schemeClr val="accent1"/>
-          </a:effectRef>
-          <a:fontRef idx="minor">
-            <a:schemeClr val="lt1"/>
-          </a:fontRef>
-        </p:style>
-        <p:txBody>
-          <a:bodyPr rtlCol="0" anchor="ctr"/>
-          <a:lstStyle/>
-          <a:p>
-            <a:pPr algn="ctr"/>
-            <a:endParaRPr lang="ko-KR" altLang="en-US"/>
-          </a:p>
-        </p:txBody>
-      </p:sp>
-    </p:spTree>
-    <p:extLst>
-      <p:ext uri="{BB962C8B-B14F-4D97-AF65-F5344CB8AC3E}">
-        <p14:creationId xmlns:p14="http://schemas.microsoft.com/office/powerpoint/2010/main" val="1768823865"/>
-      </p:ext>
-    </p:extLst>
-  </p:cSld>
-  <p:clrMapOvr>
-    <a:masterClrMapping/>
-  </p:clrMapOvr>
-</p:sld>
-</file>
-
-<file path=ppt/slides/slide8.xml><?xml version="1.0" encoding="utf-8"?>
 <p:sld xmlns:a="http://schemas.openxmlformats.org/drawingml/2006/main" xmlns:r="http://schemas.openxmlformats.org/officeDocument/2006/relationships" xmlns:p="http://schemas.openxmlformats.org/presentationml/2006/main">
   <p:cSld>
     <p:spTree>
@@ -9499,7 +6423,7 @@
           <p:cNvPr id="2" name="제목 1">
             <a:extLst>
               <a:ext uri="{FF2B5EF4-FFF2-40B4-BE49-F238E27FC236}">
-                <a16:creationId xmlns:a16="http://schemas.microsoft.com/office/drawing/2014/main" id="{AEFC79BF-CEFD-45A6-2D79-1EBDD13F7315}"/>
+                <a16:creationId xmlns:a16="http://schemas.microsoft.com/office/drawing/2014/main" id="{C983A040-B2A1-E2AF-B681-7701D5AE3104}"/>
               </a:ext>
             </a:extLst>
           </p:cNvPr>
@@ -9517,8 +6441,82 @@
           <a:p>
             <a:r>
               <a:rPr lang="ko-KR" altLang="en-US" dirty="0"/>
-              <a:t>진행 상황</a:t>
-            </a:r>
+              <a:t>추후 일정</a:t>
+            </a:r>
+          </a:p>
+        </p:txBody>
+      </p:sp>
+      <p:sp>
+        <p:nvSpPr>
+          <p:cNvPr id="3" name="내용 개체 틀 2">
+            <a:extLst>
+              <a:ext uri="{FF2B5EF4-FFF2-40B4-BE49-F238E27FC236}">
+                <a16:creationId xmlns:a16="http://schemas.microsoft.com/office/drawing/2014/main" id="{0941A029-9DC5-82C0-FE68-969A994C2FCB}"/>
+              </a:ext>
+            </a:extLst>
+          </p:cNvPr>
+          <p:cNvSpPr>
+            <a:spLocks noGrp="1"/>
+          </p:cNvSpPr>
+          <p:nvPr>
+            <p:ph idx="1"/>
+          </p:nvPr>
+        </p:nvSpPr>
+        <p:spPr>
+          <a:xfrm>
+            <a:off x="838200" y="1029195"/>
+            <a:ext cx="10515600" cy="3991616"/>
+          </a:xfrm>
+        </p:spPr>
+        <p:txBody>
+          <a:bodyPr>
+            <a:normAutofit/>
+          </a:bodyPr>
+          <a:lstStyle/>
+          <a:p>
+            <a:r>
+              <a:rPr lang="ko-KR" altLang="en-US"/>
+              <a:t>레벨 디자인 완료</a:t>
+            </a:r>
+            <a:endParaRPr lang="en-US" altLang="ko-KR" dirty="0"/>
+          </a:p>
+          <a:p>
+            <a:r>
+              <a:rPr lang="en-US" altLang="ko-KR" dirty="0"/>
+              <a:t>NPC, </a:t>
+            </a:r>
+            <a:r>
+              <a:rPr lang="ko-KR" altLang="en-US" dirty="0"/>
+              <a:t>기타 </a:t>
+            </a:r>
+            <a:r>
+              <a:rPr lang="en-US" altLang="ko-KR" dirty="0"/>
+              <a:t>UI </a:t>
+            </a:r>
+            <a:r>
+              <a:rPr lang="ko-KR" altLang="en-US" dirty="0"/>
+              <a:t>요소나 오브젝트 등의 </a:t>
+            </a:r>
+            <a:r>
+              <a:rPr lang="ko-KR" altLang="en-US" dirty="0" err="1"/>
+              <a:t>스프라이트</a:t>
+            </a:r>
+            <a:r>
+              <a:rPr lang="ko-KR" altLang="en-US" dirty="0"/>
+              <a:t> 제작 완료</a:t>
+            </a:r>
+            <a:endParaRPr lang="en-US" altLang="ko-KR" dirty="0"/>
+          </a:p>
+          <a:p>
+            <a:r>
+              <a:rPr lang="ko-KR" altLang="en-US" dirty="0" err="1"/>
+              <a:t>테크</a:t>
+            </a:r>
+            <a:r>
+              <a:rPr lang="ko-KR" altLang="en-US" dirty="0"/>
+              <a:t> 데모 배포</a:t>
+            </a:r>
+            <a:endParaRPr lang="en-US" altLang="ko-KR" dirty="0"/>
           </a:p>
         </p:txBody>
       </p:sp>
@@ -9527,7 +6525,7 @@
           <p:cNvPr id="4" name="슬라이드 번호 개체 틀 3">
             <a:extLst>
               <a:ext uri="{FF2B5EF4-FFF2-40B4-BE49-F238E27FC236}">
-                <a16:creationId xmlns:a16="http://schemas.microsoft.com/office/drawing/2014/main" id="{C2372732-F2F4-A251-A001-F153DC46ABDE}"/>
+                <a16:creationId xmlns:a16="http://schemas.microsoft.com/office/drawing/2014/main" id="{3CCF8C7F-202A-46D4-1C03-9A2E6985A158}"/>
               </a:ext>
             </a:extLst>
           </p:cNvPr>
@@ -9546,670 +6544,20 @@
             <a:fld id="{E694CC86-33DA-4CBD-A678-F7DD024C14A4}" type="slidenum">
               <a:rPr lang="ko-KR" altLang="en-US" smtClean="0"/>
               <a:pPr/>
-              <a:t>8</a:t>
+              <a:t>5</a:t>
             </a:fld>
             <a:r>
               <a:rPr lang="en-US" altLang="ko-KR" dirty="0"/>
               <a:t>/10</a:t>
             </a:r>
             <a:endParaRPr lang="ko-KR" altLang="en-US" dirty="0"/>
-          </a:p>
-        </p:txBody>
-      </p:sp>
-      <p:pic>
-        <p:nvPicPr>
-          <p:cNvPr id="6" name="그림 5" descr="텍스트, 스크린샷, 폰트, 디자인이(가) 표시된 사진&#10;&#10;AI 생성 콘텐츠는 정확하지 않을 수 있습니다.">
-            <a:extLst>
-              <a:ext uri="{FF2B5EF4-FFF2-40B4-BE49-F238E27FC236}">
-                <a16:creationId xmlns:a16="http://schemas.microsoft.com/office/drawing/2014/main" id="{09D1BC8B-CE7A-4D4D-16B2-01D162907C84}"/>
-              </a:ext>
-            </a:extLst>
-          </p:cNvPr>
-          <p:cNvPicPr>
-            <a:picLocks noChangeAspect="1"/>
-          </p:cNvPicPr>
-          <p:nvPr/>
-        </p:nvPicPr>
-        <p:blipFill>
-          <a:blip r:embed="rId2">
-            <a:extLst>
-              <a:ext uri="{28A0092B-C50C-407E-A947-70E740481C1C}">
-                <a14:useLocalDpi xmlns:a14="http://schemas.microsoft.com/office/drawing/2010/main" val="0"/>
-              </a:ext>
-            </a:extLst>
-          </a:blip>
-          <a:stretch>
-            <a:fillRect/>
-          </a:stretch>
-        </p:blipFill>
-        <p:spPr>
-          <a:xfrm>
-            <a:off x="0" y="992770"/>
-            <a:ext cx="12192000" cy="4872459"/>
-          </a:xfrm>
-          <a:prstGeom prst="rect">
-            <a:avLst/>
-          </a:prstGeom>
-        </p:spPr>
-      </p:pic>
-      <p:sp>
-        <p:nvSpPr>
-          <p:cNvPr id="3" name="사각형: 둥근 모서리 2">
-            <a:extLst>
-              <a:ext uri="{FF2B5EF4-FFF2-40B4-BE49-F238E27FC236}">
-                <a16:creationId xmlns:a16="http://schemas.microsoft.com/office/drawing/2014/main" id="{BCB1B92F-F4F2-36FA-252B-833C6DEA449A}"/>
-              </a:ext>
-            </a:extLst>
-          </p:cNvPr>
-          <p:cNvSpPr/>
-          <p:nvPr/>
-        </p:nvSpPr>
-        <p:spPr>
-          <a:xfrm>
-            <a:off x="609598" y="5840557"/>
-            <a:ext cx="10639779" cy="192595"/>
-          </a:xfrm>
-          <a:prstGeom prst="roundRect">
-            <a:avLst>
-              <a:gd name="adj" fmla="val 50000"/>
-            </a:avLst>
-          </a:prstGeom>
-          <a:solidFill>
-            <a:schemeClr val="accent6">
-              <a:lumMod val="60000"/>
-              <a:lumOff val="40000"/>
-            </a:schemeClr>
-          </a:solidFill>
-          <a:ln w="28575">
-            <a:noFill/>
-          </a:ln>
-        </p:spPr>
-        <p:style>
-          <a:lnRef idx="2">
-            <a:schemeClr val="accent1">
-              <a:shade val="15000"/>
-            </a:schemeClr>
-          </a:lnRef>
-          <a:fillRef idx="1">
-            <a:schemeClr val="accent1"/>
-          </a:fillRef>
-          <a:effectRef idx="0">
-            <a:schemeClr val="accent1"/>
-          </a:effectRef>
-          <a:fontRef idx="minor">
-            <a:schemeClr val="lt1"/>
-          </a:fontRef>
-        </p:style>
-        <p:txBody>
-          <a:bodyPr rtlCol="0" anchor="ctr"/>
-          <a:lstStyle/>
-          <a:p>
-            <a:pPr algn="ctr"/>
-            <a:endParaRPr lang="ko-KR" altLang="en-US"/>
-          </a:p>
-        </p:txBody>
-      </p:sp>
-      <p:sp>
-        <p:nvSpPr>
-          <p:cNvPr id="5" name="사각형: 둥근 모서리 4">
-            <a:extLst>
-              <a:ext uri="{FF2B5EF4-FFF2-40B4-BE49-F238E27FC236}">
-                <a16:creationId xmlns:a16="http://schemas.microsoft.com/office/drawing/2014/main" id="{F141B880-8917-4066-FC95-588899D1DC48}"/>
-              </a:ext>
-            </a:extLst>
-          </p:cNvPr>
-          <p:cNvSpPr/>
-          <p:nvPr/>
-        </p:nvSpPr>
-        <p:spPr>
-          <a:xfrm>
-            <a:off x="609600" y="5840557"/>
-            <a:ext cx="10972800" cy="192595"/>
-          </a:xfrm>
-          <a:prstGeom prst="roundRect">
-            <a:avLst>
-              <a:gd name="adj" fmla="val 50000"/>
-            </a:avLst>
-          </a:prstGeom>
-          <a:noFill/>
-          <a:ln w="28575">
-            <a:solidFill>
-              <a:schemeClr val="tx1"/>
-            </a:solidFill>
-          </a:ln>
-        </p:spPr>
-        <p:style>
-          <a:lnRef idx="2">
-            <a:schemeClr val="accent1">
-              <a:shade val="15000"/>
-            </a:schemeClr>
-          </a:lnRef>
-          <a:fillRef idx="1">
-            <a:schemeClr val="accent1"/>
-          </a:fillRef>
-          <a:effectRef idx="0">
-            <a:schemeClr val="accent1"/>
-          </a:effectRef>
-          <a:fontRef idx="minor">
-            <a:schemeClr val="lt1"/>
-          </a:fontRef>
-        </p:style>
-        <p:txBody>
-          <a:bodyPr rtlCol="0" anchor="ctr"/>
-          <a:lstStyle/>
-          <a:p>
-            <a:pPr algn="ctr"/>
-            <a:endParaRPr lang="ko-KR" altLang="en-US"/>
-          </a:p>
-        </p:txBody>
-      </p:sp>
-      <p:sp>
-        <p:nvSpPr>
-          <p:cNvPr id="7" name="TextBox 6">
-            <a:extLst>
-              <a:ext uri="{FF2B5EF4-FFF2-40B4-BE49-F238E27FC236}">
-                <a16:creationId xmlns:a16="http://schemas.microsoft.com/office/drawing/2014/main" id="{913F23DD-A840-1F89-D29F-4461ECD651E3}"/>
-              </a:ext>
-            </a:extLst>
-          </p:cNvPr>
-          <p:cNvSpPr txBox="1"/>
-          <p:nvPr/>
-        </p:nvSpPr>
-        <p:spPr>
-          <a:xfrm>
-            <a:off x="122870" y="5782967"/>
-            <a:ext cx="468398" cy="307777"/>
-          </a:xfrm>
-          <a:prstGeom prst="rect">
-            <a:avLst/>
-          </a:prstGeom>
-          <a:noFill/>
-        </p:spPr>
-        <p:txBody>
-          <a:bodyPr wrap="none" rtlCol="0">
-            <a:spAutoFit/>
-          </a:bodyPr>
-          <a:lstStyle/>
-          <a:p>
-            <a:pPr algn="ctr"/>
-            <a:r>
-              <a:rPr lang="en-US" altLang="ko-KR" sz="1400" dirty="0">
-                <a:latin typeface="HY견고딕" panose="02030600000101010101" pitchFamily="18" charset="-127"/>
-                <a:ea typeface="HY견고딕" panose="02030600000101010101" pitchFamily="18" charset="-127"/>
-              </a:rPr>
-              <a:t>0%</a:t>
-            </a:r>
-            <a:endParaRPr lang="ko-KR" altLang="en-US" sz="1400" dirty="0">
-              <a:latin typeface="HY견고딕" panose="02030600000101010101" pitchFamily="18" charset="-127"/>
-              <a:ea typeface="HY견고딕" panose="02030600000101010101" pitchFamily="18" charset="-127"/>
-            </a:endParaRPr>
-          </a:p>
-        </p:txBody>
-      </p:sp>
-      <p:sp>
-        <p:nvSpPr>
-          <p:cNvPr id="8" name="TextBox 7">
-            <a:extLst>
-              <a:ext uri="{FF2B5EF4-FFF2-40B4-BE49-F238E27FC236}">
-                <a16:creationId xmlns:a16="http://schemas.microsoft.com/office/drawing/2014/main" id="{70B250C4-B0BA-7B16-C60E-6FE79E3C451E}"/>
-              </a:ext>
-            </a:extLst>
-          </p:cNvPr>
-          <p:cNvSpPr txBox="1"/>
-          <p:nvPr/>
-        </p:nvSpPr>
-        <p:spPr>
-          <a:xfrm>
-            <a:off x="11548533" y="5782967"/>
-            <a:ext cx="692818" cy="307777"/>
-          </a:xfrm>
-          <a:prstGeom prst="rect">
-            <a:avLst/>
-          </a:prstGeom>
-          <a:noFill/>
-        </p:spPr>
-        <p:txBody>
-          <a:bodyPr wrap="none" rtlCol="0">
-            <a:spAutoFit/>
-          </a:bodyPr>
-          <a:lstStyle/>
-          <a:p>
-            <a:pPr algn="ctr"/>
-            <a:r>
-              <a:rPr lang="en-US" altLang="ko-KR" sz="1400" dirty="0">
-                <a:latin typeface="HY견고딕" panose="02030600000101010101" pitchFamily="18" charset="-127"/>
-                <a:ea typeface="HY견고딕" panose="02030600000101010101" pitchFamily="18" charset="-127"/>
-              </a:rPr>
-              <a:t>100%</a:t>
-            </a:r>
-            <a:endParaRPr lang="ko-KR" altLang="en-US" sz="1400" dirty="0">
-              <a:latin typeface="HY견고딕" panose="02030600000101010101" pitchFamily="18" charset="-127"/>
-              <a:ea typeface="HY견고딕" panose="02030600000101010101" pitchFamily="18" charset="-127"/>
-            </a:endParaRPr>
-          </a:p>
-        </p:txBody>
-      </p:sp>
-      <p:sp>
-        <p:nvSpPr>
-          <p:cNvPr id="9" name="TextBox 8">
-            <a:extLst>
-              <a:ext uri="{FF2B5EF4-FFF2-40B4-BE49-F238E27FC236}">
-                <a16:creationId xmlns:a16="http://schemas.microsoft.com/office/drawing/2014/main" id="{EAB9F574-88ED-1D2D-1D5A-CE8825E22124}"/>
-              </a:ext>
-            </a:extLst>
-          </p:cNvPr>
-          <p:cNvSpPr txBox="1"/>
-          <p:nvPr/>
-        </p:nvSpPr>
-        <p:spPr>
-          <a:xfrm>
-            <a:off x="5861800" y="5815121"/>
-            <a:ext cx="468398" cy="246221"/>
-          </a:xfrm>
-          <a:prstGeom prst="rect">
-            <a:avLst/>
-          </a:prstGeom>
-          <a:noFill/>
-        </p:spPr>
-        <p:txBody>
-          <a:bodyPr wrap="none" rtlCol="0">
-            <a:spAutoFit/>
-          </a:bodyPr>
-          <a:lstStyle/>
-          <a:p>
-            <a:pPr algn="ctr"/>
-            <a:r>
-              <a:rPr lang="en-US" altLang="ko-KR" sz="1000" dirty="0">
-                <a:latin typeface="HY견고딕" panose="02030600000101010101" pitchFamily="18" charset="-127"/>
-                <a:ea typeface="HY견고딕" panose="02030600000101010101" pitchFamily="18" charset="-127"/>
-              </a:rPr>
-              <a:t>90%</a:t>
-            </a:r>
-            <a:endParaRPr lang="ko-KR" altLang="en-US" sz="1000" dirty="0">
-              <a:latin typeface="HY견고딕" panose="02030600000101010101" pitchFamily="18" charset="-127"/>
-              <a:ea typeface="HY견고딕" panose="02030600000101010101" pitchFamily="18" charset="-127"/>
-            </a:endParaRPr>
           </a:p>
         </p:txBody>
       </p:sp>
     </p:spTree>
     <p:extLst>
       <p:ext uri="{BB962C8B-B14F-4D97-AF65-F5344CB8AC3E}">
-        <p14:creationId xmlns:p14="http://schemas.microsoft.com/office/powerpoint/2010/main" val="241660885"/>
-      </p:ext>
-    </p:extLst>
-  </p:cSld>
-  <p:clrMapOvr>
-    <a:masterClrMapping/>
-  </p:clrMapOvr>
-</p:sld>
-</file>
-
-<file path=ppt/slides/slide9.xml><?xml version="1.0" encoding="utf-8"?>
-<p:sld xmlns:a="http://schemas.openxmlformats.org/drawingml/2006/main" xmlns:r="http://schemas.openxmlformats.org/officeDocument/2006/relationships" xmlns:p="http://schemas.openxmlformats.org/presentationml/2006/main">
-  <p:cSld>
-    <p:spTree>
-      <p:nvGrpSpPr>
-        <p:cNvPr id="1" name="">
-          <a:extLst>
-            <a:ext uri="{FF2B5EF4-FFF2-40B4-BE49-F238E27FC236}">
-              <a16:creationId xmlns:a16="http://schemas.microsoft.com/office/drawing/2014/main" id="{2DBAC7F7-4BC8-6C5A-EE56-64FB4B18CC09}"/>
-            </a:ext>
-          </a:extLst>
-        </p:cNvPr>
-        <p:cNvGrpSpPr/>
-        <p:nvPr/>
-      </p:nvGrpSpPr>
-      <p:grpSpPr>
-        <a:xfrm>
-          <a:off x="0" y="0"/>
-          <a:ext cx="0" cy="0"/>
-          <a:chOff x="0" y="0"/>
-          <a:chExt cx="0" cy="0"/>
-        </a:xfrm>
-      </p:grpSpPr>
-      <p:sp>
-        <p:nvSpPr>
-          <p:cNvPr id="2" name="제목 1">
-            <a:extLst>
-              <a:ext uri="{FF2B5EF4-FFF2-40B4-BE49-F238E27FC236}">
-                <a16:creationId xmlns:a16="http://schemas.microsoft.com/office/drawing/2014/main" id="{23902489-43A5-1753-9DC6-7BF71F01774E}"/>
-              </a:ext>
-            </a:extLst>
-          </p:cNvPr>
-          <p:cNvSpPr>
-            <a:spLocks noGrp="1"/>
-          </p:cNvSpPr>
-          <p:nvPr>
-            <p:ph type="title"/>
-          </p:nvPr>
-        </p:nvSpPr>
-        <p:spPr/>
-        <p:txBody>
-          <a:bodyPr/>
-          <a:lstStyle/>
-          <a:p>
-            <a:r>
-              <a:rPr lang="ko-KR" altLang="en-US" dirty="0"/>
-              <a:t>가치</a:t>
-            </a:r>
-          </a:p>
-        </p:txBody>
-      </p:sp>
-      <p:sp>
-        <p:nvSpPr>
-          <p:cNvPr id="4" name="슬라이드 번호 개체 틀 3">
-            <a:extLst>
-              <a:ext uri="{FF2B5EF4-FFF2-40B4-BE49-F238E27FC236}">
-                <a16:creationId xmlns:a16="http://schemas.microsoft.com/office/drawing/2014/main" id="{5EC5FBB7-3962-E1BC-55B4-A9A2BE7001F7}"/>
-              </a:ext>
-            </a:extLst>
-          </p:cNvPr>
-          <p:cNvSpPr>
-            <a:spLocks noGrp="1"/>
-          </p:cNvSpPr>
-          <p:nvPr>
-            <p:ph type="sldNum" sz="quarter" idx="12"/>
-          </p:nvPr>
-        </p:nvSpPr>
-        <p:spPr/>
-        <p:txBody>
-          <a:bodyPr/>
-          <a:lstStyle/>
-          <a:p>
-            <a:fld id="{E694CC86-33DA-4CBD-A678-F7DD024C14A4}" type="slidenum">
-              <a:rPr lang="ko-KR" altLang="en-US" smtClean="0"/>
-              <a:pPr/>
-              <a:t>9</a:t>
-            </a:fld>
-            <a:r>
-              <a:rPr lang="en-US" altLang="ko-KR" dirty="0"/>
-              <a:t>/10</a:t>
-            </a:r>
-            <a:endParaRPr lang="ko-KR" altLang="en-US" dirty="0"/>
-          </a:p>
-        </p:txBody>
-      </p:sp>
-      <p:pic>
-        <p:nvPicPr>
-          <p:cNvPr id="6" name="그림 5" descr="텍스트, 스크린샷, 폰트, 디자인이(가) 표시된 사진&#10;&#10;AI 생성 콘텐츠는 정확하지 않을 수 있습니다.">
-            <a:extLst>
-              <a:ext uri="{FF2B5EF4-FFF2-40B4-BE49-F238E27FC236}">
-                <a16:creationId xmlns:a16="http://schemas.microsoft.com/office/drawing/2014/main" id="{F5C69D7B-AC2C-2B25-D8F5-39C96394CECB}"/>
-              </a:ext>
-            </a:extLst>
-          </p:cNvPr>
-          <p:cNvPicPr>
-            <a:picLocks noChangeAspect="1"/>
-          </p:cNvPicPr>
-          <p:nvPr/>
-        </p:nvPicPr>
-        <p:blipFill>
-          <a:blip r:embed="rId2">
-            <a:extLst>
-              <a:ext uri="{28A0092B-C50C-407E-A947-70E740481C1C}">
-                <a14:useLocalDpi xmlns:a14="http://schemas.microsoft.com/office/drawing/2010/main" val="0"/>
-              </a:ext>
-            </a:extLst>
-          </a:blip>
-          <a:stretch>
-            <a:fillRect/>
-          </a:stretch>
-        </p:blipFill>
-        <p:spPr>
-          <a:xfrm>
-            <a:off x="0" y="992770"/>
-            <a:ext cx="12192000" cy="4872459"/>
-          </a:xfrm>
-          <a:prstGeom prst="rect">
-            <a:avLst/>
-          </a:prstGeom>
-        </p:spPr>
-      </p:pic>
-      <p:sp>
-        <p:nvSpPr>
-          <p:cNvPr id="3" name="사각형: 둥근 모서리 2">
-            <a:extLst>
-              <a:ext uri="{FF2B5EF4-FFF2-40B4-BE49-F238E27FC236}">
-                <a16:creationId xmlns:a16="http://schemas.microsoft.com/office/drawing/2014/main" id="{EBEC17E7-C4E7-6984-D112-1108F7B25970}"/>
-              </a:ext>
-            </a:extLst>
-          </p:cNvPr>
-          <p:cNvSpPr/>
-          <p:nvPr/>
-        </p:nvSpPr>
-        <p:spPr>
-          <a:xfrm>
-            <a:off x="609598" y="5840557"/>
-            <a:ext cx="10639779" cy="192595"/>
-          </a:xfrm>
-          <a:prstGeom prst="roundRect">
-            <a:avLst>
-              <a:gd name="adj" fmla="val 50000"/>
-            </a:avLst>
-          </a:prstGeom>
-          <a:solidFill>
-            <a:schemeClr val="accent6">
-              <a:lumMod val="60000"/>
-              <a:lumOff val="40000"/>
-            </a:schemeClr>
-          </a:solidFill>
-          <a:ln w="28575">
-            <a:noFill/>
-          </a:ln>
-        </p:spPr>
-        <p:style>
-          <a:lnRef idx="2">
-            <a:schemeClr val="accent1">
-              <a:shade val="15000"/>
-            </a:schemeClr>
-          </a:lnRef>
-          <a:fillRef idx="1">
-            <a:schemeClr val="accent1"/>
-          </a:fillRef>
-          <a:effectRef idx="0">
-            <a:schemeClr val="accent1"/>
-          </a:effectRef>
-          <a:fontRef idx="minor">
-            <a:schemeClr val="lt1"/>
-          </a:fontRef>
-        </p:style>
-        <p:txBody>
-          <a:bodyPr rtlCol="0" anchor="ctr"/>
-          <a:lstStyle/>
-          <a:p>
-            <a:pPr algn="ctr"/>
-            <a:endParaRPr lang="ko-KR" altLang="en-US"/>
-          </a:p>
-        </p:txBody>
-      </p:sp>
-      <p:sp>
-        <p:nvSpPr>
-          <p:cNvPr id="5" name="사각형: 둥근 모서리 4">
-            <a:extLst>
-              <a:ext uri="{FF2B5EF4-FFF2-40B4-BE49-F238E27FC236}">
-                <a16:creationId xmlns:a16="http://schemas.microsoft.com/office/drawing/2014/main" id="{C8611400-C89D-07CA-A38F-E6A18B193393}"/>
-              </a:ext>
-            </a:extLst>
-          </p:cNvPr>
-          <p:cNvSpPr/>
-          <p:nvPr/>
-        </p:nvSpPr>
-        <p:spPr>
-          <a:xfrm>
-            <a:off x="609600" y="5840557"/>
-            <a:ext cx="10972800" cy="192595"/>
-          </a:xfrm>
-          <a:prstGeom prst="roundRect">
-            <a:avLst>
-              <a:gd name="adj" fmla="val 50000"/>
-            </a:avLst>
-          </a:prstGeom>
-          <a:noFill/>
-          <a:ln w="28575">
-            <a:solidFill>
-              <a:schemeClr val="tx1"/>
-            </a:solidFill>
-          </a:ln>
-        </p:spPr>
-        <p:style>
-          <a:lnRef idx="2">
-            <a:schemeClr val="accent1">
-              <a:shade val="15000"/>
-            </a:schemeClr>
-          </a:lnRef>
-          <a:fillRef idx="1">
-            <a:schemeClr val="accent1"/>
-          </a:fillRef>
-          <a:effectRef idx="0">
-            <a:schemeClr val="accent1"/>
-          </a:effectRef>
-          <a:fontRef idx="minor">
-            <a:schemeClr val="lt1"/>
-          </a:fontRef>
-        </p:style>
-        <p:txBody>
-          <a:bodyPr rtlCol="0" anchor="ctr"/>
-          <a:lstStyle/>
-          <a:p>
-            <a:pPr algn="ctr"/>
-            <a:endParaRPr lang="ko-KR" altLang="en-US"/>
-          </a:p>
-        </p:txBody>
-      </p:sp>
-      <p:sp>
-        <p:nvSpPr>
-          <p:cNvPr id="7" name="TextBox 6">
-            <a:extLst>
-              <a:ext uri="{FF2B5EF4-FFF2-40B4-BE49-F238E27FC236}">
-                <a16:creationId xmlns:a16="http://schemas.microsoft.com/office/drawing/2014/main" id="{76D0D2A6-2011-7F86-5A9D-3F74DF3B3F3E}"/>
-              </a:ext>
-            </a:extLst>
-          </p:cNvPr>
-          <p:cNvSpPr txBox="1"/>
-          <p:nvPr/>
-        </p:nvSpPr>
-        <p:spPr>
-          <a:xfrm>
-            <a:off x="122870" y="5782967"/>
-            <a:ext cx="468398" cy="307777"/>
-          </a:xfrm>
-          <a:prstGeom prst="rect">
-            <a:avLst/>
-          </a:prstGeom>
-          <a:noFill/>
-        </p:spPr>
-        <p:txBody>
-          <a:bodyPr wrap="none" rtlCol="0">
-            <a:spAutoFit/>
-          </a:bodyPr>
-          <a:lstStyle/>
-          <a:p>
-            <a:pPr algn="ctr"/>
-            <a:r>
-              <a:rPr lang="en-US" altLang="ko-KR" sz="1400" dirty="0">
-                <a:latin typeface="HY견고딕" panose="02030600000101010101" pitchFamily="18" charset="-127"/>
-                <a:ea typeface="HY견고딕" panose="02030600000101010101" pitchFamily="18" charset="-127"/>
-              </a:rPr>
-              <a:t>0%</a:t>
-            </a:r>
-            <a:endParaRPr lang="ko-KR" altLang="en-US" sz="1400" dirty="0">
-              <a:latin typeface="HY견고딕" panose="02030600000101010101" pitchFamily="18" charset="-127"/>
-              <a:ea typeface="HY견고딕" panose="02030600000101010101" pitchFamily="18" charset="-127"/>
-            </a:endParaRPr>
-          </a:p>
-        </p:txBody>
-      </p:sp>
-      <p:sp>
-        <p:nvSpPr>
-          <p:cNvPr id="8" name="TextBox 7">
-            <a:extLst>
-              <a:ext uri="{FF2B5EF4-FFF2-40B4-BE49-F238E27FC236}">
-                <a16:creationId xmlns:a16="http://schemas.microsoft.com/office/drawing/2014/main" id="{242B98FB-FDDE-81D8-7E89-1D22D329FC9A}"/>
-              </a:ext>
-            </a:extLst>
-          </p:cNvPr>
-          <p:cNvSpPr txBox="1"/>
-          <p:nvPr/>
-        </p:nvSpPr>
-        <p:spPr>
-          <a:xfrm>
-            <a:off x="11548533" y="5782967"/>
-            <a:ext cx="692818" cy="307777"/>
-          </a:xfrm>
-          <a:prstGeom prst="rect">
-            <a:avLst/>
-          </a:prstGeom>
-          <a:noFill/>
-        </p:spPr>
-        <p:txBody>
-          <a:bodyPr wrap="none" rtlCol="0">
-            <a:spAutoFit/>
-          </a:bodyPr>
-          <a:lstStyle/>
-          <a:p>
-            <a:pPr algn="ctr"/>
-            <a:r>
-              <a:rPr lang="en-US" altLang="ko-KR" sz="1400" dirty="0">
-                <a:latin typeface="HY견고딕" panose="02030600000101010101" pitchFamily="18" charset="-127"/>
-                <a:ea typeface="HY견고딕" panose="02030600000101010101" pitchFamily="18" charset="-127"/>
-              </a:rPr>
-              <a:t>100%</a:t>
-            </a:r>
-            <a:endParaRPr lang="ko-KR" altLang="en-US" sz="1400" dirty="0">
-              <a:latin typeface="HY견고딕" panose="02030600000101010101" pitchFamily="18" charset="-127"/>
-              <a:ea typeface="HY견고딕" panose="02030600000101010101" pitchFamily="18" charset="-127"/>
-            </a:endParaRPr>
-          </a:p>
-        </p:txBody>
-      </p:sp>
-      <p:sp>
-        <p:nvSpPr>
-          <p:cNvPr id="9" name="TextBox 8">
-            <a:extLst>
-              <a:ext uri="{FF2B5EF4-FFF2-40B4-BE49-F238E27FC236}">
-                <a16:creationId xmlns:a16="http://schemas.microsoft.com/office/drawing/2014/main" id="{A4722FCC-B811-94CF-3843-D5628632366E}"/>
-              </a:ext>
-            </a:extLst>
-          </p:cNvPr>
-          <p:cNvSpPr txBox="1"/>
-          <p:nvPr/>
-        </p:nvSpPr>
-        <p:spPr>
-          <a:xfrm>
-            <a:off x="5861800" y="5815121"/>
-            <a:ext cx="468398" cy="246221"/>
-          </a:xfrm>
-          <a:prstGeom prst="rect">
-            <a:avLst/>
-          </a:prstGeom>
-          <a:noFill/>
-        </p:spPr>
-        <p:txBody>
-          <a:bodyPr wrap="none" rtlCol="0">
-            <a:spAutoFit/>
-          </a:bodyPr>
-          <a:lstStyle/>
-          <a:p>
-            <a:pPr algn="ctr"/>
-            <a:r>
-              <a:rPr lang="en-US" altLang="ko-KR" sz="1000" dirty="0">
-                <a:latin typeface="HY견고딕" panose="02030600000101010101" pitchFamily="18" charset="-127"/>
-                <a:ea typeface="HY견고딕" panose="02030600000101010101" pitchFamily="18" charset="-127"/>
-              </a:rPr>
-              <a:t>90%</a:t>
-            </a:r>
-            <a:endParaRPr lang="ko-KR" altLang="en-US" sz="1000" dirty="0">
-              <a:latin typeface="HY견고딕" panose="02030600000101010101" pitchFamily="18" charset="-127"/>
-              <a:ea typeface="HY견고딕" panose="02030600000101010101" pitchFamily="18" charset="-127"/>
-            </a:endParaRPr>
-          </a:p>
-        </p:txBody>
-      </p:sp>
-    </p:spTree>
-    <p:extLst>
-      <p:ext uri="{BB962C8B-B14F-4D97-AF65-F5344CB8AC3E}">
-        <p14:creationId xmlns:p14="http://schemas.microsoft.com/office/powerpoint/2010/main" val="3766531235"/>
+        <p14:creationId xmlns:p14="http://schemas.microsoft.com/office/powerpoint/2010/main" val="286812283"/>
       </p:ext>
     </p:extLst>
   </p:cSld>
